--- a/examples/apparel-markdown.pptx
+++ b/examples/apparel-markdown.pptx
@@ -14,10 +14,9 @@
     <p:sldId id="262" r:id="rId8"/>
     <p:sldId id="263" r:id="rId9"/>
     <p:sldId id="264" r:id="rId10"/>
-    <p:sldId id="265" r:id="rId11"/>
   </p:sldIdLst>
   <p:notesMasterIdLst>
-    <p:notesMasterId r:id="rId12"/>
+    <p:notesMasterId r:id="rId11"/>
   </p:notesMasterIdLst>
   <p:sldSz cx="12191695" cy="6858000"/>
   <p:notesSz cx="6858000" cy="12191695"/>
@@ -553,94 +552,6 @@
 </p:notes>
 </file>
 
-<file path=ppt/notesSlides/notesSlide10.xml><?xml version="1.0" encoding="utf-8"?>
-<p:notes xmlns:a="http://schemas.openxmlformats.org/drawingml/2006/main" xmlns:r="http://schemas.openxmlformats.org/officeDocument/2006/relationships" xmlns:p="http://schemas.openxmlformats.org/presentationml/2006/main">
-  <p:cSld>
-    <p:spTree>
-      <p:nvGrpSpPr>
-        <p:cNvPr id="1" name=""/>
-        <p:cNvGrpSpPr/>
-        <p:nvPr/>
-      </p:nvGrpSpPr>
-      <p:grpSpPr>
-        <a:xfrm>
-          <a:off x="0" y="0"/>
-          <a:ext cx="0" cy="0"/>
-          <a:chOff x="0" y="0"/>
-          <a:chExt cx="0" cy="0"/>
-        </a:xfrm>
-      </p:grpSpPr>
-      <p:sp>
-        <p:nvSpPr>
-          <p:cNvPr id="2" name="Slide Image Placeholder 1"/>
-          <p:cNvSpPr>
-            <a:spLocks noGrp="1" noRot="1" noChangeAspect="1"/>
-          </p:cNvSpPr>
-          <p:nvPr>
-            <p:ph type="sldImg"/>
-          </p:nvPr>
-        </p:nvSpPr>
-        <p:spPr/>
-      </p:sp>
-      <p:sp>
-        <p:nvSpPr>
-          <p:cNvPr id="3" name="Notes Placeholder 2"/>
-          <p:cNvSpPr>
-            <a:spLocks noGrp="1"/>
-          </p:cNvSpPr>
-          <p:nvPr>
-            <p:ph type="body" idx="1"/>
-          </p:nvPr>
-        </p:nvSpPr>
-        <p:spPr/>
-        <p:txBody>
-          <a:bodyPr/>
-          <a:lstStyle/>
-          <a:p>
-            <a:r>
-              <a:rPr lang="en-US" dirty="0"/>
-              <a:t/>
-            </a:r>
-            <a:endParaRPr lang="en-US" dirty="0"/>
-          </a:p>
-        </p:txBody>
-      </p:sp>
-      <p:sp>
-        <p:nvSpPr>
-          <p:cNvPr id="4" name="Slide Number Placeholder 3"/>
-          <p:cNvSpPr>
-            <a:spLocks noGrp="1"/>
-          </p:cNvSpPr>
-          <p:nvPr>
-            <p:ph type="sldNum" sz="quarter" idx="10"/>
-          </p:nvPr>
-        </p:nvSpPr>
-        <p:spPr/>
-        <p:txBody>
-          <a:bodyPr/>
-          <a:lstStyle/>
-          <a:p>
-            <a:fld id="{F7021451-1387-4CA6-816F-3879F97B5CBC}" type="slidenum">
-              <a:rPr lang="en-US"/>
-              <a:t>10</a:t>
-            </a:fld>
-            <a:endParaRPr lang="en-US"/>
-          </a:p>
-        </p:txBody>
-      </p:sp>
-    </p:spTree>
-    <p:extLst>
-      <p:ext uri="{BB962C8B-B14F-4D97-AF65-F5344CB8AC3E}">
-        <p14:creationId xmlns:p14="http://schemas.microsoft.com/office/powerpoint/2010/main" val="1024086991"/>
-      </p:ext>
-    </p:extLst>
-  </p:cSld>
-  <p:clrMapOvr>
-    <a:masterClrMapping/>
-  </p:clrMapOvr>
-</p:notes>
-</file>
-
 <file path=ppt/notesSlides/notesSlide2.xml><?xml version="1.0" encoding="utf-8"?>
 <p:notes xmlns:a="http://schemas.openxmlformats.org/drawingml/2006/main" xmlns:r="http://schemas.openxmlformats.org/officeDocument/2006/relationships" xmlns:p="http://schemas.openxmlformats.org/presentationml/2006/main">
   <p:cSld>
@@ -1676,15 +1587,45 @@
           <a:chExt cx="0" cy="0"/>
         </a:xfrm>
       </p:grpSpPr>
-      <p:sp>
-        <p:nvSpPr>
-          <p:cNvPr id="2" name="Text 0"/>
-          <p:cNvSpPr/>
-          <p:nvPr/>
-        </p:nvSpPr>
-        <p:spPr>
-          <a:xfrm>
-            <a:off x="400050" y="457200"/>
+      <p:pic>
+        <p:nvPicPr>
+          <p:cNvPr id="2" name="Image 0" descr="/Users/dpadmana/projects/ppt-gen/themes/scientific/logo.svg">    </p:cNvPr>
+          <p:cNvPicPr>
+            <a:picLocks noChangeAspect="1"/>
+          </p:cNvPicPr>
+          <p:nvPr/>
+        </p:nvPicPr>
+        <p:blipFill>
+          <a:blip r:embed="rId1">
+            <a:extLst>
+              <a:ext uri="{96DAC541-7B7A-43D3-8B79-37D633B846F1}">
+                <asvg:svgBlip xmlns:asvg="http://schemas.microsoft.com/office/drawing/2016/SVG/main" r:embed="rId2"/>
+              </a:ext>
+            </a:extLst>
+          </a:blip>
+          <a:stretch>
+            <a:fillRect/>
+          </a:stretch>
+        </p:blipFill>
+        <p:spPr>
+          <a:xfrm>
+            <a:off x="11430000" y="266700"/>
+            <a:ext cx="419100" cy="419100"/>
+          </a:xfrm>
+          <a:prstGeom prst="rect">
+            <a:avLst/>
+          </a:prstGeom>
+        </p:spPr>
+      </p:pic>
+      <p:sp>
+        <p:nvSpPr>
+          <p:cNvPr id="3" name="Text 0"/>
+          <p:cNvSpPr/>
+          <p:nvPr/>
+        </p:nvSpPr>
+        <p:spPr>
+          <a:xfrm>
+            <a:off x="400050" y="381000"/>
             <a:ext cx="3048000" cy="171450"/>
           </a:xfrm>
           <a:prstGeom prst="rect">
@@ -1717,30 +1658,30 @@
       </p:sp>
       <p:sp>
         <p:nvSpPr>
-          <p:cNvPr id="3" name="Text 1"/>
-          <p:cNvSpPr/>
-          <p:nvPr/>
-        </p:nvSpPr>
-        <p:spPr>
-          <a:xfrm>
-            <a:off x="400050" y="1143000"/>
-            <a:ext cx="7239000" cy="2095500"/>
-          </a:xfrm>
-          <a:prstGeom prst="rect">
-            <a:avLst/>
-          </a:prstGeom>
-          <a:noFill/>
-          <a:ln/>
-        </p:spPr>
-        <p:txBody>
-          <a:bodyPr wrap="square" lIns="0" tIns="0" rIns="0" bIns="0" rtlCol="0" anchor="t"/>
-          <a:lstStyle/>
-          <a:p>
-            <a:pPr algn="l" indent="0" marL="0">
-              <a:buNone/>
-            </a:pPr>
-            <a:r>
-              <a:rPr lang="en-US" sz="4400" b="1" dirty="0">
+          <p:cNvPr id="4" name="Text 1"/>
+          <p:cNvSpPr/>
+          <p:nvPr/>
+        </p:nvSpPr>
+        <p:spPr>
+          <a:xfrm>
+            <a:off x="400050" y="838200"/>
+            <a:ext cx="7239000" cy="914400"/>
+          </a:xfrm>
+          <a:prstGeom prst="rect">
+            <a:avLst/>
+          </a:prstGeom>
+          <a:noFill/>
+          <a:ln/>
+        </p:spPr>
+        <p:txBody>
+          <a:bodyPr wrap="square" lIns="0" tIns="0" rIns="0" bIns="0" rtlCol="0" anchor="t"/>
+          <a:lstStyle/>
+          <a:p>
+            <a:pPr algn="l" indent="0" marL="0">
+              <a:buNone/>
+            </a:pPr>
+            <a:r>
+              <a:rPr lang="en-US" sz="4000" b="1" dirty="0">
                 <a:solidFill>
                   <a:srgbClr val="EAEAEA"/>
                 </a:solidFill>
@@ -1748,40 +1689,61 @@
                 <a:ea typeface="Helvetica Neue" pitchFamily="34" charset="-122"/>
                 <a:cs typeface="Helvetica Neue" pitchFamily="34" charset="-120"/>
               </a:rPr>
-              <a:t>Markdown is leaking
-6–9 pts of margin
-</a:t>
-            </a:r>
-            <a:endParaRPr lang="en-US" sz="4400" dirty="0"/>
-          </a:p>
-        </p:txBody>
-      </p:sp>
-      <p:sp>
-        <p:nvSpPr>
-          <p:cNvPr id="4" name="Text 2"/>
-          <p:cNvSpPr/>
-          <p:nvPr/>
-        </p:nvSpPr>
-        <p:spPr>
-          <a:xfrm>
-            <a:off x="400050" y="3429000"/>
-            <a:ext cx="6858000" cy="666750"/>
-          </a:xfrm>
-          <a:prstGeom prst="rect">
-            <a:avLst/>
-          </a:prstGeom>
-          <a:noFill/>
-          <a:ln/>
-        </p:spPr>
-        <p:txBody>
-          <a:bodyPr wrap="square" lIns="0" tIns="0" rIns="0" bIns="0" rtlCol="0" anchor="t"/>
-          <a:lstStyle/>
-          <a:p>
-            <a:pPr algn="l" indent="0" marL="0">
-              <a:buNone/>
-            </a:pPr>
-            <a:r>
-              <a:rPr lang="en-US" sz="2000" dirty="0">
+              <a:t>Markdown is leaking</a:t>
+            </a:r>
+            <a:endParaRPr lang="en-US" sz="4000" dirty="0"/>
+          </a:p>
+          <a:p>
+            <a:pPr algn="l" indent="0" marL="0">
+              <a:buNone/>
+            </a:pPr>
+            <a:r>
+              <a:rPr lang="en-US" sz="4000" b="1" dirty="0">
+                <a:solidFill>
+                  <a:srgbClr val="EAEAEA"/>
+                </a:solidFill>
+                <a:latin typeface="Helvetica Neue" pitchFamily="34" charset="0"/>
+                <a:ea typeface="Helvetica Neue" pitchFamily="34" charset="-122"/>
+                <a:cs typeface="Helvetica Neue" pitchFamily="34" charset="-120"/>
+              </a:rPr>
+              <a:t>6–9 pts of margin</a:t>
+            </a:r>
+            <a:endParaRPr lang="en-US" sz="4000" dirty="0"/>
+          </a:p>
+          <a:p>
+            <a:pPr algn="l" indent="0" marL="0">
+              <a:buNone/>
+            </a:pPr>
+            <a:endParaRPr lang="en-US" sz="4000" dirty="0"/>
+          </a:p>
+        </p:txBody>
+      </p:sp>
+      <p:sp>
+        <p:nvSpPr>
+          <p:cNvPr id="5" name="Text 2"/>
+          <p:cNvSpPr/>
+          <p:nvPr/>
+        </p:nvSpPr>
+        <p:spPr>
+          <a:xfrm>
+            <a:off x="400050" y="1924050"/>
+            <a:ext cx="6858000" cy="609600"/>
+          </a:xfrm>
+          <a:prstGeom prst="rect">
+            <a:avLst/>
+          </a:prstGeom>
+          <a:noFill/>
+          <a:ln/>
+        </p:spPr>
+        <p:txBody>
+          <a:bodyPr wrap="square" lIns="0" tIns="0" rIns="0" bIns="0" rtlCol="0" anchor="t"/>
+          <a:lstStyle/>
+          <a:p>
+            <a:pPr algn="l" indent="0" marL="0">
+              <a:buNone/>
+            </a:pPr>
+            <a:r>
+              <a:rPr lang="en-US" sz="1700" dirty="0">
                 <a:solidFill>
                   <a:srgbClr val="6C6C8A"/>
                 </a:solidFill>
@@ -1791,19 +1753,19 @@
               </a:rPr>
               <a:t>A 12-month path to price with intent—not panic—across full-price, promo and clearance.</a:t>
             </a:r>
-            <a:endParaRPr lang="en-US" sz="2000" dirty="0"/>
-          </a:p>
-        </p:txBody>
-      </p:sp>
-      <p:sp>
-        <p:nvSpPr>
-          <p:cNvPr id="5" name="Shape 3"/>
-          <p:cNvSpPr/>
-          <p:nvPr/>
-        </p:nvSpPr>
-        <p:spPr>
-          <a:xfrm>
-            <a:off x="400050" y="4381500"/>
+            <a:endParaRPr lang="en-US" sz="1700" dirty="0"/>
+          </a:p>
+        </p:txBody>
+      </p:sp>
+      <p:sp>
+        <p:nvSpPr>
+          <p:cNvPr id="6" name="Shape 3"/>
+          <p:cNvSpPr/>
+          <p:nvPr/>
+        </p:nvSpPr>
+        <p:spPr>
+          <a:xfrm>
+            <a:off x="400050" y="2609850"/>
             <a:ext cx="1238250" cy="285750"/>
           </a:xfrm>
           <a:prstGeom prst="roundRect">
@@ -1824,13 +1786,13 @@
       </p:sp>
       <p:sp>
         <p:nvSpPr>
-          <p:cNvPr id="6" name="Text 4"/>
-          <p:cNvSpPr/>
-          <p:nvPr/>
-        </p:nvSpPr>
-        <p:spPr>
-          <a:xfrm>
-            <a:off x="476250" y="4438650"/>
+          <p:cNvPr id="7" name="Text 4"/>
+          <p:cNvSpPr/>
+          <p:nvPr/>
+        </p:nvSpPr>
+        <p:spPr>
+          <a:xfrm>
+            <a:off x="476250" y="2667000"/>
             <a:ext cx="1085850" cy="171450"/>
           </a:xfrm>
           <a:prstGeom prst="rect">
@@ -1863,13 +1825,13 @@
       </p:sp>
       <p:sp>
         <p:nvSpPr>
-          <p:cNvPr id="7" name="Text 5"/>
-          <p:cNvSpPr/>
-          <p:nvPr/>
-        </p:nvSpPr>
-        <p:spPr>
-          <a:xfrm>
-            <a:off x="400050" y="4876800"/>
+          <p:cNvPr id="8" name="Text 5"/>
+          <p:cNvSpPr/>
+          <p:nvPr/>
+        </p:nvSpPr>
+        <p:spPr>
+          <a:xfrm>
+            <a:off x="400050" y="3028950"/>
             <a:ext cx="6667500" cy="342900"/>
           </a:xfrm>
           <a:prstGeom prst="rect">
@@ -1902,7 +1864,7 @@
       </p:sp>
       <p:sp>
         <p:nvSpPr>
-          <p:cNvPr id="8" name="Shape 6"/>
+          <p:cNvPr id="9" name="Shape 6"/>
           <p:cNvSpPr/>
           <p:nvPr/>
         </p:nvSpPr>
@@ -1929,7 +1891,7 @@
       </p:sp>
       <p:sp>
         <p:nvSpPr>
-          <p:cNvPr id="9" name="Shape 7"/>
+          <p:cNvPr id="10" name="Shape 7"/>
           <p:cNvSpPr/>
           <p:nvPr/>
         </p:nvSpPr>
@@ -1956,7 +1918,7 @@
       </p:sp>
       <p:sp>
         <p:nvSpPr>
-          <p:cNvPr id="10" name="Shape 8"/>
+          <p:cNvPr id="11" name="Shape 8"/>
           <p:cNvSpPr/>
           <p:nvPr/>
         </p:nvSpPr>
@@ -1983,7 +1945,7 @@
       </p:sp>
       <p:sp>
         <p:nvSpPr>
-          <p:cNvPr id="11" name="Shape 9"/>
+          <p:cNvPr id="12" name="Shape 9"/>
           <p:cNvSpPr/>
           <p:nvPr/>
         </p:nvSpPr>
@@ -2010,7 +1972,7 @@
       </p:sp>
       <p:sp>
         <p:nvSpPr>
-          <p:cNvPr id="12" name="Shape 10"/>
+          <p:cNvPr id="13" name="Shape 10"/>
           <p:cNvSpPr/>
           <p:nvPr/>
         </p:nvSpPr>
@@ -2037,7 +1999,7 @@
       </p:sp>
       <p:sp>
         <p:nvSpPr>
-          <p:cNvPr id="13" name="Shape 11"/>
+          <p:cNvPr id="14" name="Shape 11"/>
           <p:cNvSpPr/>
           <p:nvPr/>
         </p:nvSpPr>
@@ -2064,7 +2026,7 @@
       </p:sp>
       <p:sp>
         <p:nvSpPr>
-          <p:cNvPr id="14" name="Shape 12"/>
+          <p:cNvPr id="15" name="Shape 12"/>
           <p:cNvSpPr/>
           <p:nvPr/>
         </p:nvSpPr>
@@ -2091,7 +2053,7 @@
       </p:sp>
       <p:sp>
         <p:nvSpPr>
-          <p:cNvPr id="15" name="Shape 13"/>
+          <p:cNvPr id="16" name="Shape 13"/>
           <p:cNvSpPr/>
           <p:nvPr/>
         </p:nvSpPr>
@@ -2118,7 +2080,7 @@
       </p:sp>
       <p:sp>
         <p:nvSpPr>
-          <p:cNvPr id="16" name="Shape 14"/>
+          <p:cNvPr id="17" name="Shape 14"/>
           <p:cNvSpPr/>
           <p:nvPr/>
         </p:nvSpPr>
@@ -2145,7 +2107,7 @@
       </p:sp>
       <p:sp>
         <p:nvSpPr>
-          <p:cNvPr id="17" name="Shape 15"/>
+          <p:cNvPr id="18" name="Shape 15"/>
           <p:cNvSpPr/>
           <p:nvPr/>
         </p:nvSpPr>
@@ -2172,7 +2134,7 @@
       </p:sp>
       <p:sp>
         <p:nvSpPr>
-          <p:cNvPr id="18" name="Shape 16"/>
+          <p:cNvPr id="19" name="Shape 16"/>
           <p:cNvSpPr/>
           <p:nvPr/>
         </p:nvSpPr>
@@ -2199,7 +2161,7 @@
       </p:sp>
       <p:sp>
         <p:nvSpPr>
-          <p:cNvPr id="19" name="Shape 17"/>
+          <p:cNvPr id="20" name="Shape 17"/>
           <p:cNvSpPr/>
           <p:nvPr/>
         </p:nvSpPr>
@@ -2226,7 +2188,7 @@
       </p:sp>
       <p:sp>
         <p:nvSpPr>
-          <p:cNvPr id="20" name="Shape 18"/>
+          <p:cNvPr id="21" name="Shape 18"/>
           <p:cNvSpPr/>
           <p:nvPr/>
         </p:nvSpPr>
@@ -2253,14 +2215,14 @@
       </p:sp>
       <p:sp>
         <p:nvSpPr>
-          <p:cNvPr id="21" name="Text 19"/>
+          <p:cNvPr id="22" name="Text 19"/>
           <p:cNvSpPr/>
           <p:nvPr/>
         </p:nvSpPr>
         <p:spPr>
           <a:xfrm>
             <a:off x="400050" y="6457950"/>
-            <a:ext cx="8572500" cy="171450"/>
+            <a:ext cx="4953000" cy="171450"/>
           </a:xfrm>
           <a:prstGeom prst="rect">
             <a:avLst/>
@@ -2292,7 +2254,7 @@
       </p:sp>
       <p:sp>
         <p:nvSpPr>
-          <p:cNvPr id="22" name="Text 20"/>
+          <p:cNvPr id="23" name="Text 20"/>
           <p:cNvSpPr/>
           <p:nvPr/>
         </p:nvSpPr>
@@ -2323,665 +2285,7 @@
                 <a:ea typeface="Helvetica Neue" pitchFamily="34" charset="-122"/>
                 <a:cs typeface="Helvetica Neue" pitchFamily="34" charset="-120"/>
               </a:rPr>
-              <a:t>00</a:t>
-            </a:r>
-            <a:endParaRPr lang="en-US" sz="1200" dirty="0"/>
-          </a:p>
-        </p:txBody>
-      </p:sp>
-    </p:spTree>
-  </p:cSld>
-  <p:clrMapOvr>
-    <a:masterClrMapping/>
-  </p:clrMapOvr>
-</p:sld>
-</file>
-
-<file path=ppt/slides/slide10.xml><?xml version="1.0" encoding="utf-8"?>
-<p:sld xmlns:a="http://schemas.openxmlformats.org/drawingml/2006/main" xmlns:r="http://schemas.openxmlformats.org/officeDocument/2006/relationships" xmlns:p="http://schemas.openxmlformats.org/presentationml/2006/main">
-  <p:cSld name="Slide 10">
-    <p:bg>
-      <p:bgPr>
-        <a:solidFill>
-          <a:srgbClr val="1A1A2E"/>
-        </a:solidFill>
-      </p:bgPr>
-    </p:bg>
-    <p:spTree>
-      <p:nvGrpSpPr>
-        <p:cNvPr id="1" name=""/>
-        <p:cNvGrpSpPr/>
-        <p:nvPr/>
-      </p:nvGrpSpPr>
-      <p:grpSpPr>
-        <a:xfrm>
-          <a:off x="0" y="0"/>
-          <a:ext cx="0" cy="0"/>
-          <a:chOff x="0" y="0"/>
-          <a:chExt cx="0" cy="0"/>
-        </a:xfrm>
-      </p:grpSpPr>
-      <p:sp>
-        <p:nvSpPr>
-          <p:cNvPr id="2" name="Text 0"/>
-          <p:cNvSpPr/>
-          <p:nvPr/>
-        </p:nvSpPr>
-        <p:spPr>
-          <a:xfrm>
-            <a:off x="400050" y="457200"/>
-            <a:ext cx="1905000" cy="171450"/>
-          </a:xfrm>
-          <a:prstGeom prst="rect">
-            <a:avLst/>
-          </a:prstGeom>
-          <a:noFill/>
-          <a:ln/>
-        </p:spPr>
-        <p:txBody>
-          <a:bodyPr wrap="square" lIns="0" tIns="0" rIns="0" bIns="0" rtlCol="0" anchor="t"/>
-          <a:lstStyle/>
-          <a:p>
-            <a:pPr algn="l" indent="0" marL="0">
-              <a:buNone/>
-            </a:pPr>
-            <a:r>
-              <a:rPr lang="en-US" sz="1100" b="1" dirty="0">
-                <a:solidFill>
-                  <a:srgbClr val="E94560"/>
-                </a:solidFill>
-                <a:latin typeface="Helvetica Neue" pitchFamily="34" charset="0"/>
-                <a:ea typeface="Helvetica Neue" pitchFamily="34" charset="-122"/>
-                <a:cs typeface="Helvetica Neue" pitchFamily="34" charset="-120"/>
-              </a:rPr>
-              <a:t>THE DECISION</a:t>
-            </a:r>
-            <a:endParaRPr lang="en-US" sz="1100" dirty="0"/>
-          </a:p>
-        </p:txBody>
-      </p:sp>
-      <p:sp>
-        <p:nvSpPr>
-          <p:cNvPr id="3" name="Text 1"/>
-          <p:cNvSpPr/>
-          <p:nvPr/>
-        </p:nvSpPr>
-        <p:spPr>
-          <a:xfrm>
-            <a:off x="400050" y="1238250"/>
-            <a:ext cx="9525000" cy="1333500"/>
-          </a:xfrm>
-          <a:prstGeom prst="rect">
-            <a:avLst/>
-          </a:prstGeom>
-          <a:noFill/>
-          <a:ln/>
-        </p:spPr>
-        <p:txBody>
-          <a:bodyPr wrap="square" lIns="0" tIns="0" rIns="0" bIns="0" rtlCol="0" anchor="t"/>
-          <a:lstStyle/>
-          <a:p>
-            <a:pPr algn="l" indent="0" marL="0">
-              <a:buNone/>
-            </a:pPr>
-            <a:r>
-              <a:rPr lang="en-US" sz="4000" b="1" dirty="0">
-                <a:solidFill>
-                  <a:srgbClr val="EAEAEA"/>
-                </a:solidFill>
-                <a:latin typeface="Helvetica Neue" pitchFamily="34" charset="0"/>
-                <a:ea typeface="Helvetica Neue" pitchFamily="34" charset="-122"/>
-                <a:cs typeface="Helvetica Neue" pitchFamily="34" charset="-120"/>
-              </a:rPr>
-              <a:t>Treat markdown as a
-decision system—not a fire drill.
-</a:t>
-            </a:r>
-            <a:endParaRPr lang="en-US" sz="4000" dirty="0"/>
-          </a:p>
-        </p:txBody>
-      </p:sp>
-      <p:sp>
-        <p:nvSpPr>
-          <p:cNvPr id="4" name="Text 2"/>
-          <p:cNvSpPr/>
-          <p:nvPr/>
-        </p:nvSpPr>
-        <p:spPr>
-          <a:xfrm>
-            <a:off x="400050" y="2952750"/>
-            <a:ext cx="8572500" cy="571500"/>
-          </a:xfrm>
-          <a:prstGeom prst="rect">
-            <a:avLst/>
-          </a:prstGeom>
-          <a:noFill/>
-          <a:ln/>
-        </p:spPr>
-        <p:txBody>
-          <a:bodyPr wrap="square" lIns="0" tIns="0" rIns="0" bIns="0" rtlCol="0" anchor="t"/>
-          <a:lstStyle/>
-          <a:p>
-            <a:pPr algn="l" indent="0" marL="0">
-              <a:buNone/>
-            </a:pPr>
-            <a:r>
-              <a:rPr lang="en-US" sz="2000" dirty="0">
-                <a:solidFill>
-                  <a:srgbClr val="6C6C8A"/>
-                </a:solidFill>
-                <a:latin typeface="Helvetica Neue" pitchFamily="34" charset="0"/>
-                <a:ea typeface="Helvetica Neue" pitchFamily="34" charset="-122"/>
-                <a:cs typeface="Helvetica Neue" pitchFamily="34" charset="-120"/>
-              </a:rPr>
-              <a:t>Start with two categories, one holdout design, and a finance co-owner.</a:t>
-            </a:r>
-            <a:endParaRPr lang="en-US" sz="2000" dirty="0"/>
-          </a:p>
-        </p:txBody>
-      </p:sp>
-      <p:sp>
-        <p:nvSpPr>
-          <p:cNvPr id="5" name="Shape 3"/>
-          <p:cNvSpPr/>
-          <p:nvPr/>
-        </p:nvSpPr>
-        <p:spPr>
-          <a:xfrm>
-            <a:off x="400050" y="4000500"/>
-            <a:ext cx="3448050" cy="1143000"/>
-          </a:xfrm>
-          <a:prstGeom prst="roundRect">
-            <a:avLst>
-              <a:gd name="adj" fmla="val 8000"/>
-            </a:avLst>
-          </a:prstGeom>
-          <a:solidFill>
-            <a:srgbClr val="2B2B4A"/>
-          </a:solidFill>
-          <a:ln w="12700">
-            <a:solidFill>
-              <a:srgbClr val="2B2B4A"/>
-            </a:solidFill>
-            <a:prstDash val="solid"/>
-          </a:ln>
-        </p:spPr>
-      </p:sp>
-      <p:sp>
-        <p:nvSpPr>
-          <p:cNvPr id="6" name="Shape 4"/>
-          <p:cNvSpPr/>
-          <p:nvPr/>
-        </p:nvSpPr>
-        <p:spPr>
-          <a:xfrm>
-            <a:off x="400050" y="4000500"/>
-            <a:ext cx="57150" cy="1143000"/>
-          </a:xfrm>
-          <a:prstGeom prst="rect">
-            <a:avLst/>
-          </a:prstGeom>
-          <a:solidFill>
-            <a:srgbClr val="76B7B2"/>
-          </a:solidFill>
-          <a:ln w="12700">
-            <a:solidFill>
-              <a:srgbClr val="76B7B2"/>
-            </a:solidFill>
-            <a:prstDash val="solid"/>
-          </a:ln>
-        </p:spPr>
-      </p:sp>
-      <p:sp>
-        <p:nvSpPr>
-          <p:cNvPr id="7" name="Text 5"/>
-          <p:cNvSpPr/>
-          <p:nvPr/>
-        </p:nvSpPr>
-        <p:spPr>
-          <a:xfrm>
-            <a:off x="571500" y="4152900"/>
-            <a:ext cx="3105150" cy="171450"/>
-          </a:xfrm>
-          <a:prstGeom prst="rect">
-            <a:avLst/>
-          </a:prstGeom>
-          <a:noFill/>
-          <a:ln/>
-        </p:spPr>
-        <p:txBody>
-          <a:bodyPr wrap="square" lIns="0" tIns="0" rIns="0" bIns="0" rtlCol="0" anchor="t"/>
-          <a:lstStyle/>
-          <a:p>
-            <a:pPr algn="l" indent="0" marL="0">
-              <a:buNone/>
-            </a:pPr>
-            <a:r>
-              <a:rPr lang="en-US" sz="1100" b="1" dirty="0">
-                <a:solidFill>
-                  <a:srgbClr val="76B7B2"/>
-                </a:solidFill>
-                <a:latin typeface="Helvetica Neue" pitchFamily="34" charset="0"/>
-                <a:ea typeface="Helvetica Neue" pitchFamily="34" charset="-122"/>
-                <a:cs typeface="Helvetica Neue" pitchFamily="34" charset="-120"/>
-              </a:rPr>
-              <a:t>1. PICK PILOTS</a:t>
-            </a:r>
-            <a:endParaRPr lang="en-US" sz="1100" dirty="0"/>
-          </a:p>
-        </p:txBody>
-      </p:sp>
-      <p:sp>
-        <p:nvSpPr>
-          <p:cNvPr id="8" name="Text 6"/>
-          <p:cNvSpPr/>
-          <p:nvPr/>
-        </p:nvSpPr>
-        <p:spPr>
-          <a:xfrm>
-            <a:off x="571500" y="4419600"/>
-            <a:ext cx="3105150" cy="571500"/>
-          </a:xfrm>
-          <a:prstGeom prst="rect">
-            <a:avLst/>
-          </a:prstGeom>
-          <a:noFill/>
-          <a:ln/>
-        </p:spPr>
-        <p:txBody>
-          <a:bodyPr wrap="square" lIns="0" tIns="0" rIns="0" bIns="0" rtlCol="0" anchor="t"/>
-          <a:lstStyle/>
-          <a:p>
-            <a:pPr algn="l" indent="0" marL="0">
-              <a:buNone/>
-            </a:pPr>
-            <a:r>
-              <a:rPr lang="en-US" sz="1600" b="1" dirty="0">
-                <a:solidFill>
-                  <a:srgbClr val="EAEAEA"/>
-                </a:solidFill>
-                <a:latin typeface="Helvetica Neue" pitchFamily="34" charset="0"/>
-                <a:ea typeface="Helvetica Neue" pitchFamily="34" charset="-122"/>
-                <a:cs typeface="Helvetica Neue" pitchFamily="34" charset="-120"/>
-              </a:rPr>
-              <a:t>High-volume categories with residual risk</a:t>
-            </a:r>
-            <a:endParaRPr lang="en-US" sz="1600" dirty="0"/>
-          </a:p>
-        </p:txBody>
-      </p:sp>
-      <p:sp>
-        <p:nvSpPr>
-          <p:cNvPr id="9" name="Shape 7"/>
-          <p:cNvSpPr/>
-          <p:nvPr/>
-        </p:nvSpPr>
-        <p:spPr>
-          <a:xfrm>
-            <a:off x="4171950" y="4000500"/>
-            <a:ext cx="3448050" cy="1143000"/>
-          </a:xfrm>
-          <a:prstGeom prst="roundRect">
-            <a:avLst>
-              <a:gd name="adj" fmla="val 8000"/>
-            </a:avLst>
-          </a:prstGeom>
-          <a:solidFill>
-            <a:srgbClr val="2B2B4A"/>
-          </a:solidFill>
-          <a:ln w="12700">
-            <a:solidFill>
-              <a:srgbClr val="2B2B4A"/>
-            </a:solidFill>
-            <a:prstDash val="solid"/>
-          </a:ln>
-        </p:spPr>
-      </p:sp>
-      <p:sp>
-        <p:nvSpPr>
-          <p:cNvPr id="10" name="Shape 8"/>
-          <p:cNvSpPr/>
-          <p:nvPr/>
-        </p:nvSpPr>
-        <p:spPr>
-          <a:xfrm>
-            <a:off x="4171950" y="4000500"/>
-            <a:ext cx="57150" cy="1143000"/>
-          </a:xfrm>
-          <a:prstGeom prst="rect">
-            <a:avLst/>
-          </a:prstGeom>
-          <a:solidFill>
-            <a:srgbClr val="4E79A7"/>
-          </a:solidFill>
-          <a:ln w="12700">
-            <a:solidFill>
-              <a:srgbClr val="4E79A7"/>
-            </a:solidFill>
-            <a:prstDash val="solid"/>
-          </a:ln>
-        </p:spPr>
-      </p:sp>
-      <p:sp>
-        <p:nvSpPr>
-          <p:cNvPr id="11" name="Text 9"/>
-          <p:cNvSpPr/>
-          <p:nvPr/>
-        </p:nvSpPr>
-        <p:spPr>
-          <a:xfrm>
-            <a:off x="4343400" y="4152900"/>
-            <a:ext cx="3105150" cy="171450"/>
-          </a:xfrm>
-          <a:prstGeom prst="rect">
-            <a:avLst/>
-          </a:prstGeom>
-          <a:noFill/>
-          <a:ln/>
-        </p:spPr>
-        <p:txBody>
-          <a:bodyPr wrap="square" lIns="0" tIns="0" rIns="0" bIns="0" rtlCol="0" anchor="t"/>
-          <a:lstStyle/>
-          <a:p>
-            <a:pPr algn="l" indent="0" marL="0">
-              <a:buNone/>
-            </a:pPr>
-            <a:r>
-              <a:rPr lang="en-US" sz="1100" b="1" dirty="0">
-                <a:solidFill>
-                  <a:srgbClr val="4E79A7"/>
-                </a:solidFill>
-                <a:latin typeface="Helvetica Neue" pitchFamily="34" charset="0"/>
-                <a:ea typeface="Helvetica Neue" pitchFamily="34" charset="-122"/>
-                <a:cs typeface="Helvetica Neue" pitchFamily="34" charset="-120"/>
-              </a:rPr>
-              <a:t>2. PROVE INCREMENTALITY</a:t>
-            </a:r>
-            <a:endParaRPr lang="en-US" sz="1100" dirty="0"/>
-          </a:p>
-        </p:txBody>
-      </p:sp>
-      <p:sp>
-        <p:nvSpPr>
-          <p:cNvPr id="12" name="Text 10"/>
-          <p:cNvSpPr/>
-          <p:nvPr/>
-        </p:nvSpPr>
-        <p:spPr>
-          <a:xfrm>
-            <a:off x="4343400" y="4419600"/>
-            <a:ext cx="3105150" cy="571500"/>
-          </a:xfrm>
-          <a:prstGeom prst="rect">
-            <a:avLst/>
-          </a:prstGeom>
-          <a:noFill/>
-          <a:ln/>
-        </p:spPr>
-        <p:txBody>
-          <a:bodyPr wrap="square" lIns="0" tIns="0" rIns="0" bIns="0" rtlCol="0" anchor="t"/>
-          <a:lstStyle/>
-          <a:p>
-            <a:pPr algn="l" indent="0" marL="0">
-              <a:buNone/>
-            </a:pPr>
-            <a:r>
-              <a:rPr lang="en-US" sz="1600" b="1" dirty="0">
-                <a:solidFill>
-                  <a:srgbClr val="EAEAEA"/>
-                </a:solidFill>
-                <a:latin typeface="Helvetica Neue" pitchFamily="34" charset="0"/>
-                <a:ea typeface="Helvetica Neue" pitchFamily="34" charset="-122"/>
-                <a:cs typeface="Helvetica Neue" pitchFamily="34" charset="-120"/>
-              </a:rPr>
-              <a:t>Holdouts on price depth and timing</a:t>
-            </a:r>
-            <a:endParaRPr lang="en-US" sz="1600" dirty="0"/>
-          </a:p>
-        </p:txBody>
-      </p:sp>
-      <p:sp>
-        <p:nvSpPr>
-          <p:cNvPr id="13" name="Shape 11"/>
-          <p:cNvSpPr/>
-          <p:nvPr/>
-        </p:nvSpPr>
-        <p:spPr>
-          <a:xfrm>
-            <a:off x="7943850" y="4000500"/>
-            <a:ext cx="3448050" cy="1143000"/>
-          </a:xfrm>
-          <a:prstGeom prst="roundRect">
-            <a:avLst>
-              <a:gd name="adj" fmla="val 8000"/>
-            </a:avLst>
-          </a:prstGeom>
-          <a:solidFill>
-            <a:srgbClr val="2B2B4A"/>
-          </a:solidFill>
-          <a:ln w="12700">
-            <a:solidFill>
-              <a:srgbClr val="2B2B4A"/>
-            </a:solidFill>
-            <a:prstDash val="solid"/>
-          </a:ln>
-        </p:spPr>
-      </p:sp>
-      <p:sp>
-        <p:nvSpPr>
-          <p:cNvPr id="14" name="Shape 12"/>
-          <p:cNvSpPr/>
-          <p:nvPr/>
-        </p:nvSpPr>
-        <p:spPr>
-          <a:xfrm>
-            <a:off x="7943850" y="4000500"/>
-            <a:ext cx="57150" cy="1143000"/>
-          </a:xfrm>
-          <a:prstGeom prst="rect">
-            <a:avLst/>
-          </a:prstGeom>
-          <a:solidFill>
-            <a:srgbClr val="E94560"/>
-          </a:solidFill>
-          <a:ln w="12700">
-            <a:solidFill>
-              <a:srgbClr val="E94560"/>
-            </a:solidFill>
-            <a:prstDash val="solid"/>
-          </a:ln>
-        </p:spPr>
-      </p:sp>
-      <p:sp>
-        <p:nvSpPr>
-          <p:cNvPr id="15" name="Text 13"/>
-          <p:cNvSpPr/>
-          <p:nvPr/>
-        </p:nvSpPr>
-        <p:spPr>
-          <a:xfrm>
-            <a:off x="8115300" y="4152900"/>
-            <a:ext cx="3105150" cy="171450"/>
-          </a:xfrm>
-          <a:prstGeom prst="rect">
-            <a:avLst/>
-          </a:prstGeom>
-          <a:noFill/>
-          <a:ln/>
-        </p:spPr>
-        <p:txBody>
-          <a:bodyPr wrap="square" lIns="0" tIns="0" rIns="0" bIns="0" rtlCol="0" anchor="t"/>
-          <a:lstStyle/>
-          <a:p>
-            <a:pPr algn="l" indent="0" marL="0">
-              <a:buNone/>
-            </a:pPr>
-            <a:r>
-              <a:rPr lang="en-US" sz="1100" b="1" dirty="0">
-                <a:solidFill>
-                  <a:srgbClr val="E94560"/>
-                </a:solidFill>
-                <a:latin typeface="Helvetica Neue" pitchFamily="34" charset="0"/>
-                <a:ea typeface="Helvetica Neue" pitchFamily="34" charset="-122"/>
-                <a:cs typeface="Helvetica Neue" pitchFamily="34" charset="-120"/>
-              </a:rPr>
-              <a:t>3. SCALE THE FABRIC</a:t>
-            </a:r>
-            <a:endParaRPr lang="en-US" sz="1100" dirty="0"/>
-          </a:p>
-        </p:txBody>
-      </p:sp>
-      <p:sp>
-        <p:nvSpPr>
-          <p:cNvPr id="16" name="Text 14"/>
-          <p:cNvSpPr/>
-          <p:nvPr/>
-        </p:nvSpPr>
-        <p:spPr>
-          <a:xfrm>
-            <a:off x="8115300" y="4419600"/>
-            <a:ext cx="3105150" cy="571500"/>
-          </a:xfrm>
-          <a:prstGeom prst="rect">
-            <a:avLst/>
-          </a:prstGeom>
-          <a:noFill/>
-          <a:ln/>
-        </p:spPr>
-        <p:txBody>
-          <a:bodyPr wrap="square" lIns="0" tIns="0" rIns="0" bIns="0" rtlCol="0" anchor="t"/>
-          <a:lstStyle/>
-          <a:p>
-            <a:pPr algn="l" indent="0" marL="0">
-              <a:buNone/>
-            </a:pPr>
-            <a:r>
-              <a:rPr lang="en-US" sz="1600" b="1" dirty="0">
-                <a:solidFill>
-                  <a:srgbClr val="EAEAEA"/>
-                </a:solidFill>
-                <a:latin typeface="Helvetica Neue" pitchFamily="34" charset="0"/>
-                <a:ea typeface="Helvetica Neue" pitchFamily="34" charset="-122"/>
-                <a:cs typeface="Helvetica Neue" pitchFamily="34" charset="-120"/>
-              </a:rPr>
-              <a:t>Reuse signals across channels</a:t>
-            </a:r>
-            <a:endParaRPr lang="en-US" sz="1600" dirty="0"/>
-          </a:p>
-        </p:txBody>
-      </p:sp>
-      <p:sp>
-        <p:nvSpPr>
-          <p:cNvPr id="17" name="Text 15"/>
-          <p:cNvSpPr/>
-          <p:nvPr/>
-        </p:nvSpPr>
-        <p:spPr>
-          <a:xfrm>
-            <a:off x="400050" y="5619750"/>
-            <a:ext cx="10477500" cy="342900"/>
-          </a:xfrm>
-          <a:prstGeom prst="rect">
-            <a:avLst/>
-          </a:prstGeom>
-          <a:noFill/>
-          <a:ln/>
-        </p:spPr>
-        <p:txBody>
-          <a:bodyPr wrap="square" lIns="0" tIns="0" rIns="0" bIns="0" rtlCol="0" anchor="t"/>
-          <a:lstStyle/>
-          <a:p>
-            <a:pPr algn="l" indent="0" marL="0">
-              <a:buNone/>
-            </a:pPr>
-            <a:r>
-              <a:rPr lang="en-US" sz="1700" b="1" dirty="0">
-                <a:solidFill>
-                  <a:srgbClr val="EAEAEA"/>
-                </a:solidFill>
-                <a:latin typeface="Helvetica Neue" pitchFamily="34" charset="0"/>
-                <a:ea typeface="Helvetica Neue" pitchFamily="34" charset="-122"/>
-                <a:cs typeface="Helvetica Neue" pitchFamily="34" charset="-120"/>
-              </a:rPr>
-              <a:t>Next step: convene the 90-day squad and lock the first two categories.</a:t>
-            </a:r>
-            <a:endParaRPr lang="en-US" sz="1700" dirty="0"/>
-          </a:p>
-        </p:txBody>
-      </p:sp>
-      <p:sp>
-        <p:nvSpPr>
-          <p:cNvPr id="18" name="Text 16"/>
-          <p:cNvSpPr/>
-          <p:nvPr/>
-        </p:nvSpPr>
-        <p:spPr>
-          <a:xfrm>
-            <a:off x="400050" y="6457950"/>
-            <a:ext cx="8572500" cy="171450"/>
-          </a:xfrm>
-          <a:prstGeom prst="rect">
-            <a:avLst/>
-          </a:prstGeom>
-          <a:noFill/>
-          <a:ln/>
-        </p:spPr>
-        <p:txBody>
-          <a:bodyPr wrap="square" lIns="0" tIns="0" rIns="0" bIns="0" rtlCol="0" anchor="t"/>
-          <a:lstStyle/>
-          <a:p>
-            <a:pPr algn="l" indent="0" marL="0">
-              <a:buNone/>
-            </a:pPr>
-            <a:r>
-              <a:rPr lang="en-US" sz="1100" b="1" dirty="0">
-                <a:solidFill>
-                  <a:srgbClr val="6C6C8A"/>
-                </a:solidFill>
-                <a:latin typeface="Helvetica Neue" pitchFamily="34" charset="0"/>
-                <a:ea typeface="Helvetica Neue" pitchFamily="34" charset="-122"/>
-                <a:cs typeface="Helvetica Neue" pitchFamily="34" charset="-120"/>
-              </a:rPr>
-              <a:t>APPAREL  ·  MARKDOWN STRATEGY</a:t>
-            </a:r>
-            <a:endParaRPr lang="en-US" sz="1100" dirty="0"/>
-          </a:p>
-        </p:txBody>
-      </p:sp>
-      <p:sp>
-        <p:nvSpPr>
-          <p:cNvPr id="19" name="Text 17"/>
-          <p:cNvSpPr/>
-          <p:nvPr/>
-        </p:nvSpPr>
-        <p:spPr>
-          <a:xfrm>
-            <a:off x="11334750" y="6457950"/>
-            <a:ext cx="457200" cy="171450"/>
-          </a:xfrm>
-          <a:prstGeom prst="rect">
-            <a:avLst/>
-          </a:prstGeom>
-          <a:noFill/>
-          <a:ln/>
-        </p:spPr>
-        <p:txBody>
-          <a:bodyPr wrap="square" lIns="0" tIns="0" rIns="0" bIns="0" rtlCol="0" anchor="t"/>
-          <a:lstStyle/>
-          <a:p>
-            <a:pPr algn="r" indent="0" marL="0">
-              <a:buNone/>
-            </a:pPr>
-            <a:r>
-              <a:rPr lang="en-US" sz="1200" dirty="0">
-                <a:solidFill>
-                  <a:srgbClr val="6C6C8A"/>
-                </a:solidFill>
-                <a:latin typeface="Helvetica Neue" pitchFamily="34" charset="0"/>
-                <a:ea typeface="Helvetica Neue" pitchFamily="34" charset="-122"/>
-                <a:cs typeface="Helvetica Neue" pitchFamily="34" charset="-120"/>
-              </a:rPr>
-              <a:t>00</a:t>
+              <a:t>01</a:t>
             </a:r>
             <a:endParaRPr lang="en-US" sz="1200" dirty="0"/>
           </a:p>
@@ -3019,9 +2323,39 @@
           <a:chExt cx="0" cy="0"/>
         </a:xfrm>
       </p:grpSpPr>
-      <p:sp>
-        <p:nvSpPr>
-          <p:cNvPr id="2" name="Text 0"/>
+      <p:pic>
+        <p:nvPicPr>
+          <p:cNvPr id="2" name="Image 0" descr="/Users/dpadmana/projects/ppt-gen/themes/scientific/logo.svg">    </p:cNvPr>
+          <p:cNvPicPr>
+            <a:picLocks noChangeAspect="1"/>
+          </p:cNvPicPr>
+          <p:nvPr/>
+        </p:nvPicPr>
+        <p:blipFill>
+          <a:blip r:embed="rId1">
+            <a:extLst>
+              <a:ext uri="{96DAC541-7B7A-43D3-8B79-37D633B846F1}">
+                <asvg:svgBlip xmlns:asvg="http://schemas.microsoft.com/office/drawing/2016/SVG/main" r:embed="rId2"/>
+              </a:ext>
+            </a:extLst>
+          </a:blip>
+          <a:stretch>
+            <a:fillRect/>
+          </a:stretch>
+        </p:blipFill>
+        <p:spPr>
+          <a:xfrm>
+            <a:off x="11430000" y="266700"/>
+            <a:ext cx="419100" cy="419100"/>
+          </a:xfrm>
+          <a:prstGeom prst="rect">
+            <a:avLst/>
+          </a:prstGeom>
+        </p:spPr>
+      </p:pic>
+      <p:sp>
+        <p:nvSpPr>
+          <p:cNvPr id="3" name="Text 0"/>
           <p:cNvSpPr/>
           <p:nvPr/>
         </p:nvSpPr>
@@ -3060,7 +2394,7 @@
       </p:sp>
       <p:sp>
         <p:nvSpPr>
-          <p:cNvPr id="3" name="Text 1"/>
+          <p:cNvPr id="4" name="Text 1"/>
           <p:cNvSpPr/>
           <p:nvPr/>
         </p:nvSpPr>
@@ -3099,7 +2433,7 @@
       </p:sp>
       <p:sp>
         <p:nvSpPr>
-          <p:cNvPr id="4" name="Text 2"/>
+          <p:cNvPr id="5" name="Text 2"/>
           <p:cNvSpPr/>
           <p:nvPr/>
         </p:nvSpPr>
@@ -3138,14 +2472,14 @@
       </p:sp>
       <p:sp>
         <p:nvSpPr>
-          <p:cNvPr id="5" name="Text 3"/>
+          <p:cNvPr id="6" name="Text 3"/>
           <p:cNvSpPr/>
           <p:nvPr/>
         </p:nvSpPr>
         <p:spPr>
           <a:xfrm>
             <a:off x="400050" y="6457950"/>
-            <a:ext cx="8572500" cy="171450"/>
+            <a:ext cx="4953000" cy="171450"/>
           </a:xfrm>
           <a:prstGeom prst="rect">
             <a:avLst/>
@@ -3177,7 +2511,7 @@
       </p:sp>
       <p:sp>
         <p:nvSpPr>
-          <p:cNvPr id="6" name="Text 4"/>
+          <p:cNvPr id="7" name="Text 4"/>
           <p:cNvSpPr/>
           <p:nvPr/>
         </p:nvSpPr>
@@ -3208,7 +2542,7 @@
                 <a:ea typeface="Helvetica Neue" pitchFamily="34" charset="-122"/>
                 <a:cs typeface="Helvetica Neue" pitchFamily="34" charset="-120"/>
               </a:rPr>
-              <a:t>00</a:t>
+              <a:t>02</a:t>
             </a:r>
             <a:endParaRPr lang="en-US" sz="1200" dirty="0"/>
           </a:p>
@@ -3246,32 +2580,62 @@
           <a:chExt cx="0" cy="0"/>
         </a:xfrm>
       </p:grpSpPr>
-      <p:sp>
-        <p:nvSpPr>
-          <p:cNvPr id="2" name="Text 0"/>
-          <p:cNvSpPr/>
-          <p:nvPr/>
-        </p:nvSpPr>
-        <p:spPr>
-          <a:xfrm>
-            <a:off x="400050" y="304800"/>
-            <a:ext cx="11049000" cy="533400"/>
-          </a:xfrm>
-          <a:prstGeom prst="rect">
-            <a:avLst/>
-          </a:prstGeom>
-          <a:noFill/>
-          <a:ln/>
-        </p:spPr>
-        <p:txBody>
-          <a:bodyPr wrap="square" lIns="0" tIns="0" rIns="0" bIns="0" rtlCol="0" anchor="t"/>
-          <a:lstStyle/>
-          <a:p>
-            <a:pPr algn="l" indent="0" marL="0">
-              <a:buNone/>
-            </a:pPr>
-            <a:r>
-              <a:rPr lang="en-US" sz="3200" b="1" dirty="0">
+      <p:pic>
+        <p:nvPicPr>
+          <p:cNvPr id="2" name="Image 0" descr="/Users/dpadmana/projects/ppt-gen/themes/scientific/logo.svg">    </p:cNvPr>
+          <p:cNvPicPr>
+            <a:picLocks noChangeAspect="1"/>
+          </p:cNvPicPr>
+          <p:nvPr/>
+        </p:nvPicPr>
+        <p:blipFill>
+          <a:blip r:embed="rId1">
+            <a:extLst>
+              <a:ext uri="{96DAC541-7B7A-43D3-8B79-37D633B846F1}">
+                <asvg:svgBlip xmlns:asvg="http://schemas.microsoft.com/office/drawing/2016/SVG/main" r:embed="rId2"/>
+              </a:ext>
+            </a:extLst>
+          </a:blip>
+          <a:stretch>
+            <a:fillRect/>
+          </a:stretch>
+        </p:blipFill>
+        <p:spPr>
+          <a:xfrm>
+            <a:off x="11430000" y="266700"/>
+            <a:ext cx="419100" cy="419100"/>
+          </a:xfrm>
+          <a:prstGeom prst="rect">
+            <a:avLst/>
+          </a:prstGeom>
+        </p:spPr>
+      </p:pic>
+      <p:sp>
+        <p:nvSpPr>
+          <p:cNvPr id="3" name="Text 0"/>
+          <p:cNvSpPr/>
+          <p:nvPr/>
+        </p:nvSpPr>
+        <p:spPr>
+          <a:xfrm>
+            <a:off x="400050" y="247650"/>
+            <a:ext cx="10839450" cy="381000"/>
+          </a:xfrm>
+          <a:prstGeom prst="rect">
+            <a:avLst/>
+          </a:prstGeom>
+          <a:noFill/>
+          <a:ln/>
+        </p:spPr>
+        <p:txBody>
+          <a:bodyPr wrap="square" lIns="0" tIns="0" rIns="0" bIns="0" rtlCol="0" anchor="t"/>
+          <a:lstStyle/>
+          <a:p>
+            <a:pPr algn="l" indent="0" marL="0">
+              <a:buNone/>
+            </a:pPr>
+            <a:r>
+              <a:rPr lang="en-US" sz="3000" b="1" dirty="0">
                 <a:solidFill>
                   <a:srgbClr val="EAEAEA"/>
                 </a:solidFill>
@@ -3281,20 +2645,20 @@
               </a:rPr>
               <a:t>Reactive markdown vs intentional markdown</a:t>
             </a:r>
-            <a:endParaRPr lang="en-US" sz="3200" dirty="0"/>
-          </a:p>
-        </p:txBody>
-      </p:sp>
-      <p:sp>
-        <p:nvSpPr>
-          <p:cNvPr id="3" name="Text 1"/>
-          <p:cNvSpPr/>
-          <p:nvPr/>
-        </p:nvSpPr>
-        <p:spPr>
-          <a:xfrm>
-            <a:off x="400050" y="857250"/>
-            <a:ext cx="10477500" cy="381000"/>
+            <a:endParaRPr lang="en-US" sz="3000" dirty="0"/>
+          </a:p>
+        </p:txBody>
+      </p:sp>
+      <p:sp>
+        <p:nvSpPr>
+          <p:cNvPr id="4" name="Text 1"/>
+          <p:cNvSpPr/>
+          <p:nvPr/>
+        </p:nvSpPr>
+        <p:spPr>
+          <a:xfrm>
+            <a:off x="400050" y="800100"/>
+            <a:ext cx="10648950" cy="266700"/>
           </a:xfrm>
           <a:prstGeom prst="rect">
             <a:avLst/>
@@ -3326,14 +2690,14 @@
       </p:sp>
       <p:sp>
         <p:nvSpPr>
-          <p:cNvPr id="4" name="Text 2"/>
+          <p:cNvPr id="5" name="Text 2"/>
           <p:cNvSpPr/>
           <p:nvPr/>
         </p:nvSpPr>
         <p:spPr>
           <a:xfrm>
             <a:off x="400050" y="6457950"/>
-            <a:ext cx="8572500" cy="171450"/>
+            <a:ext cx="4953000" cy="171450"/>
           </a:xfrm>
           <a:prstGeom prst="rect">
             <a:avLst/>
@@ -3365,7 +2729,7 @@
       </p:sp>
       <p:sp>
         <p:nvSpPr>
-          <p:cNvPr id="5" name="Text 3"/>
+          <p:cNvPr id="6" name="Text 3"/>
           <p:cNvSpPr/>
           <p:nvPr/>
         </p:nvSpPr>
@@ -3404,18 +2768,18 @@
       </p:sp>
       <p:sp>
         <p:nvSpPr>
-          <p:cNvPr id="6" name="Shape 4"/>
-          <p:cNvSpPr/>
-          <p:nvPr/>
-        </p:nvSpPr>
-        <p:spPr>
-          <a:xfrm>
-            <a:off x="400050" y="1447800"/>
-            <a:ext cx="5695950" cy="4876800"/>
+          <p:cNvPr id="7" name="Shape 4"/>
+          <p:cNvSpPr/>
+          <p:nvPr/>
+        </p:nvSpPr>
+        <p:spPr>
+          <a:xfrm>
+            <a:off x="400050" y="1219200"/>
+            <a:ext cx="5695950" cy="5105400"/>
           </a:xfrm>
           <a:prstGeom prst="roundRect">
             <a:avLst>
-              <a:gd name="adj" fmla="val 1875"/>
+              <a:gd name="adj" fmla="val 1791"/>
             </a:avLst>
           </a:prstGeom>
           <a:solidFill>
@@ -3431,13 +2795,13 @@
       </p:sp>
       <p:sp>
         <p:nvSpPr>
-          <p:cNvPr id="7" name="Shape 5"/>
-          <p:cNvSpPr/>
-          <p:nvPr/>
-        </p:nvSpPr>
-        <p:spPr>
-          <a:xfrm>
-            <a:off x="400050" y="1447800"/>
+          <p:cNvPr id="8" name="Shape 5"/>
+          <p:cNvSpPr/>
+          <p:nvPr/>
+        </p:nvSpPr>
+        <p:spPr>
+          <a:xfrm>
+            <a:off x="400050" y="1219200"/>
             <a:ext cx="5695950" cy="76200"/>
           </a:xfrm>
           <a:prstGeom prst="rect">
@@ -3456,13 +2820,13 @@
       </p:sp>
       <p:sp>
         <p:nvSpPr>
-          <p:cNvPr id="8" name="Text 6"/>
-          <p:cNvSpPr/>
-          <p:nvPr/>
-        </p:nvSpPr>
-        <p:spPr>
-          <a:xfrm>
-            <a:off x="609600" y="1676400"/>
+          <p:cNvPr id="9" name="Text 6"/>
+          <p:cNvSpPr/>
+          <p:nvPr/>
+        </p:nvSpPr>
+        <p:spPr>
+          <a:xfrm>
+            <a:off x="609600" y="1447800"/>
             <a:ext cx="5276850" cy="171450"/>
           </a:xfrm>
           <a:prstGeom prst="rect">
@@ -3495,13 +2859,13 @@
       </p:sp>
       <p:sp>
         <p:nvSpPr>
-          <p:cNvPr id="9" name="Text 7"/>
-          <p:cNvSpPr/>
-          <p:nvPr/>
-        </p:nvSpPr>
-        <p:spPr>
-          <a:xfrm>
-            <a:off x="609600" y="1971675"/>
+          <p:cNvPr id="10" name="Text 7"/>
+          <p:cNvSpPr/>
+          <p:nvPr/>
+        </p:nvSpPr>
+        <p:spPr>
+          <a:xfrm>
+            <a:off x="609600" y="1743075"/>
             <a:ext cx="5276850" cy="476250"/>
           </a:xfrm>
           <a:prstGeom prst="rect">
@@ -3534,13 +2898,13 @@
       </p:sp>
       <p:sp>
         <p:nvSpPr>
-          <p:cNvPr id="10" name="Shape 8"/>
-          <p:cNvSpPr/>
-          <p:nvPr/>
-        </p:nvSpPr>
-        <p:spPr>
-          <a:xfrm>
-            <a:off x="609600" y="2733675"/>
+          <p:cNvPr id="11" name="Shape 8"/>
+          <p:cNvSpPr/>
+          <p:nvPr/>
+        </p:nvSpPr>
+        <p:spPr>
+          <a:xfrm>
+            <a:off x="609600" y="2505075"/>
             <a:ext cx="66675" cy="66675"/>
           </a:xfrm>
           <a:prstGeom prst="roundRect">
@@ -3561,13 +2925,13 @@
       </p:sp>
       <p:sp>
         <p:nvSpPr>
-          <p:cNvPr id="11" name="Text 9"/>
-          <p:cNvSpPr/>
-          <p:nvPr/>
-        </p:nvSpPr>
-        <p:spPr>
-          <a:xfrm>
-            <a:off x="800100" y="2647950"/>
+          <p:cNvPr id="12" name="Text 9"/>
+          <p:cNvSpPr/>
+          <p:nvPr/>
+        </p:nvSpPr>
+        <p:spPr>
+          <a:xfrm>
+            <a:off x="800100" y="2419350"/>
             <a:ext cx="5086350" cy="342900"/>
           </a:xfrm>
           <a:prstGeom prst="rect">
@@ -3600,13 +2964,13 @@
       </p:sp>
       <p:sp>
         <p:nvSpPr>
-          <p:cNvPr id="12" name="Shape 10"/>
-          <p:cNvSpPr/>
-          <p:nvPr/>
-        </p:nvSpPr>
-        <p:spPr>
-          <a:xfrm>
-            <a:off x="609600" y="3267075"/>
+          <p:cNvPr id="13" name="Shape 10"/>
+          <p:cNvSpPr/>
+          <p:nvPr/>
+        </p:nvSpPr>
+        <p:spPr>
+          <a:xfrm>
+            <a:off x="609600" y="3038475"/>
             <a:ext cx="66675" cy="66675"/>
           </a:xfrm>
           <a:prstGeom prst="roundRect">
@@ -3627,13 +2991,13 @@
       </p:sp>
       <p:sp>
         <p:nvSpPr>
-          <p:cNvPr id="13" name="Text 11"/>
-          <p:cNvSpPr/>
-          <p:nvPr/>
-        </p:nvSpPr>
-        <p:spPr>
-          <a:xfrm>
-            <a:off x="800100" y="3181350"/>
+          <p:cNvPr id="14" name="Text 11"/>
+          <p:cNvSpPr/>
+          <p:nvPr/>
+        </p:nvSpPr>
+        <p:spPr>
+          <a:xfrm>
+            <a:off x="800100" y="2952750"/>
             <a:ext cx="5086350" cy="342900"/>
           </a:xfrm>
           <a:prstGeom prst="rect">
@@ -3666,13 +3030,13 @@
       </p:sp>
       <p:sp>
         <p:nvSpPr>
-          <p:cNvPr id="14" name="Shape 12"/>
-          <p:cNvSpPr/>
-          <p:nvPr/>
-        </p:nvSpPr>
-        <p:spPr>
-          <a:xfrm>
-            <a:off x="609600" y="3800475"/>
+          <p:cNvPr id="15" name="Shape 12"/>
+          <p:cNvSpPr/>
+          <p:nvPr/>
+        </p:nvSpPr>
+        <p:spPr>
+          <a:xfrm>
+            <a:off x="609600" y="3571875"/>
             <a:ext cx="66675" cy="66675"/>
           </a:xfrm>
           <a:prstGeom prst="roundRect">
@@ -3693,13 +3057,13 @@
       </p:sp>
       <p:sp>
         <p:nvSpPr>
-          <p:cNvPr id="15" name="Text 13"/>
-          <p:cNvSpPr/>
-          <p:nvPr/>
-        </p:nvSpPr>
-        <p:spPr>
-          <a:xfrm>
-            <a:off x="800100" y="3714750"/>
+          <p:cNvPr id="16" name="Text 13"/>
+          <p:cNvSpPr/>
+          <p:nvPr/>
+        </p:nvSpPr>
+        <p:spPr>
+          <a:xfrm>
+            <a:off x="800100" y="3486150"/>
             <a:ext cx="5086350" cy="342900"/>
           </a:xfrm>
           <a:prstGeom prst="rect">
@@ -3732,18 +3096,18 @@
       </p:sp>
       <p:sp>
         <p:nvSpPr>
-          <p:cNvPr id="16" name="Shape 14"/>
-          <p:cNvSpPr/>
-          <p:nvPr/>
-        </p:nvSpPr>
-        <p:spPr>
-          <a:xfrm>
-            <a:off x="6324600" y="1447800"/>
-            <a:ext cx="5467350" cy="4876800"/>
+          <p:cNvPr id="17" name="Shape 14"/>
+          <p:cNvSpPr/>
+          <p:nvPr/>
+        </p:nvSpPr>
+        <p:spPr>
+          <a:xfrm>
+            <a:off x="6324600" y="1219200"/>
+            <a:ext cx="5467350" cy="5105400"/>
           </a:xfrm>
           <a:prstGeom prst="roundRect">
             <a:avLst>
-              <a:gd name="adj" fmla="val 1875"/>
+              <a:gd name="adj" fmla="val 1791"/>
             </a:avLst>
           </a:prstGeom>
           <a:solidFill>
@@ -3759,13 +3123,13 @@
       </p:sp>
       <p:sp>
         <p:nvSpPr>
-          <p:cNvPr id="17" name="Shape 15"/>
-          <p:cNvSpPr/>
-          <p:nvPr/>
-        </p:nvSpPr>
-        <p:spPr>
-          <a:xfrm>
-            <a:off x="6324600" y="1447800"/>
+          <p:cNvPr id="18" name="Shape 15"/>
+          <p:cNvSpPr/>
+          <p:nvPr/>
+        </p:nvSpPr>
+        <p:spPr>
+          <a:xfrm>
+            <a:off x="6324600" y="1219200"/>
             <a:ext cx="5467350" cy="76200"/>
           </a:xfrm>
           <a:prstGeom prst="rect">
@@ -3784,13 +3148,13 @@
       </p:sp>
       <p:sp>
         <p:nvSpPr>
-          <p:cNvPr id="18" name="Text 16"/>
-          <p:cNvSpPr/>
-          <p:nvPr/>
-        </p:nvSpPr>
-        <p:spPr>
-          <a:xfrm>
-            <a:off x="6534150" y="1676400"/>
+          <p:cNvPr id="19" name="Text 16"/>
+          <p:cNvSpPr/>
+          <p:nvPr/>
+        </p:nvSpPr>
+        <p:spPr>
+          <a:xfrm>
+            <a:off x="6534150" y="1447800"/>
             <a:ext cx="5048250" cy="171450"/>
           </a:xfrm>
           <a:prstGeom prst="rect">
@@ -3823,13 +3187,13 @@
       </p:sp>
       <p:sp>
         <p:nvSpPr>
-          <p:cNvPr id="19" name="Text 17"/>
-          <p:cNvSpPr/>
-          <p:nvPr/>
-        </p:nvSpPr>
-        <p:spPr>
-          <a:xfrm>
-            <a:off x="6534150" y="1971675"/>
+          <p:cNvPr id="20" name="Text 17"/>
+          <p:cNvSpPr/>
+          <p:nvPr/>
+        </p:nvSpPr>
+        <p:spPr>
+          <a:xfrm>
+            <a:off x="6534150" y="1743075"/>
             <a:ext cx="5048250" cy="476250"/>
           </a:xfrm>
           <a:prstGeom prst="rect">
@@ -3862,13 +3226,13 @@
       </p:sp>
       <p:sp>
         <p:nvSpPr>
-          <p:cNvPr id="20" name="Shape 18"/>
-          <p:cNvSpPr/>
-          <p:nvPr/>
-        </p:nvSpPr>
-        <p:spPr>
-          <a:xfrm>
-            <a:off x="6534150" y="2733675"/>
+          <p:cNvPr id="21" name="Shape 18"/>
+          <p:cNvSpPr/>
+          <p:nvPr/>
+        </p:nvSpPr>
+        <p:spPr>
+          <a:xfrm>
+            <a:off x="6534150" y="2505075"/>
             <a:ext cx="66675" cy="66675"/>
           </a:xfrm>
           <a:prstGeom prst="roundRect">
@@ -3889,13 +3253,13 @@
       </p:sp>
       <p:sp>
         <p:nvSpPr>
-          <p:cNvPr id="21" name="Text 19"/>
-          <p:cNvSpPr/>
-          <p:nvPr/>
-        </p:nvSpPr>
-        <p:spPr>
-          <a:xfrm>
-            <a:off x="6724650" y="2647950"/>
+          <p:cNvPr id="22" name="Text 19"/>
+          <p:cNvSpPr/>
+          <p:nvPr/>
+        </p:nvSpPr>
+        <p:spPr>
+          <a:xfrm>
+            <a:off x="6724650" y="2419350"/>
             <a:ext cx="4857750" cy="342900"/>
           </a:xfrm>
           <a:prstGeom prst="rect">
@@ -3928,13 +3292,13 @@
       </p:sp>
       <p:sp>
         <p:nvSpPr>
-          <p:cNvPr id="22" name="Shape 20"/>
-          <p:cNvSpPr/>
-          <p:nvPr/>
-        </p:nvSpPr>
-        <p:spPr>
-          <a:xfrm>
-            <a:off x="6534150" y="3267075"/>
+          <p:cNvPr id="23" name="Shape 20"/>
+          <p:cNvSpPr/>
+          <p:nvPr/>
+        </p:nvSpPr>
+        <p:spPr>
+          <a:xfrm>
+            <a:off x="6534150" y="3038475"/>
             <a:ext cx="66675" cy="66675"/>
           </a:xfrm>
           <a:prstGeom prst="roundRect">
@@ -3955,13 +3319,13 @@
       </p:sp>
       <p:sp>
         <p:nvSpPr>
-          <p:cNvPr id="23" name="Text 21"/>
-          <p:cNvSpPr/>
-          <p:nvPr/>
-        </p:nvSpPr>
-        <p:spPr>
-          <a:xfrm>
-            <a:off x="6724650" y="3181350"/>
+          <p:cNvPr id="24" name="Text 21"/>
+          <p:cNvSpPr/>
+          <p:nvPr/>
+        </p:nvSpPr>
+        <p:spPr>
+          <a:xfrm>
+            <a:off x="6724650" y="2952750"/>
             <a:ext cx="4857750" cy="342900"/>
           </a:xfrm>
           <a:prstGeom prst="rect">
@@ -3994,13 +3358,13 @@
       </p:sp>
       <p:sp>
         <p:nvSpPr>
-          <p:cNvPr id="24" name="Shape 22"/>
-          <p:cNvSpPr/>
-          <p:nvPr/>
-        </p:nvSpPr>
-        <p:spPr>
-          <a:xfrm>
-            <a:off x="6534150" y="3800475"/>
+          <p:cNvPr id="25" name="Shape 22"/>
+          <p:cNvSpPr/>
+          <p:nvPr/>
+        </p:nvSpPr>
+        <p:spPr>
+          <a:xfrm>
+            <a:off x="6534150" y="3571875"/>
             <a:ext cx="66675" cy="66675"/>
           </a:xfrm>
           <a:prstGeom prst="roundRect">
@@ -4021,13 +3385,13 @@
       </p:sp>
       <p:sp>
         <p:nvSpPr>
-          <p:cNvPr id="25" name="Text 23"/>
-          <p:cNvSpPr/>
-          <p:nvPr/>
-        </p:nvSpPr>
-        <p:spPr>
-          <a:xfrm>
-            <a:off x="6724650" y="3714750"/>
+          <p:cNvPr id="26" name="Text 23"/>
+          <p:cNvSpPr/>
+          <p:nvPr/>
+        </p:nvSpPr>
+        <p:spPr>
+          <a:xfrm>
+            <a:off x="6724650" y="3486150"/>
             <a:ext cx="4857750" cy="342900"/>
           </a:xfrm>
           <a:prstGeom prst="rect">
@@ -4090,32 +3454,62 @@
           <a:chExt cx="0" cy="0"/>
         </a:xfrm>
       </p:grpSpPr>
-      <p:sp>
-        <p:nvSpPr>
-          <p:cNvPr id="2" name="Text 0"/>
-          <p:cNvSpPr/>
-          <p:nvPr/>
-        </p:nvSpPr>
-        <p:spPr>
-          <a:xfrm>
-            <a:off x="400050" y="304800"/>
-            <a:ext cx="11049000" cy="533400"/>
-          </a:xfrm>
-          <a:prstGeom prst="rect">
-            <a:avLst/>
-          </a:prstGeom>
-          <a:noFill/>
-          <a:ln/>
-        </p:spPr>
-        <p:txBody>
-          <a:bodyPr wrap="square" lIns="0" tIns="0" rIns="0" bIns="0" rtlCol="0" anchor="t"/>
-          <a:lstStyle/>
-          <a:p>
-            <a:pPr algn="l" indent="0" marL="0">
-              <a:buNone/>
-            </a:pPr>
-            <a:r>
-              <a:rPr lang="en-US" sz="3200" b="1" dirty="0">
+      <p:pic>
+        <p:nvPicPr>
+          <p:cNvPr id="2" name="Image 0" descr="/Users/dpadmana/projects/ppt-gen/themes/scientific/logo.svg">    </p:cNvPr>
+          <p:cNvPicPr>
+            <a:picLocks noChangeAspect="1"/>
+          </p:cNvPicPr>
+          <p:nvPr/>
+        </p:nvPicPr>
+        <p:blipFill>
+          <a:blip r:embed="rId1">
+            <a:extLst>
+              <a:ext uri="{96DAC541-7B7A-43D3-8B79-37D633B846F1}">
+                <asvg:svgBlip xmlns:asvg="http://schemas.microsoft.com/office/drawing/2016/SVG/main" r:embed="rId2"/>
+              </a:ext>
+            </a:extLst>
+          </a:blip>
+          <a:stretch>
+            <a:fillRect/>
+          </a:stretch>
+        </p:blipFill>
+        <p:spPr>
+          <a:xfrm>
+            <a:off x="11430000" y="266700"/>
+            <a:ext cx="419100" cy="419100"/>
+          </a:xfrm>
+          <a:prstGeom prst="rect">
+            <a:avLst/>
+          </a:prstGeom>
+        </p:spPr>
+      </p:pic>
+      <p:sp>
+        <p:nvSpPr>
+          <p:cNvPr id="3" name="Text 0"/>
+          <p:cNvSpPr/>
+          <p:nvPr/>
+        </p:nvSpPr>
+        <p:spPr>
+          <a:xfrm>
+            <a:off x="400050" y="247650"/>
+            <a:ext cx="10839450" cy="381000"/>
+          </a:xfrm>
+          <a:prstGeom prst="rect">
+            <a:avLst/>
+          </a:prstGeom>
+          <a:noFill/>
+          <a:ln/>
+        </p:spPr>
+        <p:txBody>
+          <a:bodyPr wrap="square" lIns="0" tIns="0" rIns="0" bIns="0" rtlCol="0" anchor="t"/>
+          <a:lstStyle/>
+          <a:p>
+            <a:pPr algn="l" indent="0" marL="0">
+              <a:buNone/>
+            </a:pPr>
+            <a:r>
+              <a:rPr lang="en-US" sz="3000" b="1" dirty="0">
                 <a:solidFill>
                   <a:srgbClr val="EAEAEA"/>
                 </a:solidFill>
@@ -4125,20 +3519,20 @@
               </a:rPr>
               <a:t>Clearance already destroys more margin than promo</a:t>
             </a:r>
-            <a:endParaRPr lang="en-US" sz="3200" dirty="0"/>
-          </a:p>
-        </p:txBody>
-      </p:sp>
-      <p:sp>
-        <p:nvSpPr>
-          <p:cNvPr id="3" name="Text 1"/>
+            <a:endParaRPr lang="en-US" sz="3000" dirty="0"/>
+          </a:p>
+        </p:txBody>
+      </p:sp>
+      <p:sp>
+        <p:nvSpPr>
+          <p:cNvPr id="4" name="Text 1"/>
           <p:cNvSpPr/>
           <p:nvPr/>
         </p:nvSpPr>
         <p:spPr>
           <a:xfrm>
             <a:off x="400050" y="6457950"/>
-            <a:ext cx="8572500" cy="171450"/>
+            <a:ext cx="4953000" cy="171450"/>
           </a:xfrm>
           <a:prstGeom prst="rect">
             <a:avLst/>
@@ -4170,7 +3564,7 @@
       </p:sp>
       <p:sp>
         <p:nvSpPr>
-          <p:cNvPr id="4" name="Text 2"/>
+          <p:cNvPr id="5" name="Text 2"/>
           <p:cNvSpPr/>
           <p:nvPr/>
         </p:nvSpPr>
@@ -4209,18 +3603,18 @@
       </p:sp>
       <p:sp>
         <p:nvSpPr>
-          <p:cNvPr id="5" name="Shape 3"/>
-          <p:cNvSpPr/>
-          <p:nvPr/>
-        </p:nvSpPr>
-        <p:spPr>
-          <a:xfrm>
-            <a:off x="400050" y="1181100"/>
-            <a:ext cx="7058025" cy="5143500"/>
+          <p:cNvPr id="6" name="Shape 3"/>
+          <p:cNvSpPr/>
+          <p:nvPr/>
+        </p:nvSpPr>
+        <p:spPr>
+          <a:xfrm>
+            <a:off x="400050" y="781050"/>
+            <a:ext cx="7058025" cy="5543550"/>
           </a:xfrm>
           <a:prstGeom prst="roundRect">
             <a:avLst>
-              <a:gd name="adj" fmla="val 1778"/>
+              <a:gd name="adj" fmla="val 1649"/>
             </a:avLst>
           </a:prstGeom>
           <a:solidFill>
@@ -4236,22 +3630,22 @@
       </p:sp>
       <p:pic>
         <p:nvPicPr>
-          <p:cNvPr id="6" name="Image 0" descr="/Users/dpadmana/projects/ppt-gen/assets/plots/apparel_markdown-b3601702a6.png">    </p:cNvPr>
+          <p:cNvPr id="7" name="Image 1" descr="/Users/dpadmana/projects/ppt-gen/assets/plots/apparel_markdown-8843ecdf50.png">    </p:cNvPr>
           <p:cNvPicPr>
             <a:picLocks noChangeAspect="1"/>
           </p:cNvPicPr>
           <p:nvPr/>
         </p:nvPicPr>
         <p:blipFill>
-          <a:blip r:embed="rId1"/>
+          <a:blip r:embed="rId3"/>
           <a:stretch>
             <a:fillRect/>
           </a:stretch>
         </p:blipFill>
         <p:spPr>
           <a:xfrm>
-            <a:off x="514350" y="1295400"/>
-            <a:ext cx="6829425" cy="4914900"/>
+            <a:off x="552450" y="2019300"/>
+            <a:ext cx="6753225" cy="3067050"/>
           </a:xfrm>
           <a:prstGeom prst="rect">
             <a:avLst/>
@@ -4260,13 +3654,13 @@
       </p:pic>
       <p:sp>
         <p:nvSpPr>
-          <p:cNvPr id="7" name="Text 4"/>
-          <p:cNvSpPr/>
-          <p:nvPr/>
-        </p:nvSpPr>
-        <p:spPr>
-          <a:xfrm>
-            <a:off x="7743825" y="1181100"/>
+          <p:cNvPr id="8" name="Text 4"/>
+          <p:cNvSpPr/>
+          <p:nvPr/>
+        </p:nvSpPr>
+        <p:spPr>
+          <a:xfrm>
+            <a:off x="7743825" y="781050"/>
             <a:ext cx="4048125" cy="171450"/>
           </a:xfrm>
           <a:prstGeom prst="rect">
@@ -4299,13 +3693,13 @@
       </p:sp>
       <p:sp>
         <p:nvSpPr>
-          <p:cNvPr id="8" name="Shape 5"/>
-          <p:cNvSpPr/>
-          <p:nvPr/>
-        </p:nvSpPr>
-        <p:spPr>
-          <a:xfrm>
-            <a:off x="7743825" y="1609725"/>
+          <p:cNvPr id="9" name="Shape 5"/>
+          <p:cNvSpPr/>
+          <p:nvPr/>
+        </p:nvSpPr>
+        <p:spPr>
+          <a:xfrm>
+            <a:off x="7743825" y="1209675"/>
             <a:ext cx="66675" cy="66675"/>
           </a:xfrm>
           <a:prstGeom prst="roundRect">
@@ -4326,13 +3720,13 @@
       </p:sp>
       <p:sp>
         <p:nvSpPr>
-          <p:cNvPr id="9" name="Text 6"/>
-          <p:cNvSpPr/>
-          <p:nvPr/>
-        </p:nvSpPr>
-        <p:spPr>
-          <a:xfrm>
-            <a:off x="7934325" y="1524000"/>
+          <p:cNvPr id="10" name="Text 6"/>
+          <p:cNvSpPr/>
+          <p:nvPr/>
+        </p:nvSpPr>
+        <p:spPr>
+          <a:xfrm>
+            <a:off x="7934325" y="1123950"/>
             <a:ext cx="3857625" cy="342900"/>
           </a:xfrm>
           <a:prstGeom prst="rect">
@@ -4365,13 +3759,13 @@
       </p:sp>
       <p:sp>
         <p:nvSpPr>
-          <p:cNvPr id="10" name="Shape 7"/>
-          <p:cNvSpPr/>
-          <p:nvPr/>
-        </p:nvSpPr>
-        <p:spPr>
-          <a:xfrm>
-            <a:off x="7743825" y="2143125"/>
+          <p:cNvPr id="11" name="Shape 7"/>
+          <p:cNvSpPr/>
+          <p:nvPr/>
+        </p:nvSpPr>
+        <p:spPr>
+          <a:xfrm>
+            <a:off x="7743825" y="1743075"/>
             <a:ext cx="66675" cy="66675"/>
           </a:xfrm>
           <a:prstGeom prst="roundRect">
@@ -4392,13 +3786,13 @@
       </p:sp>
       <p:sp>
         <p:nvSpPr>
-          <p:cNvPr id="11" name="Text 8"/>
-          <p:cNvSpPr/>
-          <p:nvPr/>
-        </p:nvSpPr>
-        <p:spPr>
-          <a:xfrm>
-            <a:off x="7934325" y="2057400"/>
+          <p:cNvPr id="12" name="Text 8"/>
+          <p:cNvSpPr/>
+          <p:nvPr/>
+        </p:nvSpPr>
+        <p:spPr>
+          <a:xfrm>
+            <a:off x="7934325" y="1657350"/>
             <a:ext cx="3857625" cy="342900"/>
           </a:xfrm>
           <a:prstGeom prst="rect">
@@ -4431,13 +3825,13 @@
       </p:sp>
       <p:sp>
         <p:nvSpPr>
-          <p:cNvPr id="12" name="Shape 9"/>
-          <p:cNvSpPr/>
-          <p:nvPr/>
-        </p:nvSpPr>
-        <p:spPr>
-          <a:xfrm>
-            <a:off x="7743825" y="2676525"/>
+          <p:cNvPr id="13" name="Shape 9"/>
+          <p:cNvSpPr/>
+          <p:nvPr/>
+        </p:nvSpPr>
+        <p:spPr>
+          <a:xfrm>
+            <a:off x="7743825" y="2276475"/>
             <a:ext cx="66675" cy="66675"/>
           </a:xfrm>
           <a:prstGeom prst="roundRect">
@@ -4458,13 +3852,13 @@
       </p:sp>
       <p:sp>
         <p:nvSpPr>
-          <p:cNvPr id="13" name="Text 10"/>
-          <p:cNvSpPr/>
-          <p:nvPr/>
-        </p:nvSpPr>
-        <p:spPr>
-          <a:xfrm>
-            <a:off x="7934325" y="2590800"/>
+          <p:cNvPr id="14" name="Text 10"/>
+          <p:cNvSpPr/>
+          <p:nvPr/>
+        </p:nvSpPr>
+        <p:spPr>
+          <a:xfrm>
+            <a:off x="7934325" y="2190750"/>
             <a:ext cx="3857625" cy="342900"/>
           </a:xfrm>
           <a:prstGeom prst="rect">
@@ -4527,32 +3921,62 @@
           <a:chExt cx="0" cy="0"/>
         </a:xfrm>
       </p:grpSpPr>
-      <p:sp>
-        <p:nvSpPr>
-          <p:cNvPr id="2" name="Text 0"/>
-          <p:cNvSpPr/>
-          <p:nvPr/>
-        </p:nvSpPr>
-        <p:spPr>
-          <a:xfrm>
-            <a:off x="400050" y="304800"/>
-            <a:ext cx="11049000" cy="533400"/>
-          </a:xfrm>
-          <a:prstGeom prst="rect">
-            <a:avLst/>
-          </a:prstGeom>
-          <a:noFill/>
-          <a:ln/>
-        </p:spPr>
-        <p:txBody>
-          <a:bodyPr wrap="square" lIns="0" tIns="0" rIns="0" bIns="0" rtlCol="0" anchor="t"/>
-          <a:lstStyle/>
-          <a:p>
-            <a:pPr algn="l" indent="0" marL="0">
-              <a:buNone/>
-            </a:pPr>
-            <a:r>
-              <a:rPr lang="en-US" sz="3200" b="1" dirty="0">
+      <p:pic>
+        <p:nvPicPr>
+          <p:cNvPr id="2" name="Image 0" descr="/Users/dpadmana/projects/ppt-gen/themes/scientific/logo.svg">    </p:cNvPr>
+          <p:cNvPicPr>
+            <a:picLocks noChangeAspect="1"/>
+          </p:cNvPicPr>
+          <p:nvPr/>
+        </p:nvPicPr>
+        <p:blipFill>
+          <a:blip r:embed="rId1">
+            <a:extLst>
+              <a:ext uri="{96DAC541-7B7A-43D3-8B79-37D633B846F1}">
+                <asvg:svgBlip xmlns:asvg="http://schemas.microsoft.com/office/drawing/2016/SVG/main" r:embed="rId2"/>
+              </a:ext>
+            </a:extLst>
+          </a:blip>
+          <a:stretch>
+            <a:fillRect/>
+          </a:stretch>
+        </p:blipFill>
+        <p:spPr>
+          <a:xfrm>
+            <a:off x="11430000" y="266700"/>
+            <a:ext cx="419100" cy="419100"/>
+          </a:xfrm>
+          <a:prstGeom prst="rect">
+            <a:avLst/>
+          </a:prstGeom>
+        </p:spPr>
+      </p:pic>
+      <p:sp>
+        <p:nvSpPr>
+          <p:cNvPr id="3" name="Text 0"/>
+          <p:cNvSpPr/>
+          <p:nvPr/>
+        </p:nvSpPr>
+        <p:spPr>
+          <a:xfrm>
+            <a:off x="400050" y="247650"/>
+            <a:ext cx="10839450" cy="381000"/>
+          </a:xfrm>
+          <a:prstGeom prst="rect">
+            <a:avLst/>
+          </a:prstGeom>
+          <a:noFill/>
+          <a:ln/>
+        </p:spPr>
+        <p:txBody>
+          <a:bodyPr wrap="square" lIns="0" tIns="0" rIns="0" bIns="0" rtlCol="0" anchor="t"/>
+          <a:lstStyle/>
+          <a:p>
+            <a:pPr algn="l" indent="0" marL="0">
+              <a:buNone/>
+            </a:pPr>
+            <a:r>
+              <a:rPr lang="en-US" sz="3000" b="1" dirty="0">
                 <a:solidFill>
                   <a:srgbClr val="EAEAEA"/>
                 </a:solidFill>
@@ -4562,20 +3986,20 @@
               </a:rPr>
               <a:t>Full-price mix is eroding</a:t>
             </a:r>
-            <a:endParaRPr lang="en-US" sz="3200" dirty="0"/>
-          </a:p>
-        </p:txBody>
-      </p:sp>
-      <p:sp>
-        <p:nvSpPr>
-          <p:cNvPr id="3" name="Text 1"/>
+            <a:endParaRPr lang="en-US" sz="3000" dirty="0"/>
+          </a:p>
+        </p:txBody>
+      </p:sp>
+      <p:sp>
+        <p:nvSpPr>
+          <p:cNvPr id="4" name="Text 1"/>
           <p:cNvSpPr/>
           <p:nvPr/>
         </p:nvSpPr>
         <p:spPr>
           <a:xfrm>
             <a:off x="400050" y="6457950"/>
-            <a:ext cx="8572500" cy="171450"/>
+            <a:ext cx="4953000" cy="171450"/>
           </a:xfrm>
           <a:prstGeom prst="rect">
             <a:avLst/>
@@ -4607,7 +4031,7 @@
       </p:sp>
       <p:sp>
         <p:nvSpPr>
-          <p:cNvPr id="4" name="Text 2"/>
+          <p:cNvPr id="5" name="Text 2"/>
           <p:cNvSpPr/>
           <p:nvPr/>
         </p:nvSpPr>
@@ -4646,18 +4070,18 @@
       </p:sp>
       <p:sp>
         <p:nvSpPr>
-          <p:cNvPr id="5" name="Shape 3"/>
+          <p:cNvPr id="6" name="Shape 3"/>
           <p:cNvSpPr/>
           <p:nvPr/>
         </p:nvSpPr>
         <p:spPr>
           <a:xfrm>
             <a:off x="400050" y="1123950"/>
-            <a:ext cx="11010900" cy="4572000"/>
+            <a:ext cx="11010900" cy="4191000"/>
           </a:xfrm>
           <a:prstGeom prst="roundRect">
             <a:avLst>
-              <a:gd name="adj" fmla="val 2000"/>
+              <a:gd name="adj" fmla="val 2182"/>
             </a:avLst>
           </a:prstGeom>
           <a:solidFill>
@@ -4673,22 +4097,22 @@
       </p:sp>
       <p:pic>
         <p:nvPicPr>
-          <p:cNvPr id="6" name="Image 0" descr="/Users/dpadmana/projects/ppt-gen/assets/plots/apparel_margin-8ebb739de4.png">    </p:cNvPr>
+          <p:cNvPr id="7" name="Image 1" descr="/Users/dpadmana/projects/ppt-gen/assets/plots/apparel_margin-c1f66affad.png">    </p:cNvPr>
           <p:cNvPicPr>
             <a:picLocks noChangeAspect="1"/>
           </p:cNvPicPr>
           <p:nvPr/>
         </p:nvPicPr>
         <p:blipFill>
-          <a:blip r:embed="rId1"/>
+          <a:blip r:embed="rId3"/>
           <a:stretch>
             <a:fillRect/>
           </a:stretch>
         </p:blipFill>
         <p:spPr>
           <a:xfrm>
-            <a:off x="952500" y="1314450"/>
-            <a:ext cx="9906000" cy="4191000"/>
+            <a:off x="1724025" y="1314450"/>
+            <a:ext cx="8372475" cy="3810000"/>
           </a:xfrm>
           <a:prstGeom prst="rect">
             <a:avLst/>
@@ -4697,13 +4121,13 @@
       </p:pic>
       <p:sp>
         <p:nvSpPr>
-          <p:cNvPr id="7" name="Text 4"/>
-          <p:cNvSpPr/>
-          <p:nvPr/>
-        </p:nvSpPr>
-        <p:spPr>
-          <a:xfrm>
-            <a:off x="590550" y="5867400"/>
+          <p:cNvPr id="8" name="Text 4"/>
+          <p:cNvSpPr/>
+          <p:nvPr/>
+        </p:nvSpPr>
+        <p:spPr>
+          <a:xfrm>
+            <a:off x="590550" y="5486400"/>
             <a:ext cx="10477500" cy="762000"/>
           </a:xfrm>
           <a:prstGeom prst="rect">
@@ -4766,32 +4190,62 @@
           <a:chExt cx="0" cy="0"/>
         </a:xfrm>
       </p:grpSpPr>
-      <p:sp>
-        <p:nvSpPr>
-          <p:cNvPr id="2" name="Text 0"/>
-          <p:cNvSpPr/>
-          <p:nvPr/>
-        </p:nvSpPr>
-        <p:spPr>
-          <a:xfrm>
-            <a:off x="400050" y="304800"/>
-            <a:ext cx="11049000" cy="533400"/>
-          </a:xfrm>
-          <a:prstGeom prst="rect">
-            <a:avLst/>
-          </a:prstGeom>
-          <a:noFill/>
-          <a:ln/>
-        </p:spPr>
-        <p:txBody>
-          <a:bodyPr wrap="square" lIns="0" tIns="0" rIns="0" bIns="0" rtlCol="0" anchor="t"/>
-          <a:lstStyle/>
-          <a:p>
-            <a:pPr algn="l" indent="0" marL="0">
-              <a:buNone/>
-            </a:pPr>
-            <a:r>
-              <a:rPr lang="en-US" sz="3200" b="1" dirty="0">
+      <p:pic>
+        <p:nvPicPr>
+          <p:cNvPr id="2" name="Image 0" descr="/Users/dpadmana/projects/ppt-gen/themes/scientific/logo.svg">    </p:cNvPr>
+          <p:cNvPicPr>
+            <a:picLocks noChangeAspect="1"/>
+          </p:cNvPicPr>
+          <p:nvPr/>
+        </p:nvPicPr>
+        <p:blipFill>
+          <a:blip r:embed="rId1">
+            <a:extLst>
+              <a:ext uri="{96DAC541-7B7A-43D3-8B79-37D633B846F1}">
+                <asvg:svgBlip xmlns:asvg="http://schemas.microsoft.com/office/drawing/2016/SVG/main" r:embed="rId2"/>
+              </a:ext>
+            </a:extLst>
+          </a:blip>
+          <a:stretch>
+            <a:fillRect/>
+          </a:stretch>
+        </p:blipFill>
+        <p:spPr>
+          <a:xfrm>
+            <a:off x="11430000" y="266700"/>
+            <a:ext cx="419100" cy="419100"/>
+          </a:xfrm>
+          <a:prstGeom prst="rect">
+            <a:avLst/>
+          </a:prstGeom>
+        </p:spPr>
+      </p:pic>
+      <p:sp>
+        <p:nvSpPr>
+          <p:cNvPr id="3" name="Text 0"/>
+          <p:cNvSpPr/>
+          <p:nvPr/>
+        </p:nvSpPr>
+        <p:spPr>
+          <a:xfrm>
+            <a:off x="400050" y="247650"/>
+            <a:ext cx="10839450" cy="381000"/>
+          </a:xfrm>
+          <a:prstGeom prst="rect">
+            <a:avLst/>
+          </a:prstGeom>
+          <a:noFill/>
+          <a:ln/>
+        </p:spPr>
+        <p:txBody>
+          <a:bodyPr wrap="square" lIns="0" tIns="0" rIns="0" bIns="0" rtlCol="0" anchor="t"/>
+          <a:lstStyle/>
+          <a:p>
+            <a:pPr algn="l" indent="0" marL="0">
+              <a:buNone/>
+            </a:pPr>
+            <a:r>
+              <a:rPr lang="en-US" sz="3000" b="1" dirty="0">
                 <a:solidFill>
                   <a:srgbClr val="EAEAEA"/>
                 </a:solidFill>
@@ -4799,38 +4253,38 @@
                 <a:ea typeface="Helvetica Neue" pitchFamily="34" charset="-122"/>
                 <a:cs typeface="Helvetica Neue" pitchFamily="34" charset="-120"/>
               </a:rPr>
-              <a:t>Where to intervene first</a:t>
-            </a:r>
-            <a:endParaRPr lang="en-US" sz="3200" dirty="0"/>
-          </a:p>
-        </p:txBody>
-      </p:sp>
-      <p:sp>
-        <p:nvSpPr>
-          <p:cNvPr id="3" name="Text 1"/>
-          <p:cNvSpPr/>
-          <p:nvPr/>
-        </p:nvSpPr>
-        <p:spPr>
-          <a:xfrm>
-            <a:off x="400050" y="857250"/>
-            <a:ext cx="10477500" cy="381000"/>
-          </a:xfrm>
-          <a:prstGeom prst="rect">
-            <a:avLst/>
-          </a:prstGeom>
-          <a:noFill/>
-          <a:ln/>
-        </p:spPr>
-        <p:txBody>
-          <a:bodyPr wrap="square" lIns="0" tIns="0" rIns="0" bIns="0" rtlCol="0" anchor="t"/>
-          <a:lstStyle/>
-          <a:p>
-            <a:pPr algn="l" indent="0" marL="0">
-              <a:buNone/>
-            </a:pPr>
-            <a:r>
-              <a:rPr lang="en-US" sz="1600" dirty="0">
+              <a:t>Where to act — and what it buys</a:t>
+            </a:r>
+            <a:endParaRPr lang="en-US" sz="3000" dirty="0"/>
+          </a:p>
+        </p:txBody>
+      </p:sp>
+      <p:sp>
+        <p:nvSpPr>
+          <p:cNvPr id="4" name="Text 1"/>
+          <p:cNvSpPr/>
+          <p:nvPr/>
+        </p:nvSpPr>
+        <p:spPr>
+          <a:xfrm>
+            <a:off x="400050" y="6457950"/>
+            <a:ext cx="4953000" cy="171450"/>
+          </a:xfrm>
+          <a:prstGeom prst="rect">
+            <a:avLst/>
+          </a:prstGeom>
+          <a:noFill/>
+          <a:ln/>
+        </p:spPr>
+        <p:txBody>
+          <a:bodyPr wrap="square" lIns="0" tIns="0" rIns="0" bIns="0" rtlCol="0" anchor="t"/>
+          <a:lstStyle/>
+          <a:p>
+            <a:pPr algn="l" indent="0" marL="0">
+              <a:buNone/>
+            </a:pPr>
+            <a:r>
+              <a:rPr lang="en-US" sz="1100" b="1" dirty="0">
                 <a:solidFill>
                   <a:srgbClr val="6C6C8A"/>
                 </a:solidFill>
@@ -4838,45 +4292,6 @@
                 <a:ea typeface="Helvetica Neue" pitchFamily="34" charset="-122"/>
                 <a:cs typeface="Helvetica Neue" pitchFamily="34" charset="-120"/>
               </a:rPr>
-              <a:t>Prioritize high residual value with recoverable demand</a:t>
-            </a:r>
-            <a:endParaRPr lang="en-US" sz="1600" dirty="0"/>
-          </a:p>
-        </p:txBody>
-      </p:sp>
-      <p:sp>
-        <p:nvSpPr>
-          <p:cNvPr id="4" name="Text 2"/>
-          <p:cNvSpPr/>
-          <p:nvPr/>
-        </p:nvSpPr>
-        <p:spPr>
-          <a:xfrm>
-            <a:off x="400050" y="6457950"/>
-            <a:ext cx="8572500" cy="171450"/>
-          </a:xfrm>
-          <a:prstGeom prst="rect">
-            <a:avLst/>
-          </a:prstGeom>
-          <a:noFill/>
-          <a:ln/>
-        </p:spPr>
-        <p:txBody>
-          <a:bodyPr wrap="square" lIns="0" tIns="0" rIns="0" bIns="0" rtlCol="0" anchor="t"/>
-          <a:lstStyle/>
-          <a:p>
-            <a:pPr algn="l" indent="0" marL="0">
-              <a:buNone/>
-            </a:pPr>
-            <a:r>
-              <a:rPr lang="en-US" sz="1100" b="1" dirty="0">
-                <a:solidFill>
-                  <a:srgbClr val="6C6C8A"/>
-                </a:solidFill>
-                <a:latin typeface="Helvetica Neue" pitchFamily="34" charset="0"/>
-                <a:ea typeface="Helvetica Neue" pitchFamily="34" charset="-122"/>
-                <a:cs typeface="Helvetica Neue" pitchFamily="34" charset="-120"/>
-              </a:rPr>
               <a:t>APPAREL  ·  MARKDOWN STRATEGY</a:t>
             </a:r>
             <a:endParaRPr lang="en-US" sz="1100" dirty="0"/>
@@ -4885,7 +4300,7 @@
       </p:sp>
       <p:sp>
         <p:nvSpPr>
-          <p:cNvPr id="5" name="Text 3"/>
+          <p:cNvPr id="5" name="Text 2"/>
           <p:cNvSpPr/>
           <p:nvPr/>
         </p:nvSpPr>
@@ -4924,17 +4339,58 @@
       </p:sp>
       <p:sp>
         <p:nvSpPr>
-          <p:cNvPr id="6" name="Shape 4"/>
-          <p:cNvSpPr/>
-          <p:nvPr/>
-        </p:nvSpPr>
-        <p:spPr>
-          <a:xfrm>
-            <a:off x="1352550" y="1638300"/>
-            <a:ext cx="10058400" cy="4114800"/>
-          </a:xfrm>
-          <a:prstGeom prst="rect">
-            <a:avLst/>
+          <p:cNvPr id="6" name="Text 3"/>
+          <p:cNvSpPr/>
+          <p:nvPr/>
+        </p:nvSpPr>
+        <p:spPr>
+          <a:xfrm>
+            <a:off x="400050" y="819150"/>
+            <a:ext cx="5619750" cy="171450"/>
+          </a:xfrm>
+          <a:prstGeom prst="rect">
+            <a:avLst/>
+          </a:prstGeom>
+          <a:noFill/>
+          <a:ln/>
+        </p:spPr>
+        <p:txBody>
+          <a:bodyPr wrap="square" lIns="0" tIns="0" rIns="0" bIns="0" rtlCol="0" anchor="t"/>
+          <a:lstStyle/>
+          <a:p>
+            <a:pPr algn="l" indent="0" marL="0">
+              <a:buNone/>
+            </a:pPr>
+            <a:r>
+              <a:rPr lang="en-US" sz="1100" b="1" dirty="0">
+                <a:solidFill>
+                  <a:srgbClr val="6C6C8A"/>
+                </a:solidFill>
+                <a:latin typeface="Helvetica Neue" pitchFamily="34" charset="0"/>
+                <a:ea typeface="Helvetica Neue" pitchFamily="34" charset="-122"/>
+                <a:cs typeface="Helvetica Neue" pitchFamily="34" charset="-120"/>
+              </a:rPr>
+              <a:t>INTERVENE FIRST</a:t>
+            </a:r>
+            <a:endParaRPr lang="en-US" sz="1100" dirty="0"/>
+          </a:p>
+        </p:txBody>
+      </p:sp>
+      <p:sp>
+        <p:nvSpPr>
+          <p:cNvPr id="7" name="Shape 4"/>
+          <p:cNvSpPr/>
+          <p:nvPr/>
+        </p:nvSpPr>
+        <p:spPr>
+          <a:xfrm>
+            <a:off x="1543050" y="1143000"/>
+            <a:ext cx="2047875" cy="2266950"/>
+          </a:xfrm>
+          <a:prstGeom prst="roundRect">
+            <a:avLst>
+              <a:gd name="adj" fmla="val 4465"/>
+            </a:avLst>
           </a:prstGeom>
           <a:solidFill>
             <a:srgbClr val="2B2B4A"/>
@@ -4949,22 +4405,24 @@
       </p:sp>
       <p:sp>
         <p:nvSpPr>
-          <p:cNvPr id="7" name="Shape 5"/>
-          <p:cNvSpPr/>
-          <p:nvPr/>
-        </p:nvSpPr>
-        <p:spPr>
-          <a:xfrm>
-            <a:off x="6374606" y="1638300"/>
-            <a:ext cx="14288" cy="4114800"/>
-          </a:xfrm>
-          <a:prstGeom prst="rect">
-            <a:avLst/>
-          </a:prstGeom>
-          <a:solidFill>
-            <a:srgbClr val="3A3A5C"/>
-          </a:solidFill>
-          <a:ln w="12700">
+          <p:cNvPr id="8" name="Shape 5"/>
+          <p:cNvSpPr/>
+          <p:nvPr/>
+        </p:nvSpPr>
+        <p:spPr>
+          <a:xfrm>
+            <a:off x="3686175" y="1143000"/>
+            <a:ext cx="2047875" cy="2266950"/>
+          </a:xfrm>
+          <a:prstGeom prst="roundRect">
+            <a:avLst>
+              <a:gd name="adj" fmla="val 4465"/>
+            </a:avLst>
+          </a:prstGeom>
+          <a:solidFill>
+            <a:srgbClr val="2B2B4A"/>
+          </a:solidFill>
+          <a:ln w="15875">
             <a:solidFill>
               <a:srgbClr val="3A3A5C"/>
             </a:solidFill>
@@ -4974,22 +4432,24 @@
       </p:sp>
       <p:sp>
         <p:nvSpPr>
-          <p:cNvPr id="8" name="Shape 6"/>
-          <p:cNvSpPr/>
-          <p:nvPr/>
-        </p:nvSpPr>
-        <p:spPr>
-          <a:xfrm>
-            <a:off x="1352550" y="3688556"/>
-            <a:ext cx="10058400" cy="14288"/>
-          </a:xfrm>
-          <a:prstGeom prst="rect">
-            <a:avLst/>
-          </a:prstGeom>
-          <a:solidFill>
-            <a:srgbClr val="3A3A5C"/>
-          </a:solidFill>
-          <a:ln w="12700">
+          <p:cNvPr id="9" name="Shape 6"/>
+          <p:cNvSpPr/>
+          <p:nvPr/>
+        </p:nvSpPr>
+        <p:spPr>
+          <a:xfrm>
+            <a:off x="1543050" y="3505200"/>
+            <a:ext cx="2047875" cy="2266950"/>
+          </a:xfrm>
+          <a:prstGeom prst="roundRect">
+            <a:avLst>
+              <a:gd name="adj" fmla="val 4465"/>
+            </a:avLst>
+          </a:prstGeom>
+          <a:solidFill>
+            <a:srgbClr val="2B2B4A"/>
+          </a:solidFill>
+          <a:ln w="15875">
             <a:solidFill>
               <a:srgbClr val="3A3A5C"/>
             </a:solidFill>
@@ -4999,253 +4459,608 @@
       </p:sp>
       <p:sp>
         <p:nvSpPr>
-          <p:cNvPr id="9" name="Text 7"/>
-          <p:cNvSpPr/>
-          <p:nvPr/>
-        </p:nvSpPr>
-        <p:spPr>
-          <a:xfrm>
-            <a:off x="400050" y="1638300"/>
-            <a:ext cx="857250" cy="209550"/>
-          </a:xfrm>
-          <a:prstGeom prst="rect">
-            <a:avLst/>
-          </a:prstGeom>
-          <a:noFill/>
-          <a:ln/>
-        </p:spPr>
-        <p:txBody>
-          <a:bodyPr wrap="square" lIns="0" tIns="0" rIns="0" bIns="0" rtlCol="0" anchor="t"/>
-          <a:lstStyle/>
-          <a:p>
-            <a:pPr algn="l" indent="0" marL="0">
-              <a:buNone/>
-            </a:pPr>
-            <a:r>
-              <a:rPr lang="en-US" sz="1100" b="1" dirty="0">
-                <a:solidFill>
-                  <a:srgbClr val="6C6C8A"/>
-                </a:solidFill>
-                <a:latin typeface="Helvetica Neue" pitchFamily="34" charset="0"/>
-                <a:ea typeface="Helvetica Neue" pitchFamily="34" charset="-122"/>
-                <a:cs typeface="Helvetica Neue" pitchFamily="34" charset="-120"/>
-              </a:rPr>
-              <a:t>Unit contribution</a:t>
-            </a:r>
-            <a:endParaRPr lang="en-US" sz="1100" dirty="0"/>
-          </a:p>
-        </p:txBody>
-      </p:sp>
-      <p:sp>
-        <p:nvSpPr>
-          <p:cNvPr id="10" name="Text 8"/>
-          <p:cNvSpPr/>
-          <p:nvPr/>
-        </p:nvSpPr>
-        <p:spPr>
-          <a:xfrm>
-            <a:off x="1352550" y="5924550"/>
-            <a:ext cx="10058400" cy="190500"/>
-          </a:xfrm>
-          <a:prstGeom prst="rect">
-            <a:avLst/>
-          </a:prstGeom>
-          <a:noFill/>
-          <a:ln/>
-        </p:spPr>
-        <p:txBody>
-          <a:bodyPr wrap="square" lIns="0" tIns="0" rIns="0" bIns="0" rtlCol="0" anchor="t"/>
-          <a:lstStyle/>
-          <a:p>
-            <a:pPr algn="ctr" indent="0" marL="0">
-              <a:buNone/>
-            </a:pPr>
-            <a:r>
-              <a:rPr lang="en-US" sz="1100" b="1" dirty="0">
-                <a:solidFill>
-                  <a:srgbClr val="6C6C8A"/>
-                </a:solidFill>
-                <a:latin typeface="Helvetica Neue" pitchFamily="34" charset="0"/>
-                <a:ea typeface="Helvetica Neue" pitchFamily="34" charset="-122"/>
-                <a:cs typeface="Helvetica Neue" pitchFamily="34" charset="-120"/>
-              </a:rPr>
-              <a:t>Sell-through risk</a:t>
-            </a:r>
-            <a:endParaRPr lang="en-US" sz="1100" dirty="0"/>
-          </a:p>
-        </p:txBody>
-      </p:sp>
-      <p:sp>
-        <p:nvSpPr>
-          <p:cNvPr id="11" name="Text 9"/>
-          <p:cNvSpPr/>
-          <p:nvPr/>
-        </p:nvSpPr>
-        <p:spPr>
-          <a:xfrm>
-            <a:off x="3486150" y="2080260"/>
-            <a:ext cx="762000" cy="171450"/>
-          </a:xfrm>
-          <a:prstGeom prst="rect">
-            <a:avLst/>
-          </a:prstGeom>
-          <a:noFill/>
-          <a:ln/>
-        </p:spPr>
-        <p:txBody>
-          <a:bodyPr wrap="square" lIns="0" tIns="0" rIns="0" bIns="0" rtlCol="0" anchor="t"/>
-          <a:lstStyle/>
-          <a:p>
-            <a:pPr algn="l" indent="0" marL="0">
-              <a:buNone/>
-            </a:pPr>
-            <a:r>
-              <a:rPr lang="en-US" sz="1100" b="1" dirty="0">
-                <a:solidFill>
-                  <a:srgbClr val="6C6C8A"/>
-                </a:solidFill>
-                <a:latin typeface="Helvetica Neue" pitchFamily="34" charset="0"/>
-                <a:ea typeface="Helvetica Neue" pitchFamily="34" charset="-122"/>
-                <a:cs typeface="Helvetica Neue" pitchFamily="34" charset="-120"/>
-              </a:rPr>
-              <a:t>PROTECT</a:t>
-            </a:r>
-            <a:endParaRPr lang="en-US" sz="1100" dirty="0"/>
-          </a:p>
-        </p:txBody>
-      </p:sp>
-      <p:sp>
-        <p:nvSpPr>
-          <p:cNvPr id="12" name="Text 10"/>
-          <p:cNvSpPr/>
-          <p:nvPr/>
-        </p:nvSpPr>
-        <p:spPr>
-          <a:xfrm>
-            <a:off x="8515350" y="2080260"/>
-            <a:ext cx="762000" cy="171450"/>
-          </a:xfrm>
-          <a:prstGeom prst="rect">
-            <a:avLst/>
-          </a:prstGeom>
-          <a:noFill/>
-          <a:ln/>
-        </p:spPr>
-        <p:txBody>
-          <a:bodyPr wrap="square" lIns="0" tIns="0" rIns="0" bIns="0" rtlCol="0" anchor="t"/>
-          <a:lstStyle/>
-          <a:p>
-            <a:pPr algn="l" indent="0" marL="0">
-              <a:buNone/>
-            </a:pPr>
-            <a:r>
-              <a:rPr lang="en-US" sz="1100" b="1" dirty="0">
-                <a:solidFill>
-                  <a:srgbClr val="6C6C8A"/>
-                </a:solidFill>
-                <a:latin typeface="Helvetica Neue" pitchFamily="34" charset="0"/>
-                <a:ea typeface="Helvetica Neue" pitchFamily="34" charset="-122"/>
-                <a:cs typeface="Helvetica Neue" pitchFamily="34" charset="-120"/>
-              </a:rPr>
-              <a:t>PRICE NOW</a:t>
-            </a:r>
-            <a:endParaRPr lang="en-US" sz="1100" dirty="0"/>
-          </a:p>
-        </p:txBody>
-      </p:sp>
-      <p:sp>
-        <p:nvSpPr>
-          <p:cNvPr id="13" name="Text 11"/>
-          <p:cNvSpPr/>
-          <p:nvPr/>
-        </p:nvSpPr>
-        <p:spPr>
-          <a:xfrm>
-            <a:off x="3486150" y="4137660"/>
-            <a:ext cx="762000" cy="171450"/>
-          </a:xfrm>
-          <a:prstGeom prst="rect">
-            <a:avLst/>
-          </a:prstGeom>
-          <a:noFill/>
-          <a:ln/>
-        </p:spPr>
-        <p:txBody>
-          <a:bodyPr wrap="square" lIns="0" tIns="0" rIns="0" bIns="0" rtlCol="0" anchor="t"/>
-          <a:lstStyle/>
-          <a:p>
-            <a:pPr algn="l" indent="0" marL="0">
-              <a:buNone/>
-            </a:pPr>
-            <a:r>
-              <a:rPr lang="en-US" sz="1100" b="1" dirty="0">
-                <a:solidFill>
-                  <a:srgbClr val="6C6C8A"/>
-                </a:solidFill>
-                <a:latin typeface="Helvetica Neue" pitchFamily="34" charset="0"/>
-                <a:ea typeface="Helvetica Neue" pitchFamily="34" charset="-122"/>
-                <a:cs typeface="Helvetica Neue" pitchFamily="34" charset="-120"/>
-              </a:rPr>
-              <a:t>EXIT</a:t>
-            </a:r>
-            <a:endParaRPr lang="en-US" sz="1100" dirty="0"/>
-          </a:p>
-        </p:txBody>
-      </p:sp>
-      <p:sp>
-        <p:nvSpPr>
-          <p:cNvPr id="14" name="Text 12"/>
-          <p:cNvSpPr/>
-          <p:nvPr/>
-        </p:nvSpPr>
-        <p:spPr>
-          <a:xfrm>
-            <a:off x="8515350" y="4137660"/>
-            <a:ext cx="762000" cy="171450"/>
-          </a:xfrm>
-          <a:prstGeom prst="rect">
-            <a:avLst/>
-          </a:prstGeom>
-          <a:noFill/>
-          <a:ln/>
-        </p:spPr>
-        <p:txBody>
-          <a:bodyPr wrap="square" lIns="0" tIns="0" rIns="0" bIns="0" rtlCol="0" anchor="t"/>
-          <a:lstStyle/>
-          <a:p>
-            <a:pPr algn="l" indent="0" marL="0">
-              <a:buNone/>
-            </a:pPr>
-            <a:r>
-              <a:rPr lang="en-US" sz="1100" b="1" dirty="0">
-                <a:solidFill>
-                  <a:srgbClr val="6C6C8A"/>
-                </a:solidFill>
-                <a:latin typeface="Helvetica Neue" pitchFamily="34" charset="0"/>
-                <a:ea typeface="Helvetica Neue" pitchFamily="34" charset="-122"/>
-                <a:cs typeface="Helvetica Neue" pitchFamily="34" charset="-120"/>
-              </a:rPr>
-              <a:t>TEST &amp; LEARN</a:t>
-            </a:r>
-            <a:endParaRPr lang="en-US" sz="1100" dirty="0"/>
-          </a:p>
-        </p:txBody>
-      </p:sp>
-      <p:sp>
-        <p:nvSpPr>
-          <p:cNvPr id="15" name="Shape 13"/>
-          <p:cNvSpPr/>
-          <p:nvPr/>
-        </p:nvSpPr>
-        <p:spPr>
-          <a:xfrm>
-            <a:off x="3295650" y="2524125"/>
-            <a:ext cx="1143000" cy="285750"/>
+          <p:cNvPr id="10" name="Shape 7"/>
+          <p:cNvSpPr/>
+          <p:nvPr/>
+        </p:nvSpPr>
+        <p:spPr>
+          <a:xfrm>
+            <a:off x="3686175" y="3505200"/>
+            <a:ext cx="2047875" cy="2266950"/>
           </a:xfrm>
           <a:prstGeom prst="roundRect">
             <a:avLst>
-              <a:gd name="adj" fmla="val 32000"/>
+              <a:gd name="adj" fmla="val 4465"/>
             </a:avLst>
+          </a:prstGeom>
+          <a:solidFill>
+            <a:srgbClr val="2B2B4A"/>
+          </a:solidFill>
+          <a:ln w="15875">
+            <a:solidFill>
+              <a:srgbClr val="3A3A5C"/>
+            </a:solidFill>
+            <a:prstDash val="solid"/>
+          </a:ln>
+        </p:spPr>
+      </p:sp>
+      <p:sp>
+        <p:nvSpPr>
+          <p:cNvPr id="11" name="Text 8"/>
+          <p:cNvSpPr/>
+          <p:nvPr/>
+        </p:nvSpPr>
+        <p:spPr>
+          <a:xfrm>
+            <a:off x="400050" y="1143000"/>
+            <a:ext cx="1047750" cy="266700"/>
+          </a:xfrm>
+          <a:prstGeom prst="rect">
+            <a:avLst/>
+          </a:prstGeom>
+          <a:noFill/>
+          <a:ln/>
+        </p:spPr>
+        <p:txBody>
+          <a:bodyPr wrap="square" lIns="0" tIns="0" rIns="0" bIns="0" rtlCol="0" anchor="t"/>
+          <a:lstStyle/>
+          <a:p>
+            <a:pPr algn="l" indent="0" marL="0">
+              <a:buNone/>
+            </a:pPr>
+            <a:r>
+              <a:rPr lang="en-US" sz="1400" b="1" dirty="0">
+                <a:solidFill>
+                  <a:srgbClr val="6C6C8A"/>
+                </a:solidFill>
+                <a:latin typeface="Helvetica Neue" pitchFamily="34" charset="0"/>
+                <a:ea typeface="Helvetica Neue" pitchFamily="34" charset="-122"/>
+                <a:cs typeface="Helvetica Neue" pitchFamily="34" charset="-120"/>
+              </a:rPr>
+              <a:t>Unit contribution</a:t>
+            </a:r>
+            <a:endParaRPr lang="en-US" sz="1400" dirty="0"/>
+          </a:p>
+        </p:txBody>
+      </p:sp>
+      <p:sp>
+        <p:nvSpPr>
+          <p:cNvPr id="12" name="Text 9"/>
+          <p:cNvSpPr/>
+          <p:nvPr/>
+        </p:nvSpPr>
+        <p:spPr>
+          <a:xfrm>
+            <a:off x="1543050" y="5924550"/>
+            <a:ext cx="4191000" cy="266700"/>
+          </a:xfrm>
+          <a:prstGeom prst="rect">
+            <a:avLst/>
+          </a:prstGeom>
+          <a:noFill/>
+          <a:ln/>
+        </p:spPr>
+        <p:txBody>
+          <a:bodyPr wrap="square" lIns="0" tIns="0" rIns="0" bIns="0" rtlCol="0" anchor="t"/>
+          <a:lstStyle/>
+          <a:p>
+            <a:pPr algn="ctr" indent="0" marL="0">
+              <a:buNone/>
+            </a:pPr>
+            <a:r>
+              <a:rPr lang="en-US" sz="1400" b="1" dirty="0">
+                <a:solidFill>
+                  <a:srgbClr val="6C6C8A"/>
+                </a:solidFill>
+                <a:latin typeface="Helvetica Neue" pitchFamily="34" charset="0"/>
+                <a:ea typeface="Helvetica Neue" pitchFamily="34" charset="-122"/>
+                <a:cs typeface="Helvetica Neue" pitchFamily="34" charset="-120"/>
+              </a:rPr>
+              <a:t>Sell-through risk</a:t>
+            </a:r>
+            <a:endParaRPr lang="en-US" sz="1400" dirty="0"/>
+          </a:p>
+        </p:txBody>
+      </p:sp>
+      <p:sp>
+        <p:nvSpPr>
+          <p:cNvPr id="13" name="Text 10"/>
+          <p:cNvSpPr/>
+          <p:nvPr/>
+        </p:nvSpPr>
+        <p:spPr>
+          <a:xfrm>
+            <a:off x="1695450" y="1276350"/>
+            <a:ext cx="1743075" cy="171450"/>
+          </a:xfrm>
+          <a:prstGeom prst="rect">
+            <a:avLst/>
+          </a:prstGeom>
+          <a:noFill/>
+          <a:ln/>
+        </p:spPr>
+        <p:txBody>
+          <a:bodyPr wrap="square" lIns="0" tIns="0" rIns="0" bIns="0" rtlCol="0" anchor="t"/>
+          <a:lstStyle/>
+          <a:p>
+            <a:pPr algn="l" indent="0" marL="0">
+              <a:buNone/>
+            </a:pPr>
+            <a:r>
+              <a:rPr lang="en-US" sz="1100" b="1" dirty="0">
+                <a:solidFill>
+                  <a:srgbClr val="6C6C8A"/>
+                </a:solidFill>
+                <a:latin typeface="Helvetica Neue" pitchFamily="34" charset="0"/>
+                <a:ea typeface="Helvetica Neue" pitchFamily="34" charset="-122"/>
+                <a:cs typeface="Helvetica Neue" pitchFamily="34" charset="-120"/>
+              </a:rPr>
+              <a:t>PROTECT</a:t>
+            </a:r>
+            <a:endParaRPr lang="en-US" sz="1100" dirty="0"/>
+          </a:p>
+        </p:txBody>
+      </p:sp>
+      <p:sp>
+        <p:nvSpPr>
+          <p:cNvPr id="14" name="Text 11"/>
+          <p:cNvSpPr/>
+          <p:nvPr/>
+        </p:nvSpPr>
+        <p:spPr>
+          <a:xfrm>
+            <a:off x="3838575" y="1276350"/>
+            <a:ext cx="1743075" cy="171450"/>
+          </a:xfrm>
+          <a:prstGeom prst="rect">
+            <a:avLst/>
+          </a:prstGeom>
+          <a:noFill/>
+          <a:ln/>
+        </p:spPr>
+        <p:txBody>
+          <a:bodyPr wrap="square" lIns="0" tIns="0" rIns="0" bIns="0" rtlCol="0" anchor="t"/>
+          <a:lstStyle/>
+          <a:p>
+            <a:pPr algn="l" indent="0" marL="0">
+              <a:buNone/>
+            </a:pPr>
+            <a:r>
+              <a:rPr lang="en-US" sz="1100" b="1" dirty="0">
+                <a:solidFill>
+                  <a:srgbClr val="6C6C8A"/>
+                </a:solidFill>
+                <a:latin typeface="Helvetica Neue" pitchFamily="34" charset="0"/>
+                <a:ea typeface="Helvetica Neue" pitchFamily="34" charset="-122"/>
+                <a:cs typeface="Helvetica Neue" pitchFamily="34" charset="-120"/>
+              </a:rPr>
+              <a:t>PRICE NOW</a:t>
+            </a:r>
+            <a:endParaRPr lang="en-US" sz="1100" dirty="0"/>
+          </a:p>
+        </p:txBody>
+      </p:sp>
+      <p:sp>
+        <p:nvSpPr>
+          <p:cNvPr id="15" name="Text 12"/>
+          <p:cNvSpPr/>
+          <p:nvPr/>
+        </p:nvSpPr>
+        <p:spPr>
+          <a:xfrm>
+            <a:off x="1695450" y="3638550"/>
+            <a:ext cx="1743075" cy="171450"/>
+          </a:xfrm>
+          <a:prstGeom prst="rect">
+            <a:avLst/>
+          </a:prstGeom>
+          <a:noFill/>
+          <a:ln/>
+        </p:spPr>
+        <p:txBody>
+          <a:bodyPr wrap="square" lIns="0" tIns="0" rIns="0" bIns="0" rtlCol="0" anchor="t"/>
+          <a:lstStyle/>
+          <a:p>
+            <a:pPr algn="l" indent="0" marL="0">
+              <a:buNone/>
+            </a:pPr>
+            <a:r>
+              <a:rPr lang="en-US" sz="1100" b="1" dirty="0">
+                <a:solidFill>
+                  <a:srgbClr val="6C6C8A"/>
+                </a:solidFill>
+                <a:latin typeface="Helvetica Neue" pitchFamily="34" charset="0"/>
+                <a:ea typeface="Helvetica Neue" pitchFamily="34" charset="-122"/>
+                <a:cs typeface="Helvetica Neue" pitchFamily="34" charset="-120"/>
+              </a:rPr>
+              <a:t>EXIT</a:t>
+            </a:r>
+            <a:endParaRPr lang="en-US" sz="1100" dirty="0"/>
+          </a:p>
+        </p:txBody>
+      </p:sp>
+      <p:sp>
+        <p:nvSpPr>
+          <p:cNvPr id="16" name="Text 13"/>
+          <p:cNvSpPr/>
+          <p:nvPr/>
+        </p:nvSpPr>
+        <p:spPr>
+          <a:xfrm>
+            <a:off x="3838575" y="3638550"/>
+            <a:ext cx="1743075" cy="171450"/>
+          </a:xfrm>
+          <a:prstGeom prst="rect">
+            <a:avLst/>
+          </a:prstGeom>
+          <a:noFill/>
+          <a:ln/>
+        </p:spPr>
+        <p:txBody>
+          <a:bodyPr wrap="square" lIns="0" tIns="0" rIns="0" bIns="0" rtlCol="0" anchor="t"/>
+          <a:lstStyle/>
+          <a:p>
+            <a:pPr algn="l" indent="0" marL="0">
+              <a:buNone/>
+            </a:pPr>
+            <a:r>
+              <a:rPr lang="en-US" sz="1100" b="1" dirty="0">
+                <a:solidFill>
+                  <a:srgbClr val="6C6C8A"/>
+                </a:solidFill>
+                <a:latin typeface="Helvetica Neue" pitchFamily="34" charset="0"/>
+                <a:ea typeface="Helvetica Neue" pitchFamily="34" charset="-122"/>
+                <a:cs typeface="Helvetica Neue" pitchFamily="34" charset="-120"/>
+              </a:rPr>
+              <a:t>TEST</a:t>
+            </a:r>
+            <a:endParaRPr lang="en-US" sz="1100" dirty="0"/>
+          </a:p>
+        </p:txBody>
+      </p:sp>
+      <p:sp>
+        <p:nvSpPr>
+          <p:cNvPr id="17" name="Shape 14"/>
+          <p:cNvSpPr/>
+          <p:nvPr/>
+        </p:nvSpPr>
+        <p:spPr>
+          <a:xfrm>
+            <a:off x="1695450" y="1562100"/>
+            <a:ext cx="1743075" cy="381000"/>
+          </a:xfrm>
+          <a:prstGeom prst="roundRect">
+            <a:avLst>
+              <a:gd name="adj" fmla="val 24000"/>
+            </a:avLst>
+          </a:prstGeom>
+          <a:solidFill>
+            <a:srgbClr val="1F1F36"/>
+          </a:solidFill>
+          <a:ln w="15875">
+            <a:solidFill>
+              <a:srgbClr val="4E79A7"/>
+            </a:solidFill>
+            <a:prstDash val="solid"/>
+          </a:ln>
+        </p:spPr>
+      </p:sp>
+      <p:sp>
+        <p:nvSpPr>
+          <p:cNvPr id="18" name="Text 15"/>
+          <p:cNvSpPr/>
+          <p:nvPr/>
+        </p:nvSpPr>
+        <p:spPr>
+          <a:xfrm>
+            <a:off x="1809750" y="1562100"/>
+            <a:ext cx="1514475" cy="381000"/>
+          </a:xfrm>
+          <a:prstGeom prst="rect">
+            <a:avLst/>
+          </a:prstGeom>
+          <a:noFill/>
+          <a:ln/>
+        </p:spPr>
+        <p:txBody>
+          <a:bodyPr wrap="square" lIns="0" tIns="0" rIns="0" bIns="0" rtlCol="0" anchor="ctr"/>
+          <a:lstStyle/>
+          <a:p>
+            <a:pPr algn="l" indent="0" marL="0">
+              <a:buNone/>
+            </a:pPr>
+            <a:r>
+              <a:rPr lang="en-US" sz="1600" b="1" dirty="0">
+                <a:solidFill>
+                  <a:srgbClr val="EAEAEA"/>
+                </a:solidFill>
+                <a:latin typeface="Helvetica Neue" pitchFamily="34" charset="0"/>
+                <a:ea typeface="Helvetica Neue" pitchFamily="34" charset="-122"/>
+                <a:cs typeface="Helvetica Neue" pitchFamily="34" charset="-120"/>
+              </a:rPr>
+              <a:t>Core basics</a:t>
+            </a:r>
+            <a:endParaRPr lang="en-US" sz="1600" dirty="0"/>
+          </a:p>
+        </p:txBody>
+      </p:sp>
+      <p:sp>
+        <p:nvSpPr>
+          <p:cNvPr id="19" name="Shape 16"/>
+          <p:cNvSpPr/>
+          <p:nvPr/>
+        </p:nvSpPr>
+        <p:spPr>
+          <a:xfrm>
+            <a:off x="3838575" y="1562100"/>
+            <a:ext cx="1743075" cy="381000"/>
+          </a:xfrm>
+          <a:prstGeom prst="roundRect">
+            <a:avLst>
+              <a:gd name="adj" fmla="val 24000"/>
+            </a:avLst>
+          </a:prstGeom>
+          <a:solidFill>
+            <a:srgbClr val="1F1F36"/>
+          </a:solidFill>
+          <a:ln w="15875">
+            <a:solidFill>
+              <a:srgbClr val="4E79A7"/>
+            </a:solidFill>
+            <a:prstDash val="solid"/>
+          </a:ln>
+        </p:spPr>
+      </p:sp>
+      <p:sp>
+        <p:nvSpPr>
+          <p:cNvPr id="20" name="Text 17"/>
+          <p:cNvSpPr/>
+          <p:nvPr/>
+        </p:nvSpPr>
+        <p:spPr>
+          <a:xfrm>
+            <a:off x="3952875" y="1562100"/>
+            <a:ext cx="1514475" cy="381000"/>
+          </a:xfrm>
+          <a:prstGeom prst="rect">
+            <a:avLst/>
+          </a:prstGeom>
+          <a:noFill/>
+          <a:ln/>
+        </p:spPr>
+        <p:txBody>
+          <a:bodyPr wrap="square" lIns="0" tIns="0" rIns="0" bIns="0" rtlCol="0" anchor="ctr"/>
+          <a:lstStyle/>
+          <a:p>
+            <a:pPr algn="l" indent="0" marL="0">
+              <a:buNone/>
+            </a:pPr>
+            <a:r>
+              <a:rPr lang="en-US" sz="1600" b="1" dirty="0">
+                <a:solidFill>
+                  <a:srgbClr val="EAEAEA"/>
+                </a:solidFill>
+                <a:latin typeface="Helvetica Neue" pitchFamily="34" charset="0"/>
+                <a:ea typeface="Helvetica Neue" pitchFamily="34" charset="-122"/>
+                <a:cs typeface="Helvetica Neue" pitchFamily="34" charset="-120"/>
+              </a:rPr>
+              <a:t>Seasonal fashion</a:t>
+            </a:r>
+            <a:endParaRPr lang="en-US" sz="1600" dirty="0"/>
+          </a:p>
+        </p:txBody>
+      </p:sp>
+      <p:sp>
+        <p:nvSpPr>
+          <p:cNvPr id="21" name="Shape 18"/>
+          <p:cNvSpPr/>
+          <p:nvPr/>
+        </p:nvSpPr>
+        <p:spPr>
+          <a:xfrm>
+            <a:off x="1695450" y="3924300"/>
+            <a:ext cx="1743075" cy="381000"/>
+          </a:xfrm>
+          <a:prstGeom prst="roundRect">
+            <a:avLst>
+              <a:gd name="adj" fmla="val 24000"/>
+            </a:avLst>
+          </a:prstGeom>
+          <a:solidFill>
+            <a:srgbClr val="1F1F36"/>
+          </a:solidFill>
+          <a:ln w="15875">
+            <a:solidFill>
+              <a:srgbClr val="4E79A7"/>
+            </a:solidFill>
+            <a:prstDash val="solid"/>
+          </a:ln>
+        </p:spPr>
+      </p:sp>
+      <p:sp>
+        <p:nvSpPr>
+          <p:cNvPr id="22" name="Text 19"/>
+          <p:cNvSpPr/>
+          <p:nvPr/>
+        </p:nvSpPr>
+        <p:spPr>
+          <a:xfrm>
+            <a:off x="1809750" y="3924300"/>
+            <a:ext cx="1514475" cy="381000"/>
+          </a:xfrm>
+          <a:prstGeom prst="rect">
+            <a:avLst/>
+          </a:prstGeom>
+          <a:noFill/>
+          <a:ln/>
+        </p:spPr>
+        <p:txBody>
+          <a:bodyPr wrap="square" lIns="0" tIns="0" rIns="0" bIns="0" rtlCol="0" anchor="ctr"/>
+          <a:lstStyle/>
+          <a:p>
+            <a:pPr algn="l" indent="0" marL="0">
+              <a:buNone/>
+            </a:pPr>
+            <a:r>
+              <a:rPr lang="en-US" sz="1600" b="1" dirty="0">
+                <a:solidFill>
+                  <a:srgbClr val="EAEAEA"/>
+                </a:solidFill>
+                <a:latin typeface="Helvetica Neue" pitchFamily="34" charset="0"/>
+                <a:ea typeface="Helvetica Neue" pitchFamily="34" charset="-122"/>
+                <a:cs typeface="Helvetica Neue" pitchFamily="34" charset="-120"/>
+              </a:rPr>
+              <a:t>Test capsules</a:t>
+            </a:r>
+            <a:endParaRPr lang="en-US" sz="1600" dirty="0"/>
+          </a:p>
+        </p:txBody>
+      </p:sp>
+      <p:sp>
+        <p:nvSpPr>
+          <p:cNvPr id="23" name="Shape 20"/>
+          <p:cNvSpPr/>
+          <p:nvPr/>
+        </p:nvSpPr>
+        <p:spPr>
+          <a:xfrm>
+            <a:off x="3838575" y="3924300"/>
+            <a:ext cx="1743075" cy="381000"/>
+          </a:xfrm>
+          <a:prstGeom prst="roundRect">
+            <a:avLst>
+              <a:gd name="adj" fmla="val 24000"/>
+            </a:avLst>
+          </a:prstGeom>
+          <a:solidFill>
+            <a:srgbClr val="1F1F36"/>
+          </a:solidFill>
+          <a:ln w="15875">
+            <a:solidFill>
+              <a:srgbClr val="4E79A7"/>
+            </a:solidFill>
+            <a:prstDash val="solid"/>
+          </a:ln>
+        </p:spPr>
+      </p:sp>
+      <p:sp>
+        <p:nvSpPr>
+          <p:cNvPr id="24" name="Text 21"/>
+          <p:cNvSpPr/>
+          <p:nvPr/>
+        </p:nvSpPr>
+        <p:spPr>
+          <a:xfrm>
+            <a:off x="3952875" y="3924300"/>
+            <a:ext cx="1514475" cy="381000"/>
+          </a:xfrm>
+          <a:prstGeom prst="rect">
+            <a:avLst/>
+          </a:prstGeom>
+          <a:noFill/>
+          <a:ln/>
+        </p:spPr>
+        <p:txBody>
+          <a:bodyPr wrap="square" lIns="0" tIns="0" rIns="0" bIns="0" rtlCol="0" anchor="ctr"/>
+          <a:lstStyle/>
+          <a:p>
+            <a:pPr algn="l" indent="0" marL="0">
+              <a:buNone/>
+            </a:pPr>
+            <a:r>
+              <a:rPr lang="en-US" sz="1600" b="1" dirty="0">
+                <a:solidFill>
+                  <a:srgbClr val="EAEAEA"/>
+                </a:solidFill>
+                <a:latin typeface="Helvetica Neue" pitchFamily="34" charset="0"/>
+                <a:ea typeface="Helvetica Neue" pitchFamily="34" charset="-122"/>
+                <a:cs typeface="Helvetica Neue" pitchFamily="34" charset="-120"/>
+              </a:rPr>
+              <a:t>Aged novelty</a:t>
+            </a:r>
+            <a:endParaRPr lang="en-US" sz="1600" dirty="0"/>
+          </a:p>
+        </p:txBody>
+      </p:sp>
+      <p:sp>
+        <p:nvSpPr>
+          <p:cNvPr id="25" name="Text 22"/>
+          <p:cNvSpPr/>
+          <p:nvPr/>
+        </p:nvSpPr>
+        <p:spPr>
+          <a:xfrm>
+            <a:off x="6172200" y="819150"/>
+            <a:ext cx="5619750" cy="171450"/>
+          </a:xfrm>
+          <a:prstGeom prst="rect">
+            <a:avLst/>
+          </a:prstGeom>
+          <a:noFill/>
+          <a:ln/>
+        </p:spPr>
+        <p:txBody>
+          <a:bodyPr wrap="square" lIns="0" tIns="0" rIns="0" bIns="0" rtlCol="0" anchor="t"/>
+          <a:lstStyle/>
+          <a:p>
+            <a:pPr algn="l" indent="0" marL="0">
+              <a:buNone/>
+            </a:pPr>
+            <a:r>
+              <a:rPr lang="en-US" sz="1100" b="1" dirty="0">
+                <a:solidFill>
+                  <a:srgbClr val="6C6C8A"/>
+                </a:solidFill>
+                <a:latin typeface="Helvetica Neue" pitchFamily="34" charset="0"/>
+                <a:ea typeface="Helvetica Neue" pitchFamily="34" charset="-122"/>
+                <a:cs typeface="Helvetica Neue" pitchFamily="34" charset="-120"/>
+              </a:rPr>
+              <a:t>ANNUAL IMPACT (ILLUSTRATIVE)</a:t>
+            </a:r>
+            <a:endParaRPr lang="en-US" sz="1100" dirty="0"/>
+          </a:p>
+        </p:txBody>
+      </p:sp>
+      <p:sp>
+        <p:nvSpPr>
+          <p:cNvPr id="26" name="Shape 23"/>
+          <p:cNvSpPr/>
+          <p:nvPr/>
+        </p:nvSpPr>
+        <p:spPr>
+          <a:xfrm>
+            <a:off x="6172200" y="2247900"/>
+            <a:ext cx="1714500" cy="2857500"/>
+          </a:xfrm>
+          <a:prstGeom prst="roundRect">
+            <a:avLst>
+              <a:gd name="adj" fmla="val 5333"/>
+            </a:avLst>
+          </a:prstGeom>
+          <a:solidFill>
+            <a:srgbClr val="2B2B4A"/>
+          </a:solidFill>
+          <a:ln w="12700">
+            <a:solidFill>
+              <a:srgbClr val="2B2B4A"/>
+            </a:solidFill>
+            <a:prstDash val="solid"/>
+          </a:ln>
+        </p:spPr>
+      </p:sp>
+      <p:sp>
+        <p:nvSpPr>
+          <p:cNvPr id="27" name="Shape 24"/>
+          <p:cNvSpPr/>
+          <p:nvPr/>
+        </p:nvSpPr>
+        <p:spPr>
+          <a:xfrm>
+            <a:off x="6172200" y="2247900"/>
+            <a:ext cx="1714500" cy="76200"/>
+          </a:xfrm>
+          <a:prstGeom prst="rect">
+            <a:avLst/>
           </a:prstGeom>
           <a:solidFill>
             <a:srgbClr val="4E79A7"/>
@@ -5260,38 +5075,38 @@
       </p:sp>
       <p:sp>
         <p:nvSpPr>
-          <p:cNvPr id="16" name="Text 14"/>
-          <p:cNvSpPr/>
-          <p:nvPr/>
-        </p:nvSpPr>
-        <p:spPr>
-          <a:xfrm>
-            <a:off x="3371850" y="2581275"/>
-            <a:ext cx="990600" cy="171450"/>
-          </a:xfrm>
-          <a:prstGeom prst="rect">
-            <a:avLst/>
-          </a:prstGeom>
-          <a:noFill/>
-          <a:ln/>
-        </p:spPr>
-        <p:txBody>
-          <a:bodyPr wrap="square" lIns="0" tIns="0" rIns="0" bIns="0" rtlCol="0" anchor="t"/>
-          <a:lstStyle/>
-          <a:p>
-            <a:pPr algn="ctr" indent="0" marL="0">
+          <p:cNvPr id="28" name="Text 25"/>
+          <p:cNvSpPr/>
+          <p:nvPr/>
+        </p:nvSpPr>
+        <p:spPr>
+          <a:xfrm>
+            <a:off x="6362700" y="2495550"/>
+            <a:ext cx="1333500" cy="171450"/>
+          </a:xfrm>
+          <a:prstGeom prst="rect">
+            <a:avLst/>
+          </a:prstGeom>
+          <a:noFill/>
+          <a:ln/>
+        </p:spPr>
+        <p:txBody>
+          <a:bodyPr wrap="square" lIns="0" tIns="0" rIns="0" bIns="0" rtlCol="0" anchor="t"/>
+          <a:lstStyle/>
+          <a:p>
+            <a:pPr algn="l" indent="0" marL="0">
               <a:buNone/>
             </a:pPr>
             <a:r>
               <a:rPr lang="en-US" sz="1100" b="1" dirty="0">
                 <a:solidFill>
-                  <a:srgbClr val="FFFFFF"/>
-                </a:solidFill>
-                <a:latin typeface="Helvetica Neue" pitchFamily="34" charset="0"/>
-                <a:ea typeface="Helvetica Neue" pitchFamily="34" charset="-122"/>
-                <a:cs typeface="Helvetica Neue" pitchFamily="34" charset="-120"/>
-              </a:rPr>
-              <a:t>Core basics</a:t>
+                  <a:srgbClr val="6C6C8A"/>
+                </a:solidFill>
+                <a:latin typeface="Helvetica Neue" pitchFamily="34" charset="0"/>
+                <a:ea typeface="Helvetica Neue" pitchFamily="34" charset="-122"/>
+                <a:cs typeface="Helvetica Neue" pitchFamily="34" charset="-120"/>
+              </a:rPr>
+              <a:t>MARGIN RECOVERY</a:t>
             </a:r>
             <a:endParaRPr lang="en-US" sz="1100" dirty="0"/>
           </a:p>
@@ -5299,19 +5114,122 @@
       </p:sp>
       <p:sp>
         <p:nvSpPr>
-          <p:cNvPr id="17" name="Shape 15"/>
-          <p:cNvSpPr/>
-          <p:nvPr/>
-        </p:nvSpPr>
-        <p:spPr>
-          <a:xfrm>
-            <a:off x="8324850" y="2524125"/>
-            <a:ext cx="1143000" cy="285750"/>
+          <p:cNvPr id="29" name="Text 26"/>
+          <p:cNvSpPr/>
+          <p:nvPr/>
+        </p:nvSpPr>
+        <p:spPr>
+          <a:xfrm>
+            <a:off x="6362700" y="2895600"/>
+            <a:ext cx="1333500" cy="1524000"/>
+          </a:xfrm>
+          <a:prstGeom prst="rect">
+            <a:avLst/>
+          </a:prstGeom>
+          <a:noFill/>
+          <a:ln/>
+        </p:spPr>
+        <p:txBody>
+          <a:bodyPr wrap="none" lIns="0" tIns="0" rIns="0" bIns="0" rtlCol="0" anchor="ctr"/>
+          <a:lstStyle/>
+          <a:p>
+            <a:pPr algn="l" indent="0" marL="0">
+              <a:buNone/>
+            </a:pPr>
+            <a:r>
+              <a:rPr lang="en-US" sz="3000" b="1" dirty="0">
+                <a:solidFill>
+                  <a:srgbClr val="4E79A7"/>
+                </a:solidFill>
+                <a:latin typeface="Helvetica Neue" pitchFamily="34" charset="0"/>
+                <a:ea typeface="Helvetica Neue" pitchFamily="34" charset="-122"/>
+                <a:cs typeface="Helvetica Neue" pitchFamily="34" charset="-120"/>
+              </a:rPr>
+              <a:t>+$18–28M</a:t>
+            </a:r>
+            <a:endParaRPr lang="en-US" sz="3000" dirty="0"/>
+          </a:p>
+        </p:txBody>
+      </p:sp>
+      <p:sp>
+        <p:nvSpPr>
+          <p:cNvPr id="30" name="Text 27"/>
+          <p:cNvSpPr/>
+          <p:nvPr/>
+        </p:nvSpPr>
+        <p:spPr>
+          <a:xfrm>
+            <a:off x="6362700" y="4552950"/>
+            <a:ext cx="1333500" cy="381000"/>
+          </a:xfrm>
+          <a:prstGeom prst="rect">
+            <a:avLst/>
+          </a:prstGeom>
+          <a:noFill/>
+          <a:ln/>
+        </p:spPr>
+        <p:txBody>
+          <a:bodyPr wrap="square" lIns="0" tIns="0" rIns="0" bIns="0" rtlCol="0" anchor="t"/>
+          <a:lstStyle/>
+          <a:p>
+            <a:pPr algn="l" indent="0" marL="0">
+              <a:buNone/>
+            </a:pPr>
+            <a:r>
+              <a:rPr lang="en-US" sz="1300" dirty="0">
+                <a:solidFill>
+                  <a:srgbClr val="6C6C8A"/>
+                </a:solidFill>
+                <a:latin typeface="Helvetica Neue" pitchFamily="34" charset="0"/>
+                <a:ea typeface="Helvetica Neue" pitchFamily="34" charset="-122"/>
+                <a:cs typeface="Helvetica Neue" pitchFamily="34" charset="-120"/>
+              </a:rPr>
+              <a:t>Gross profit</a:t>
+            </a:r>
+            <a:endParaRPr lang="en-US" sz="1300" dirty="0"/>
+          </a:p>
+        </p:txBody>
+      </p:sp>
+      <p:sp>
+        <p:nvSpPr>
+          <p:cNvPr id="31" name="Shape 28"/>
+          <p:cNvSpPr/>
+          <p:nvPr/>
+        </p:nvSpPr>
+        <p:spPr>
+          <a:xfrm>
+            <a:off x="8115300" y="2247900"/>
+            <a:ext cx="1714500" cy="2857500"/>
           </a:xfrm>
           <a:prstGeom prst="roundRect">
             <a:avLst>
-              <a:gd name="adj" fmla="val 32000"/>
+              <a:gd name="adj" fmla="val 5333"/>
             </a:avLst>
+          </a:prstGeom>
+          <a:solidFill>
+            <a:srgbClr val="2B2B4A"/>
+          </a:solidFill>
+          <a:ln w="12700">
+            <a:solidFill>
+              <a:srgbClr val="2B2B4A"/>
+            </a:solidFill>
+            <a:prstDash val="solid"/>
+          </a:ln>
+        </p:spPr>
+      </p:sp>
+      <p:sp>
+        <p:nvSpPr>
+          <p:cNvPr id="32" name="Shape 29"/>
+          <p:cNvSpPr/>
+          <p:nvPr/>
+        </p:nvSpPr>
+        <p:spPr>
+          <a:xfrm>
+            <a:off x="8115300" y="2247900"/>
+            <a:ext cx="1714500" cy="76200"/>
+          </a:xfrm>
+          <a:prstGeom prst="rect">
+            <a:avLst/>
           </a:prstGeom>
           <a:solidFill>
             <a:srgbClr val="F28E2B"/>
@@ -5326,38 +5244,38 @@
       </p:sp>
       <p:sp>
         <p:nvSpPr>
-          <p:cNvPr id="18" name="Text 16"/>
-          <p:cNvSpPr/>
-          <p:nvPr/>
-        </p:nvSpPr>
-        <p:spPr>
-          <a:xfrm>
-            <a:off x="8401050" y="2581275"/>
-            <a:ext cx="990600" cy="171450"/>
-          </a:xfrm>
-          <a:prstGeom prst="rect">
-            <a:avLst/>
-          </a:prstGeom>
-          <a:noFill/>
-          <a:ln/>
-        </p:spPr>
-        <p:txBody>
-          <a:bodyPr wrap="square" lIns="0" tIns="0" rIns="0" bIns="0" rtlCol="0" anchor="t"/>
-          <a:lstStyle/>
-          <a:p>
-            <a:pPr algn="ctr" indent="0" marL="0">
+          <p:cNvPr id="33" name="Text 30"/>
+          <p:cNvSpPr/>
+          <p:nvPr/>
+        </p:nvSpPr>
+        <p:spPr>
+          <a:xfrm>
+            <a:off x="8305800" y="2495550"/>
+            <a:ext cx="1333500" cy="171450"/>
+          </a:xfrm>
+          <a:prstGeom prst="rect">
+            <a:avLst/>
+          </a:prstGeom>
+          <a:noFill/>
+          <a:ln/>
+        </p:spPr>
+        <p:txBody>
+          <a:bodyPr wrap="square" lIns="0" tIns="0" rIns="0" bIns="0" rtlCol="0" anchor="t"/>
+          <a:lstStyle/>
+          <a:p>
+            <a:pPr algn="l" indent="0" marL="0">
               <a:buNone/>
             </a:pPr>
             <a:r>
               <a:rPr lang="en-US" sz="1100" b="1" dirty="0">
                 <a:solidFill>
-                  <a:srgbClr val="FFFFFF"/>
-                </a:solidFill>
-                <a:latin typeface="Helvetica Neue" pitchFamily="34" charset="0"/>
-                <a:ea typeface="Helvetica Neue" pitchFamily="34" charset="-122"/>
-                <a:cs typeface="Helvetica Neue" pitchFamily="34" charset="-120"/>
-              </a:rPr>
-              <a:t>Seasonal fashion</a:t>
+                  <a:srgbClr val="6C6C8A"/>
+                </a:solidFill>
+                <a:latin typeface="Helvetica Neue" pitchFamily="34" charset="0"/>
+                <a:ea typeface="Helvetica Neue" pitchFamily="34" charset="-122"/>
+                <a:cs typeface="Helvetica Neue" pitchFamily="34" charset="-120"/>
+              </a:rPr>
+              <a:t>FULL-PRICE MIX</a:t>
             </a:r>
             <a:endParaRPr lang="en-US" sz="1100" dirty="0"/>
           </a:p>
@@ -5365,19 +5283,122 @@
       </p:sp>
       <p:sp>
         <p:nvSpPr>
-          <p:cNvPr id="19" name="Shape 17"/>
-          <p:cNvSpPr/>
-          <p:nvPr/>
-        </p:nvSpPr>
-        <p:spPr>
-          <a:xfrm>
-            <a:off x="3295650" y="4581525"/>
-            <a:ext cx="1143000" cy="285750"/>
+          <p:cNvPr id="34" name="Text 31"/>
+          <p:cNvSpPr/>
+          <p:nvPr/>
+        </p:nvSpPr>
+        <p:spPr>
+          <a:xfrm>
+            <a:off x="8305800" y="2895600"/>
+            <a:ext cx="1333500" cy="1524000"/>
+          </a:xfrm>
+          <a:prstGeom prst="rect">
+            <a:avLst/>
+          </a:prstGeom>
+          <a:noFill/>
+          <a:ln/>
+        </p:spPr>
+        <p:txBody>
+          <a:bodyPr wrap="none" lIns="0" tIns="0" rIns="0" bIns="0" rtlCol="0" anchor="ctr"/>
+          <a:lstStyle/>
+          <a:p>
+            <a:pPr algn="l" indent="0" marL="0">
+              <a:buNone/>
+            </a:pPr>
+            <a:r>
+              <a:rPr lang="en-US" sz="3000" b="1" dirty="0">
+                <a:solidFill>
+                  <a:srgbClr val="F28E2B"/>
+                </a:solidFill>
+                <a:latin typeface="Helvetica Neue" pitchFamily="34" charset="0"/>
+                <a:ea typeface="Helvetica Neue" pitchFamily="34" charset="-122"/>
+                <a:cs typeface="Helvetica Neue" pitchFamily="34" charset="-120"/>
+              </a:rPr>
+              <a:t>+4–6 pts</a:t>
+            </a:r>
+            <a:endParaRPr lang="en-US" sz="3000" dirty="0"/>
+          </a:p>
+        </p:txBody>
+      </p:sp>
+      <p:sp>
+        <p:nvSpPr>
+          <p:cNvPr id="35" name="Text 32"/>
+          <p:cNvSpPr/>
+          <p:nvPr/>
+        </p:nvSpPr>
+        <p:spPr>
+          <a:xfrm>
+            <a:off x="8305800" y="4552950"/>
+            <a:ext cx="1333500" cy="381000"/>
+          </a:xfrm>
+          <a:prstGeom prst="rect">
+            <a:avLst/>
+          </a:prstGeom>
+          <a:noFill/>
+          <a:ln/>
+        </p:spPr>
+        <p:txBody>
+          <a:bodyPr wrap="square" lIns="0" tIns="0" rIns="0" bIns="0" rtlCol="0" anchor="t"/>
+          <a:lstStyle/>
+          <a:p>
+            <a:pPr algn="l" indent="0" marL="0">
+              <a:buNone/>
+            </a:pPr>
+            <a:r>
+              <a:rPr lang="en-US" sz="1300" dirty="0">
+                <a:solidFill>
+                  <a:srgbClr val="6C6C8A"/>
+                </a:solidFill>
+                <a:latin typeface="Helvetica Neue" pitchFamily="34" charset="0"/>
+                <a:ea typeface="Helvetica Neue" pitchFamily="34" charset="-122"/>
+                <a:cs typeface="Helvetica Neue" pitchFamily="34" charset="-120"/>
+              </a:rPr>
+              <a:t>Within 12 months</a:t>
+            </a:r>
+            <a:endParaRPr lang="en-US" sz="1300" dirty="0"/>
+          </a:p>
+        </p:txBody>
+      </p:sp>
+      <p:sp>
+        <p:nvSpPr>
+          <p:cNvPr id="36" name="Shape 33"/>
+          <p:cNvSpPr/>
+          <p:nvPr/>
+        </p:nvSpPr>
+        <p:spPr>
+          <a:xfrm>
+            <a:off x="10058400" y="2247900"/>
+            <a:ext cx="1714500" cy="2857500"/>
           </a:xfrm>
           <a:prstGeom prst="roundRect">
             <a:avLst>
-              <a:gd name="adj" fmla="val 32000"/>
+              <a:gd name="adj" fmla="val 5333"/>
             </a:avLst>
+          </a:prstGeom>
+          <a:solidFill>
+            <a:srgbClr val="2B2B4A"/>
+          </a:solidFill>
+          <a:ln w="12700">
+            <a:solidFill>
+              <a:srgbClr val="2B2B4A"/>
+            </a:solidFill>
+            <a:prstDash val="solid"/>
+          </a:ln>
+        </p:spPr>
+      </p:sp>
+      <p:sp>
+        <p:nvSpPr>
+          <p:cNvPr id="37" name="Shape 34"/>
+          <p:cNvSpPr/>
+          <p:nvPr/>
+        </p:nvSpPr>
+        <p:spPr>
+          <a:xfrm>
+            <a:off x="10058400" y="2247900"/>
+            <a:ext cx="1714500" cy="76200"/>
+          </a:xfrm>
+          <a:prstGeom prst="rect">
+            <a:avLst/>
           </a:prstGeom>
           <a:solidFill>
             <a:srgbClr val="E15759"/>
@@ -5392,38 +5413,38 @@
       </p:sp>
       <p:sp>
         <p:nvSpPr>
-          <p:cNvPr id="20" name="Text 18"/>
-          <p:cNvSpPr/>
-          <p:nvPr/>
-        </p:nvSpPr>
-        <p:spPr>
-          <a:xfrm>
-            <a:off x="3371850" y="4638675"/>
-            <a:ext cx="990600" cy="171450"/>
-          </a:xfrm>
-          <a:prstGeom prst="rect">
-            <a:avLst/>
-          </a:prstGeom>
-          <a:noFill/>
-          <a:ln/>
-        </p:spPr>
-        <p:txBody>
-          <a:bodyPr wrap="square" lIns="0" tIns="0" rIns="0" bIns="0" rtlCol="0" anchor="t"/>
-          <a:lstStyle/>
-          <a:p>
-            <a:pPr algn="ctr" indent="0" marL="0">
+          <p:cNvPr id="38" name="Text 35"/>
+          <p:cNvSpPr/>
+          <p:nvPr/>
+        </p:nvSpPr>
+        <p:spPr>
+          <a:xfrm>
+            <a:off x="10248900" y="2495550"/>
+            <a:ext cx="1333500" cy="171450"/>
+          </a:xfrm>
+          <a:prstGeom prst="rect">
+            <a:avLst/>
+          </a:prstGeom>
+          <a:noFill/>
+          <a:ln/>
+        </p:spPr>
+        <p:txBody>
+          <a:bodyPr wrap="square" lIns="0" tIns="0" rIns="0" bIns="0" rtlCol="0" anchor="t"/>
+          <a:lstStyle/>
+          <a:p>
+            <a:pPr algn="l" indent="0" marL="0">
               <a:buNone/>
             </a:pPr>
             <a:r>
               <a:rPr lang="en-US" sz="1100" b="1" dirty="0">
                 <a:solidFill>
-                  <a:srgbClr val="FFFFFF"/>
-                </a:solidFill>
-                <a:latin typeface="Helvetica Neue" pitchFamily="34" charset="0"/>
-                <a:ea typeface="Helvetica Neue" pitchFamily="34" charset="-122"/>
-                <a:cs typeface="Helvetica Neue" pitchFamily="34" charset="-120"/>
-              </a:rPr>
-              <a:t>Aged novelty</a:t>
+                  <a:srgbClr val="6C6C8A"/>
+                </a:solidFill>
+                <a:latin typeface="Helvetica Neue" pitchFamily="34" charset="0"/>
+                <a:ea typeface="Helvetica Neue" pitchFamily="34" charset="-122"/>
+                <a:cs typeface="Helvetica Neue" pitchFamily="34" charset="-120"/>
+              </a:rPr>
+              <a:t>AGED INVENTORY</a:t>
             </a:r>
             <a:endParaRPr lang="en-US" sz="1100" dirty="0"/>
           </a:p>
@@ -5431,67 +5452,79 @@
       </p:sp>
       <p:sp>
         <p:nvSpPr>
-          <p:cNvPr id="21" name="Shape 19"/>
-          <p:cNvSpPr/>
-          <p:nvPr/>
-        </p:nvSpPr>
-        <p:spPr>
-          <a:xfrm>
-            <a:off x="8324850" y="4581525"/>
-            <a:ext cx="1143000" cy="285750"/>
-          </a:xfrm>
-          <a:prstGeom prst="roundRect">
-            <a:avLst>
-              <a:gd name="adj" fmla="val 32000"/>
-            </a:avLst>
-          </a:prstGeom>
-          <a:solidFill>
-            <a:srgbClr val="76B7B2"/>
-          </a:solidFill>
-          <a:ln w="12700">
-            <a:solidFill>
-              <a:srgbClr val="76B7B2"/>
-            </a:solidFill>
-            <a:prstDash val="solid"/>
-          </a:ln>
-        </p:spPr>
-      </p:sp>
-      <p:sp>
-        <p:nvSpPr>
-          <p:cNvPr id="22" name="Text 20"/>
-          <p:cNvSpPr/>
-          <p:nvPr/>
-        </p:nvSpPr>
-        <p:spPr>
-          <a:xfrm>
-            <a:off x="8401050" y="4638675"/>
-            <a:ext cx="990600" cy="171450"/>
-          </a:xfrm>
-          <a:prstGeom prst="rect">
-            <a:avLst/>
-          </a:prstGeom>
-          <a:noFill/>
-          <a:ln/>
-        </p:spPr>
-        <p:txBody>
-          <a:bodyPr wrap="square" lIns="0" tIns="0" rIns="0" bIns="0" rtlCol="0" anchor="t"/>
-          <a:lstStyle/>
-          <a:p>
-            <a:pPr algn="ctr" indent="0" marL="0">
-              <a:buNone/>
-            </a:pPr>
-            <a:r>
-              <a:rPr lang="en-US" sz="1100" b="1" dirty="0">
-                <a:solidFill>
-                  <a:srgbClr val="FFFFFF"/>
-                </a:solidFill>
-                <a:latin typeface="Helvetica Neue" pitchFamily="34" charset="0"/>
-                <a:ea typeface="Helvetica Neue" pitchFamily="34" charset="-122"/>
-                <a:cs typeface="Helvetica Neue" pitchFamily="34" charset="-120"/>
-              </a:rPr>
-              <a:t>Test capsules</a:t>
-            </a:r>
-            <a:endParaRPr lang="en-US" sz="1100" dirty="0"/>
+          <p:cNvPr id="39" name="Text 36"/>
+          <p:cNvSpPr/>
+          <p:nvPr/>
+        </p:nvSpPr>
+        <p:spPr>
+          <a:xfrm>
+            <a:off x="10248900" y="2895600"/>
+            <a:ext cx="1333500" cy="1524000"/>
+          </a:xfrm>
+          <a:prstGeom prst="rect">
+            <a:avLst/>
+          </a:prstGeom>
+          <a:noFill/>
+          <a:ln/>
+        </p:spPr>
+        <p:txBody>
+          <a:bodyPr wrap="none" lIns="0" tIns="0" rIns="0" bIns="0" rtlCol="0" anchor="ctr"/>
+          <a:lstStyle/>
+          <a:p>
+            <a:pPr algn="l" indent="0" marL="0">
+              <a:buNone/>
+            </a:pPr>
+            <a:r>
+              <a:rPr lang="en-US" sz="3400" b="1" dirty="0">
+                <a:solidFill>
+                  <a:srgbClr val="E15759"/>
+                </a:solidFill>
+                <a:latin typeface="Helvetica Neue" pitchFamily="34" charset="0"/>
+                <a:ea typeface="Helvetica Neue" pitchFamily="34" charset="-122"/>
+                <a:cs typeface="Helvetica Neue" pitchFamily="34" charset="-120"/>
+              </a:rPr>
+              <a:t>−15–25%</a:t>
+            </a:r>
+            <a:endParaRPr lang="en-US" sz="3400" dirty="0"/>
+          </a:p>
+        </p:txBody>
+      </p:sp>
+      <p:sp>
+        <p:nvSpPr>
+          <p:cNvPr id="40" name="Text 37"/>
+          <p:cNvSpPr/>
+          <p:nvPr/>
+        </p:nvSpPr>
+        <p:spPr>
+          <a:xfrm>
+            <a:off x="10248900" y="4552950"/>
+            <a:ext cx="1333500" cy="381000"/>
+          </a:xfrm>
+          <a:prstGeom prst="rect">
+            <a:avLst/>
+          </a:prstGeom>
+          <a:noFill/>
+          <a:ln/>
+        </p:spPr>
+        <p:txBody>
+          <a:bodyPr wrap="square" lIns="0" tIns="0" rIns="0" bIns="0" rtlCol="0" anchor="t"/>
+          <a:lstStyle/>
+          <a:p>
+            <a:pPr algn="l" indent="0" marL="0">
+              <a:buNone/>
+            </a:pPr>
+            <a:r>
+              <a:rPr lang="en-US" sz="1300" dirty="0">
+                <a:solidFill>
+                  <a:srgbClr val="6C6C8A"/>
+                </a:solidFill>
+                <a:latin typeface="Helvetica Neue" pitchFamily="34" charset="0"/>
+                <a:ea typeface="Helvetica Neue" pitchFamily="34" charset="-122"/>
+                <a:cs typeface="Helvetica Neue" pitchFamily="34" charset="-120"/>
+              </a:rPr>
+              <a:t>Weeks of supply</a:t>
+            </a:r>
+            <a:endParaRPr lang="en-US" sz="1300" dirty="0"/>
           </a:p>
         </p:txBody>
       </p:sp>
@@ -5527,32 +5560,62 @@
           <a:chExt cx="0" cy="0"/>
         </a:xfrm>
       </p:grpSpPr>
-      <p:sp>
-        <p:nvSpPr>
-          <p:cNvPr id="2" name="Text 0"/>
-          <p:cNvSpPr/>
-          <p:nvPr/>
-        </p:nvSpPr>
-        <p:spPr>
-          <a:xfrm>
-            <a:off x="400050" y="304800"/>
-            <a:ext cx="11049000" cy="533400"/>
-          </a:xfrm>
-          <a:prstGeom prst="rect">
-            <a:avLst/>
-          </a:prstGeom>
-          <a:noFill/>
-          <a:ln/>
-        </p:spPr>
-        <p:txBody>
-          <a:bodyPr wrap="square" lIns="0" tIns="0" rIns="0" bIns="0" rtlCol="0" anchor="t"/>
-          <a:lstStyle/>
-          <a:p>
-            <a:pPr algn="l" indent="0" marL="0">
-              <a:buNone/>
-            </a:pPr>
-            <a:r>
-              <a:rPr lang="en-US" sz="3200" b="1" dirty="0">
+      <p:pic>
+        <p:nvPicPr>
+          <p:cNvPr id="2" name="Image 0" descr="/Users/dpadmana/projects/ppt-gen/themes/scientific/logo.svg">    </p:cNvPr>
+          <p:cNvPicPr>
+            <a:picLocks noChangeAspect="1"/>
+          </p:cNvPicPr>
+          <p:nvPr/>
+        </p:nvPicPr>
+        <p:blipFill>
+          <a:blip r:embed="rId1">
+            <a:extLst>
+              <a:ext uri="{96DAC541-7B7A-43D3-8B79-37D633B846F1}">
+                <asvg:svgBlip xmlns:asvg="http://schemas.microsoft.com/office/drawing/2016/SVG/main" r:embed="rId2"/>
+              </a:ext>
+            </a:extLst>
+          </a:blip>
+          <a:stretch>
+            <a:fillRect/>
+          </a:stretch>
+        </p:blipFill>
+        <p:spPr>
+          <a:xfrm>
+            <a:off x="11430000" y="266700"/>
+            <a:ext cx="419100" cy="419100"/>
+          </a:xfrm>
+          <a:prstGeom prst="rect">
+            <a:avLst/>
+          </a:prstGeom>
+        </p:spPr>
+      </p:pic>
+      <p:sp>
+        <p:nvSpPr>
+          <p:cNvPr id="3" name="Text 0"/>
+          <p:cNvSpPr/>
+          <p:nvPr/>
+        </p:nvSpPr>
+        <p:spPr>
+          <a:xfrm>
+            <a:off x="400050" y="247650"/>
+            <a:ext cx="10839450" cy="381000"/>
+          </a:xfrm>
+          <a:prstGeom prst="rect">
+            <a:avLst/>
+          </a:prstGeom>
+          <a:noFill/>
+          <a:ln/>
+        </p:spPr>
+        <p:txBody>
+          <a:bodyPr wrap="square" lIns="0" tIns="0" rIns="0" bIns="0" rtlCol="0" anchor="t"/>
+          <a:lstStyle/>
+          <a:p>
+            <a:pPr algn="l" indent="0" marL="0">
+              <a:buNone/>
+            </a:pPr>
+            <a:r>
+              <a:rPr lang="en-US" sz="3000" b="1" dirty="0">
                 <a:solidFill>
                   <a:srgbClr val="EAEAEA"/>
                 </a:solidFill>
@@ -5560,38 +5623,38 @@
                 <a:ea typeface="Helvetica Neue" pitchFamily="34" charset="-122"/>
                 <a:cs typeface="Helvetica Neue" pitchFamily="34" charset="-120"/>
               </a:rPr>
-              <a:t>Illustrative annual impact (US apparel mid-market)</a:t>
-            </a:r>
-            <a:endParaRPr lang="en-US" sz="3200" dirty="0"/>
-          </a:p>
-        </p:txBody>
-      </p:sp>
-      <p:sp>
-        <p:nvSpPr>
-          <p:cNvPr id="3" name="Text 1"/>
-          <p:cNvSpPr/>
-          <p:nvPr/>
-        </p:nvSpPr>
-        <p:spPr>
-          <a:xfrm>
-            <a:off x="400050" y="857250"/>
-            <a:ext cx="10477500" cy="381000"/>
-          </a:xfrm>
-          <a:prstGeom prst="rect">
-            <a:avLst/>
-          </a:prstGeom>
-          <a:noFill/>
-          <a:ln/>
-        </p:spPr>
-        <p:txBody>
-          <a:bodyPr wrap="square" lIns="0" tIns="0" rIns="0" bIns="0" rtlCol="0" anchor="t"/>
-          <a:lstStyle/>
-          <a:p>
-            <a:pPr algn="l" indent="0" marL="0">
-              <a:buNone/>
-            </a:pPr>
-            <a:r>
-              <a:rPr lang="en-US" sz="1600" dirty="0">
+              <a:t>Sequence the capability—not a one-off promo calendar</a:t>
+            </a:r>
+            <a:endParaRPr lang="en-US" sz="3000" dirty="0"/>
+          </a:p>
+        </p:txBody>
+      </p:sp>
+      <p:sp>
+        <p:nvSpPr>
+          <p:cNvPr id="4" name="Text 1"/>
+          <p:cNvSpPr/>
+          <p:nvPr/>
+        </p:nvSpPr>
+        <p:spPr>
+          <a:xfrm>
+            <a:off x="400050" y="6457950"/>
+            <a:ext cx="4953000" cy="171450"/>
+          </a:xfrm>
+          <a:prstGeom prst="rect">
+            <a:avLst/>
+          </a:prstGeom>
+          <a:noFill/>
+          <a:ln/>
+        </p:spPr>
+        <p:txBody>
+          <a:bodyPr wrap="square" lIns="0" tIns="0" rIns="0" bIns="0" rtlCol="0" anchor="t"/>
+          <a:lstStyle/>
+          <a:p>
+            <a:pPr algn="l" indent="0" marL="0">
+              <a:buNone/>
+            </a:pPr>
+            <a:r>
+              <a:rPr lang="en-US" sz="1100" b="1" dirty="0">
                 <a:solidFill>
                   <a:srgbClr val="6C6C8A"/>
                 </a:solidFill>
@@ -5599,45 +5662,6 @@
                 <a:ea typeface="Helvetica Neue" pitchFamily="34" charset="-122"/>
                 <a:cs typeface="Helvetica Neue" pitchFamily="34" charset="-120"/>
               </a:rPr>
-              <a:t>Directional, based on $800M revenue and current mix</a:t>
-            </a:r>
-            <a:endParaRPr lang="en-US" sz="1600" dirty="0"/>
-          </a:p>
-        </p:txBody>
-      </p:sp>
-      <p:sp>
-        <p:nvSpPr>
-          <p:cNvPr id="4" name="Text 2"/>
-          <p:cNvSpPr/>
-          <p:nvPr/>
-        </p:nvSpPr>
-        <p:spPr>
-          <a:xfrm>
-            <a:off x="400050" y="6457950"/>
-            <a:ext cx="8572500" cy="171450"/>
-          </a:xfrm>
-          <a:prstGeom prst="rect">
-            <a:avLst/>
-          </a:prstGeom>
-          <a:noFill/>
-          <a:ln/>
-        </p:spPr>
-        <p:txBody>
-          <a:bodyPr wrap="square" lIns="0" tIns="0" rIns="0" bIns="0" rtlCol="0" anchor="t"/>
-          <a:lstStyle/>
-          <a:p>
-            <a:pPr algn="l" indent="0" marL="0">
-              <a:buNone/>
-            </a:pPr>
-            <a:r>
-              <a:rPr lang="en-US" sz="1100" b="1" dirty="0">
-                <a:solidFill>
-                  <a:srgbClr val="6C6C8A"/>
-                </a:solidFill>
-                <a:latin typeface="Helvetica Neue" pitchFamily="34" charset="0"/>
-                <a:ea typeface="Helvetica Neue" pitchFamily="34" charset="-122"/>
-                <a:cs typeface="Helvetica Neue" pitchFamily="34" charset="-120"/>
-              </a:rPr>
               <a:t>APPAREL  ·  MARKDOWN STRATEGY</a:t>
             </a:r>
             <a:endParaRPr lang="en-US" sz="1100" dirty="0"/>
@@ -5646,7 +5670,7 @@
       </p:sp>
       <p:sp>
         <p:nvSpPr>
-          <p:cNvPr id="5" name="Text 3"/>
+          <p:cNvPr id="5" name="Text 2"/>
           <p:cNvSpPr/>
           <p:nvPr/>
         </p:nvSpPr>
@@ -5685,18 +5709,18 @@
       </p:sp>
       <p:sp>
         <p:nvSpPr>
-          <p:cNvPr id="6" name="Shape 4"/>
-          <p:cNvSpPr/>
-          <p:nvPr/>
-        </p:nvSpPr>
-        <p:spPr>
-          <a:xfrm>
-            <a:off x="400050" y="2457450"/>
-            <a:ext cx="2676525" cy="2857500"/>
+          <p:cNvPr id="6" name="Shape 3"/>
+          <p:cNvSpPr/>
+          <p:nvPr/>
+        </p:nvSpPr>
+        <p:spPr>
+          <a:xfrm>
+            <a:off x="400050" y="781050"/>
+            <a:ext cx="3667125" cy="5086350"/>
           </a:xfrm>
           <a:prstGeom prst="roundRect">
             <a:avLst>
-              <a:gd name="adj" fmla="val 3416"/>
+              <a:gd name="adj" fmla="val 2494"/>
             </a:avLst>
           </a:prstGeom>
           <a:solidFill>
@@ -5712,14 +5736,381 @@
       </p:sp>
       <p:sp>
         <p:nvSpPr>
-          <p:cNvPr id="7" name="Shape 5"/>
-          <p:cNvSpPr/>
-          <p:nvPr/>
-        </p:nvSpPr>
-        <p:spPr>
-          <a:xfrm>
-            <a:off x="400050" y="2457450"/>
-            <a:ext cx="2676525" cy="76200"/>
+          <p:cNvPr id="7" name="Shape 4"/>
+          <p:cNvSpPr/>
+          <p:nvPr/>
+        </p:nvSpPr>
+        <p:spPr>
+          <a:xfrm>
+            <a:off x="400050" y="781050"/>
+            <a:ext cx="57150" cy="5086350"/>
+          </a:xfrm>
+          <a:prstGeom prst="rect">
+            <a:avLst/>
+          </a:prstGeom>
+          <a:solidFill>
+            <a:srgbClr val="E94560"/>
+          </a:solidFill>
+          <a:ln w="12700">
+            <a:solidFill>
+              <a:srgbClr val="E94560"/>
+            </a:solidFill>
+            <a:prstDash val="solid"/>
+          </a:ln>
+        </p:spPr>
+      </p:sp>
+      <p:sp>
+        <p:nvSpPr>
+          <p:cNvPr id="8" name="Text 5"/>
+          <p:cNvSpPr/>
+          <p:nvPr/>
+        </p:nvSpPr>
+        <p:spPr>
+          <a:xfrm>
+            <a:off x="571500" y="952500"/>
+            <a:ext cx="3324225" cy="171450"/>
+          </a:xfrm>
+          <a:prstGeom prst="rect">
+            <a:avLst/>
+          </a:prstGeom>
+          <a:noFill/>
+          <a:ln/>
+        </p:spPr>
+        <p:txBody>
+          <a:bodyPr wrap="square" lIns="0" tIns="0" rIns="0" bIns="0" rtlCol="0" anchor="t"/>
+          <a:lstStyle/>
+          <a:p>
+            <a:pPr algn="l" indent="0" marL="0">
+              <a:buNone/>
+            </a:pPr>
+            <a:r>
+              <a:rPr lang="en-US" sz="1100" b="1" dirty="0">
+                <a:solidFill>
+                  <a:srgbClr val="E94560"/>
+                </a:solidFill>
+                <a:latin typeface="Helvetica Neue" pitchFamily="34" charset="0"/>
+                <a:ea typeface="Helvetica Neue" pitchFamily="34" charset="-122"/>
+                <a:cs typeface="Helvetica Neue" pitchFamily="34" charset="-120"/>
+              </a:rPr>
+              <a:t>0–90 DAYS</a:t>
+            </a:r>
+            <a:endParaRPr lang="en-US" sz="1100" dirty="0"/>
+          </a:p>
+        </p:txBody>
+      </p:sp>
+      <p:sp>
+        <p:nvSpPr>
+          <p:cNvPr id="9" name="Text 6"/>
+          <p:cNvSpPr/>
+          <p:nvPr/>
+        </p:nvSpPr>
+        <p:spPr>
+          <a:xfrm>
+            <a:off x="571500" y="1200150"/>
+            <a:ext cx="3324225" cy="381000"/>
+          </a:xfrm>
+          <a:prstGeom prst="rect">
+            <a:avLst/>
+          </a:prstGeom>
+          <a:noFill/>
+          <a:ln/>
+        </p:spPr>
+        <p:txBody>
+          <a:bodyPr wrap="square" lIns="0" tIns="0" rIns="0" bIns="0" rtlCol="0" anchor="t"/>
+          <a:lstStyle/>
+          <a:p>
+            <a:pPr algn="l" indent="0" marL="0">
+              <a:buNone/>
+            </a:pPr>
+            <a:r>
+              <a:rPr lang="en-US" sz="1800" b="1" dirty="0">
+                <a:solidFill>
+                  <a:srgbClr val="EAEAEA"/>
+                </a:solidFill>
+                <a:latin typeface="Helvetica Neue" pitchFamily="34" charset="0"/>
+                <a:ea typeface="Helvetica Neue" pitchFamily="34" charset="-122"/>
+                <a:cs typeface="Helvetica Neue" pitchFamily="34" charset="-120"/>
+              </a:rPr>
+              <a:t>Diagnose &amp; pilot</a:t>
+            </a:r>
+            <a:endParaRPr lang="en-US" sz="1800" dirty="0"/>
+          </a:p>
+        </p:txBody>
+      </p:sp>
+      <p:sp>
+        <p:nvSpPr>
+          <p:cNvPr id="10" name="Text 7"/>
+          <p:cNvSpPr/>
+          <p:nvPr/>
+        </p:nvSpPr>
+        <p:spPr>
+          <a:xfrm>
+            <a:off x="571500" y="1619250"/>
+            <a:ext cx="3324225" cy="457200"/>
+          </a:xfrm>
+          <a:prstGeom prst="rect">
+            <a:avLst/>
+          </a:prstGeom>
+          <a:noFill/>
+          <a:ln/>
+        </p:spPr>
+        <p:txBody>
+          <a:bodyPr wrap="square" lIns="0" tIns="0" rIns="0" bIns="0" rtlCol="0" anchor="t"/>
+          <a:lstStyle/>
+          <a:p>
+            <a:pPr algn="l" indent="0" marL="0">
+              <a:buNone/>
+            </a:pPr>
+            <a:r>
+              <a:rPr lang="en-US" sz="1400" dirty="0">
+                <a:solidFill>
+                  <a:srgbClr val="6C6C8A"/>
+                </a:solidFill>
+                <a:latin typeface="Helvetica Neue" pitchFamily="34" charset="0"/>
+                <a:ea typeface="Helvetica Neue" pitchFamily="34" charset="-122"/>
+                <a:cs typeface="Helvetica Neue" pitchFamily="34" charset="-120"/>
+              </a:rPr>
+              <a:t>SKU risk scores + 2 categories</a:t>
+            </a:r>
+            <a:endParaRPr lang="en-US" sz="1400" dirty="0"/>
+          </a:p>
+        </p:txBody>
+      </p:sp>
+      <p:sp>
+        <p:nvSpPr>
+          <p:cNvPr id="11" name="Shape 8"/>
+          <p:cNvSpPr/>
+          <p:nvPr/>
+        </p:nvSpPr>
+        <p:spPr>
+          <a:xfrm>
+            <a:off x="571500" y="2200275"/>
+            <a:ext cx="66675" cy="66675"/>
+          </a:xfrm>
+          <a:prstGeom prst="roundRect">
+            <a:avLst>
+              <a:gd name="adj" fmla="val 137143"/>
+            </a:avLst>
+          </a:prstGeom>
+          <a:solidFill>
+            <a:srgbClr val="E94560"/>
+          </a:solidFill>
+          <a:ln w="12700">
+            <a:solidFill>
+              <a:srgbClr val="E94560"/>
+            </a:solidFill>
+            <a:prstDash val="solid"/>
+          </a:ln>
+        </p:spPr>
+      </p:sp>
+      <p:sp>
+        <p:nvSpPr>
+          <p:cNvPr id="12" name="Text 9"/>
+          <p:cNvSpPr/>
+          <p:nvPr/>
+        </p:nvSpPr>
+        <p:spPr>
+          <a:xfrm>
+            <a:off x="762000" y="2114550"/>
+            <a:ext cx="3133725" cy="342900"/>
+          </a:xfrm>
+          <a:prstGeom prst="rect">
+            <a:avLst/>
+          </a:prstGeom>
+          <a:noFill/>
+          <a:ln/>
+        </p:spPr>
+        <p:txBody>
+          <a:bodyPr wrap="square" lIns="0" tIns="0" rIns="0" bIns="0" rtlCol="0" anchor="t"/>
+          <a:lstStyle/>
+          <a:p>
+            <a:pPr algn="l" indent="0" marL="0">
+              <a:buNone/>
+            </a:pPr>
+            <a:r>
+              <a:rPr lang="en-US" sz="1500" dirty="0">
+                <a:solidFill>
+                  <a:srgbClr val="EAEAEA"/>
+                </a:solidFill>
+                <a:latin typeface="Helvetica Neue" pitchFamily="34" charset="0"/>
+                <a:ea typeface="Helvetica Neue" pitchFamily="34" charset="-122"/>
+                <a:cs typeface="Helvetica Neue" pitchFamily="34" charset="-120"/>
+              </a:rPr>
+              <a:t>Residual demand model MVP</a:t>
+            </a:r>
+            <a:endParaRPr lang="en-US" sz="1500" dirty="0"/>
+          </a:p>
+        </p:txBody>
+      </p:sp>
+      <p:sp>
+        <p:nvSpPr>
+          <p:cNvPr id="13" name="Shape 10"/>
+          <p:cNvSpPr/>
+          <p:nvPr/>
+        </p:nvSpPr>
+        <p:spPr>
+          <a:xfrm>
+            <a:off x="571500" y="2428875"/>
+            <a:ext cx="66675" cy="66675"/>
+          </a:xfrm>
+          <a:prstGeom prst="roundRect">
+            <a:avLst>
+              <a:gd name="adj" fmla="val 137143"/>
+            </a:avLst>
+          </a:prstGeom>
+          <a:solidFill>
+            <a:srgbClr val="E94560"/>
+          </a:solidFill>
+          <a:ln w="12700">
+            <a:solidFill>
+              <a:srgbClr val="E94560"/>
+            </a:solidFill>
+            <a:prstDash val="solid"/>
+          </a:ln>
+        </p:spPr>
+      </p:sp>
+      <p:sp>
+        <p:nvSpPr>
+          <p:cNvPr id="14" name="Text 11"/>
+          <p:cNvSpPr/>
+          <p:nvPr/>
+        </p:nvSpPr>
+        <p:spPr>
+          <a:xfrm>
+            <a:off x="762000" y="2343150"/>
+            <a:ext cx="3133725" cy="342900"/>
+          </a:xfrm>
+          <a:prstGeom prst="rect">
+            <a:avLst/>
+          </a:prstGeom>
+          <a:noFill/>
+          <a:ln/>
+        </p:spPr>
+        <p:txBody>
+          <a:bodyPr wrap="square" lIns="0" tIns="0" rIns="0" bIns="0" rtlCol="0" anchor="t"/>
+          <a:lstStyle/>
+          <a:p>
+            <a:pPr algn="l" indent="0" marL="0">
+              <a:buNone/>
+            </a:pPr>
+            <a:r>
+              <a:rPr lang="en-US" sz="1500" dirty="0">
+                <a:solidFill>
+                  <a:srgbClr val="EAEAEA"/>
+                </a:solidFill>
+                <a:latin typeface="Helvetica Neue" pitchFamily="34" charset="0"/>
+                <a:ea typeface="Helvetica Neue" pitchFamily="34" charset="-122"/>
+                <a:cs typeface="Helvetica Neue" pitchFamily="34" charset="-120"/>
+              </a:rPr>
+              <a:t>Markdown playbook v1</a:t>
+            </a:r>
+            <a:endParaRPr lang="en-US" sz="1500" dirty="0"/>
+          </a:p>
+        </p:txBody>
+      </p:sp>
+      <p:sp>
+        <p:nvSpPr>
+          <p:cNvPr id="15" name="Shape 12"/>
+          <p:cNvSpPr/>
+          <p:nvPr/>
+        </p:nvSpPr>
+        <p:spPr>
+          <a:xfrm>
+            <a:off x="571500" y="2657475"/>
+            <a:ext cx="66675" cy="66675"/>
+          </a:xfrm>
+          <a:prstGeom prst="roundRect">
+            <a:avLst>
+              <a:gd name="adj" fmla="val 137143"/>
+            </a:avLst>
+          </a:prstGeom>
+          <a:solidFill>
+            <a:srgbClr val="E94560"/>
+          </a:solidFill>
+          <a:ln w="12700">
+            <a:solidFill>
+              <a:srgbClr val="E94560"/>
+            </a:solidFill>
+            <a:prstDash val="solid"/>
+          </a:ln>
+        </p:spPr>
+      </p:sp>
+      <p:sp>
+        <p:nvSpPr>
+          <p:cNvPr id="16" name="Text 13"/>
+          <p:cNvSpPr/>
+          <p:nvPr/>
+        </p:nvSpPr>
+        <p:spPr>
+          <a:xfrm>
+            <a:off x="762000" y="2571750"/>
+            <a:ext cx="3133725" cy="342900"/>
+          </a:xfrm>
+          <a:prstGeom prst="rect">
+            <a:avLst/>
+          </a:prstGeom>
+          <a:noFill/>
+          <a:ln/>
+        </p:spPr>
+        <p:txBody>
+          <a:bodyPr wrap="square" lIns="0" tIns="0" rIns="0" bIns="0" rtlCol="0" anchor="t"/>
+          <a:lstStyle/>
+          <a:p>
+            <a:pPr algn="l" indent="0" marL="0">
+              <a:buNone/>
+            </a:pPr>
+            <a:r>
+              <a:rPr lang="en-US" sz="1500" dirty="0">
+                <a:solidFill>
+                  <a:srgbClr val="EAEAEA"/>
+                </a:solidFill>
+                <a:latin typeface="Helvetica Neue" pitchFamily="34" charset="0"/>
+                <a:ea typeface="Helvetica Neue" pitchFamily="34" charset="-122"/>
+                <a:cs typeface="Helvetica Neue" pitchFamily="34" charset="-120"/>
+              </a:rPr>
+              <a:t>Holdout in 40 doors</a:t>
+            </a:r>
+            <a:endParaRPr lang="en-US" sz="1500" dirty="0"/>
+          </a:p>
+        </p:txBody>
+      </p:sp>
+      <p:sp>
+        <p:nvSpPr>
+          <p:cNvPr id="17" name="Shape 14"/>
+          <p:cNvSpPr/>
+          <p:nvPr/>
+        </p:nvSpPr>
+        <p:spPr>
+          <a:xfrm>
+            <a:off x="4257675" y="781050"/>
+            <a:ext cx="3667125" cy="5086350"/>
+          </a:xfrm>
+          <a:prstGeom prst="roundRect">
+            <a:avLst>
+              <a:gd name="adj" fmla="val 2494"/>
+            </a:avLst>
+          </a:prstGeom>
+          <a:solidFill>
+            <a:srgbClr val="2B2B4A"/>
+          </a:solidFill>
+          <a:ln w="12700">
+            <a:solidFill>
+              <a:srgbClr val="2B2B4A"/>
+            </a:solidFill>
+            <a:prstDash val="solid"/>
+          </a:ln>
+        </p:spPr>
+      </p:sp>
+      <p:sp>
+        <p:nvSpPr>
+          <p:cNvPr id="18" name="Shape 15"/>
+          <p:cNvSpPr/>
+          <p:nvPr/>
+        </p:nvSpPr>
+        <p:spPr>
+          <a:xfrm>
+            <a:off x="4257675" y="781050"/>
+            <a:ext cx="57150" cy="5086350"/>
           </a:xfrm>
           <a:prstGeom prst="rect">
             <a:avLst/>
@@ -5737,14 +6128,14 @@
       </p:sp>
       <p:sp>
         <p:nvSpPr>
-          <p:cNvPr id="8" name="Text 6"/>
-          <p:cNvSpPr/>
-          <p:nvPr/>
-        </p:nvSpPr>
-        <p:spPr>
-          <a:xfrm>
-            <a:off x="590550" y="2705100"/>
-            <a:ext cx="2295525" cy="171450"/>
+          <p:cNvPr id="19" name="Text 16"/>
+          <p:cNvSpPr/>
+          <p:nvPr/>
+        </p:nvSpPr>
+        <p:spPr>
+          <a:xfrm>
+            <a:off x="4429125" y="952500"/>
+            <a:ext cx="3324225" cy="171450"/>
           </a:xfrm>
           <a:prstGeom prst="rect">
             <a:avLst/>
@@ -5762,110 +6153,308 @@
             <a:r>
               <a:rPr lang="en-US" sz="1100" b="1" dirty="0">
                 <a:solidFill>
+                  <a:srgbClr val="4E79A7"/>
+                </a:solidFill>
+                <a:latin typeface="Helvetica Neue" pitchFamily="34" charset="0"/>
+                <a:ea typeface="Helvetica Neue" pitchFamily="34" charset="-122"/>
+                <a:cs typeface="Helvetica Neue" pitchFamily="34" charset="-120"/>
+              </a:rPr>
+              <a:t>3–9 MONTHS</a:t>
+            </a:r>
+            <a:endParaRPr lang="en-US" sz="1100" dirty="0"/>
+          </a:p>
+        </p:txBody>
+      </p:sp>
+      <p:sp>
+        <p:nvSpPr>
+          <p:cNvPr id="20" name="Text 17"/>
+          <p:cNvSpPr/>
+          <p:nvPr/>
+        </p:nvSpPr>
+        <p:spPr>
+          <a:xfrm>
+            <a:off x="4429125" y="1200150"/>
+            <a:ext cx="3324225" cy="381000"/>
+          </a:xfrm>
+          <a:prstGeom prst="rect">
+            <a:avLst/>
+          </a:prstGeom>
+          <a:noFill/>
+          <a:ln/>
+        </p:spPr>
+        <p:txBody>
+          <a:bodyPr wrap="square" lIns="0" tIns="0" rIns="0" bIns="0" rtlCol="0" anchor="t"/>
+          <a:lstStyle/>
+          <a:p>
+            <a:pPr algn="l" indent="0" marL="0">
+              <a:buNone/>
+            </a:pPr>
+            <a:r>
+              <a:rPr lang="en-US" sz="1800" b="1" dirty="0">
+                <a:solidFill>
+                  <a:srgbClr val="EAEAEA"/>
+                </a:solidFill>
+                <a:latin typeface="Helvetica Neue" pitchFamily="34" charset="0"/>
+                <a:ea typeface="Helvetica Neue" pitchFamily="34" charset="-122"/>
+                <a:cs typeface="Helvetica Neue" pitchFamily="34" charset="-120"/>
+              </a:rPr>
+              <a:t>Scale decisions</a:t>
+            </a:r>
+            <a:endParaRPr lang="en-US" sz="1800" dirty="0"/>
+          </a:p>
+        </p:txBody>
+      </p:sp>
+      <p:sp>
+        <p:nvSpPr>
+          <p:cNvPr id="21" name="Text 18"/>
+          <p:cNvSpPr/>
+          <p:nvPr/>
+        </p:nvSpPr>
+        <p:spPr>
+          <a:xfrm>
+            <a:off x="4429125" y="1619250"/>
+            <a:ext cx="3324225" cy="457200"/>
+          </a:xfrm>
+          <a:prstGeom prst="rect">
+            <a:avLst/>
+          </a:prstGeom>
+          <a:noFill/>
+          <a:ln/>
+        </p:spPr>
+        <p:txBody>
+          <a:bodyPr wrap="square" lIns="0" tIns="0" rIns="0" bIns="0" rtlCol="0" anchor="t"/>
+          <a:lstStyle/>
+          <a:p>
+            <a:pPr algn="l" indent="0" marL="0">
+              <a:buNone/>
+            </a:pPr>
+            <a:r>
+              <a:rPr lang="en-US" sz="1400" dirty="0">
+                <a:solidFill>
                   <a:srgbClr val="6C6C8A"/>
                 </a:solidFill>
                 <a:latin typeface="Helvetica Neue" pitchFamily="34" charset="0"/>
                 <a:ea typeface="Helvetica Neue" pitchFamily="34" charset="-122"/>
                 <a:cs typeface="Helvetica Neue" pitchFamily="34" charset="-120"/>
               </a:rPr>
-              <a:t>MARGIN RECOVERY</a:t>
-            </a:r>
-            <a:endParaRPr lang="en-US" sz="1100" dirty="0"/>
-          </a:p>
-        </p:txBody>
-      </p:sp>
-      <p:sp>
-        <p:nvSpPr>
-          <p:cNvPr id="9" name="Text 7"/>
-          <p:cNvSpPr/>
-          <p:nvPr/>
-        </p:nvSpPr>
-        <p:spPr>
-          <a:xfrm>
-            <a:off x="590550" y="3105150"/>
-            <a:ext cx="2295525" cy="1524000"/>
-          </a:xfrm>
-          <a:prstGeom prst="rect">
-            <a:avLst/>
-          </a:prstGeom>
-          <a:noFill/>
-          <a:ln/>
-        </p:spPr>
-        <p:txBody>
-          <a:bodyPr wrap="none" lIns="0" tIns="0" rIns="0" bIns="0" rtlCol="0" anchor="ctr"/>
-          <a:lstStyle/>
-          <a:p>
-            <a:pPr algn="l" indent="0" marL="0">
-              <a:buNone/>
-            </a:pPr>
-            <a:r>
-              <a:rPr lang="en-US" sz="4000" b="1" dirty="0">
-                <a:solidFill>
-                  <a:srgbClr val="4E79A7"/>
-                </a:solidFill>
-                <a:latin typeface="Helvetica Neue" pitchFamily="34" charset="0"/>
-                <a:ea typeface="Helvetica Neue" pitchFamily="34" charset="-122"/>
-                <a:cs typeface="Helvetica Neue" pitchFamily="34" charset="-120"/>
-              </a:rPr>
-              <a:t>+$18–28M</a:t>
-            </a:r>
-            <a:endParaRPr lang="en-US" sz="4000" dirty="0"/>
-          </a:p>
-        </p:txBody>
-      </p:sp>
-      <p:sp>
-        <p:nvSpPr>
-          <p:cNvPr id="10" name="Text 8"/>
-          <p:cNvSpPr/>
-          <p:nvPr/>
-        </p:nvSpPr>
-        <p:spPr>
-          <a:xfrm>
-            <a:off x="590550" y="4762500"/>
-            <a:ext cx="2295525" cy="381000"/>
-          </a:xfrm>
-          <a:prstGeom prst="rect">
-            <a:avLst/>
-          </a:prstGeom>
-          <a:noFill/>
-          <a:ln/>
-        </p:spPr>
-        <p:txBody>
-          <a:bodyPr wrap="square" lIns="0" tIns="0" rIns="0" bIns="0" rtlCol="0" anchor="t"/>
-          <a:lstStyle/>
-          <a:p>
-            <a:pPr algn="l" indent="0" marL="0">
-              <a:buNone/>
-            </a:pPr>
-            <a:r>
-              <a:rPr lang="en-US" sz="1300" dirty="0">
-                <a:solidFill>
-                  <a:srgbClr val="6C6C8A"/>
-                </a:solidFill>
-                <a:latin typeface="Helvetica Neue" pitchFamily="34" charset="0"/>
-                <a:ea typeface="Helvetica Neue" pitchFamily="34" charset="-122"/>
-                <a:cs typeface="Helvetica Neue" pitchFamily="34" charset="-120"/>
-              </a:rPr>
-              <a:t>Gross profit</a:t>
-            </a:r>
-            <a:endParaRPr lang="en-US" sz="1300" dirty="0"/>
-          </a:p>
-        </p:txBody>
-      </p:sp>
-      <p:sp>
-        <p:nvSpPr>
-          <p:cNvPr id="11" name="Shape 9"/>
-          <p:cNvSpPr/>
-          <p:nvPr/>
-        </p:nvSpPr>
-        <p:spPr>
-          <a:xfrm>
-            <a:off x="3305175" y="2457450"/>
-            <a:ext cx="2676525" cy="2857500"/>
+              <a:t>Planner workflow + guardrails</a:t>
+            </a:r>
+            <a:endParaRPr lang="en-US" sz="1400" dirty="0"/>
+          </a:p>
+        </p:txBody>
+      </p:sp>
+      <p:sp>
+        <p:nvSpPr>
+          <p:cNvPr id="22" name="Shape 19"/>
+          <p:cNvSpPr/>
+          <p:nvPr/>
+        </p:nvSpPr>
+        <p:spPr>
+          <a:xfrm>
+            <a:off x="4429125" y="2200275"/>
+            <a:ext cx="66675" cy="66675"/>
           </a:xfrm>
           <a:prstGeom prst="roundRect">
             <a:avLst>
-              <a:gd name="adj" fmla="val 3416"/>
+              <a:gd name="adj" fmla="val 137143"/>
+            </a:avLst>
+          </a:prstGeom>
+          <a:solidFill>
+            <a:srgbClr val="E94560"/>
+          </a:solidFill>
+          <a:ln w="12700">
+            <a:solidFill>
+              <a:srgbClr val="E94560"/>
+            </a:solidFill>
+            <a:prstDash val="solid"/>
+          </a:ln>
+        </p:spPr>
+      </p:sp>
+      <p:sp>
+        <p:nvSpPr>
+          <p:cNvPr id="23" name="Text 20"/>
+          <p:cNvSpPr/>
+          <p:nvPr/>
+        </p:nvSpPr>
+        <p:spPr>
+          <a:xfrm>
+            <a:off x="4619625" y="2114550"/>
+            <a:ext cx="3133725" cy="342900"/>
+          </a:xfrm>
+          <a:prstGeom prst="rect">
+            <a:avLst/>
+          </a:prstGeom>
+          <a:noFill/>
+          <a:ln/>
+        </p:spPr>
+        <p:txBody>
+          <a:bodyPr wrap="square" lIns="0" tIns="0" rIns="0" bIns="0" rtlCol="0" anchor="t"/>
+          <a:lstStyle/>
+          <a:p>
+            <a:pPr algn="l" indent="0" marL="0">
+              <a:buNone/>
+            </a:pPr>
+            <a:r>
+              <a:rPr lang="en-US" sz="1500" dirty="0">
+                <a:solidFill>
+                  <a:srgbClr val="EAEAEA"/>
+                </a:solidFill>
+                <a:latin typeface="Helvetica Neue" pitchFamily="34" charset="0"/>
+                <a:ea typeface="Helvetica Neue" pitchFamily="34" charset="-122"/>
+                <a:cs typeface="Helvetica Neue" pitchFamily="34" charset="-120"/>
+              </a:rPr>
+              <a:t>Next-best price service</a:t>
+            </a:r>
+            <a:endParaRPr lang="en-US" sz="1500" dirty="0"/>
+          </a:p>
+        </p:txBody>
+      </p:sp>
+      <p:sp>
+        <p:nvSpPr>
+          <p:cNvPr id="24" name="Shape 21"/>
+          <p:cNvSpPr/>
+          <p:nvPr/>
+        </p:nvSpPr>
+        <p:spPr>
+          <a:xfrm>
+            <a:off x="4429125" y="2428875"/>
+            <a:ext cx="66675" cy="66675"/>
+          </a:xfrm>
+          <a:prstGeom prst="roundRect">
+            <a:avLst>
+              <a:gd name="adj" fmla="val 137143"/>
+            </a:avLst>
+          </a:prstGeom>
+          <a:solidFill>
+            <a:srgbClr val="E94560"/>
+          </a:solidFill>
+          <a:ln w="12700">
+            <a:solidFill>
+              <a:srgbClr val="E94560"/>
+            </a:solidFill>
+            <a:prstDash val="solid"/>
+          </a:ln>
+        </p:spPr>
+      </p:sp>
+      <p:sp>
+        <p:nvSpPr>
+          <p:cNvPr id="25" name="Text 22"/>
+          <p:cNvSpPr/>
+          <p:nvPr/>
+        </p:nvSpPr>
+        <p:spPr>
+          <a:xfrm>
+            <a:off x="4619625" y="2343150"/>
+            <a:ext cx="3133725" cy="342900"/>
+          </a:xfrm>
+          <a:prstGeom prst="rect">
+            <a:avLst/>
+          </a:prstGeom>
+          <a:noFill/>
+          <a:ln/>
+        </p:spPr>
+        <p:txBody>
+          <a:bodyPr wrap="square" lIns="0" tIns="0" rIns="0" bIns="0" rtlCol="0" anchor="t"/>
+          <a:lstStyle/>
+          <a:p>
+            <a:pPr algn="l" indent="0" marL="0">
+              <a:buNone/>
+            </a:pPr>
+            <a:r>
+              <a:rPr lang="en-US" sz="1500" dirty="0">
+                <a:solidFill>
+                  <a:srgbClr val="EAEAEA"/>
+                </a:solidFill>
+                <a:latin typeface="Helvetica Neue" pitchFamily="34" charset="0"/>
+                <a:ea typeface="Helvetica Neue" pitchFamily="34" charset="-122"/>
+                <a:cs typeface="Helvetica Neue" pitchFamily="34" charset="-120"/>
+              </a:rPr>
+              <a:t>Assortment linkage</a:t>
+            </a:r>
+            <a:endParaRPr lang="en-US" sz="1500" dirty="0"/>
+          </a:p>
+        </p:txBody>
+      </p:sp>
+      <p:sp>
+        <p:nvSpPr>
+          <p:cNvPr id="26" name="Shape 23"/>
+          <p:cNvSpPr/>
+          <p:nvPr/>
+        </p:nvSpPr>
+        <p:spPr>
+          <a:xfrm>
+            <a:off x="4429125" y="2657475"/>
+            <a:ext cx="66675" cy="66675"/>
+          </a:xfrm>
+          <a:prstGeom prst="roundRect">
+            <a:avLst>
+              <a:gd name="adj" fmla="val 137143"/>
+            </a:avLst>
+          </a:prstGeom>
+          <a:solidFill>
+            <a:srgbClr val="E94560"/>
+          </a:solidFill>
+          <a:ln w="12700">
+            <a:solidFill>
+              <a:srgbClr val="E94560"/>
+            </a:solidFill>
+            <a:prstDash val="solid"/>
+          </a:ln>
+        </p:spPr>
+      </p:sp>
+      <p:sp>
+        <p:nvSpPr>
+          <p:cNvPr id="27" name="Text 24"/>
+          <p:cNvSpPr/>
+          <p:nvPr/>
+        </p:nvSpPr>
+        <p:spPr>
+          <a:xfrm>
+            <a:off x="4619625" y="2571750"/>
+            <a:ext cx="3133725" cy="342900"/>
+          </a:xfrm>
+          <a:prstGeom prst="rect">
+            <a:avLst/>
+          </a:prstGeom>
+          <a:noFill/>
+          <a:ln/>
+        </p:spPr>
+        <p:txBody>
+          <a:bodyPr wrap="square" lIns="0" tIns="0" rIns="0" bIns="0" rtlCol="0" anchor="t"/>
+          <a:lstStyle/>
+          <a:p>
+            <a:pPr algn="l" indent="0" marL="0">
+              <a:buNone/>
+            </a:pPr>
+            <a:r>
+              <a:rPr lang="en-US" sz="1500" dirty="0">
+                <a:solidFill>
+                  <a:srgbClr val="EAEAEA"/>
+                </a:solidFill>
+                <a:latin typeface="Helvetica Neue" pitchFamily="34" charset="0"/>
+                <a:ea typeface="Helvetica Neue" pitchFamily="34" charset="-122"/>
+                <a:cs typeface="Helvetica Neue" pitchFamily="34" charset="-120"/>
+              </a:rPr>
+              <a:t>Weekly margin readout</a:t>
+            </a:r>
+            <a:endParaRPr lang="en-US" sz="1500" dirty="0"/>
+          </a:p>
+        </p:txBody>
+      </p:sp>
+      <p:sp>
+        <p:nvSpPr>
+          <p:cNvPr id="28" name="Shape 25"/>
+          <p:cNvSpPr/>
+          <p:nvPr/>
+        </p:nvSpPr>
+        <p:spPr>
+          <a:xfrm>
+            <a:off x="8115300" y="781050"/>
+            <a:ext cx="3667125" cy="5086350"/>
+          </a:xfrm>
+          <a:prstGeom prst="roundRect">
+            <a:avLst>
+              <a:gd name="adj" fmla="val 2494"/>
             </a:avLst>
           </a:prstGeom>
           <a:solidFill>
@@ -5881,24 +6470,24 @@
       </p:sp>
       <p:sp>
         <p:nvSpPr>
-          <p:cNvPr id="12" name="Shape 10"/>
-          <p:cNvSpPr/>
-          <p:nvPr/>
-        </p:nvSpPr>
-        <p:spPr>
-          <a:xfrm>
-            <a:off x="3305175" y="2457450"/>
-            <a:ext cx="2676525" cy="76200"/>
-          </a:xfrm>
-          <a:prstGeom prst="rect">
-            <a:avLst/>
-          </a:prstGeom>
-          <a:solidFill>
-            <a:srgbClr val="F28E2B"/>
+          <p:cNvPr id="29" name="Shape 26"/>
+          <p:cNvSpPr/>
+          <p:nvPr/>
+        </p:nvSpPr>
+        <p:spPr>
+          <a:xfrm>
+            <a:off x="8115300" y="781050"/>
+            <a:ext cx="57150" cy="5086350"/>
+          </a:xfrm>
+          <a:prstGeom prst="rect">
+            <a:avLst/>
+          </a:prstGeom>
+          <a:solidFill>
+            <a:srgbClr val="59A14F"/>
           </a:solidFill>
           <a:ln w="12700">
             <a:solidFill>
-              <a:srgbClr val="F28E2B"/>
+              <a:srgbClr val="59A14F"/>
             </a:solidFill>
             <a:prstDash val="solid"/>
           </a:ln>
@@ -5906,14 +6495,14 @@
       </p:sp>
       <p:sp>
         <p:nvSpPr>
-          <p:cNvPr id="13" name="Text 11"/>
-          <p:cNvSpPr/>
-          <p:nvPr/>
-        </p:nvSpPr>
-        <p:spPr>
-          <a:xfrm>
-            <a:off x="3495675" y="2705100"/>
-            <a:ext cx="2295525" cy="171450"/>
+          <p:cNvPr id="30" name="Text 27"/>
+          <p:cNvSpPr/>
+          <p:nvPr/>
+        </p:nvSpPr>
+        <p:spPr>
+          <a:xfrm>
+            <a:off x="8286750" y="952500"/>
+            <a:ext cx="3324225" cy="171450"/>
           </a:xfrm>
           <a:prstGeom prst="rect">
             <a:avLst/>
@@ -5931,118 +6520,118 @@
             <a:r>
               <a:rPr lang="en-US" sz="1100" b="1" dirty="0">
                 <a:solidFill>
+                  <a:srgbClr val="59A14F"/>
+                </a:solidFill>
+                <a:latin typeface="Helvetica Neue" pitchFamily="34" charset="0"/>
+                <a:ea typeface="Helvetica Neue" pitchFamily="34" charset="-122"/>
+                <a:cs typeface="Helvetica Neue" pitchFamily="34" charset="-120"/>
+              </a:rPr>
+              <a:t>9–18 MONTHS</a:t>
+            </a:r>
+            <a:endParaRPr lang="en-US" sz="1100" dirty="0"/>
+          </a:p>
+        </p:txBody>
+      </p:sp>
+      <p:sp>
+        <p:nvSpPr>
+          <p:cNvPr id="31" name="Text 28"/>
+          <p:cNvSpPr/>
+          <p:nvPr/>
+        </p:nvSpPr>
+        <p:spPr>
+          <a:xfrm>
+            <a:off x="8286750" y="1200150"/>
+            <a:ext cx="3324225" cy="381000"/>
+          </a:xfrm>
+          <a:prstGeom prst="rect">
+            <a:avLst/>
+          </a:prstGeom>
+          <a:noFill/>
+          <a:ln/>
+        </p:spPr>
+        <p:txBody>
+          <a:bodyPr wrap="square" lIns="0" tIns="0" rIns="0" bIns="0" rtlCol="0" anchor="t"/>
+          <a:lstStyle/>
+          <a:p>
+            <a:pPr algn="l" indent="0" marL="0">
+              <a:buNone/>
+            </a:pPr>
+            <a:r>
+              <a:rPr lang="en-US" sz="1800" b="1" dirty="0">
+                <a:solidFill>
+                  <a:srgbClr val="EAEAEA"/>
+                </a:solidFill>
+                <a:latin typeface="Helvetica Neue" pitchFamily="34" charset="0"/>
+                <a:ea typeface="Helvetica Neue" pitchFamily="34" charset="-122"/>
+                <a:cs typeface="Helvetica Neue" pitchFamily="34" charset="-120"/>
+              </a:rPr>
+              <a:t>Optimize system</a:t>
+            </a:r>
+            <a:endParaRPr lang="en-US" sz="1800" dirty="0"/>
+          </a:p>
+        </p:txBody>
+      </p:sp>
+      <p:sp>
+        <p:nvSpPr>
+          <p:cNvPr id="32" name="Text 29"/>
+          <p:cNvSpPr/>
+          <p:nvPr/>
+        </p:nvSpPr>
+        <p:spPr>
+          <a:xfrm>
+            <a:off x="8286750" y="1619250"/>
+            <a:ext cx="3324225" cy="457200"/>
+          </a:xfrm>
+          <a:prstGeom prst="rect">
+            <a:avLst/>
+          </a:prstGeom>
+          <a:noFill/>
+          <a:ln/>
+        </p:spPr>
+        <p:txBody>
+          <a:bodyPr wrap="square" lIns="0" tIns="0" rIns="0" bIns="0" rtlCol="0" anchor="t"/>
+          <a:lstStyle/>
+          <a:p>
+            <a:pPr algn="l" indent="0" marL="0">
+              <a:buNone/>
+            </a:pPr>
+            <a:r>
+              <a:rPr lang="en-US" sz="1400" dirty="0">
+                <a:solidFill>
                   <a:srgbClr val="6C6C8A"/>
                 </a:solidFill>
                 <a:latin typeface="Helvetica Neue" pitchFamily="34" charset="0"/>
                 <a:ea typeface="Helvetica Neue" pitchFamily="34" charset="-122"/>
                 <a:cs typeface="Helvetica Neue" pitchFamily="34" charset="-120"/>
               </a:rPr>
-              <a:t>FULL-PRICE MIX</a:t>
-            </a:r>
-            <a:endParaRPr lang="en-US" sz="1100" dirty="0"/>
-          </a:p>
-        </p:txBody>
-      </p:sp>
-      <p:sp>
-        <p:nvSpPr>
-          <p:cNvPr id="14" name="Text 12"/>
-          <p:cNvSpPr/>
-          <p:nvPr/>
-        </p:nvSpPr>
-        <p:spPr>
-          <a:xfrm>
-            <a:off x="3495675" y="3105150"/>
-            <a:ext cx="2295525" cy="1524000"/>
-          </a:xfrm>
-          <a:prstGeom prst="rect">
-            <a:avLst/>
-          </a:prstGeom>
-          <a:noFill/>
-          <a:ln/>
-        </p:spPr>
-        <p:txBody>
-          <a:bodyPr wrap="none" lIns="0" tIns="0" rIns="0" bIns="0" rtlCol="0" anchor="ctr"/>
-          <a:lstStyle/>
-          <a:p>
-            <a:pPr algn="l" indent="0" marL="0">
-              <a:buNone/>
-            </a:pPr>
-            <a:r>
-              <a:rPr lang="en-US" sz="4000" b="1" dirty="0">
-                <a:solidFill>
-                  <a:srgbClr val="F28E2B"/>
-                </a:solidFill>
-                <a:latin typeface="Helvetica Neue" pitchFamily="34" charset="0"/>
-                <a:ea typeface="Helvetica Neue" pitchFamily="34" charset="-122"/>
-                <a:cs typeface="Helvetica Neue" pitchFamily="34" charset="-120"/>
-              </a:rPr>
-              <a:t>+4–6 pts</a:t>
-            </a:r>
-            <a:endParaRPr lang="en-US" sz="4000" dirty="0"/>
-          </a:p>
-        </p:txBody>
-      </p:sp>
-      <p:sp>
-        <p:nvSpPr>
-          <p:cNvPr id="15" name="Text 13"/>
-          <p:cNvSpPr/>
-          <p:nvPr/>
-        </p:nvSpPr>
-        <p:spPr>
-          <a:xfrm>
-            <a:off x="3495675" y="4762500"/>
-            <a:ext cx="2295525" cy="381000"/>
-          </a:xfrm>
-          <a:prstGeom prst="rect">
-            <a:avLst/>
-          </a:prstGeom>
-          <a:noFill/>
-          <a:ln/>
-        </p:spPr>
-        <p:txBody>
-          <a:bodyPr wrap="square" lIns="0" tIns="0" rIns="0" bIns="0" rtlCol="0" anchor="t"/>
-          <a:lstStyle/>
-          <a:p>
-            <a:pPr algn="l" indent="0" marL="0">
-              <a:buNone/>
-            </a:pPr>
-            <a:r>
-              <a:rPr lang="en-US" sz="1300" dirty="0">
-                <a:solidFill>
-                  <a:srgbClr val="6C6C8A"/>
-                </a:solidFill>
-                <a:latin typeface="Helvetica Neue" pitchFamily="34" charset="0"/>
-                <a:ea typeface="Helvetica Neue" pitchFamily="34" charset="-122"/>
-                <a:cs typeface="Helvetica Neue" pitchFamily="34" charset="-120"/>
-              </a:rPr>
-              <a:t>Within 12 months</a:t>
-            </a:r>
-            <a:endParaRPr lang="en-US" sz="1300" dirty="0"/>
-          </a:p>
-        </p:txBody>
-      </p:sp>
-      <p:sp>
-        <p:nvSpPr>
-          <p:cNvPr id="16" name="Shape 14"/>
-          <p:cNvSpPr/>
-          <p:nvPr/>
-        </p:nvSpPr>
-        <p:spPr>
-          <a:xfrm>
-            <a:off x="6210300" y="2457450"/>
-            <a:ext cx="2676525" cy="2857500"/>
+              <a:t>Cross-channel price fabric</a:t>
+            </a:r>
+            <a:endParaRPr lang="en-US" sz="1400" dirty="0"/>
+          </a:p>
+        </p:txBody>
+      </p:sp>
+      <p:sp>
+        <p:nvSpPr>
+          <p:cNvPr id="33" name="Shape 30"/>
+          <p:cNvSpPr/>
+          <p:nvPr/>
+        </p:nvSpPr>
+        <p:spPr>
+          <a:xfrm>
+            <a:off x="8286750" y="2200275"/>
+            <a:ext cx="66675" cy="66675"/>
           </a:xfrm>
           <a:prstGeom prst="roundRect">
             <a:avLst>
-              <a:gd name="adj" fmla="val 3416"/>
+              <a:gd name="adj" fmla="val 137143"/>
             </a:avLst>
           </a:prstGeom>
           <a:solidFill>
-            <a:srgbClr val="2B2B4A"/>
+            <a:srgbClr val="E94560"/>
           </a:solidFill>
           <a:ln w="12700">
             <a:solidFill>
-              <a:srgbClr val="2B2B4A"/>
+              <a:srgbClr val="E94560"/>
             </a:solidFill>
             <a:prstDash val="solid"/>
           </a:ln>
@@ -6050,24 +6639,65 @@
       </p:sp>
       <p:sp>
         <p:nvSpPr>
-          <p:cNvPr id="17" name="Shape 15"/>
-          <p:cNvSpPr/>
-          <p:nvPr/>
-        </p:nvSpPr>
-        <p:spPr>
-          <a:xfrm>
-            <a:off x="6210300" y="2457450"/>
-            <a:ext cx="2676525" cy="76200"/>
-          </a:xfrm>
-          <a:prstGeom prst="rect">
-            <a:avLst/>
-          </a:prstGeom>
-          <a:solidFill>
-            <a:srgbClr val="E15759"/>
+          <p:cNvPr id="34" name="Text 31"/>
+          <p:cNvSpPr/>
+          <p:nvPr/>
+        </p:nvSpPr>
+        <p:spPr>
+          <a:xfrm>
+            <a:off x="8477250" y="2114550"/>
+            <a:ext cx="3133725" cy="342900"/>
+          </a:xfrm>
+          <a:prstGeom prst="rect">
+            <a:avLst/>
+          </a:prstGeom>
+          <a:noFill/>
+          <a:ln/>
+        </p:spPr>
+        <p:txBody>
+          <a:bodyPr wrap="square" lIns="0" tIns="0" rIns="0" bIns="0" rtlCol="0" anchor="t"/>
+          <a:lstStyle/>
+          <a:p>
+            <a:pPr algn="l" indent="0" marL="0">
+              <a:buNone/>
+            </a:pPr>
+            <a:r>
+              <a:rPr lang="en-US" sz="1500" dirty="0">
+                <a:solidFill>
+                  <a:srgbClr val="EAEAEA"/>
+                </a:solidFill>
+                <a:latin typeface="Helvetica Neue" pitchFamily="34" charset="0"/>
+                <a:ea typeface="Helvetica Neue" pitchFamily="34" charset="-122"/>
+                <a:cs typeface="Helvetica Neue" pitchFamily="34" charset="-120"/>
+              </a:rPr>
+              <a:t>Outlet / wholesale rules</a:t>
+            </a:r>
+            <a:endParaRPr lang="en-US" sz="1500" dirty="0"/>
+          </a:p>
+        </p:txBody>
+      </p:sp>
+      <p:sp>
+        <p:nvSpPr>
+          <p:cNvPr id="35" name="Shape 32"/>
+          <p:cNvSpPr/>
+          <p:nvPr/>
+        </p:nvSpPr>
+        <p:spPr>
+          <a:xfrm>
+            <a:off x="8286750" y="2428875"/>
+            <a:ext cx="66675" cy="66675"/>
+          </a:xfrm>
+          <a:prstGeom prst="roundRect">
+            <a:avLst>
+              <a:gd name="adj" fmla="val 137143"/>
+            </a:avLst>
+          </a:prstGeom>
+          <a:solidFill>
+            <a:srgbClr val="E94560"/>
           </a:solidFill>
           <a:ln w="12700">
             <a:solidFill>
-              <a:srgbClr val="E15759"/>
+              <a:srgbClr val="E94560"/>
             </a:solidFill>
             <a:prstDash val="solid"/>
           </a:ln>
@@ -6075,143 +6705,65 @@
       </p:sp>
       <p:sp>
         <p:nvSpPr>
-          <p:cNvPr id="18" name="Text 16"/>
-          <p:cNvSpPr/>
-          <p:nvPr/>
-        </p:nvSpPr>
-        <p:spPr>
-          <a:xfrm>
-            <a:off x="6400800" y="2705100"/>
-            <a:ext cx="2295525" cy="171450"/>
-          </a:xfrm>
-          <a:prstGeom prst="rect">
-            <a:avLst/>
-          </a:prstGeom>
-          <a:noFill/>
-          <a:ln/>
-        </p:spPr>
-        <p:txBody>
-          <a:bodyPr wrap="square" lIns="0" tIns="0" rIns="0" bIns="0" rtlCol="0" anchor="t"/>
-          <a:lstStyle/>
-          <a:p>
-            <a:pPr algn="l" indent="0" marL="0">
-              <a:buNone/>
-            </a:pPr>
-            <a:r>
-              <a:rPr lang="en-US" sz="1100" b="1" dirty="0">
-                <a:solidFill>
-                  <a:srgbClr val="6C6C8A"/>
-                </a:solidFill>
-                <a:latin typeface="Helvetica Neue" pitchFamily="34" charset="0"/>
-                <a:ea typeface="Helvetica Neue" pitchFamily="34" charset="-122"/>
-                <a:cs typeface="Helvetica Neue" pitchFamily="34" charset="-120"/>
-              </a:rPr>
-              <a:t>AGED INVENTORY</a:t>
-            </a:r>
-            <a:endParaRPr lang="en-US" sz="1100" dirty="0"/>
-          </a:p>
-        </p:txBody>
-      </p:sp>
-      <p:sp>
-        <p:nvSpPr>
-          <p:cNvPr id="19" name="Text 17"/>
-          <p:cNvSpPr/>
-          <p:nvPr/>
-        </p:nvSpPr>
-        <p:spPr>
-          <a:xfrm>
-            <a:off x="6400800" y="3105150"/>
-            <a:ext cx="2295525" cy="1524000"/>
-          </a:xfrm>
-          <a:prstGeom prst="rect">
-            <a:avLst/>
-          </a:prstGeom>
-          <a:noFill/>
-          <a:ln/>
-        </p:spPr>
-        <p:txBody>
-          <a:bodyPr wrap="none" lIns="0" tIns="0" rIns="0" bIns="0" rtlCol="0" anchor="ctr"/>
-          <a:lstStyle/>
-          <a:p>
-            <a:pPr algn="l" indent="0" marL="0">
-              <a:buNone/>
-            </a:pPr>
-            <a:r>
-              <a:rPr lang="en-US" sz="4000" b="1" dirty="0">
-                <a:solidFill>
-                  <a:srgbClr val="E15759"/>
-                </a:solidFill>
-                <a:latin typeface="Helvetica Neue" pitchFamily="34" charset="0"/>
-                <a:ea typeface="Helvetica Neue" pitchFamily="34" charset="-122"/>
-                <a:cs typeface="Helvetica Neue" pitchFamily="34" charset="-120"/>
-              </a:rPr>
-              <a:t>−15–25%</a:t>
-            </a:r>
-            <a:endParaRPr lang="en-US" sz="4000" dirty="0"/>
-          </a:p>
-        </p:txBody>
-      </p:sp>
-      <p:sp>
-        <p:nvSpPr>
-          <p:cNvPr id="20" name="Text 18"/>
-          <p:cNvSpPr/>
-          <p:nvPr/>
-        </p:nvSpPr>
-        <p:spPr>
-          <a:xfrm>
-            <a:off x="6400800" y="4762500"/>
-            <a:ext cx="2295525" cy="381000"/>
-          </a:xfrm>
-          <a:prstGeom prst="rect">
-            <a:avLst/>
-          </a:prstGeom>
-          <a:noFill/>
-          <a:ln/>
-        </p:spPr>
-        <p:txBody>
-          <a:bodyPr wrap="square" lIns="0" tIns="0" rIns="0" bIns="0" rtlCol="0" anchor="t"/>
-          <a:lstStyle/>
-          <a:p>
-            <a:pPr algn="l" indent="0" marL="0">
-              <a:buNone/>
-            </a:pPr>
-            <a:r>
-              <a:rPr lang="en-US" sz="1300" dirty="0">
-                <a:solidFill>
-                  <a:srgbClr val="6C6C8A"/>
-                </a:solidFill>
-                <a:latin typeface="Helvetica Neue" pitchFamily="34" charset="0"/>
-                <a:ea typeface="Helvetica Neue" pitchFamily="34" charset="-122"/>
-                <a:cs typeface="Helvetica Neue" pitchFamily="34" charset="-120"/>
-              </a:rPr>
-              <a:t>Weeks of supply</a:t>
-            </a:r>
-            <a:endParaRPr lang="en-US" sz="1300" dirty="0"/>
-          </a:p>
-        </p:txBody>
-      </p:sp>
-      <p:sp>
-        <p:nvSpPr>
-          <p:cNvPr id="21" name="Shape 19"/>
-          <p:cNvSpPr/>
-          <p:nvPr/>
-        </p:nvSpPr>
-        <p:spPr>
-          <a:xfrm>
-            <a:off x="9115425" y="2457450"/>
-            <a:ext cx="2676525" cy="2857500"/>
+          <p:cNvPr id="36" name="Text 33"/>
+          <p:cNvSpPr/>
+          <p:nvPr/>
+        </p:nvSpPr>
+        <p:spPr>
+          <a:xfrm>
+            <a:off x="8477250" y="2343150"/>
+            <a:ext cx="3133725" cy="342900"/>
+          </a:xfrm>
+          <a:prstGeom prst="rect">
+            <a:avLst/>
+          </a:prstGeom>
+          <a:noFill/>
+          <a:ln/>
+        </p:spPr>
+        <p:txBody>
+          <a:bodyPr wrap="square" lIns="0" tIns="0" rIns="0" bIns="0" rtlCol="0" anchor="t"/>
+          <a:lstStyle/>
+          <a:p>
+            <a:pPr algn="l" indent="0" marL="0">
+              <a:buNone/>
+            </a:pPr>
+            <a:r>
+              <a:rPr lang="en-US" sz="1500" dirty="0">
+                <a:solidFill>
+                  <a:srgbClr val="EAEAEA"/>
+                </a:solidFill>
+                <a:latin typeface="Helvetica Neue" pitchFamily="34" charset="0"/>
+                <a:ea typeface="Helvetica Neue" pitchFamily="34" charset="-122"/>
+                <a:cs typeface="Helvetica Neue" pitchFamily="34" charset="-120"/>
+              </a:rPr>
+              <a:t>Auto-clearance with caps</a:t>
+            </a:r>
+            <a:endParaRPr lang="en-US" sz="1500" dirty="0"/>
+          </a:p>
+        </p:txBody>
+      </p:sp>
+      <p:sp>
+        <p:nvSpPr>
+          <p:cNvPr id="37" name="Shape 34"/>
+          <p:cNvSpPr/>
+          <p:nvPr/>
+        </p:nvSpPr>
+        <p:spPr>
+          <a:xfrm>
+            <a:off x="8286750" y="2657475"/>
+            <a:ext cx="66675" cy="66675"/>
           </a:xfrm>
           <a:prstGeom prst="roundRect">
             <a:avLst>
-              <a:gd name="adj" fmla="val 3416"/>
+              <a:gd name="adj" fmla="val 137143"/>
             </a:avLst>
           </a:prstGeom>
           <a:solidFill>
-            <a:srgbClr val="2B2B4A"/>
+            <a:srgbClr val="E94560"/>
           </a:solidFill>
           <a:ln w="12700">
             <a:solidFill>
-              <a:srgbClr val="2B2B4A"/>
+              <a:srgbClr val="E94560"/>
             </a:solidFill>
             <a:prstDash val="solid"/>
           </a:ln>
@@ -6219,55 +6771,69 @@
       </p:sp>
       <p:sp>
         <p:nvSpPr>
-          <p:cNvPr id="22" name="Shape 20"/>
-          <p:cNvSpPr/>
-          <p:nvPr/>
-        </p:nvSpPr>
-        <p:spPr>
-          <a:xfrm>
-            <a:off x="9115425" y="2457450"/>
-            <a:ext cx="2676525" cy="76200"/>
-          </a:xfrm>
-          <a:prstGeom prst="rect">
-            <a:avLst/>
-          </a:prstGeom>
-          <a:solidFill>
-            <a:srgbClr val="76B7B2"/>
-          </a:solidFill>
-          <a:ln w="12700">
-            <a:solidFill>
-              <a:srgbClr val="76B7B2"/>
-            </a:solidFill>
-            <a:prstDash val="solid"/>
-          </a:ln>
-        </p:spPr>
-      </p:sp>
-      <p:sp>
-        <p:nvSpPr>
-          <p:cNvPr id="23" name="Text 21"/>
-          <p:cNvSpPr/>
-          <p:nvPr/>
-        </p:nvSpPr>
-        <p:spPr>
-          <a:xfrm>
-            <a:off x="9305925" y="2705100"/>
-            <a:ext cx="2295525" cy="171450"/>
-          </a:xfrm>
-          <a:prstGeom prst="rect">
-            <a:avLst/>
-          </a:prstGeom>
-          <a:noFill/>
-          <a:ln/>
-        </p:spPr>
-        <p:txBody>
-          <a:bodyPr wrap="square" lIns="0" tIns="0" rIns="0" bIns="0" rtlCol="0" anchor="t"/>
-          <a:lstStyle/>
-          <a:p>
-            <a:pPr algn="l" indent="0" marL="0">
-              <a:buNone/>
-            </a:pPr>
-            <a:r>
-              <a:rPr lang="en-US" sz="1100" b="1" dirty="0">
+          <p:cNvPr id="38" name="Text 35"/>
+          <p:cNvSpPr/>
+          <p:nvPr/>
+        </p:nvSpPr>
+        <p:spPr>
+          <a:xfrm>
+            <a:off x="8477250" y="2571750"/>
+            <a:ext cx="3133725" cy="342900"/>
+          </a:xfrm>
+          <a:prstGeom prst="rect">
+            <a:avLst/>
+          </a:prstGeom>
+          <a:noFill/>
+          <a:ln/>
+        </p:spPr>
+        <p:txBody>
+          <a:bodyPr wrap="square" lIns="0" tIns="0" rIns="0" bIns="0" rtlCol="0" anchor="t"/>
+          <a:lstStyle/>
+          <a:p>
+            <a:pPr algn="l" indent="0" marL="0">
+              <a:buNone/>
+            </a:pPr>
+            <a:r>
+              <a:rPr lang="en-US" sz="1500" dirty="0">
+                <a:solidFill>
+                  <a:srgbClr val="EAEAEA"/>
+                </a:solidFill>
+                <a:latin typeface="Helvetica Neue" pitchFamily="34" charset="0"/>
+                <a:ea typeface="Helvetica Neue" pitchFamily="34" charset="-122"/>
+                <a:cs typeface="Helvetica Neue" pitchFamily="34" charset="-120"/>
+              </a:rPr>
+              <a:t>Finance-owned KPI pack</a:t>
+            </a:r>
+            <a:endParaRPr lang="en-US" sz="1500" dirty="0"/>
+          </a:p>
+        </p:txBody>
+      </p:sp>
+      <p:sp>
+        <p:nvSpPr>
+          <p:cNvPr id="39" name="Text 36"/>
+          <p:cNvSpPr/>
+          <p:nvPr/>
+        </p:nvSpPr>
+        <p:spPr>
+          <a:xfrm>
+            <a:off x="400050" y="5943600"/>
+            <a:ext cx="11391900" cy="342900"/>
+          </a:xfrm>
+          <a:prstGeom prst="rect">
+            <a:avLst/>
+          </a:prstGeom>
+          <a:noFill/>
+          <a:ln/>
+        </p:spPr>
+        <p:txBody>
+          <a:bodyPr wrap="square" lIns="0" tIns="0" rIns="0" bIns="0" rtlCol="0" anchor="t"/>
+          <a:lstStyle/>
+          <a:p>
+            <a:pPr algn="l" indent="0" marL="0">
+              <a:buNone/>
+            </a:pPr>
+            <a:r>
+              <a:rPr lang="en-US" sz="1500" b="1" dirty="0">
                 <a:solidFill>
                   <a:srgbClr val="6C6C8A"/>
                 </a:solidFill>
@@ -6275,87 +6841,9 @@
                 <a:ea typeface="Helvetica Neue" pitchFamily="34" charset="-122"/>
                 <a:cs typeface="Helvetica Neue" pitchFamily="34" charset="-120"/>
               </a:rPr>
-              <a:t>PAYBACK</a:t>
-            </a:r>
-            <a:endParaRPr lang="en-US" sz="1100" dirty="0"/>
-          </a:p>
-        </p:txBody>
-      </p:sp>
-      <p:sp>
-        <p:nvSpPr>
-          <p:cNvPr id="24" name="Text 22"/>
-          <p:cNvSpPr/>
-          <p:nvPr/>
-        </p:nvSpPr>
-        <p:spPr>
-          <a:xfrm>
-            <a:off x="9305925" y="3105150"/>
-            <a:ext cx="2295525" cy="1524000"/>
-          </a:xfrm>
-          <a:prstGeom prst="rect">
-            <a:avLst/>
-          </a:prstGeom>
-          <a:noFill/>
-          <a:ln/>
-        </p:spPr>
-        <p:txBody>
-          <a:bodyPr wrap="none" lIns="0" tIns="0" rIns="0" bIns="0" rtlCol="0" anchor="ctr"/>
-          <a:lstStyle/>
-          <a:p>
-            <a:pPr algn="l" indent="0" marL="0">
-              <a:buNone/>
-            </a:pPr>
-            <a:r>
-              <a:rPr lang="en-US" sz="4000" b="1" dirty="0">
-                <a:solidFill>
-                  <a:srgbClr val="76B7B2"/>
-                </a:solidFill>
-                <a:latin typeface="Helvetica Neue" pitchFamily="34" charset="0"/>
-                <a:ea typeface="Helvetica Neue" pitchFamily="34" charset="-122"/>
-                <a:cs typeface="Helvetica Neue" pitchFamily="34" charset="-120"/>
-              </a:rPr>
-              <a:t>&lt;2 qtrs</a:t>
-            </a:r>
-            <a:endParaRPr lang="en-US" sz="4000" dirty="0"/>
-          </a:p>
-        </p:txBody>
-      </p:sp>
-      <p:sp>
-        <p:nvSpPr>
-          <p:cNvPr id="25" name="Text 23"/>
-          <p:cNvSpPr/>
-          <p:nvPr/>
-        </p:nvSpPr>
-        <p:spPr>
-          <a:xfrm>
-            <a:off x="9305925" y="4762500"/>
-            <a:ext cx="2295525" cy="381000"/>
-          </a:xfrm>
-          <a:prstGeom prst="rect">
-            <a:avLst/>
-          </a:prstGeom>
-          <a:noFill/>
-          <a:ln/>
-        </p:spPr>
-        <p:txBody>
-          <a:bodyPr wrap="square" lIns="0" tIns="0" rIns="0" bIns="0" rtlCol="0" anchor="t"/>
-          <a:lstStyle/>
-          <a:p>
-            <a:pPr algn="l" indent="0" marL="0">
-              <a:buNone/>
-            </a:pPr>
-            <a:r>
-              <a:rPr lang="en-US" sz="1300" dirty="0">
-                <a:solidFill>
-                  <a:srgbClr val="6C6C8A"/>
-                </a:solidFill>
-                <a:latin typeface="Helvetica Neue" pitchFamily="34" charset="0"/>
-                <a:ea typeface="Helvetica Neue" pitchFamily="34" charset="-122"/>
-                <a:cs typeface="Helvetica Neue" pitchFamily="34" charset="-120"/>
-              </a:rPr>
-              <a:t>After pilot</a:t>
-            </a:r>
-            <a:endParaRPr lang="en-US" sz="1300" dirty="0"/>
+              <a:t>Each gate requires a merchant owner and a stop / scale rule.</a:t>
+            </a:r>
+            <a:endParaRPr lang="en-US" sz="1500" dirty="0"/>
           </a:p>
         </p:txBody>
       </p:sp>
@@ -6391,32 +6879,62 @@
           <a:chExt cx="0" cy="0"/>
         </a:xfrm>
       </p:grpSpPr>
-      <p:sp>
-        <p:nvSpPr>
-          <p:cNvPr id="2" name="Text 0"/>
-          <p:cNvSpPr/>
-          <p:nvPr/>
-        </p:nvSpPr>
-        <p:spPr>
-          <a:xfrm>
-            <a:off x="400050" y="304800"/>
-            <a:ext cx="11049000" cy="533400"/>
-          </a:xfrm>
-          <a:prstGeom prst="rect">
-            <a:avLst/>
-          </a:prstGeom>
-          <a:noFill/>
-          <a:ln/>
-        </p:spPr>
-        <p:txBody>
-          <a:bodyPr wrap="square" lIns="0" tIns="0" rIns="0" bIns="0" rtlCol="0" anchor="t"/>
-          <a:lstStyle/>
-          <a:p>
-            <a:pPr algn="l" indent="0" marL="0">
-              <a:buNone/>
-            </a:pPr>
-            <a:r>
-              <a:rPr lang="en-US" sz="3200" b="1" dirty="0">
+      <p:pic>
+        <p:nvPicPr>
+          <p:cNvPr id="2" name="Image 0" descr="/Users/dpadmana/projects/ppt-gen/themes/scientific/logo.svg">    </p:cNvPr>
+          <p:cNvPicPr>
+            <a:picLocks noChangeAspect="1"/>
+          </p:cNvPicPr>
+          <p:nvPr/>
+        </p:nvPicPr>
+        <p:blipFill>
+          <a:blip r:embed="rId1">
+            <a:extLst>
+              <a:ext uri="{96DAC541-7B7A-43D3-8B79-37D633B846F1}">
+                <asvg:svgBlip xmlns:asvg="http://schemas.microsoft.com/office/drawing/2016/SVG/main" r:embed="rId2"/>
+              </a:ext>
+            </a:extLst>
+          </a:blip>
+          <a:stretch>
+            <a:fillRect/>
+          </a:stretch>
+        </p:blipFill>
+        <p:spPr>
+          <a:xfrm>
+            <a:off x="11430000" y="266700"/>
+            <a:ext cx="419100" cy="419100"/>
+          </a:xfrm>
+          <a:prstGeom prst="rect">
+            <a:avLst/>
+          </a:prstGeom>
+        </p:spPr>
+      </p:pic>
+      <p:sp>
+        <p:nvSpPr>
+          <p:cNvPr id="3" name="Text 0"/>
+          <p:cNvSpPr/>
+          <p:nvPr/>
+        </p:nvSpPr>
+        <p:spPr>
+          <a:xfrm>
+            <a:off x="400050" y="247650"/>
+            <a:ext cx="10839450" cy="381000"/>
+          </a:xfrm>
+          <a:prstGeom prst="rect">
+            <a:avLst/>
+          </a:prstGeom>
+          <a:noFill/>
+          <a:ln/>
+        </p:spPr>
+        <p:txBody>
+          <a:bodyPr wrap="square" lIns="0" tIns="0" rIns="0" bIns="0" rtlCol="0" anchor="t"/>
+          <a:lstStyle/>
+          <a:p>
+            <a:pPr algn="l" indent="0" marL="0">
+              <a:buNone/>
+            </a:pPr>
+            <a:r>
+              <a:rPr lang="en-US" sz="3000" b="1" dirty="0">
                 <a:solidFill>
                   <a:srgbClr val="EAEAEA"/>
                 </a:solidFill>
@@ -6424,22 +6942,61 @@
                 <a:ea typeface="Helvetica Neue" pitchFamily="34" charset="-122"/>
                 <a:cs typeface="Helvetica Neue" pitchFamily="34" charset="-120"/>
               </a:rPr>
-              <a:t>Sequence the capability—not a one-off promo calendar</a:t>
-            </a:r>
-            <a:endParaRPr lang="en-US" sz="3200" dirty="0"/>
-          </a:p>
-        </p:txBody>
-      </p:sp>
-      <p:sp>
-        <p:nvSpPr>
-          <p:cNvPr id="3" name="Text 1"/>
+              <a:t>90-day pilot squad</a:t>
+            </a:r>
+            <a:endParaRPr lang="en-US" sz="3000" dirty="0"/>
+          </a:p>
+        </p:txBody>
+      </p:sp>
+      <p:sp>
+        <p:nvSpPr>
+          <p:cNvPr id="4" name="Text 1"/>
+          <p:cNvSpPr/>
+          <p:nvPr/>
+        </p:nvSpPr>
+        <p:spPr>
+          <a:xfrm>
+            <a:off x="400050" y="800100"/>
+            <a:ext cx="10648950" cy="266700"/>
+          </a:xfrm>
+          <a:prstGeom prst="rect">
+            <a:avLst/>
+          </a:prstGeom>
+          <a:noFill/>
+          <a:ln/>
+        </p:spPr>
+        <p:txBody>
+          <a:bodyPr wrap="square" lIns="0" tIns="0" rIns="0" bIns="0" rtlCol="0" anchor="t"/>
+          <a:lstStyle/>
+          <a:p>
+            <a:pPr algn="l" indent="0" marL="0">
+              <a:buNone/>
+            </a:pPr>
+            <a:r>
+              <a:rPr lang="en-US" sz="1600" dirty="0">
+                <a:solidFill>
+                  <a:srgbClr val="6C6C8A"/>
+                </a:solidFill>
+                <a:latin typeface="Helvetica Neue" pitchFamily="34" charset="0"/>
+                <a:ea typeface="Helvetica Neue" pitchFamily="34" charset="-122"/>
+                <a:cs typeface="Helvetica Neue" pitchFamily="34" charset="-120"/>
+              </a:rPr>
+              <a:t>Keep commercial ownership next to the algorithm</a:t>
+            </a:r>
+            <a:endParaRPr lang="en-US" sz="1600" dirty="0"/>
+          </a:p>
+        </p:txBody>
+      </p:sp>
+      <p:sp>
+        <p:nvSpPr>
+          <p:cNvPr id="5" name="Text 2"/>
           <p:cNvSpPr/>
           <p:nvPr/>
         </p:nvSpPr>
         <p:spPr>
           <a:xfrm>
             <a:off x="400050" y="6457950"/>
-            <a:ext cx="8572500" cy="171450"/>
+            <a:ext cx="4953000" cy="171450"/>
           </a:xfrm>
           <a:prstGeom prst="rect">
             <a:avLst/>
@@ -6471,7 +7028,7 @@
       </p:sp>
       <p:sp>
         <p:nvSpPr>
-          <p:cNvPr id="4" name="Text 2"/>
+          <p:cNvPr id="6" name="Text 3"/>
           <p:cNvSpPr/>
           <p:nvPr/>
         </p:nvSpPr>
@@ -6510,26 +7067,180 @@
       </p:sp>
       <p:sp>
         <p:nvSpPr>
-          <p:cNvPr id="5" name="Shape 3"/>
-          <p:cNvSpPr/>
-          <p:nvPr/>
-        </p:nvSpPr>
-        <p:spPr>
-          <a:xfrm>
-            <a:off x="400050" y="1181100"/>
-            <a:ext cx="3667125" cy="5143500"/>
-          </a:xfrm>
-          <a:prstGeom prst="roundRect">
-            <a:avLst>
-              <a:gd name="adj" fmla="val 2494"/>
-            </a:avLst>
+          <p:cNvPr id="7" name="Text 4"/>
+          <p:cNvSpPr/>
+          <p:nvPr/>
+        </p:nvSpPr>
+        <p:spPr>
+          <a:xfrm>
+            <a:off x="1905000" y="1219200"/>
+            <a:ext cx="3168650" cy="171450"/>
+          </a:xfrm>
+          <a:prstGeom prst="rect">
+            <a:avLst/>
+          </a:prstGeom>
+          <a:noFill/>
+          <a:ln/>
+        </p:spPr>
+        <p:txBody>
+          <a:bodyPr wrap="square" lIns="0" tIns="0" rIns="0" bIns="0" rtlCol="0" anchor="t"/>
+          <a:lstStyle/>
+          <a:p>
+            <a:pPr algn="l" indent="0" marL="0">
+              <a:buNone/>
+            </a:pPr>
+            <a:r>
+              <a:rPr lang="en-US" sz="1100" b="1" dirty="0">
+                <a:solidFill>
+                  <a:srgbClr val="6C6C8A"/>
+                </a:solidFill>
+                <a:latin typeface="Helvetica Neue" pitchFamily="34" charset="0"/>
+                <a:ea typeface="Helvetica Neue" pitchFamily="34" charset="-122"/>
+                <a:cs typeface="Helvetica Neue" pitchFamily="34" charset="-120"/>
+              </a:rPr>
+              <a:t>WEEKS 1–3</a:t>
+            </a:r>
+            <a:endParaRPr lang="en-US" sz="1100" dirty="0"/>
+          </a:p>
+        </p:txBody>
+      </p:sp>
+      <p:sp>
+        <p:nvSpPr>
+          <p:cNvPr id="8" name="Text 5"/>
+          <p:cNvSpPr/>
+          <p:nvPr/>
+        </p:nvSpPr>
+        <p:spPr>
+          <a:xfrm>
+            <a:off x="5226050" y="1219200"/>
+            <a:ext cx="3168650" cy="171450"/>
+          </a:xfrm>
+          <a:prstGeom prst="rect">
+            <a:avLst/>
+          </a:prstGeom>
+          <a:noFill/>
+          <a:ln/>
+        </p:spPr>
+        <p:txBody>
+          <a:bodyPr wrap="square" lIns="0" tIns="0" rIns="0" bIns="0" rtlCol="0" anchor="t"/>
+          <a:lstStyle/>
+          <a:p>
+            <a:pPr algn="l" indent="0" marL="0">
+              <a:buNone/>
+            </a:pPr>
+            <a:r>
+              <a:rPr lang="en-US" sz="1100" b="1" dirty="0">
+                <a:solidFill>
+                  <a:srgbClr val="6C6C8A"/>
+                </a:solidFill>
+                <a:latin typeface="Helvetica Neue" pitchFamily="34" charset="0"/>
+                <a:ea typeface="Helvetica Neue" pitchFamily="34" charset="-122"/>
+                <a:cs typeface="Helvetica Neue" pitchFamily="34" charset="-120"/>
+              </a:rPr>
+              <a:t>WEEKS 4–7</a:t>
+            </a:r>
+            <a:endParaRPr lang="en-US" sz="1100" dirty="0"/>
+          </a:p>
+        </p:txBody>
+      </p:sp>
+      <p:sp>
+        <p:nvSpPr>
+          <p:cNvPr id="9" name="Text 6"/>
+          <p:cNvSpPr/>
+          <p:nvPr/>
+        </p:nvSpPr>
+        <p:spPr>
+          <a:xfrm>
+            <a:off x="8547100" y="1219200"/>
+            <a:ext cx="3168650" cy="171450"/>
+          </a:xfrm>
+          <a:prstGeom prst="rect">
+            <a:avLst/>
+          </a:prstGeom>
+          <a:noFill/>
+          <a:ln/>
+        </p:spPr>
+        <p:txBody>
+          <a:bodyPr wrap="square" lIns="0" tIns="0" rIns="0" bIns="0" rtlCol="0" anchor="t"/>
+          <a:lstStyle/>
+          <a:p>
+            <a:pPr algn="l" indent="0" marL="0">
+              <a:buNone/>
+            </a:pPr>
+            <a:r>
+              <a:rPr lang="en-US" sz="1100" b="1" dirty="0">
+                <a:solidFill>
+                  <a:srgbClr val="6C6C8A"/>
+                </a:solidFill>
+                <a:latin typeface="Helvetica Neue" pitchFamily="34" charset="0"/>
+                <a:ea typeface="Helvetica Neue" pitchFamily="34" charset="-122"/>
+                <a:cs typeface="Helvetica Neue" pitchFamily="34" charset="-120"/>
+              </a:rPr>
+              <a:t>WEEKS 8–12</a:t>
+            </a:r>
+            <a:endParaRPr lang="en-US" sz="1100" dirty="0"/>
+          </a:p>
+        </p:txBody>
+      </p:sp>
+      <p:sp>
+        <p:nvSpPr>
+          <p:cNvPr id="10" name="Text 7"/>
+          <p:cNvSpPr/>
+          <p:nvPr/>
+        </p:nvSpPr>
+        <p:spPr>
+          <a:xfrm>
+            <a:off x="400050" y="1562100"/>
+            <a:ext cx="1257300" cy="876300"/>
+          </a:xfrm>
+          <a:prstGeom prst="rect">
+            <a:avLst/>
+          </a:prstGeom>
+          <a:noFill/>
+          <a:ln/>
+        </p:spPr>
+        <p:txBody>
+          <a:bodyPr wrap="square" lIns="0" tIns="0" rIns="0" bIns="0" rtlCol="0" anchor="ctr"/>
+          <a:lstStyle/>
+          <a:p>
+            <a:pPr algn="l" indent="0" marL="0">
+              <a:buNone/>
+            </a:pPr>
+            <a:r>
+              <a:rPr lang="en-US" sz="1300" b="1" dirty="0">
+                <a:solidFill>
+                  <a:srgbClr val="EAEAEA"/>
+                </a:solidFill>
+                <a:latin typeface="Helvetica Neue" pitchFamily="34" charset="0"/>
+                <a:ea typeface="Helvetica Neue" pitchFamily="34" charset="-122"/>
+                <a:cs typeface="Helvetica Neue" pitchFamily="34" charset="-120"/>
+              </a:rPr>
+              <a:t>Merchandising</a:t>
+            </a:r>
+            <a:endParaRPr lang="en-US" sz="1300" dirty="0"/>
+          </a:p>
+        </p:txBody>
+      </p:sp>
+      <p:sp>
+        <p:nvSpPr>
+          <p:cNvPr id="11" name="Shape 8"/>
+          <p:cNvSpPr/>
+          <p:nvPr/>
+        </p:nvSpPr>
+        <p:spPr>
+          <a:xfrm>
+            <a:off x="1828800" y="1562100"/>
+            <a:ext cx="9963150" cy="876300"/>
+          </a:xfrm>
+          <a:prstGeom prst="rect">
+            <a:avLst/>
           </a:prstGeom>
           <a:solidFill>
             <a:srgbClr val="2B2B4A"/>
           </a:solidFill>
-          <a:ln w="12700">
+          <a:ln w="15875">
             <a:solidFill>
-              <a:srgbClr val="2B2B4A"/>
+              <a:srgbClr val="3A3A5C"/>
             </a:solidFill>
             <a:prstDash val="solid"/>
           </a:ln>
@@ -6537,17 +7248,275 @@
       </p:sp>
       <p:sp>
         <p:nvSpPr>
-          <p:cNvPr id="6" name="Shape 4"/>
-          <p:cNvSpPr/>
-          <p:nvPr/>
-        </p:nvSpPr>
-        <p:spPr>
-          <a:xfrm>
-            <a:off x="400050" y="1181100"/>
-            <a:ext cx="57150" cy="5143500"/>
-          </a:xfrm>
-          <a:prstGeom prst="rect">
-            <a:avLst/>
+          <p:cNvPr id="12" name="Text 9"/>
+          <p:cNvSpPr/>
+          <p:nvPr/>
+        </p:nvSpPr>
+        <p:spPr>
+          <a:xfrm>
+            <a:off x="400050" y="2514600"/>
+            <a:ext cx="1257300" cy="876300"/>
+          </a:xfrm>
+          <a:prstGeom prst="rect">
+            <a:avLst/>
+          </a:prstGeom>
+          <a:noFill/>
+          <a:ln/>
+        </p:spPr>
+        <p:txBody>
+          <a:bodyPr wrap="square" lIns="0" tIns="0" rIns="0" bIns="0" rtlCol="0" anchor="ctr"/>
+          <a:lstStyle/>
+          <a:p>
+            <a:pPr algn="l" indent="0" marL="0">
+              <a:buNone/>
+            </a:pPr>
+            <a:r>
+              <a:rPr lang="en-US" sz="1300" b="1" dirty="0">
+                <a:solidFill>
+                  <a:srgbClr val="EAEAEA"/>
+                </a:solidFill>
+                <a:latin typeface="Helvetica Neue" pitchFamily="34" charset="0"/>
+                <a:ea typeface="Helvetica Neue" pitchFamily="34" charset="-122"/>
+                <a:cs typeface="Helvetica Neue" pitchFamily="34" charset="-120"/>
+              </a:rPr>
+              <a:t>Planning</a:t>
+            </a:r>
+            <a:endParaRPr lang="en-US" sz="1300" dirty="0"/>
+          </a:p>
+        </p:txBody>
+      </p:sp>
+      <p:sp>
+        <p:nvSpPr>
+          <p:cNvPr id="13" name="Shape 10"/>
+          <p:cNvSpPr/>
+          <p:nvPr/>
+        </p:nvSpPr>
+        <p:spPr>
+          <a:xfrm>
+            <a:off x="1828800" y="2514600"/>
+            <a:ext cx="9963150" cy="876300"/>
+          </a:xfrm>
+          <a:prstGeom prst="rect">
+            <a:avLst/>
+          </a:prstGeom>
+          <a:solidFill>
+            <a:srgbClr val="1F1F36"/>
+          </a:solidFill>
+          <a:ln w="15875">
+            <a:solidFill>
+              <a:srgbClr val="3A3A5C"/>
+            </a:solidFill>
+            <a:prstDash val="solid"/>
+          </a:ln>
+        </p:spPr>
+      </p:sp>
+      <p:sp>
+        <p:nvSpPr>
+          <p:cNvPr id="14" name="Text 11"/>
+          <p:cNvSpPr/>
+          <p:nvPr/>
+        </p:nvSpPr>
+        <p:spPr>
+          <a:xfrm>
+            <a:off x="400050" y="3467100"/>
+            <a:ext cx="1257300" cy="876300"/>
+          </a:xfrm>
+          <a:prstGeom prst="rect">
+            <a:avLst/>
+          </a:prstGeom>
+          <a:noFill/>
+          <a:ln/>
+        </p:spPr>
+        <p:txBody>
+          <a:bodyPr wrap="square" lIns="0" tIns="0" rIns="0" bIns="0" rtlCol="0" anchor="ctr"/>
+          <a:lstStyle/>
+          <a:p>
+            <a:pPr algn="l" indent="0" marL="0">
+              <a:buNone/>
+            </a:pPr>
+            <a:r>
+              <a:rPr lang="en-US" sz="1300" b="1" dirty="0">
+                <a:solidFill>
+                  <a:srgbClr val="EAEAEA"/>
+                </a:solidFill>
+                <a:latin typeface="Helvetica Neue" pitchFamily="34" charset="0"/>
+                <a:ea typeface="Helvetica Neue" pitchFamily="34" charset="-122"/>
+                <a:cs typeface="Helvetica Neue" pitchFamily="34" charset="-120"/>
+              </a:rPr>
+              <a:t>Data science</a:t>
+            </a:r>
+            <a:endParaRPr lang="en-US" sz="1300" dirty="0"/>
+          </a:p>
+        </p:txBody>
+      </p:sp>
+      <p:sp>
+        <p:nvSpPr>
+          <p:cNvPr id="15" name="Shape 12"/>
+          <p:cNvSpPr/>
+          <p:nvPr/>
+        </p:nvSpPr>
+        <p:spPr>
+          <a:xfrm>
+            <a:off x="1828800" y="3467100"/>
+            <a:ext cx="9963150" cy="876300"/>
+          </a:xfrm>
+          <a:prstGeom prst="rect">
+            <a:avLst/>
+          </a:prstGeom>
+          <a:solidFill>
+            <a:srgbClr val="2B2B4A"/>
+          </a:solidFill>
+          <a:ln w="15875">
+            <a:solidFill>
+              <a:srgbClr val="3A3A5C"/>
+            </a:solidFill>
+            <a:prstDash val="solid"/>
+          </a:ln>
+        </p:spPr>
+      </p:sp>
+      <p:sp>
+        <p:nvSpPr>
+          <p:cNvPr id="16" name="Text 13"/>
+          <p:cNvSpPr/>
+          <p:nvPr/>
+        </p:nvSpPr>
+        <p:spPr>
+          <a:xfrm>
+            <a:off x="400050" y="4419600"/>
+            <a:ext cx="1257300" cy="876300"/>
+          </a:xfrm>
+          <a:prstGeom prst="rect">
+            <a:avLst/>
+          </a:prstGeom>
+          <a:noFill/>
+          <a:ln/>
+        </p:spPr>
+        <p:txBody>
+          <a:bodyPr wrap="square" lIns="0" tIns="0" rIns="0" bIns="0" rtlCol="0" anchor="ctr"/>
+          <a:lstStyle/>
+          <a:p>
+            <a:pPr algn="l" indent="0" marL="0">
+              <a:buNone/>
+            </a:pPr>
+            <a:r>
+              <a:rPr lang="en-US" sz="1300" b="1" dirty="0">
+                <a:solidFill>
+                  <a:srgbClr val="EAEAEA"/>
+                </a:solidFill>
+                <a:latin typeface="Helvetica Neue" pitchFamily="34" charset="0"/>
+                <a:ea typeface="Helvetica Neue" pitchFamily="34" charset="-122"/>
+                <a:cs typeface="Helvetica Neue" pitchFamily="34" charset="-120"/>
+              </a:rPr>
+              <a:t>Stores / e-comm</a:t>
+            </a:r>
+            <a:endParaRPr lang="en-US" sz="1300" dirty="0"/>
+          </a:p>
+        </p:txBody>
+      </p:sp>
+      <p:sp>
+        <p:nvSpPr>
+          <p:cNvPr id="17" name="Shape 14"/>
+          <p:cNvSpPr/>
+          <p:nvPr/>
+        </p:nvSpPr>
+        <p:spPr>
+          <a:xfrm>
+            <a:off x="1828800" y="4419600"/>
+            <a:ext cx="9963150" cy="876300"/>
+          </a:xfrm>
+          <a:prstGeom prst="rect">
+            <a:avLst/>
+          </a:prstGeom>
+          <a:solidFill>
+            <a:srgbClr val="1F1F36"/>
+          </a:solidFill>
+          <a:ln w="15875">
+            <a:solidFill>
+              <a:srgbClr val="3A3A5C"/>
+            </a:solidFill>
+            <a:prstDash val="solid"/>
+          </a:ln>
+        </p:spPr>
+      </p:sp>
+      <p:sp>
+        <p:nvSpPr>
+          <p:cNvPr id="18" name="Text 15"/>
+          <p:cNvSpPr/>
+          <p:nvPr/>
+        </p:nvSpPr>
+        <p:spPr>
+          <a:xfrm>
+            <a:off x="400050" y="5372100"/>
+            <a:ext cx="1257300" cy="876300"/>
+          </a:xfrm>
+          <a:prstGeom prst="rect">
+            <a:avLst/>
+          </a:prstGeom>
+          <a:noFill/>
+          <a:ln/>
+        </p:spPr>
+        <p:txBody>
+          <a:bodyPr wrap="square" lIns="0" tIns="0" rIns="0" bIns="0" rtlCol="0" anchor="ctr"/>
+          <a:lstStyle/>
+          <a:p>
+            <a:pPr algn="l" indent="0" marL="0">
+              <a:buNone/>
+            </a:pPr>
+            <a:r>
+              <a:rPr lang="en-US" sz="1300" b="1" dirty="0">
+                <a:solidFill>
+                  <a:srgbClr val="EAEAEA"/>
+                </a:solidFill>
+                <a:latin typeface="Helvetica Neue" pitchFamily="34" charset="0"/>
+                <a:ea typeface="Helvetica Neue" pitchFamily="34" charset="-122"/>
+                <a:cs typeface="Helvetica Neue" pitchFamily="34" charset="-120"/>
+              </a:rPr>
+              <a:t>Finance</a:t>
+            </a:r>
+            <a:endParaRPr lang="en-US" sz="1300" dirty="0"/>
+          </a:p>
+        </p:txBody>
+      </p:sp>
+      <p:sp>
+        <p:nvSpPr>
+          <p:cNvPr id="19" name="Shape 16"/>
+          <p:cNvSpPr/>
+          <p:nvPr/>
+        </p:nvSpPr>
+        <p:spPr>
+          <a:xfrm>
+            <a:off x="1828800" y="5372100"/>
+            <a:ext cx="9963150" cy="876300"/>
+          </a:xfrm>
+          <a:prstGeom prst="rect">
+            <a:avLst/>
+          </a:prstGeom>
+          <a:solidFill>
+            <a:srgbClr val="2B2B4A"/>
+          </a:solidFill>
+          <a:ln w="15875">
+            <a:solidFill>
+              <a:srgbClr val="3A3A5C"/>
+            </a:solidFill>
+            <a:prstDash val="solid"/>
+          </a:ln>
+        </p:spPr>
+      </p:sp>
+      <p:sp>
+        <p:nvSpPr>
+          <p:cNvPr id="20" name="Shape 17"/>
+          <p:cNvSpPr/>
+          <p:nvPr/>
+        </p:nvSpPr>
+        <p:spPr>
+          <a:xfrm>
+            <a:off x="1924050" y="1809750"/>
+            <a:ext cx="3130550" cy="381000"/>
+          </a:xfrm>
+          <a:prstGeom prst="roundRect">
+            <a:avLst>
+              <a:gd name="adj" fmla="val 24000"/>
+            </a:avLst>
           </a:prstGeom>
           <a:solidFill>
             <a:srgbClr val="4E79A7"/>
@@ -6562,200 +7531,58 @@
       </p:sp>
       <p:sp>
         <p:nvSpPr>
-          <p:cNvPr id="7" name="Text 5"/>
-          <p:cNvSpPr/>
-          <p:nvPr/>
-        </p:nvSpPr>
-        <p:spPr>
-          <a:xfrm>
-            <a:off x="571500" y="1333500"/>
-            <a:ext cx="3324225" cy="171450"/>
-          </a:xfrm>
-          <a:prstGeom prst="rect">
-            <a:avLst/>
-          </a:prstGeom>
-          <a:noFill/>
-          <a:ln/>
-        </p:spPr>
-        <p:txBody>
-          <a:bodyPr wrap="square" lIns="0" tIns="0" rIns="0" bIns="0" rtlCol="0" anchor="t"/>
-          <a:lstStyle/>
-          <a:p>
-            <a:pPr algn="l" indent="0" marL="0">
-              <a:buNone/>
-            </a:pPr>
-            <a:r>
-              <a:rPr lang="en-US" sz="1100" b="1" dirty="0">
-                <a:solidFill>
-                  <a:srgbClr val="4E79A7"/>
-                </a:solidFill>
-                <a:latin typeface="Helvetica Neue" pitchFamily="34" charset="0"/>
-                <a:ea typeface="Helvetica Neue" pitchFamily="34" charset="-122"/>
-                <a:cs typeface="Helvetica Neue" pitchFamily="34" charset="-120"/>
-              </a:rPr>
-              <a:t>DIAGNOSE &amp; PILOT</a:t>
-            </a:r>
-            <a:endParaRPr lang="en-US" sz="1100" dirty="0"/>
-          </a:p>
-        </p:txBody>
-      </p:sp>
-      <p:sp>
-        <p:nvSpPr>
-          <p:cNvPr id="8" name="Text 6"/>
-          <p:cNvSpPr/>
-          <p:nvPr/>
-        </p:nvSpPr>
-        <p:spPr>
-          <a:xfrm>
-            <a:off x="571500" y="1600200"/>
-            <a:ext cx="3324225" cy="4572000"/>
-          </a:xfrm>
-          <a:prstGeom prst="rect">
-            <a:avLst/>
-          </a:prstGeom>
-          <a:noFill/>
-          <a:ln/>
-        </p:spPr>
-        <p:txBody>
-          <a:bodyPr wrap="square" lIns="0" tIns="0" rIns="0" bIns="0" rtlCol="0" anchor="t"/>
-          <a:lstStyle/>
-          <a:p>
-            <a:pPr algn="l" indent="0" marL="0">
-              <a:buNone/>
-            </a:pPr>
-            <a:r>
-              <a:rPr lang="en-US" sz="1800" b="1" dirty="0">
-                <a:solidFill>
-                  <a:srgbClr val="EAEAEA"/>
-                </a:solidFill>
-                <a:latin typeface="Helvetica Neue" pitchFamily="34" charset="0"/>
-                <a:ea typeface="Helvetica Neue" pitchFamily="34" charset="-122"/>
-                <a:cs typeface="Helvetica Neue" pitchFamily="34" charset="-120"/>
-              </a:rPr>
-              <a:t>SKU risk scores + 2 categories</a:t>
-            </a:r>
-            <a:endParaRPr lang="en-US" sz="1800" dirty="0"/>
-          </a:p>
-        </p:txBody>
-      </p:sp>
-      <p:sp>
-        <p:nvSpPr>
-          <p:cNvPr id="9" name="Text 7"/>
-          <p:cNvSpPr/>
-          <p:nvPr/>
-        </p:nvSpPr>
-        <p:spPr>
-          <a:xfrm>
-            <a:off x="571500" y="5962650"/>
-            <a:ext cx="3324225" cy="171450"/>
-          </a:xfrm>
-          <a:prstGeom prst="rect">
-            <a:avLst/>
-          </a:prstGeom>
-          <a:noFill/>
-          <a:ln/>
-        </p:spPr>
-        <p:txBody>
-          <a:bodyPr wrap="square" lIns="0" tIns="0" rIns="0" bIns="0" rtlCol="0" anchor="t"/>
-          <a:lstStyle/>
-          <a:p>
-            <a:pPr algn="l" indent="0" marL="0">
-              <a:buNone/>
-            </a:pPr>
-            <a:r>
-              <a:rPr lang="en-US" sz="1100" b="1" dirty="0">
-                <a:solidFill>
-                  <a:srgbClr val="4E79A7"/>
-                </a:solidFill>
-                <a:latin typeface="Helvetica Neue" pitchFamily="34" charset="0"/>
-                <a:ea typeface="Helvetica Neue" pitchFamily="34" charset="-122"/>
-                <a:cs typeface="Helvetica Neue" pitchFamily="34" charset="-120"/>
-              </a:rPr>
-              <a:t>0–90 DAYS</a:t>
-            </a:r>
-            <a:endParaRPr lang="en-US" sz="1100" dirty="0"/>
-          </a:p>
-        </p:txBody>
-      </p:sp>
-      <p:sp>
-        <p:nvSpPr>
-          <p:cNvPr id="10" name="Text 8"/>
-          <p:cNvSpPr/>
-          <p:nvPr/>
-        </p:nvSpPr>
-        <p:spPr>
-          <a:xfrm>
-            <a:off x="571500" y="5695950"/>
-            <a:ext cx="3324225" cy="190500"/>
-          </a:xfrm>
-          <a:prstGeom prst="rect">
-            <a:avLst/>
-          </a:prstGeom>
-          <a:noFill/>
-          <a:ln/>
-        </p:spPr>
-        <p:txBody>
-          <a:bodyPr wrap="square" lIns="0" tIns="0" rIns="0" bIns="0" rtlCol="0" anchor="t"/>
-          <a:lstStyle/>
-          <a:p>
-            <a:pPr algn="l" indent="0" marL="0">
-              <a:buNone/>
-            </a:pPr>
-            <a:r>
-              <a:rPr lang="en-US" sz="1100" dirty="0">
-                <a:solidFill>
-                  <a:srgbClr val="6C6C8A"/>
-                </a:solidFill>
-                <a:latin typeface="Helvetica Neue" pitchFamily="34" charset="0"/>
-                <a:ea typeface="Helvetica Neue" pitchFamily="34" charset="-122"/>
-                <a:cs typeface="Helvetica Neue" pitchFamily="34" charset="-120"/>
-              </a:rPr>
-              <a:t>Residual demand model MVP • Markdown playbook v1 • Holdout in 40 doors</a:t>
-            </a:r>
-            <a:endParaRPr lang="en-US" sz="1100" dirty="0"/>
-          </a:p>
-        </p:txBody>
-      </p:sp>
-      <p:sp>
-        <p:nvSpPr>
-          <p:cNvPr id="11" name="Shape 9"/>
-          <p:cNvSpPr/>
-          <p:nvPr/>
-        </p:nvSpPr>
-        <p:spPr>
-          <a:xfrm>
-            <a:off x="4257675" y="1181100"/>
-            <a:ext cx="3667125" cy="5143500"/>
+          <p:cNvPr id="21" name="Text 18"/>
+          <p:cNvSpPr/>
+          <p:nvPr/>
+        </p:nvSpPr>
+        <p:spPr>
+          <a:xfrm>
+            <a:off x="2000250" y="1809750"/>
+            <a:ext cx="2978150" cy="381000"/>
+          </a:xfrm>
+          <a:prstGeom prst="rect">
+            <a:avLst/>
+          </a:prstGeom>
+          <a:noFill/>
+          <a:ln/>
+        </p:spPr>
+        <p:txBody>
+          <a:bodyPr wrap="square" lIns="0" tIns="0" rIns="0" bIns="0" rtlCol="0" anchor="ctr"/>
+          <a:lstStyle/>
+          <a:p>
+            <a:pPr algn="ctr" indent="0" marL="0">
+              <a:buNone/>
+            </a:pPr>
+            <a:r>
+              <a:rPr lang="en-US" sz="1200" b="1" dirty="0">
+                <a:solidFill>
+                  <a:srgbClr val="FFFFFF"/>
+                </a:solidFill>
+                <a:latin typeface="Helvetica Neue" pitchFamily="34" charset="0"/>
+                <a:ea typeface="Helvetica Neue" pitchFamily="34" charset="-122"/>
+                <a:cs typeface="Helvetica Neue" pitchFamily="34" charset="-120"/>
+              </a:rPr>
+              <a:t>Category charter</a:t>
+            </a:r>
+            <a:endParaRPr lang="en-US" sz="1200" dirty="0"/>
+          </a:p>
+        </p:txBody>
+      </p:sp>
+      <p:sp>
+        <p:nvSpPr>
+          <p:cNvPr id="22" name="Shape 19"/>
+          <p:cNvSpPr/>
+          <p:nvPr/>
+        </p:nvSpPr>
+        <p:spPr>
+          <a:xfrm>
+            <a:off x="1924050" y="2762250"/>
+            <a:ext cx="3130550" cy="381000"/>
           </a:xfrm>
           <a:prstGeom prst="roundRect">
             <a:avLst>
-              <a:gd name="adj" fmla="val 2494"/>
+              <a:gd name="adj" fmla="val 24000"/>
             </a:avLst>
-          </a:prstGeom>
-          <a:solidFill>
-            <a:srgbClr val="2B2B4A"/>
-          </a:solidFill>
-          <a:ln w="12700">
-            <a:solidFill>
-              <a:srgbClr val="2B2B4A"/>
-            </a:solidFill>
-            <a:prstDash val="solid"/>
-          </a:ln>
-        </p:spPr>
-      </p:sp>
-      <p:sp>
-        <p:nvSpPr>
-          <p:cNvPr id="12" name="Shape 10"/>
-          <p:cNvSpPr/>
-          <p:nvPr/>
-        </p:nvSpPr>
-        <p:spPr>
-          <a:xfrm>
-            <a:off x="4257675" y="1181100"/>
-            <a:ext cx="57150" cy="5143500"/>
-          </a:xfrm>
-          <a:prstGeom prst="rect">
-            <a:avLst/>
           </a:prstGeom>
           <a:solidFill>
             <a:srgbClr val="F28E2B"/>
@@ -6770,200 +7597,58 @@
       </p:sp>
       <p:sp>
         <p:nvSpPr>
-          <p:cNvPr id="13" name="Text 11"/>
-          <p:cNvSpPr/>
-          <p:nvPr/>
-        </p:nvSpPr>
-        <p:spPr>
-          <a:xfrm>
-            <a:off x="4429125" y="1333500"/>
-            <a:ext cx="3324225" cy="171450"/>
-          </a:xfrm>
-          <a:prstGeom prst="rect">
-            <a:avLst/>
-          </a:prstGeom>
-          <a:noFill/>
-          <a:ln/>
-        </p:spPr>
-        <p:txBody>
-          <a:bodyPr wrap="square" lIns="0" tIns="0" rIns="0" bIns="0" rtlCol="0" anchor="t"/>
-          <a:lstStyle/>
-          <a:p>
-            <a:pPr algn="l" indent="0" marL="0">
-              <a:buNone/>
-            </a:pPr>
-            <a:r>
-              <a:rPr lang="en-US" sz="1100" b="1" dirty="0">
-                <a:solidFill>
-                  <a:srgbClr val="F28E2B"/>
-                </a:solidFill>
-                <a:latin typeface="Helvetica Neue" pitchFamily="34" charset="0"/>
-                <a:ea typeface="Helvetica Neue" pitchFamily="34" charset="-122"/>
-                <a:cs typeface="Helvetica Neue" pitchFamily="34" charset="-120"/>
-              </a:rPr>
-              <a:t>SCALE DECISIONS</a:t>
-            </a:r>
-            <a:endParaRPr lang="en-US" sz="1100" dirty="0"/>
-          </a:p>
-        </p:txBody>
-      </p:sp>
-      <p:sp>
-        <p:nvSpPr>
-          <p:cNvPr id="14" name="Text 12"/>
-          <p:cNvSpPr/>
-          <p:nvPr/>
-        </p:nvSpPr>
-        <p:spPr>
-          <a:xfrm>
-            <a:off x="4429125" y="1600200"/>
-            <a:ext cx="3324225" cy="4572000"/>
-          </a:xfrm>
-          <a:prstGeom prst="rect">
-            <a:avLst/>
-          </a:prstGeom>
-          <a:noFill/>
-          <a:ln/>
-        </p:spPr>
-        <p:txBody>
-          <a:bodyPr wrap="square" lIns="0" tIns="0" rIns="0" bIns="0" rtlCol="0" anchor="t"/>
-          <a:lstStyle/>
-          <a:p>
-            <a:pPr algn="l" indent="0" marL="0">
-              <a:buNone/>
-            </a:pPr>
-            <a:r>
-              <a:rPr lang="en-US" sz="1800" b="1" dirty="0">
-                <a:solidFill>
-                  <a:srgbClr val="EAEAEA"/>
-                </a:solidFill>
-                <a:latin typeface="Helvetica Neue" pitchFamily="34" charset="0"/>
-                <a:ea typeface="Helvetica Neue" pitchFamily="34" charset="-122"/>
-                <a:cs typeface="Helvetica Neue" pitchFamily="34" charset="-120"/>
-              </a:rPr>
-              <a:t>Planner workflow + guardrails</a:t>
-            </a:r>
-            <a:endParaRPr lang="en-US" sz="1800" dirty="0"/>
-          </a:p>
-        </p:txBody>
-      </p:sp>
-      <p:sp>
-        <p:nvSpPr>
-          <p:cNvPr id="15" name="Text 13"/>
-          <p:cNvSpPr/>
-          <p:nvPr/>
-        </p:nvSpPr>
-        <p:spPr>
-          <a:xfrm>
-            <a:off x="4429125" y="5962650"/>
-            <a:ext cx="3324225" cy="171450"/>
-          </a:xfrm>
-          <a:prstGeom prst="rect">
-            <a:avLst/>
-          </a:prstGeom>
-          <a:noFill/>
-          <a:ln/>
-        </p:spPr>
-        <p:txBody>
-          <a:bodyPr wrap="square" lIns="0" tIns="0" rIns="0" bIns="0" rtlCol="0" anchor="t"/>
-          <a:lstStyle/>
-          <a:p>
-            <a:pPr algn="l" indent="0" marL="0">
-              <a:buNone/>
-            </a:pPr>
-            <a:r>
-              <a:rPr lang="en-US" sz="1100" b="1" dirty="0">
-                <a:solidFill>
-                  <a:srgbClr val="F28E2B"/>
-                </a:solidFill>
-                <a:latin typeface="Helvetica Neue" pitchFamily="34" charset="0"/>
-                <a:ea typeface="Helvetica Neue" pitchFamily="34" charset="-122"/>
-                <a:cs typeface="Helvetica Neue" pitchFamily="34" charset="-120"/>
-              </a:rPr>
-              <a:t>3–9 MONTHS</a:t>
-            </a:r>
-            <a:endParaRPr lang="en-US" sz="1100" dirty="0"/>
-          </a:p>
-        </p:txBody>
-      </p:sp>
-      <p:sp>
-        <p:nvSpPr>
-          <p:cNvPr id="16" name="Text 14"/>
-          <p:cNvSpPr/>
-          <p:nvPr/>
-        </p:nvSpPr>
-        <p:spPr>
-          <a:xfrm>
-            <a:off x="4429125" y="5695950"/>
-            <a:ext cx="3324225" cy="190500"/>
-          </a:xfrm>
-          <a:prstGeom prst="rect">
-            <a:avLst/>
-          </a:prstGeom>
-          <a:noFill/>
-          <a:ln/>
-        </p:spPr>
-        <p:txBody>
-          <a:bodyPr wrap="square" lIns="0" tIns="0" rIns="0" bIns="0" rtlCol="0" anchor="t"/>
-          <a:lstStyle/>
-          <a:p>
-            <a:pPr algn="l" indent="0" marL="0">
-              <a:buNone/>
-            </a:pPr>
-            <a:r>
-              <a:rPr lang="en-US" sz="1100" dirty="0">
-                <a:solidFill>
-                  <a:srgbClr val="6C6C8A"/>
-                </a:solidFill>
-                <a:latin typeface="Helvetica Neue" pitchFamily="34" charset="0"/>
-                <a:ea typeface="Helvetica Neue" pitchFamily="34" charset="-122"/>
-                <a:cs typeface="Helvetica Neue" pitchFamily="34" charset="-120"/>
-              </a:rPr>
-              <a:t>Next-best price service • Assortment linkage • Weekly margin readout</a:t>
-            </a:r>
-            <a:endParaRPr lang="en-US" sz="1100" dirty="0"/>
-          </a:p>
-        </p:txBody>
-      </p:sp>
-      <p:sp>
-        <p:nvSpPr>
-          <p:cNvPr id="17" name="Shape 15"/>
-          <p:cNvSpPr/>
-          <p:nvPr/>
-        </p:nvSpPr>
-        <p:spPr>
-          <a:xfrm>
-            <a:off x="8115300" y="1181100"/>
-            <a:ext cx="3667125" cy="5143500"/>
+          <p:cNvPr id="23" name="Text 20"/>
+          <p:cNvSpPr/>
+          <p:nvPr/>
+        </p:nvSpPr>
+        <p:spPr>
+          <a:xfrm>
+            <a:off x="2000250" y="2762250"/>
+            <a:ext cx="2978150" cy="381000"/>
+          </a:xfrm>
+          <a:prstGeom prst="rect">
+            <a:avLst/>
+          </a:prstGeom>
+          <a:noFill/>
+          <a:ln/>
+        </p:spPr>
+        <p:txBody>
+          <a:bodyPr wrap="square" lIns="0" tIns="0" rIns="0" bIns="0" rtlCol="0" anchor="ctr"/>
+          <a:lstStyle/>
+          <a:p>
+            <a:pPr algn="ctr" indent="0" marL="0">
+              <a:buNone/>
+            </a:pPr>
+            <a:r>
+              <a:rPr lang="en-US" sz="1200" b="1" dirty="0">
+                <a:solidFill>
+                  <a:srgbClr val="FFFFFF"/>
+                </a:solidFill>
+                <a:latin typeface="Helvetica Neue" pitchFamily="34" charset="0"/>
+                <a:ea typeface="Helvetica Neue" pitchFamily="34" charset="-122"/>
+                <a:cs typeface="Helvetica Neue" pitchFamily="34" charset="-120"/>
+              </a:rPr>
+              <a:t>Risk rules</a:t>
+            </a:r>
+            <a:endParaRPr lang="en-US" sz="1200" dirty="0"/>
+          </a:p>
+        </p:txBody>
+      </p:sp>
+      <p:sp>
+        <p:nvSpPr>
+          <p:cNvPr id="24" name="Shape 21"/>
+          <p:cNvSpPr/>
+          <p:nvPr/>
+        </p:nvSpPr>
+        <p:spPr>
+          <a:xfrm>
+            <a:off x="5245100" y="3714750"/>
+            <a:ext cx="3130550" cy="381000"/>
           </a:xfrm>
           <a:prstGeom prst="roundRect">
             <a:avLst>
-              <a:gd name="adj" fmla="val 2494"/>
+              <a:gd name="adj" fmla="val 24000"/>
             </a:avLst>
-          </a:prstGeom>
-          <a:solidFill>
-            <a:srgbClr val="2B2B4A"/>
-          </a:solidFill>
-          <a:ln w="12700">
-            <a:solidFill>
-              <a:srgbClr val="2B2B4A"/>
-            </a:solidFill>
-            <a:prstDash val="solid"/>
-          </a:ln>
-        </p:spPr>
-      </p:sp>
-      <p:sp>
-        <p:nvSpPr>
-          <p:cNvPr id="18" name="Shape 16"/>
-          <p:cNvSpPr/>
-          <p:nvPr/>
-        </p:nvSpPr>
-        <p:spPr>
-          <a:xfrm>
-            <a:off x="8115300" y="1181100"/>
-            <a:ext cx="57150" cy="5143500"/>
-          </a:xfrm>
-          <a:prstGeom prst="rect">
-            <a:avLst/>
           </a:prstGeom>
           <a:solidFill>
             <a:srgbClr val="E15759"/>
@@ -6978,157 +7663,172 @@
       </p:sp>
       <p:sp>
         <p:nvSpPr>
-          <p:cNvPr id="19" name="Text 17"/>
-          <p:cNvSpPr/>
-          <p:nvPr/>
-        </p:nvSpPr>
-        <p:spPr>
-          <a:xfrm>
-            <a:off x="8286750" y="1333500"/>
-            <a:ext cx="3324225" cy="171450"/>
-          </a:xfrm>
-          <a:prstGeom prst="rect">
-            <a:avLst/>
-          </a:prstGeom>
-          <a:noFill/>
-          <a:ln/>
-        </p:spPr>
-        <p:txBody>
-          <a:bodyPr wrap="square" lIns="0" tIns="0" rIns="0" bIns="0" rtlCol="0" anchor="t"/>
-          <a:lstStyle/>
-          <a:p>
-            <a:pPr algn="l" indent="0" marL="0">
-              <a:buNone/>
-            </a:pPr>
-            <a:r>
-              <a:rPr lang="en-US" sz="1100" b="1" dirty="0">
-                <a:solidFill>
-                  <a:srgbClr val="E15759"/>
-                </a:solidFill>
-                <a:latin typeface="Helvetica Neue" pitchFamily="34" charset="0"/>
-                <a:ea typeface="Helvetica Neue" pitchFamily="34" charset="-122"/>
-                <a:cs typeface="Helvetica Neue" pitchFamily="34" charset="-120"/>
-              </a:rPr>
-              <a:t>OPTIMIZE SYSTEM</a:t>
-            </a:r>
-            <a:endParaRPr lang="en-US" sz="1100" dirty="0"/>
-          </a:p>
-        </p:txBody>
-      </p:sp>
-      <p:sp>
-        <p:nvSpPr>
-          <p:cNvPr id="20" name="Text 18"/>
-          <p:cNvSpPr/>
-          <p:nvPr/>
-        </p:nvSpPr>
-        <p:spPr>
-          <a:xfrm>
-            <a:off x="8286750" y="1600200"/>
-            <a:ext cx="3324225" cy="4572000"/>
-          </a:xfrm>
-          <a:prstGeom prst="rect">
-            <a:avLst/>
-          </a:prstGeom>
-          <a:noFill/>
-          <a:ln/>
-        </p:spPr>
-        <p:txBody>
-          <a:bodyPr wrap="square" lIns="0" tIns="0" rIns="0" bIns="0" rtlCol="0" anchor="t"/>
-          <a:lstStyle/>
-          <a:p>
-            <a:pPr algn="l" indent="0" marL="0">
-              <a:buNone/>
-            </a:pPr>
-            <a:r>
-              <a:rPr lang="en-US" sz="1800" b="1" dirty="0">
-                <a:solidFill>
-                  <a:srgbClr val="EAEAEA"/>
-                </a:solidFill>
-                <a:latin typeface="Helvetica Neue" pitchFamily="34" charset="0"/>
-                <a:ea typeface="Helvetica Neue" pitchFamily="34" charset="-122"/>
-                <a:cs typeface="Helvetica Neue" pitchFamily="34" charset="-120"/>
-              </a:rPr>
-              <a:t>Cross-channel price fabric</a:t>
-            </a:r>
-            <a:endParaRPr lang="en-US" sz="1800" dirty="0"/>
-          </a:p>
-        </p:txBody>
-      </p:sp>
-      <p:sp>
-        <p:nvSpPr>
-          <p:cNvPr id="21" name="Text 19"/>
-          <p:cNvSpPr/>
-          <p:nvPr/>
-        </p:nvSpPr>
-        <p:spPr>
-          <a:xfrm>
-            <a:off x="8286750" y="5962650"/>
-            <a:ext cx="3324225" cy="171450"/>
-          </a:xfrm>
-          <a:prstGeom prst="rect">
-            <a:avLst/>
-          </a:prstGeom>
-          <a:noFill/>
-          <a:ln/>
-        </p:spPr>
-        <p:txBody>
-          <a:bodyPr wrap="square" lIns="0" tIns="0" rIns="0" bIns="0" rtlCol="0" anchor="t"/>
-          <a:lstStyle/>
-          <a:p>
-            <a:pPr algn="l" indent="0" marL="0">
-              <a:buNone/>
-            </a:pPr>
-            <a:r>
-              <a:rPr lang="en-US" sz="1100" b="1" dirty="0">
-                <a:solidFill>
-                  <a:srgbClr val="E15759"/>
-                </a:solidFill>
-                <a:latin typeface="Helvetica Neue" pitchFamily="34" charset="0"/>
-                <a:ea typeface="Helvetica Neue" pitchFamily="34" charset="-122"/>
-                <a:cs typeface="Helvetica Neue" pitchFamily="34" charset="-120"/>
-              </a:rPr>
-              <a:t>9–18 MONTHS</a:t>
-            </a:r>
-            <a:endParaRPr lang="en-US" sz="1100" dirty="0"/>
-          </a:p>
-        </p:txBody>
-      </p:sp>
-      <p:sp>
-        <p:nvSpPr>
-          <p:cNvPr id="22" name="Text 20"/>
-          <p:cNvSpPr/>
-          <p:nvPr/>
-        </p:nvSpPr>
-        <p:spPr>
-          <a:xfrm>
-            <a:off x="8286750" y="5695950"/>
-            <a:ext cx="3324225" cy="190500"/>
-          </a:xfrm>
-          <a:prstGeom prst="rect">
-            <a:avLst/>
-          </a:prstGeom>
-          <a:noFill/>
-          <a:ln/>
-        </p:spPr>
-        <p:txBody>
-          <a:bodyPr wrap="square" lIns="0" tIns="0" rIns="0" bIns="0" rtlCol="0" anchor="t"/>
-          <a:lstStyle/>
-          <a:p>
-            <a:pPr algn="l" indent="0" marL="0">
-              <a:buNone/>
-            </a:pPr>
-            <a:r>
-              <a:rPr lang="en-US" sz="1100" dirty="0">
-                <a:solidFill>
-                  <a:srgbClr val="6C6C8A"/>
-                </a:solidFill>
-                <a:latin typeface="Helvetica Neue" pitchFamily="34" charset="0"/>
-                <a:ea typeface="Helvetica Neue" pitchFamily="34" charset="-122"/>
-                <a:cs typeface="Helvetica Neue" pitchFamily="34" charset="-120"/>
-              </a:rPr>
-              <a:t>Outlet / wholesale rules • Auto-clearance with caps • Finance-owned KPI pack</a:t>
-            </a:r>
-            <a:endParaRPr lang="en-US" sz="1100" dirty="0"/>
+          <p:cNvPr id="25" name="Text 22"/>
+          <p:cNvSpPr/>
+          <p:nvPr/>
+        </p:nvSpPr>
+        <p:spPr>
+          <a:xfrm>
+            <a:off x="5321300" y="3714750"/>
+            <a:ext cx="2978150" cy="381000"/>
+          </a:xfrm>
+          <a:prstGeom prst="rect">
+            <a:avLst/>
+          </a:prstGeom>
+          <a:noFill/>
+          <a:ln/>
+        </p:spPr>
+        <p:txBody>
+          <a:bodyPr wrap="square" lIns="0" tIns="0" rIns="0" bIns="0" rtlCol="0" anchor="ctr"/>
+          <a:lstStyle/>
+          <a:p>
+            <a:pPr algn="ctr" indent="0" marL="0">
+              <a:buNone/>
+            </a:pPr>
+            <a:r>
+              <a:rPr lang="en-US" sz="1200" b="1" dirty="0">
+                <a:solidFill>
+                  <a:srgbClr val="FFFFFF"/>
+                </a:solidFill>
+                <a:latin typeface="Helvetica Neue" pitchFamily="34" charset="0"/>
+                <a:ea typeface="Helvetica Neue" pitchFamily="34" charset="-122"/>
+                <a:cs typeface="Helvetica Neue" pitchFamily="34" charset="-120"/>
+              </a:rPr>
+              <a:t>Model + holdout</a:t>
+            </a:r>
+            <a:endParaRPr lang="en-US" sz="1200" dirty="0"/>
+          </a:p>
+        </p:txBody>
+      </p:sp>
+      <p:sp>
+        <p:nvSpPr>
+          <p:cNvPr id="26" name="Shape 23"/>
+          <p:cNvSpPr/>
+          <p:nvPr/>
+        </p:nvSpPr>
+        <p:spPr>
+          <a:xfrm>
+            <a:off x="5245100" y="4667250"/>
+            <a:ext cx="3130550" cy="381000"/>
+          </a:xfrm>
+          <a:prstGeom prst="roundRect">
+            <a:avLst>
+              <a:gd name="adj" fmla="val 24000"/>
+            </a:avLst>
+          </a:prstGeom>
+          <a:solidFill>
+            <a:srgbClr val="76B7B2"/>
+          </a:solidFill>
+          <a:ln w="12700">
+            <a:solidFill>
+              <a:srgbClr val="76B7B2"/>
+            </a:solidFill>
+            <a:prstDash val="solid"/>
+          </a:ln>
+        </p:spPr>
+      </p:sp>
+      <p:sp>
+        <p:nvSpPr>
+          <p:cNvPr id="27" name="Text 24"/>
+          <p:cNvSpPr/>
+          <p:nvPr/>
+        </p:nvSpPr>
+        <p:spPr>
+          <a:xfrm>
+            <a:off x="5321300" y="4667250"/>
+            <a:ext cx="2978150" cy="381000"/>
+          </a:xfrm>
+          <a:prstGeom prst="rect">
+            <a:avLst/>
+          </a:prstGeom>
+          <a:noFill/>
+          <a:ln/>
+        </p:spPr>
+        <p:txBody>
+          <a:bodyPr wrap="square" lIns="0" tIns="0" rIns="0" bIns="0" rtlCol="0" anchor="ctr"/>
+          <a:lstStyle/>
+          <a:p>
+            <a:pPr algn="ctr" indent="0" marL="0">
+              <a:buNone/>
+            </a:pPr>
+            <a:r>
+              <a:rPr lang="en-US" sz="1200" b="1" dirty="0">
+                <a:solidFill>
+                  <a:srgbClr val="FFFFFF"/>
+                </a:solidFill>
+                <a:latin typeface="Helvetica Neue" pitchFamily="34" charset="0"/>
+                <a:ea typeface="Helvetica Neue" pitchFamily="34" charset="-122"/>
+                <a:cs typeface="Helvetica Neue" pitchFamily="34" charset="-120"/>
+              </a:rPr>
+              <a:t>Execution path</a:t>
+            </a:r>
+            <a:endParaRPr lang="en-US" sz="1200" dirty="0"/>
+          </a:p>
+        </p:txBody>
+      </p:sp>
+      <p:sp>
+        <p:nvSpPr>
+          <p:cNvPr id="28" name="Shape 25"/>
+          <p:cNvSpPr/>
+          <p:nvPr/>
+        </p:nvSpPr>
+        <p:spPr>
+          <a:xfrm>
+            <a:off x="8566150" y="5619750"/>
+            <a:ext cx="3130550" cy="381000"/>
+          </a:xfrm>
+          <a:prstGeom prst="roundRect">
+            <a:avLst>
+              <a:gd name="adj" fmla="val 24000"/>
+            </a:avLst>
+          </a:prstGeom>
+          <a:solidFill>
+            <a:srgbClr val="59A14F"/>
+          </a:solidFill>
+          <a:ln w="12700">
+            <a:solidFill>
+              <a:srgbClr val="59A14F"/>
+            </a:solidFill>
+            <a:prstDash val="solid"/>
+          </a:ln>
+        </p:spPr>
+      </p:sp>
+      <p:sp>
+        <p:nvSpPr>
+          <p:cNvPr id="29" name="Text 26"/>
+          <p:cNvSpPr/>
+          <p:nvPr/>
+        </p:nvSpPr>
+        <p:spPr>
+          <a:xfrm>
+            <a:off x="8642350" y="5619750"/>
+            <a:ext cx="2978150" cy="381000"/>
+          </a:xfrm>
+          <a:prstGeom prst="rect">
+            <a:avLst/>
+          </a:prstGeom>
+          <a:noFill/>
+          <a:ln/>
+        </p:spPr>
+        <p:txBody>
+          <a:bodyPr wrap="square" lIns="0" tIns="0" rIns="0" bIns="0" rtlCol="0" anchor="ctr"/>
+          <a:lstStyle/>
+          <a:p>
+            <a:pPr algn="ctr" indent="0" marL="0">
+              <a:buNone/>
+            </a:pPr>
+            <a:r>
+              <a:rPr lang="en-US" sz="1200" b="1" dirty="0">
+                <a:solidFill>
+                  <a:srgbClr val="FFFFFF"/>
+                </a:solidFill>
+                <a:latin typeface="Helvetica Neue" pitchFamily="34" charset="0"/>
+                <a:ea typeface="Helvetica Neue" pitchFamily="34" charset="-122"/>
+                <a:cs typeface="Helvetica Neue" pitchFamily="34" charset="-120"/>
+              </a:rPr>
+              <a:t>Margin gate</a:t>
+            </a:r>
+            <a:endParaRPr lang="en-US" sz="1200" dirty="0"/>
           </a:p>
         </p:txBody>
       </p:sp>
@@ -7164,32 +7864,101 @@
           <a:chExt cx="0" cy="0"/>
         </a:xfrm>
       </p:grpSpPr>
-      <p:sp>
-        <p:nvSpPr>
-          <p:cNvPr id="2" name="Text 0"/>
-          <p:cNvSpPr/>
-          <p:nvPr/>
-        </p:nvSpPr>
-        <p:spPr>
-          <a:xfrm>
-            <a:off x="400050" y="304800"/>
-            <a:ext cx="11049000" cy="533400"/>
-          </a:xfrm>
-          <a:prstGeom prst="rect">
-            <a:avLst/>
-          </a:prstGeom>
-          <a:noFill/>
-          <a:ln/>
-        </p:spPr>
-        <p:txBody>
-          <a:bodyPr wrap="square" lIns="0" tIns="0" rIns="0" bIns="0" rtlCol="0" anchor="t"/>
-          <a:lstStyle/>
-          <a:p>
-            <a:pPr algn="l" indent="0" marL="0">
-              <a:buNone/>
-            </a:pPr>
-            <a:r>
-              <a:rPr lang="en-US" sz="3200" b="1" dirty="0">
+      <p:pic>
+        <p:nvPicPr>
+          <p:cNvPr id="2" name="Image 0" descr="/Users/dpadmana/projects/ppt-gen/themes/scientific/logo.svg">    </p:cNvPr>
+          <p:cNvPicPr>
+            <a:picLocks noChangeAspect="1"/>
+          </p:cNvPicPr>
+          <p:nvPr/>
+        </p:nvPicPr>
+        <p:blipFill>
+          <a:blip r:embed="rId1">
+            <a:extLst>
+              <a:ext uri="{96DAC541-7B7A-43D3-8B79-37D633B846F1}">
+                <asvg:svgBlip xmlns:asvg="http://schemas.microsoft.com/office/drawing/2016/SVG/main" r:embed="rId2"/>
+              </a:ext>
+            </a:extLst>
+          </a:blip>
+          <a:stretch>
+            <a:fillRect/>
+          </a:stretch>
+        </p:blipFill>
+        <p:spPr>
+          <a:xfrm>
+            <a:off x="11430000" y="266700"/>
+            <a:ext cx="419100" cy="419100"/>
+          </a:xfrm>
+          <a:prstGeom prst="rect">
+            <a:avLst/>
+          </a:prstGeom>
+        </p:spPr>
+      </p:pic>
+      <p:sp>
+        <p:nvSpPr>
+          <p:cNvPr id="3" name="Text 0"/>
+          <p:cNvSpPr/>
+          <p:nvPr/>
+        </p:nvSpPr>
+        <p:spPr>
+          <a:xfrm>
+            <a:off x="400050" y="457200"/>
+            <a:ext cx="1905000" cy="171450"/>
+          </a:xfrm>
+          <a:prstGeom prst="rect">
+            <a:avLst/>
+          </a:prstGeom>
+          <a:noFill/>
+          <a:ln/>
+        </p:spPr>
+        <p:txBody>
+          <a:bodyPr wrap="square" lIns="0" tIns="0" rIns="0" bIns="0" rtlCol="0" anchor="t"/>
+          <a:lstStyle/>
+          <a:p>
+            <a:pPr algn="l" indent="0" marL="0">
+              <a:buNone/>
+            </a:pPr>
+            <a:r>
+              <a:rPr lang="en-US" sz="1100" b="1" dirty="0">
+                <a:solidFill>
+                  <a:srgbClr val="E94560"/>
+                </a:solidFill>
+                <a:latin typeface="Helvetica Neue" pitchFamily="34" charset="0"/>
+                <a:ea typeface="Helvetica Neue" pitchFamily="34" charset="-122"/>
+                <a:cs typeface="Helvetica Neue" pitchFamily="34" charset="-120"/>
+              </a:rPr>
+              <a:t>THE DECISION</a:t>
+            </a:r>
+            <a:endParaRPr lang="en-US" sz="1100" dirty="0"/>
+          </a:p>
+        </p:txBody>
+      </p:sp>
+      <p:sp>
+        <p:nvSpPr>
+          <p:cNvPr id="4" name="Text 1"/>
+          <p:cNvSpPr/>
+          <p:nvPr/>
+        </p:nvSpPr>
+        <p:spPr>
+          <a:xfrm>
+            <a:off x="400050" y="1238250"/>
+            <a:ext cx="9525000" cy="1333500"/>
+          </a:xfrm>
+          <a:prstGeom prst="rect">
+            <a:avLst/>
+          </a:prstGeom>
+          <a:noFill/>
+          <a:ln/>
+        </p:spPr>
+        <p:txBody>
+          <a:bodyPr wrap="square" lIns="0" tIns="0" rIns="0" bIns="0" rtlCol="0" anchor="t"/>
+          <a:lstStyle/>
+          <a:p>
+            <a:pPr algn="l" indent="0" marL="0">
+              <a:buNone/>
+            </a:pPr>
+            <a:r>
+              <a:rPr lang="en-US" sz="4000" b="1" dirty="0">
                 <a:solidFill>
                   <a:srgbClr val="EAEAEA"/>
                 </a:solidFill>
@@ -7197,38 +7966,61 @@
                 <a:ea typeface="Helvetica Neue" pitchFamily="34" charset="-122"/>
                 <a:cs typeface="Helvetica Neue" pitchFamily="34" charset="-120"/>
               </a:rPr>
-              <a:t>90-day pilot squad</a:t>
-            </a:r>
-            <a:endParaRPr lang="en-US" sz="3200" dirty="0"/>
-          </a:p>
-        </p:txBody>
-      </p:sp>
-      <p:sp>
-        <p:nvSpPr>
-          <p:cNvPr id="3" name="Text 1"/>
-          <p:cNvSpPr/>
-          <p:nvPr/>
-        </p:nvSpPr>
-        <p:spPr>
-          <a:xfrm>
-            <a:off x="400050" y="857250"/>
-            <a:ext cx="10477500" cy="381000"/>
-          </a:xfrm>
-          <a:prstGeom prst="rect">
-            <a:avLst/>
-          </a:prstGeom>
-          <a:noFill/>
-          <a:ln/>
-        </p:spPr>
-        <p:txBody>
-          <a:bodyPr wrap="square" lIns="0" tIns="0" rIns="0" bIns="0" rtlCol="0" anchor="t"/>
-          <a:lstStyle/>
-          <a:p>
-            <a:pPr algn="l" indent="0" marL="0">
-              <a:buNone/>
-            </a:pPr>
-            <a:r>
-              <a:rPr lang="en-US" sz="1600" dirty="0">
+              <a:t>Treat markdown as a</a:t>
+            </a:r>
+            <a:endParaRPr lang="en-US" sz="4000" dirty="0"/>
+          </a:p>
+          <a:p>
+            <a:pPr algn="l" indent="0" marL="0">
+              <a:buNone/>
+            </a:pPr>
+            <a:r>
+              <a:rPr lang="en-US" sz="4000" b="1" dirty="0">
+                <a:solidFill>
+                  <a:srgbClr val="EAEAEA"/>
+                </a:solidFill>
+                <a:latin typeface="Helvetica Neue" pitchFamily="34" charset="0"/>
+                <a:ea typeface="Helvetica Neue" pitchFamily="34" charset="-122"/>
+                <a:cs typeface="Helvetica Neue" pitchFamily="34" charset="-120"/>
+              </a:rPr>
+              <a:t>decision system—not a fire drill.</a:t>
+            </a:r>
+            <a:endParaRPr lang="en-US" sz="4000" dirty="0"/>
+          </a:p>
+          <a:p>
+            <a:pPr algn="l" indent="0" marL="0">
+              <a:buNone/>
+            </a:pPr>
+            <a:endParaRPr lang="en-US" sz="4000" dirty="0"/>
+          </a:p>
+        </p:txBody>
+      </p:sp>
+      <p:sp>
+        <p:nvSpPr>
+          <p:cNvPr id="5" name="Text 2"/>
+          <p:cNvSpPr/>
+          <p:nvPr/>
+        </p:nvSpPr>
+        <p:spPr>
+          <a:xfrm>
+            <a:off x="400050" y="2952750"/>
+            <a:ext cx="8572500" cy="571500"/>
+          </a:xfrm>
+          <a:prstGeom prst="rect">
+            <a:avLst/>
+          </a:prstGeom>
+          <a:noFill/>
+          <a:ln/>
+        </p:spPr>
+        <p:txBody>
+          <a:bodyPr wrap="square" lIns="0" tIns="0" rIns="0" bIns="0" rtlCol="0" anchor="t"/>
+          <a:lstStyle/>
+          <a:p>
+            <a:pPr algn="l" indent="0" marL="0">
+              <a:buNone/>
+            </a:pPr>
+            <a:r>
+              <a:rPr lang="en-US" sz="2000" dirty="0">
                 <a:solidFill>
                   <a:srgbClr val="6C6C8A"/>
                 </a:solidFill>
@@ -7236,266 +8028,34 @@
                 <a:ea typeface="Helvetica Neue" pitchFamily="34" charset="-122"/>
                 <a:cs typeface="Helvetica Neue" pitchFamily="34" charset="-120"/>
               </a:rPr>
-              <a:t>Keep commercial ownership next to the algorithm</a:t>
-            </a:r>
-            <a:endParaRPr lang="en-US" sz="1600" dirty="0"/>
-          </a:p>
-        </p:txBody>
-      </p:sp>
-      <p:sp>
-        <p:nvSpPr>
-          <p:cNvPr id="4" name="Text 2"/>
-          <p:cNvSpPr/>
-          <p:nvPr/>
-        </p:nvSpPr>
-        <p:spPr>
-          <a:xfrm>
-            <a:off x="400050" y="6457950"/>
-            <a:ext cx="8572500" cy="171450"/>
-          </a:xfrm>
-          <a:prstGeom prst="rect">
-            <a:avLst/>
-          </a:prstGeom>
-          <a:noFill/>
-          <a:ln/>
-        </p:spPr>
-        <p:txBody>
-          <a:bodyPr wrap="square" lIns="0" tIns="0" rIns="0" bIns="0" rtlCol="0" anchor="t"/>
-          <a:lstStyle/>
-          <a:p>
-            <a:pPr algn="l" indent="0" marL="0">
-              <a:buNone/>
-            </a:pPr>
-            <a:r>
-              <a:rPr lang="en-US" sz="1100" b="1" dirty="0">
-                <a:solidFill>
-                  <a:srgbClr val="6C6C8A"/>
-                </a:solidFill>
-                <a:latin typeface="Helvetica Neue" pitchFamily="34" charset="0"/>
-                <a:ea typeface="Helvetica Neue" pitchFamily="34" charset="-122"/>
-                <a:cs typeface="Helvetica Neue" pitchFamily="34" charset="-120"/>
-              </a:rPr>
-              <a:t>APPAREL  ·  MARKDOWN STRATEGY</a:t>
-            </a:r>
-            <a:endParaRPr lang="en-US" sz="1100" dirty="0"/>
-          </a:p>
-        </p:txBody>
-      </p:sp>
-      <p:sp>
-        <p:nvSpPr>
-          <p:cNvPr id="5" name="Text 3"/>
-          <p:cNvSpPr/>
-          <p:nvPr/>
-        </p:nvSpPr>
-        <p:spPr>
-          <a:xfrm>
-            <a:off x="11334750" y="6457950"/>
-            <a:ext cx="457200" cy="171450"/>
-          </a:xfrm>
-          <a:prstGeom prst="rect">
-            <a:avLst/>
-          </a:prstGeom>
-          <a:noFill/>
-          <a:ln/>
-        </p:spPr>
-        <p:txBody>
-          <a:bodyPr wrap="square" lIns="0" tIns="0" rIns="0" bIns="0" rtlCol="0" anchor="t"/>
-          <a:lstStyle/>
-          <a:p>
-            <a:pPr algn="r" indent="0" marL="0">
-              <a:buNone/>
-            </a:pPr>
-            <a:r>
-              <a:rPr lang="en-US" sz="1200" dirty="0">
-                <a:solidFill>
-                  <a:srgbClr val="6C6C8A"/>
-                </a:solidFill>
-                <a:latin typeface="Helvetica Neue" pitchFamily="34" charset="0"/>
-                <a:ea typeface="Helvetica Neue" pitchFamily="34" charset="-122"/>
-                <a:cs typeface="Helvetica Neue" pitchFamily="34" charset="-120"/>
-              </a:rPr>
-              <a:t>09</a:t>
-            </a:r>
-            <a:endParaRPr lang="en-US" sz="1200" dirty="0"/>
-          </a:p>
-        </p:txBody>
-      </p:sp>
-      <p:sp>
-        <p:nvSpPr>
-          <p:cNvPr id="6" name="Text 4"/>
-          <p:cNvSpPr/>
-          <p:nvPr/>
-        </p:nvSpPr>
-        <p:spPr>
-          <a:xfrm>
-            <a:off x="1905000" y="1447800"/>
-            <a:ext cx="3168650" cy="171450"/>
-          </a:xfrm>
-          <a:prstGeom prst="rect">
-            <a:avLst/>
-          </a:prstGeom>
-          <a:noFill/>
-          <a:ln/>
-        </p:spPr>
-        <p:txBody>
-          <a:bodyPr wrap="square" lIns="0" tIns="0" rIns="0" bIns="0" rtlCol="0" anchor="t"/>
-          <a:lstStyle/>
-          <a:p>
-            <a:pPr algn="l" indent="0" marL="0">
-              <a:buNone/>
-            </a:pPr>
-            <a:r>
-              <a:rPr lang="en-US" sz="1100" b="1" dirty="0">
-                <a:solidFill>
-                  <a:srgbClr val="6C6C8A"/>
-                </a:solidFill>
-                <a:latin typeface="Helvetica Neue" pitchFamily="34" charset="0"/>
-                <a:ea typeface="Helvetica Neue" pitchFamily="34" charset="-122"/>
-                <a:cs typeface="Helvetica Neue" pitchFamily="34" charset="-120"/>
-              </a:rPr>
-              <a:t>WEEKS 1–3</a:t>
-            </a:r>
-            <a:endParaRPr lang="en-US" sz="1100" dirty="0"/>
-          </a:p>
-        </p:txBody>
-      </p:sp>
-      <p:sp>
-        <p:nvSpPr>
-          <p:cNvPr id="7" name="Text 5"/>
-          <p:cNvSpPr/>
-          <p:nvPr/>
-        </p:nvSpPr>
-        <p:spPr>
-          <a:xfrm>
-            <a:off x="5226050" y="1447800"/>
-            <a:ext cx="3168650" cy="171450"/>
-          </a:xfrm>
-          <a:prstGeom prst="rect">
-            <a:avLst/>
-          </a:prstGeom>
-          <a:noFill/>
-          <a:ln/>
-        </p:spPr>
-        <p:txBody>
-          <a:bodyPr wrap="square" lIns="0" tIns="0" rIns="0" bIns="0" rtlCol="0" anchor="t"/>
-          <a:lstStyle/>
-          <a:p>
-            <a:pPr algn="l" indent="0" marL="0">
-              <a:buNone/>
-            </a:pPr>
-            <a:r>
-              <a:rPr lang="en-US" sz="1100" b="1" dirty="0">
-                <a:solidFill>
-                  <a:srgbClr val="6C6C8A"/>
-                </a:solidFill>
-                <a:latin typeface="Helvetica Neue" pitchFamily="34" charset="0"/>
-                <a:ea typeface="Helvetica Neue" pitchFamily="34" charset="-122"/>
-                <a:cs typeface="Helvetica Neue" pitchFamily="34" charset="-120"/>
-              </a:rPr>
-              <a:t>WEEKS 4–7</a:t>
-            </a:r>
-            <a:endParaRPr lang="en-US" sz="1100" dirty="0"/>
-          </a:p>
-        </p:txBody>
-      </p:sp>
-      <p:sp>
-        <p:nvSpPr>
-          <p:cNvPr id="8" name="Text 6"/>
-          <p:cNvSpPr/>
-          <p:nvPr/>
-        </p:nvSpPr>
-        <p:spPr>
-          <a:xfrm>
-            <a:off x="8547100" y="1447800"/>
-            <a:ext cx="3168650" cy="171450"/>
-          </a:xfrm>
-          <a:prstGeom prst="rect">
-            <a:avLst/>
-          </a:prstGeom>
-          <a:noFill/>
-          <a:ln/>
-        </p:spPr>
-        <p:txBody>
-          <a:bodyPr wrap="square" lIns="0" tIns="0" rIns="0" bIns="0" rtlCol="0" anchor="t"/>
-          <a:lstStyle/>
-          <a:p>
-            <a:pPr algn="l" indent="0" marL="0">
-              <a:buNone/>
-            </a:pPr>
-            <a:r>
-              <a:rPr lang="en-US" sz="1100" b="1" dirty="0">
-                <a:solidFill>
-                  <a:srgbClr val="6C6C8A"/>
-                </a:solidFill>
-                <a:latin typeface="Helvetica Neue" pitchFamily="34" charset="0"/>
-                <a:ea typeface="Helvetica Neue" pitchFamily="34" charset="-122"/>
-                <a:cs typeface="Helvetica Neue" pitchFamily="34" charset="-120"/>
-              </a:rPr>
-              <a:t>WEEKS 8–12</a:t>
-            </a:r>
-            <a:endParaRPr lang="en-US" sz="1100" dirty="0"/>
-          </a:p>
-        </p:txBody>
-      </p:sp>
-      <p:sp>
-        <p:nvSpPr>
-          <p:cNvPr id="9" name="Text 7"/>
-          <p:cNvSpPr/>
-          <p:nvPr/>
-        </p:nvSpPr>
-        <p:spPr>
-          <a:xfrm>
-            <a:off x="400050" y="1866900"/>
-            <a:ext cx="1257300" cy="152400"/>
-          </a:xfrm>
-          <a:prstGeom prst="rect">
-            <a:avLst/>
-          </a:prstGeom>
-          <a:noFill/>
-          <a:ln/>
-        </p:spPr>
-        <p:txBody>
-          <a:bodyPr wrap="square" lIns="0" tIns="0" rIns="0" bIns="0" rtlCol="0" anchor="t"/>
-          <a:lstStyle/>
-          <a:p>
-            <a:pPr algn="l" indent="0" marL="0">
-              <a:buNone/>
-            </a:pPr>
-            <a:r>
-              <a:rPr lang="en-US" sz="1300" b="1" dirty="0">
-                <a:solidFill>
-                  <a:srgbClr val="EAEAEA"/>
-                </a:solidFill>
-                <a:latin typeface="Helvetica Neue" pitchFamily="34" charset="0"/>
-                <a:ea typeface="Helvetica Neue" pitchFamily="34" charset="-122"/>
-                <a:cs typeface="Helvetica Neue" pitchFamily="34" charset="-120"/>
-              </a:rPr>
-              <a:t>Merchandising</a:t>
-            </a:r>
-            <a:endParaRPr lang="en-US" sz="1300" dirty="0"/>
-          </a:p>
-        </p:txBody>
-      </p:sp>
-      <p:sp>
-        <p:nvSpPr>
-          <p:cNvPr id="10" name="Shape 8"/>
-          <p:cNvSpPr/>
-          <p:nvPr/>
-        </p:nvSpPr>
-        <p:spPr>
-          <a:xfrm>
-            <a:off x="1828800" y="1752600"/>
-            <a:ext cx="9963150" cy="822960"/>
-          </a:xfrm>
-          <a:prstGeom prst="rect">
-            <a:avLst/>
+              <a:t>Start with two categories, one holdout design, and a finance co-owner.</a:t>
+            </a:r>
+            <a:endParaRPr lang="en-US" sz="2000" dirty="0"/>
+          </a:p>
+        </p:txBody>
+      </p:sp>
+      <p:sp>
+        <p:nvSpPr>
+          <p:cNvPr id="6" name="Shape 3"/>
+          <p:cNvSpPr/>
+          <p:nvPr/>
+        </p:nvSpPr>
+        <p:spPr>
+          <a:xfrm>
+            <a:off x="400050" y="4000500"/>
+            <a:ext cx="3448050" cy="1143000"/>
+          </a:xfrm>
+          <a:prstGeom prst="roundRect">
+            <a:avLst>
+              <a:gd name="adj" fmla="val 8000"/>
+            </a:avLst>
           </a:prstGeom>
           <a:solidFill>
             <a:srgbClr val="2B2B4A"/>
           </a:solidFill>
-          <a:ln w="15875">
+          <a:ln w="12700">
             <a:solidFill>
-              <a:srgbClr val="3A3A5C"/>
+              <a:srgbClr val="2B2B4A"/>
             </a:solidFill>
             <a:prstDash val="solid"/>
           </a:ln>
@@ -7503,63 +8063,24 @@
       </p:sp>
       <p:sp>
         <p:nvSpPr>
-          <p:cNvPr id="11" name="Text 9"/>
-          <p:cNvSpPr/>
-          <p:nvPr/>
-        </p:nvSpPr>
-        <p:spPr>
-          <a:xfrm>
-            <a:off x="400050" y="2766060"/>
-            <a:ext cx="1257300" cy="152400"/>
-          </a:xfrm>
-          <a:prstGeom prst="rect">
-            <a:avLst/>
-          </a:prstGeom>
-          <a:noFill/>
-          <a:ln/>
-        </p:spPr>
-        <p:txBody>
-          <a:bodyPr wrap="square" lIns="0" tIns="0" rIns="0" bIns="0" rtlCol="0" anchor="t"/>
-          <a:lstStyle/>
-          <a:p>
-            <a:pPr algn="l" indent="0" marL="0">
-              <a:buNone/>
-            </a:pPr>
-            <a:r>
-              <a:rPr lang="en-US" sz="1300" b="1" dirty="0">
-                <a:solidFill>
-                  <a:srgbClr val="EAEAEA"/>
-                </a:solidFill>
-                <a:latin typeface="Helvetica Neue" pitchFamily="34" charset="0"/>
-                <a:ea typeface="Helvetica Neue" pitchFamily="34" charset="-122"/>
-                <a:cs typeface="Helvetica Neue" pitchFamily="34" charset="-120"/>
-              </a:rPr>
-              <a:t>Planning</a:t>
-            </a:r>
-            <a:endParaRPr lang="en-US" sz="1300" dirty="0"/>
-          </a:p>
-        </p:txBody>
-      </p:sp>
-      <p:sp>
-        <p:nvSpPr>
-          <p:cNvPr id="12" name="Shape 10"/>
-          <p:cNvSpPr/>
-          <p:nvPr/>
-        </p:nvSpPr>
-        <p:spPr>
-          <a:xfrm>
-            <a:off x="1828800" y="2651760"/>
-            <a:ext cx="9963150" cy="822960"/>
-          </a:xfrm>
-          <a:prstGeom prst="rect">
-            <a:avLst/>
-          </a:prstGeom>
-          <a:solidFill>
-            <a:srgbClr val="1F1F36"/>
-          </a:solidFill>
-          <a:ln w="15875">
+          <p:cNvPr id="7" name="Shape 4"/>
+          <p:cNvSpPr/>
+          <p:nvPr/>
+        </p:nvSpPr>
+        <p:spPr>
+          <a:xfrm>
+            <a:off x="400050" y="4000500"/>
+            <a:ext cx="57150" cy="1143000"/>
+          </a:xfrm>
+          <a:prstGeom prst="rect">
+            <a:avLst/>
+          </a:prstGeom>
+          <a:solidFill>
+            <a:srgbClr val="76B7B2"/>
+          </a:solidFill>
+          <a:ln w="12700">
             <a:solidFill>
-              <a:srgbClr val="3A3A5C"/>
+              <a:srgbClr val="76B7B2"/>
             </a:solidFill>
             <a:prstDash val="solid"/>
           </a:ln>
@@ -7567,30 +8088,69 @@
       </p:sp>
       <p:sp>
         <p:nvSpPr>
-          <p:cNvPr id="13" name="Text 11"/>
-          <p:cNvSpPr/>
-          <p:nvPr/>
-        </p:nvSpPr>
-        <p:spPr>
-          <a:xfrm>
-            <a:off x="400050" y="3665220"/>
-            <a:ext cx="1257300" cy="152400"/>
-          </a:xfrm>
-          <a:prstGeom prst="rect">
-            <a:avLst/>
-          </a:prstGeom>
-          <a:noFill/>
-          <a:ln/>
-        </p:spPr>
-        <p:txBody>
-          <a:bodyPr wrap="square" lIns="0" tIns="0" rIns="0" bIns="0" rtlCol="0" anchor="t"/>
-          <a:lstStyle/>
-          <a:p>
-            <a:pPr algn="l" indent="0" marL="0">
-              <a:buNone/>
-            </a:pPr>
-            <a:r>
-              <a:rPr lang="en-US" sz="1300" b="1" dirty="0">
+          <p:cNvPr id="8" name="Text 5"/>
+          <p:cNvSpPr/>
+          <p:nvPr/>
+        </p:nvSpPr>
+        <p:spPr>
+          <a:xfrm>
+            <a:off x="571500" y="4152900"/>
+            <a:ext cx="3105150" cy="171450"/>
+          </a:xfrm>
+          <a:prstGeom prst="rect">
+            <a:avLst/>
+          </a:prstGeom>
+          <a:noFill/>
+          <a:ln/>
+        </p:spPr>
+        <p:txBody>
+          <a:bodyPr wrap="square" lIns="0" tIns="0" rIns="0" bIns="0" rtlCol="0" anchor="t"/>
+          <a:lstStyle/>
+          <a:p>
+            <a:pPr algn="l" indent="0" marL="0">
+              <a:buNone/>
+            </a:pPr>
+            <a:r>
+              <a:rPr lang="en-US" sz="1100" b="1" dirty="0">
+                <a:solidFill>
+                  <a:srgbClr val="76B7B2"/>
+                </a:solidFill>
+                <a:latin typeface="Helvetica Neue" pitchFamily="34" charset="0"/>
+                <a:ea typeface="Helvetica Neue" pitchFamily="34" charset="-122"/>
+                <a:cs typeface="Helvetica Neue" pitchFamily="34" charset="-120"/>
+              </a:rPr>
+              <a:t>1. PICK PILOTS</a:t>
+            </a:r>
+            <a:endParaRPr lang="en-US" sz="1100" dirty="0"/>
+          </a:p>
+        </p:txBody>
+      </p:sp>
+      <p:sp>
+        <p:nvSpPr>
+          <p:cNvPr id="9" name="Text 6"/>
+          <p:cNvSpPr/>
+          <p:nvPr/>
+        </p:nvSpPr>
+        <p:spPr>
+          <a:xfrm>
+            <a:off x="571500" y="4419600"/>
+            <a:ext cx="3105150" cy="571500"/>
+          </a:xfrm>
+          <a:prstGeom prst="rect">
+            <a:avLst/>
+          </a:prstGeom>
+          <a:noFill/>
+          <a:ln/>
+        </p:spPr>
+        <p:txBody>
+          <a:bodyPr wrap="square" lIns="0" tIns="0" rIns="0" bIns="0" rtlCol="0" anchor="t"/>
+          <a:lstStyle/>
+          <a:p>
+            <a:pPr algn="l" indent="0" marL="0">
+              <a:buNone/>
+            </a:pPr>
+            <a:r>
+              <a:rPr lang="en-US" sz="1600" b="1" dirty="0">
                 <a:solidFill>
                   <a:srgbClr val="EAEAEA"/>
                 </a:solidFill>
@@ -7598,32 +8158,34 @@
                 <a:ea typeface="Helvetica Neue" pitchFamily="34" charset="-122"/>
                 <a:cs typeface="Helvetica Neue" pitchFamily="34" charset="-120"/>
               </a:rPr>
-              <a:t>Data science</a:t>
-            </a:r>
-            <a:endParaRPr lang="en-US" sz="1300" dirty="0"/>
-          </a:p>
-        </p:txBody>
-      </p:sp>
-      <p:sp>
-        <p:nvSpPr>
-          <p:cNvPr id="14" name="Shape 12"/>
-          <p:cNvSpPr/>
-          <p:nvPr/>
-        </p:nvSpPr>
-        <p:spPr>
-          <a:xfrm>
-            <a:off x="1828800" y="3550920"/>
-            <a:ext cx="9963150" cy="822960"/>
-          </a:xfrm>
-          <a:prstGeom prst="rect">
-            <a:avLst/>
+              <a:t>High-volume categories with residual risk</a:t>
+            </a:r>
+            <a:endParaRPr lang="en-US" sz="1600" dirty="0"/>
+          </a:p>
+        </p:txBody>
+      </p:sp>
+      <p:sp>
+        <p:nvSpPr>
+          <p:cNvPr id="10" name="Shape 7"/>
+          <p:cNvSpPr/>
+          <p:nvPr/>
+        </p:nvSpPr>
+        <p:spPr>
+          <a:xfrm>
+            <a:off x="4171950" y="4000500"/>
+            <a:ext cx="3448050" cy="1143000"/>
+          </a:xfrm>
+          <a:prstGeom prst="roundRect">
+            <a:avLst>
+              <a:gd name="adj" fmla="val 8000"/>
+            </a:avLst>
           </a:prstGeom>
           <a:solidFill>
             <a:srgbClr val="2B2B4A"/>
           </a:solidFill>
-          <a:ln w="15875">
+          <a:ln w="12700">
             <a:solidFill>
-              <a:srgbClr val="3A3A5C"/>
+              <a:srgbClr val="2B2B4A"/>
             </a:solidFill>
             <a:prstDash val="solid"/>
           </a:ln>
@@ -7631,147 +8193,17 @@
       </p:sp>
       <p:sp>
         <p:nvSpPr>
-          <p:cNvPr id="15" name="Text 13"/>
-          <p:cNvSpPr/>
-          <p:nvPr/>
-        </p:nvSpPr>
-        <p:spPr>
-          <a:xfrm>
-            <a:off x="400050" y="4564380"/>
-            <a:ext cx="1257300" cy="152400"/>
-          </a:xfrm>
-          <a:prstGeom prst="rect">
-            <a:avLst/>
-          </a:prstGeom>
-          <a:noFill/>
-          <a:ln/>
-        </p:spPr>
-        <p:txBody>
-          <a:bodyPr wrap="square" lIns="0" tIns="0" rIns="0" bIns="0" rtlCol="0" anchor="t"/>
-          <a:lstStyle/>
-          <a:p>
-            <a:pPr algn="l" indent="0" marL="0">
-              <a:buNone/>
-            </a:pPr>
-            <a:r>
-              <a:rPr lang="en-US" sz="1300" b="1" dirty="0">
-                <a:solidFill>
-                  <a:srgbClr val="EAEAEA"/>
-                </a:solidFill>
-                <a:latin typeface="Helvetica Neue" pitchFamily="34" charset="0"/>
-                <a:ea typeface="Helvetica Neue" pitchFamily="34" charset="-122"/>
-                <a:cs typeface="Helvetica Neue" pitchFamily="34" charset="-120"/>
-              </a:rPr>
-              <a:t>Stores / e-comm</a:t>
-            </a:r>
-            <a:endParaRPr lang="en-US" sz="1300" dirty="0"/>
-          </a:p>
-        </p:txBody>
-      </p:sp>
-      <p:sp>
-        <p:nvSpPr>
-          <p:cNvPr id="16" name="Shape 14"/>
-          <p:cNvSpPr/>
-          <p:nvPr/>
-        </p:nvSpPr>
-        <p:spPr>
-          <a:xfrm>
-            <a:off x="1828800" y="4450080"/>
-            <a:ext cx="9963150" cy="822960"/>
-          </a:xfrm>
-          <a:prstGeom prst="rect">
-            <a:avLst/>
-          </a:prstGeom>
-          <a:solidFill>
-            <a:srgbClr val="1F1F36"/>
-          </a:solidFill>
-          <a:ln w="15875">
-            <a:solidFill>
-              <a:srgbClr val="3A3A5C"/>
-            </a:solidFill>
-            <a:prstDash val="solid"/>
-          </a:ln>
-        </p:spPr>
-      </p:sp>
-      <p:sp>
-        <p:nvSpPr>
-          <p:cNvPr id="17" name="Text 15"/>
-          <p:cNvSpPr/>
-          <p:nvPr/>
-        </p:nvSpPr>
-        <p:spPr>
-          <a:xfrm>
-            <a:off x="400050" y="5463540"/>
-            <a:ext cx="1257300" cy="152400"/>
-          </a:xfrm>
-          <a:prstGeom prst="rect">
-            <a:avLst/>
-          </a:prstGeom>
-          <a:noFill/>
-          <a:ln/>
-        </p:spPr>
-        <p:txBody>
-          <a:bodyPr wrap="square" lIns="0" tIns="0" rIns="0" bIns="0" rtlCol="0" anchor="t"/>
-          <a:lstStyle/>
-          <a:p>
-            <a:pPr algn="l" indent="0" marL="0">
-              <a:buNone/>
-            </a:pPr>
-            <a:r>
-              <a:rPr lang="en-US" sz="1300" b="1" dirty="0">
-                <a:solidFill>
-                  <a:srgbClr val="EAEAEA"/>
-                </a:solidFill>
-                <a:latin typeface="Helvetica Neue" pitchFamily="34" charset="0"/>
-                <a:ea typeface="Helvetica Neue" pitchFamily="34" charset="-122"/>
-                <a:cs typeface="Helvetica Neue" pitchFamily="34" charset="-120"/>
-              </a:rPr>
-              <a:t>Finance</a:t>
-            </a:r>
-            <a:endParaRPr lang="en-US" sz="1300" dirty="0"/>
-          </a:p>
-        </p:txBody>
-      </p:sp>
-      <p:sp>
-        <p:nvSpPr>
-          <p:cNvPr id="18" name="Shape 16"/>
-          <p:cNvSpPr/>
-          <p:nvPr/>
-        </p:nvSpPr>
-        <p:spPr>
-          <a:xfrm>
-            <a:off x="1828800" y="5349240"/>
-            <a:ext cx="9963150" cy="822960"/>
-          </a:xfrm>
-          <a:prstGeom prst="rect">
-            <a:avLst/>
-          </a:prstGeom>
-          <a:solidFill>
-            <a:srgbClr val="2B2B4A"/>
-          </a:solidFill>
-          <a:ln w="15875">
-            <a:solidFill>
-              <a:srgbClr val="3A3A5C"/>
-            </a:solidFill>
-            <a:prstDash val="solid"/>
-          </a:ln>
-        </p:spPr>
-      </p:sp>
-      <p:sp>
-        <p:nvSpPr>
-          <p:cNvPr id="19" name="Shape 17"/>
-          <p:cNvSpPr/>
-          <p:nvPr/>
-        </p:nvSpPr>
-        <p:spPr>
-          <a:xfrm>
-            <a:off x="1924050" y="1905000"/>
-            <a:ext cx="3130550" cy="304800"/>
-          </a:xfrm>
-          <a:prstGeom prst="roundRect">
-            <a:avLst>
-              <a:gd name="adj" fmla="val 30000"/>
-            </a:avLst>
+          <p:cNvPr id="11" name="Shape 8"/>
+          <p:cNvSpPr/>
+          <p:nvPr/>
+        </p:nvSpPr>
+        <p:spPr>
+          <a:xfrm>
+            <a:off x="4171950" y="4000500"/>
+            <a:ext cx="57150" cy="1143000"/>
+          </a:xfrm>
+          <a:prstGeom prst="rect">
+            <a:avLst/>
           </a:prstGeom>
           <a:solidFill>
             <a:srgbClr val="4E79A7"/>
@@ -7786,38 +8218,38 @@
       </p:sp>
       <p:sp>
         <p:nvSpPr>
-          <p:cNvPr id="20" name="Text 18"/>
-          <p:cNvSpPr/>
-          <p:nvPr/>
-        </p:nvSpPr>
-        <p:spPr>
-          <a:xfrm>
-            <a:off x="2000250" y="1885950"/>
-            <a:ext cx="2978150" cy="171450"/>
-          </a:xfrm>
-          <a:prstGeom prst="rect">
-            <a:avLst/>
-          </a:prstGeom>
-          <a:noFill/>
-          <a:ln/>
-        </p:spPr>
-        <p:txBody>
-          <a:bodyPr wrap="square" lIns="0" tIns="0" rIns="0" bIns="0" rtlCol="0" anchor="t"/>
-          <a:lstStyle/>
-          <a:p>
-            <a:pPr algn="ctr" indent="0" marL="0">
+          <p:cNvPr id="12" name="Text 9"/>
+          <p:cNvSpPr/>
+          <p:nvPr/>
+        </p:nvSpPr>
+        <p:spPr>
+          <a:xfrm>
+            <a:off x="4343400" y="4152900"/>
+            <a:ext cx="3105150" cy="171450"/>
+          </a:xfrm>
+          <a:prstGeom prst="rect">
+            <a:avLst/>
+          </a:prstGeom>
+          <a:noFill/>
+          <a:ln/>
+        </p:spPr>
+        <p:txBody>
+          <a:bodyPr wrap="square" lIns="0" tIns="0" rIns="0" bIns="0" rtlCol="0" anchor="t"/>
+          <a:lstStyle/>
+          <a:p>
+            <a:pPr algn="l" indent="0" marL="0">
               <a:buNone/>
             </a:pPr>
             <a:r>
               <a:rPr lang="en-US" sz="1100" b="1" dirty="0">
                 <a:solidFill>
-                  <a:srgbClr val="FFFFFF"/>
-                </a:solidFill>
-                <a:latin typeface="Helvetica Neue" pitchFamily="34" charset="0"/>
-                <a:ea typeface="Helvetica Neue" pitchFamily="34" charset="-122"/>
-                <a:cs typeface="Helvetica Neue" pitchFamily="34" charset="-120"/>
-              </a:rPr>
-              <a:t>Category charter</a:t>
+                  <a:srgbClr val="4E79A7"/>
+                </a:solidFill>
+                <a:latin typeface="Helvetica Neue" pitchFamily="34" charset="0"/>
+                <a:ea typeface="Helvetica Neue" pitchFamily="34" charset="-122"/>
+                <a:cs typeface="Helvetica Neue" pitchFamily="34" charset="-120"/>
+              </a:rPr>
+              <a:t>2. PROVE INCREMENTALITY</a:t>
             </a:r>
             <a:endParaRPr lang="en-US" sz="1100" dirty="0"/>
           </a:p>
@@ -7825,26 +8257,65 @@
       </p:sp>
       <p:sp>
         <p:nvSpPr>
-          <p:cNvPr id="21" name="Shape 19"/>
-          <p:cNvSpPr/>
-          <p:nvPr/>
-        </p:nvSpPr>
-        <p:spPr>
-          <a:xfrm>
-            <a:off x="1924050" y="2804160"/>
-            <a:ext cx="3130550" cy="304800"/>
+          <p:cNvPr id="13" name="Text 10"/>
+          <p:cNvSpPr/>
+          <p:nvPr/>
+        </p:nvSpPr>
+        <p:spPr>
+          <a:xfrm>
+            <a:off x="4343400" y="4419600"/>
+            <a:ext cx="3105150" cy="571500"/>
+          </a:xfrm>
+          <a:prstGeom prst="rect">
+            <a:avLst/>
+          </a:prstGeom>
+          <a:noFill/>
+          <a:ln/>
+        </p:spPr>
+        <p:txBody>
+          <a:bodyPr wrap="square" lIns="0" tIns="0" rIns="0" bIns="0" rtlCol="0" anchor="t"/>
+          <a:lstStyle/>
+          <a:p>
+            <a:pPr algn="l" indent="0" marL="0">
+              <a:buNone/>
+            </a:pPr>
+            <a:r>
+              <a:rPr lang="en-US" sz="1600" b="1" dirty="0">
+                <a:solidFill>
+                  <a:srgbClr val="EAEAEA"/>
+                </a:solidFill>
+                <a:latin typeface="Helvetica Neue" pitchFamily="34" charset="0"/>
+                <a:ea typeface="Helvetica Neue" pitchFamily="34" charset="-122"/>
+                <a:cs typeface="Helvetica Neue" pitchFamily="34" charset="-120"/>
+              </a:rPr>
+              <a:t>Holdouts on price depth and timing</a:t>
+            </a:r>
+            <a:endParaRPr lang="en-US" sz="1600" dirty="0"/>
+          </a:p>
+        </p:txBody>
+      </p:sp>
+      <p:sp>
+        <p:nvSpPr>
+          <p:cNvPr id="14" name="Shape 11"/>
+          <p:cNvSpPr/>
+          <p:nvPr/>
+        </p:nvSpPr>
+        <p:spPr>
+          <a:xfrm>
+            <a:off x="7943850" y="4000500"/>
+            <a:ext cx="3448050" cy="1143000"/>
           </a:xfrm>
           <a:prstGeom prst="roundRect">
             <a:avLst>
-              <a:gd name="adj" fmla="val 30000"/>
+              <a:gd name="adj" fmla="val 8000"/>
             </a:avLst>
           </a:prstGeom>
           <a:solidFill>
-            <a:srgbClr val="F28E2B"/>
+            <a:srgbClr val="2B2B4A"/>
           </a:solidFill>
           <a:ln w="12700">
             <a:solidFill>
-              <a:srgbClr val="F28E2B"/>
+              <a:srgbClr val="2B2B4A"/>
             </a:solidFill>
             <a:prstDash val="solid"/>
           </a:ln>
@@ -7852,65 +8323,24 @@
       </p:sp>
       <p:sp>
         <p:nvSpPr>
-          <p:cNvPr id="22" name="Text 20"/>
-          <p:cNvSpPr/>
-          <p:nvPr/>
-        </p:nvSpPr>
-        <p:spPr>
-          <a:xfrm>
-            <a:off x="2000250" y="2785110"/>
-            <a:ext cx="2978150" cy="171450"/>
-          </a:xfrm>
-          <a:prstGeom prst="rect">
-            <a:avLst/>
-          </a:prstGeom>
-          <a:noFill/>
-          <a:ln/>
-        </p:spPr>
-        <p:txBody>
-          <a:bodyPr wrap="square" lIns="0" tIns="0" rIns="0" bIns="0" rtlCol="0" anchor="t"/>
-          <a:lstStyle/>
-          <a:p>
-            <a:pPr algn="ctr" indent="0" marL="0">
-              <a:buNone/>
-            </a:pPr>
-            <a:r>
-              <a:rPr lang="en-US" sz="1100" b="1" dirty="0">
-                <a:solidFill>
-                  <a:srgbClr val="FFFFFF"/>
-                </a:solidFill>
-                <a:latin typeface="Helvetica Neue" pitchFamily="34" charset="0"/>
-                <a:ea typeface="Helvetica Neue" pitchFamily="34" charset="-122"/>
-                <a:cs typeface="Helvetica Neue" pitchFamily="34" charset="-120"/>
-              </a:rPr>
-              <a:t>Risk rules</a:t>
-            </a:r>
-            <a:endParaRPr lang="en-US" sz="1100" dirty="0"/>
-          </a:p>
-        </p:txBody>
-      </p:sp>
-      <p:sp>
-        <p:nvSpPr>
-          <p:cNvPr id="23" name="Shape 21"/>
-          <p:cNvSpPr/>
-          <p:nvPr/>
-        </p:nvSpPr>
-        <p:spPr>
-          <a:xfrm>
-            <a:off x="5245100" y="3703320"/>
-            <a:ext cx="3130550" cy="304800"/>
-          </a:xfrm>
-          <a:prstGeom prst="roundRect">
-            <a:avLst>
-              <a:gd name="adj" fmla="val 30000"/>
-            </a:avLst>
-          </a:prstGeom>
-          <a:solidFill>
-            <a:srgbClr val="E15759"/>
+          <p:cNvPr id="15" name="Shape 12"/>
+          <p:cNvSpPr/>
+          <p:nvPr/>
+        </p:nvSpPr>
+        <p:spPr>
+          <a:xfrm>
+            <a:off x="7943850" y="4000500"/>
+            <a:ext cx="57150" cy="1143000"/>
+          </a:xfrm>
+          <a:prstGeom prst="rect">
+            <a:avLst/>
+          </a:prstGeom>
+          <a:solidFill>
+            <a:srgbClr val="E94560"/>
           </a:solidFill>
           <a:ln w="12700">
             <a:solidFill>
-              <a:srgbClr val="E15759"/>
+              <a:srgbClr val="E94560"/>
             </a:solidFill>
             <a:prstDash val="solid"/>
           </a:ln>
@@ -7918,38 +8348,38 @@
       </p:sp>
       <p:sp>
         <p:nvSpPr>
-          <p:cNvPr id="24" name="Text 22"/>
-          <p:cNvSpPr/>
-          <p:nvPr/>
-        </p:nvSpPr>
-        <p:spPr>
-          <a:xfrm>
-            <a:off x="5321300" y="3684270"/>
-            <a:ext cx="2978150" cy="171450"/>
-          </a:xfrm>
-          <a:prstGeom prst="rect">
-            <a:avLst/>
-          </a:prstGeom>
-          <a:noFill/>
-          <a:ln/>
-        </p:spPr>
-        <p:txBody>
-          <a:bodyPr wrap="square" lIns="0" tIns="0" rIns="0" bIns="0" rtlCol="0" anchor="t"/>
-          <a:lstStyle/>
-          <a:p>
-            <a:pPr algn="ctr" indent="0" marL="0">
+          <p:cNvPr id="16" name="Text 13"/>
+          <p:cNvSpPr/>
+          <p:nvPr/>
+        </p:nvSpPr>
+        <p:spPr>
+          <a:xfrm>
+            <a:off x="8115300" y="4152900"/>
+            <a:ext cx="3105150" cy="171450"/>
+          </a:xfrm>
+          <a:prstGeom prst="rect">
+            <a:avLst/>
+          </a:prstGeom>
+          <a:noFill/>
+          <a:ln/>
+        </p:spPr>
+        <p:txBody>
+          <a:bodyPr wrap="square" lIns="0" tIns="0" rIns="0" bIns="0" rtlCol="0" anchor="t"/>
+          <a:lstStyle/>
+          <a:p>
+            <a:pPr algn="l" indent="0" marL="0">
               <a:buNone/>
             </a:pPr>
             <a:r>
               <a:rPr lang="en-US" sz="1100" b="1" dirty="0">
                 <a:solidFill>
-                  <a:srgbClr val="FFFFFF"/>
-                </a:solidFill>
-                <a:latin typeface="Helvetica Neue" pitchFamily="34" charset="0"/>
-                <a:ea typeface="Helvetica Neue" pitchFamily="34" charset="-122"/>
-                <a:cs typeface="Helvetica Neue" pitchFamily="34" charset="-120"/>
-              </a:rPr>
-              <a:t>Model + holdout</a:t>
+                  <a:srgbClr val="E94560"/>
+                </a:solidFill>
+                <a:latin typeface="Helvetica Neue" pitchFamily="34" charset="0"/>
+                <a:ea typeface="Helvetica Neue" pitchFamily="34" charset="-122"/>
+                <a:cs typeface="Helvetica Neue" pitchFamily="34" charset="-120"/>
+              </a:rPr>
+              <a:t>3. SCALE THE FABRIC</a:t>
             </a:r>
             <a:endParaRPr lang="en-US" sz="1100" dirty="0"/>
           </a:p>
@@ -7957,65 +8387,116 @@
       </p:sp>
       <p:sp>
         <p:nvSpPr>
-          <p:cNvPr id="25" name="Shape 23"/>
-          <p:cNvSpPr/>
-          <p:nvPr/>
-        </p:nvSpPr>
-        <p:spPr>
-          <a:xfrm>
-            <a:off x="5245100" y="4602480"/>
-            <a:ext cx="3130550" cy="304800"/>
-          </a:xfrm>
-          <a:prstGeom prst="roundRect">
-            <a:avLst>
-              <a:gd name="adj" fmla="val 30000"/>
-            </a:avLst>
-          </a:prstGeom>
-          <a:solidFill>
-            <a:srgbClr val="76B7B2"/>
-          </a:solidFill>
-          <a:ln w="12700">
-            <a:solidFill>
-              <a:srgbClr val="76B7B2"/>
-            </a:solidFill>
-            <a:prstDash val="solid"/>
-          </a:ln>
-        </p:spPr>
-      </p:sp>
-      <p:sp>
-        <p:nvSpPr>
-          <p:cNvPr id="26" name="Text 24"/>
-          <p:cNvSpPr/>
-          <p:nvPr/>
-        </p:nvSpPr>
-        <p:spPr>
-          <a:xfrm>
-            <a:off x="5321300" y="4583430"/>
-            <a:ext cx="2978150" cy="171450"/>
-          </a:xfrm>
-          <a:prstGeom prst="rect">
-            <a:avLst/>
-          </a:prstGeom>
-          <a:noFill/>
-          <a:ln/>
-        </p:spPr>
-        <p:txBody>
-          <a:bodyPr wrap="square" lIns="0" tIns="0" rIns="0" bIns="0" rtlCol="0" anchor="t"/>
-          <a:lstStyle/>
-          <a:p>
-            <a:pPr algn="ctr" indent="0" marL="0">
+          <p:cNvPr id="17" name="Text 14"/>
+          <p:cNvSpPr/>
+          <p:nvPr/>
+        </p:nvSpPr>
+        <p:spPr>
+          <a:xfrm>
+            <a:off x="8115300" y="4419600"/>
+            <a:ext cx="3105150" cy="571500"/>
+          </a:xfrm>
+          <a:prstGeom prst="rect">
+            <a:avLst/>
+          </a:prstGeom>
+          <a:noFill/>
+          <a:ln/>
+        </p:spPr>
+        <p:txBody>
+          <a:bodyPr wrap="square" lIns="0" tIns="0" rIns="0" bIns="0" rtlCol="0" anchor="t"/>
+          <a:lstStyle/>
+          <a:p>
+            <a:pPr algn="l" indent="0" marL="0">
+              <a:buNone/>
+            </a:pPr>
+            <a:r>
+              <a:rPr lang="en-US" sz="1600" b="1" dirty="0">
+                <a:solidFill>
+                  <a:srgbClr val="EAEAEA"/>
+                </a:solidFill>
+                <a:latin typeface="Helvetica Neue" pitchFamily="34" charset="0"/>
+                <a:ea typeface="Helvetica Neue" pitchFamily="34" charset="-122"/>
+                <a:cs typeface="Helvetica Neue" pitchFamily="34" charset="-120"/>
+              </a:rPr>
+              <a:t>Reuse signals across channels</a:t>
+            </a:r>
+            <a:endParaRPr lang="en-US" sz="1600" dirty="0"/>
+          </a:p>
+        </p:txBody>
+      </p:sp>
+      <p:sp>
+        <p:nvSpPr>
+          <p:cNvPr id="18" name="Text 15"/>
+          <p:cNvSpPr/>
+          <p:nvPr/>
+        </p:nvSpPr>
+        <p:spPr>
+          <a:xfrm>
+            <a:off x="400050" y="5619750"/>
+            <a:ext cx="10477500" cy="342900"/>
+          </a:xfrm>
+          <a:prstGeom prst="rect">
+            <a:avLst/>
+          </a:prstGeom>
+          <a:noFill/>
+          <a:ln/>
+        </p:spPr>
+        <p:txBody>
+          <a:bodyPr wrap="square" lIns="0" tIns="0" rIns="0" bIns="0" rtlCol="0" anchor="t"/>
+          <a:lstStyle/>
+          <a:p>
+            <a:pPr algn="l" indent="0" marL="0">
+              <a:buNone/>
+            </a:pPr>
+            <a:r>
+              <a:rPr lang="en-US" sz="1700" b="1" dirty="0">
+                <a:solidFill>
+                  <a:srgbClr val="EAEAEA"/>
+                </a:solidFill>
+                <a:latin typeface="Helvetica Neue" pitchFamily="34" charset="0"/>
+                <a:ea typeface="Helvetica Neue" pitchFamily="34" charset="-122"/>
+                <a:cs typeface="Helvetica Neue" pitchFamily="34" charset="-120"/>
+              </a:rPr>
+              <a:t>Next step: convene the 90-day squad and lock the first two categories.</a:t>
+            </a:r>
+            <a:endParaRPr lang="en-US" sz="1700" dirty="0"/>
+          </a:p>
+        </p:txBody>
+      </p:sp>
+      <p:sp>
+        <p:nvSpPr>
+          <p:cNvPr id="19" name="Text 16"/>
+          <p:cNvSpPr/>
+          <p:nvPr/>
+        </p:nvSpPr>
+        <p:spPr>
+          <a:xfrm>
+            <a:off x="400050" y="6457950"/>
+            <a:ext cx="4953000" cy="171450"/>
+          </a:xfrm>
+          <a:prstGeom prst="rect">
+            <a:avLst/>
+          </a:prstGeom>
+          <a:noFill/>
+          <a:ln/>
+        </p:spPr>
+        <p:txBody>
+          <a:bodyPr wrap="square" lIns="0" tIns="0" rIns="0" bIns="0" rtlCol="0" anchor="t"/>
+          <a:lstStyle/>
+          <a:p>
+            <a:pPr algn="l" indent="0" marL="0">
               <a:buNone/>
             </a:pPr>
             <a:r>
               <a:rPr lang="en-US" sz="1100" b="1" dirty="0">
                 <a:solidFill>
-                  <a:srgbClr val="FFFFFF"/>
-                </a:solidFill>
-                <a:latin typeface="Helvetica Neue" pitchFamily="34" charset="0"/>
-                <a:ea typeface="Helvetica Neue" pitchFamily="34" charset="-122"/>
-                <a:cs typeface="Helvetica Neue" pitchFamily="34" charset="-120"/>
-              </a:rPr>
-              <a:t>Execution path</a:t>
+                  <a:srgbClr val="6C6C8A"/>
+                </a:solidFill>
+                <a:latin typeface="Helvetica Neue" pitchFamily="34" charset="0"/>
+                <a:ea typeface="Helvetica Neue" pitchFamily="34" charset="-122"/>
+                <a:cs typeface="Helvetica Neue" pitchFamily="34" charset="-120"/>
+              </a:rPr>
+              <a:t>APPAREL  ·  MARKDOWN STRATEGY</a:t>
             </a:r>
             <a:endParaRPr lang="en-US" sz="1100" dirty="0"/>
           </a:p>
@@ -8023,67 +8504,40 @@
       </p:sp>
       <p:sp>
         <p:nvSpPr>
-          <p:cNvPr id="27" name="Shape 25"/>
-          <p:cNvSpPr/>
-          <p:nvPr/>
-        </p:nvSpPr>
-        <p:spPr>
-          <a:xfrm>
-            <a:off x="8566150" y="5501640"/>
-            <a:ext cx="3130550" cy="304800"/>
-          </a:xfrm>
-          <a:prstGeom prst="roundRect">
-            <a:avLst>
-              <a:gd name="adj" fmla="val 30000"/>
-            </a:avLst>
-          </a:prstGeom>
-          <a:solidFill>
-            <a:srgbClr val="59A14F"/>
-          </a:solidFill>
-          <a:ln w="12700">
-            <a:solidFill>
-              <a:srgbClr val="59A14F"/>
-            </a:solidFill>
-            <a:prstDash val="solid"/>
-          </a:ln>
-        </p:spPr>
-      </p:sp>
-      <p:sp>
-        <p:nvSpPr>
-          <p:cNvPr id="28" name="Text 26"/>
-          <p:cNvSpPr/>
-          <p:nvPr/>
-        </p:nvSpPr>
-        <p:spPr>
-          <a:xfrm>
-            <a:off x="8642350" y="5482590"/>
-            <a:ext cx="2978150" cy="171450"/>
-          </a:xfrm>
-          <a:prstGeom prst="rect">
-            <a:avLst/>
-          </a:prstGeom>
-          <a:noFill/>
-          <a:ln/>
-        </p:spPr>
-        <p:txBody>
-          <a:bodyPr wrap="square" lIns="0" tIns="0" rIns="0" bIns="0" rtlCol="0" anchor="t"/>
-          <a:lstStyle/>
-          <a:p>
-            <a:pPr algn="ctr" indent="0" marL="0">
-              <a:buNone/>
-            </a:pPr>
-            <a:r>
-              <a:rPr lang="en-US" sz="1100" b="1" dirty="0">
-                <a:solidFill>
-                  <a:srgbClr val="FFFFFF"/>
-                </a:solidFill>
-                <a:latin typeface="Helvetica Neue" pitchFamily="34" charset="0"/>
-                <a:ea typeface="Helvetica Neue" pitchFamily="34" charset="-122"/>
-                <a:cs typeface="Helvetica Neue" pitchFamily="34" charset="-120"/>
-              </a:rPr>
-              <a:t>Margin gate</a:t>
-            </a:r>
-            <a:endParaRPr lang="en-US" sz="1100" dirty="0"/>
+          <p:cNvPr id="20" name="Text 17"/>
+          <p:cNvSpPr/>
+          <p:nvPr/>
+        </p:nvSpPr>
+        <p:spPr>
+          <a:xfrm>
+            <a:off x="11334750" y="6457950"/>
+            <a:ext cx="457200" cy="171450"/>
+          </a:xfrm>
+          <a:prstGeom prst="rect">
+            <a:avLst/>
+          </a:prstGeom>
+          <a:noFill/>
+          <a:ln/>
+        </p:spPr>
+        <p:txBody>
+          <a:bodyPr wrap="square" lIns="0" tIns="0" rIns="0" bIns="0" rtlCol="0" anchor="t"/>
+          <a:lstStyle/>
+          <a:p>
+            <a:pPr algn="r" indent="0" marL="0">
+              <a:buNone/>
+            </a:pPr>
+            <a:r>
+              <a:rPr lang="en-US" sz="1200" dirty="0">
+                <a:solidFill>
+                  <a:srgbClr val="6C6C8A"/>
+                </a:solidFill>
+                <a:latin typeface="Helvetica Neue" pitchFamily="34" charset="0"/>
+                <a:ea typeface="Helvetica Neue" pitchFamily="34" charset="-122"/>
+                <a:cs typeface="Helvetica Neue" pitchFamily="34" charset="-120"/>
+              </a:rPr>
+              <a:t>09</a:t>
+            </a:r>
+            <a:endParaRPr lang="en-US" sz="1200" dirty="0"/>
           </a:p>
         </p:txBody>
       </p:sp>

--- a/examples/apparel-markdown.pptx
+++ b/examples/apparel-markdown.pptx
@@ -1665,7 +1665,7 @@
         <p:spPr>
           <a:xfrm>
             <a:off x="400050" y="838200"/>
-            <a:ext cx="7239000" cy="914400"/>
+            <a:ext cx="7239000" cy="933450"/>
           </a:xfrm>
           <a:prstGeom prst="rect">
             <a:avLst/>
@@ -1726,8 +1726,8 @@
         </p:nvSpPr>
         <p:spPr>
           <a:xfrm>
-            <a:off x="400050" y="1924050"/>
-            <a:ext cx="6858000" cy="609600"/>
+            <a:off x="400050" y="2038350"/>
+            <a:ext cx="6858000" cy="457200"/>
           </a:xfrm>
           <a:prstGeom prst="rect">
             <a:avLst/>
@@ -1765,7 +1765,7 @@
         </p:nvSpPr>
         <p:spPr>
           <a:xfrm>
-            <a:off x="400050" y="2609850"/>
+            <a:off x="400050" y="2686050"/>
             <a:ext cx="1238250" cy="285750"/>
           </a:xfrm>
           <a:prstGeom prst="roundRect">
@@ -1792,7 +1792,7 @@
         </p:nvSpPr>
         <p:spPr>
           <a:xfrm>
-            <a:off x="476250" y="2667000"/>
+            <a:off x="476250" y="2743200"/>
             <a:ext cx="1085850" cy="171450"/>
           </a:xfrm>
           <a:prstGeom prst="rect">
@@ -1831,7 +1831,7 @@
         </p:nvSpPr>
         <p:spPr>
           <a:xfrm>
-            <a:off x="400050" y="3028950"/>
+            <a:off x="400050" y="3105150"/>
             <a:ext cx="6667500" cy="342900"/>
           </a:xfrm>
           <a:prstGeom prst="rect">
@@ -2400,8 +2400,8 @@
         </p:nvSpPr>
         <p:spPr>
           <a:xfrm>
-            <a:off x="1524000" y="2190750"/>
-            <a:ext cx="9144000" cy="1047750"/>
+            <a:off x="1524000" y="2552700"/>
+            <a:ext cx="9144000" cy="609600"/>
           </a:xfrm>
           <a:prstGeom prst="rect">
             <a:avLst/>
@@ -2439,8 +2439,8 @@
         </p:nvSpPr>
         <p:spPr>
           <a:xfrm>
-            <a:off x="1524000" y="3381375"/>
-            <a:ext cx="9144000" cy="428625"/>
+            <a:off x="1524000" y="3467100"/>
+            <a:ext cx="9144000" cy="457200"/>
           </a:xfrm>
           <a:prstGeom prst="rect">
             <a:avLst/>
@@ -2619,7 +2619,7 @@
         <p:spPr>
           <a:xfrm>
             <a:off x="400050" y="247650"/>
-            <a:ext cx="10839450" cy="381000"/>
+            <a:ext cx="10839450" cy="428625"/>
           </a:xfrm>
           <a:prstGeom prst="rect">
             <a:avLst/>
@@ -2635,7 +2635,7 @@
               <a:buNone/>
             </a:pPr>
             <a:r>
-              <a:rPr lang="en-US" sz="3000" b="1" dirty="0">
+              <a:rPr lang="en-US" sz="3200" b="1" dirty="0">
                 <a:solidFill>
                   <a:srgbClr val="EAEAEA"/>
                 </a:solidFill>
@@ -2645,7 +2645,7 @@
               </a:rPr>
               <a:t>Reactive markdown vs intentional markdown</a:t>
             </a:r>
-            <a:endParaRPr lang="en-US" sz="3000" dirty="0"/>
+            <a:endParaRPr lang="en-US" sz="3200" dirty="0"/>
           </a:p>
         </p:txBody>
       </p:sp>
@@ -2657,8 +2657,8 @@
         </p:nvSpPr>
         <p:spPr>
           <a:xfrm>
-            <a:off x="400050" y="800100"/>
-            <a:ext cx="10648950" cy="266700"/>
+            <a:off x="400050" y="942975"/>
+            <a:ext cx="10648950" cy="285750"/>
           </a:xfrm>
           <a:prstGeom prst="rect">
             <a:avLst/>
@@ -2774,12 +2774,12 @@
         </p:nvSpPr>
         <p:spPr>
           <a:xfrm>
-            <a:off x="400050" y="1219200"/>
-            <a:ext cx="5695950" cy="5105400"/>
+            <a:off x="400050" y="1457325"/>
+            <a:ext cx="5695950" cy="4867275"/>
           </a:xfrm>
           <a:prstGeom prst="roundRect">
             <a:avLst>
-              <a:gd name="adj" fmla="val 1791"/>
+              <a:gd name="adj" fmla="val 1879"/>
             </a:avLst>
           </a:prstGeom>
           <a:solidFill>
@@ -2801,7 +2801,7 @@
         </p:nvSpPr>
         <p:spPr>
           <a:xfrm>
-            <a:off x="400050" y="1219200"/>
+            <a:off x="400050" y="1457325"/>
             <a:ext cx="5695950" cy="76200"/>
           </a:xfrm>
           <a:prstGeom prst="rect">
@@ -2826,7 +2826,7 @@
         </p:nvSpPr>
         <p:spPr>
           <a:xfrm>
-            <a:off x="609600" y="1447800"/>
+            <a:off x="609600" y="1685925"/>
             <a:ext cx="5276850" cy="171450"/>
           </a:xfrm>
           <a:prstGeom prst="rect">
@@ -2865,7 +2865,7 @@
         </p:nvSpPr>
         <p:spPr>
           <a:xfrm>
-            <a:off x="609600" y="1743075"/>
+            <a:off x="609600" y="1981200"/>
             <a:ext cx="5276850" cy="476250"/>
           </a:xfrm>
           <a:prstGeom prst="rect">
@@ -2904,7 +2904,7 @@
         </p:nvSpPr>
         <p:spPr>
           <a:xfrm>
-            <a:off x="609600" y="2505075"/>
+            <a:off x="609600" y="2828925"/>
             <a:ext cx="66675" cy="66675"/>
           </a:xfrm>
           <a:prstGeom prst="roundRect">
@@ -2931,17 +2931,17 @@
         </p:nvSpPr>
         <p:spPr>
           <a:xfrm>
-            <a:off x="800100" y="2419350"/>
-            <a:ext cx="5086350" cy="342900"/>
-          </a:xfrm>
-          <a:prstGeom prst="rect">
-            <a:avLst/>
-          </a:prstGeom>
-          <a:noFill/>
-          <a:ln/>
-        </p:spPr>
-        <p:txBody>
-          <a:bodyPr wrap="square" lIns="0" tIns="0" rIns="0" bIns="0" rtlCol="0" anchor="t"/>
+            <a:off x="800100" y="2657475"/>
+            <a:ext cx="5086350" cy="419100"/>
+          </a:xfrm>
+          <a:prstGeom prst="rect">
+            <a:avLst/>
+          </a:prstGeom>
+          <a:noFill/>
+          <a:ln/>
+        </p:spPr>
+        <p:txBody>
+          <a:bodyPr wrap="square" lIns="0" tIns="0" rIns="0" bIns="0" rtlCol="0" anchor="ctr"/>
           <a:lstStyle/>
           <a:p>
             <a:pPr algn="l" indent="0" marL="0">
@@ -2970,7 +2970,7 @@
         </p:nvSpPr>
         <p:spPr>
           <a:xfrm>
-            <a:off x="609600" y="3038475"/>
+            <a:off x="609600" y="3286125"/>
             <a:ext cx="66675" cy="66675"/>
           </a:xfrm>
           <a:prstGeom prst="roundRect">
@@ -2997,17 +2997,17 @@
         </p:nvSpPr>
         <p:spPr>
           <a:xfrm>
-            <a:off x="800100" y="2952750"/>
-            <a:ext cx="5086350" cy="342900"/>
-          </a:xfrm>
-          <a:prstGeom prst="rect">
-            <a:avLst/>
-          </a:prstGeom>
-          <a:noFill/>
-          <a:ln/>
-        </p:spPr>
-        <p:txBody>
-          <a:bodyPr wrap="square" lIns="0" tIns="0" rIns="0" bIns="0" rtlCol="0" anchor="t"/>
+            <a:off x="800100" y="3114675"/>
+            <a:ext cx="5086350" cy="419100"/>
+          </a:xfrm>
+          <a:prstGeom prst="rect">
+            <a:avLst/>
+          </a:prstGeom>
+          <a:noFill/>
+          <a:ln/>
+        </p:spPr>
+        <p:txBody>
+          <a:bodyPr wrap="square" lIns="0" tIns="0" rIns="0" bIns="0" rtlCol="0" anchor="ctr"/>
           <a:lstStyle/>
           <a:p>
             <a:pPr algn="l" indent="0" marL="0">
@@ -3036,7 +3036,7 @@
         </p:nvSpPr>
         <p:spPr>
           <a:xfrm>
-            <a:off x="609600" y="3571875"/>
+            <a:off x="609600" y="3743325"/>
             <a:ext cx="66675" cy="66675"/>
           </a:xfrm>
           <a:prstGeom prst="roundRect">
@@ -3063,17 +3063,17 @@
         </p:nvSpPr>
         <p:spPr>
           <a:xfrm>
-            <a:off x="800100" y="3486150"/>
-            <a:ext cx="5086350" cy="342900"/>
-          </a:xfrm>
-          <a:prstGeom prst="rect">
-            <a:avLst/>
-          </a:prstGeom>
-          <a:noFill/>
-          <a:ln/>
-        </p:spPr>
-        <p:txBody>
-          <a:bodyPr wrap="square" lIns="0" tIns="0" rIns="0" bIns="0" rtlCol="0" anchor="t"/>
+            <a:off x="800100" y="3571875"/>
+            <a:ext cx="5086350" cy="419100"/>
+          </a:xfrm>
+          <a:prstGeom prst="rect">
+            <a:avLst/>
+          </a:prstGeom>
+          <a:noFill/>
+          <a:ln/>
+        </p:spPr>
+        <p:txBody>
+          <a:bodyPr wrap="square" lIns="0" tIns="0" rIns="0" bIns="0" rtlCol="0" anchor="ctr"/>
           <a:lstStyle/>
           <a:p>
             <a:pPr algn="l" indent="0" marL="0">
@@ -3102,12 +3102,12 @@
         </p:nvSpPr>
         <p:spPr>
           <a:xfrm>
-            <a:off x="6324600" y="1219200"/>
-            <a:ext cx="5467350" cy="5105400"/>
+            <a:off x="6324600" y="1457325"/>
+            <a:ext cx="5467350" cy="4867275"/>
           </a:xfrm>
           <a:prstGeom prst="roundRect">
             <a:avLst>
-              <a:gd name="adj" fmla="val 1791"/>
+              <a:gd name="adj" fmla="val 1879"/>
             </a:avLst>
           </a:prstGeom>
           <a:solidFill>
@@ -3129,7 +3129,7 @@
         </p:nvSpPr>
         <p:spPr>
           <a:xfrm>
-            <a:off x="6324600" y="1219200"/>
+            <a:off x="6324600" y="1457325"/>
             <a:ext cx="5467350" cy="76200"/>
           </a:xfrm>
           <a:prstGeom prst="rect">
@@ -3154,7 +3154,7 @@
         </p:nvSpPr>
         <p:spPr>
           <a:xfrm>
-            <a:off x="6534150" y="1447800"/>
+            <a:off x="6534150" y="1685925"/>
             <a:ext cx="5048250" cy="171450"/>
           </a:xfrm>
           <a:prstGeom prst="rect">
@@ -3193,7 +3193,7 @@
         </p:nvSpPr>
         <p:spPr>
           <a:xfrm>
-            <a:off x="6534150" y="1743075"/>
+            <a:off x="6534150" y="1981200"/>
             <a:ext cx="5048250" cy="476250"/>
           </a:xfrm>
           <a:prstGeom prst="rect">
@@ -3232,7 +3232,7 @@
         </p:nvSpPr>
         <p:spPr>
           <a:xfrm>
-            <a:off x="6534150" y="2505075"/>
+            <a:off x="6534150" y="2828925"/>
             <a:ext cx="66675" cy="66675"/>
           </a:xfrm>
           <a:prstGeom prst="roundRect">
@@ -3259,17 +3259,17 @@
         </p:nvSpPr>
         <p:spPr>
           <a:xfrm>
-            <a:off x="6724650" y="2419350"/>
-            <a:ext cx="4857750" cy="342900"/>
-          </a:xfrm>
-          <a:prstGeom prst="rect">
-            <a:avLst/>
-          </a:prstGeom>
-          <a:noFill/>
-          <a:ln/>
-        </p:spPr>
-        <p:txBody>
-          <a:bodyPr wrap="square" lIns="0" tIns="0" rIns="0" bIns="0" rtlCol="0" anchor="t"/>
+            <a:off x="6724650" y="2657475"/>
+            <a:ext cx="4857750" cy="419100"/>
+          </a:xfrm>
+          <a:prstGeom prst="rect">
+            <a:avLst/>
+          </a:prstGeom>
+          <a:noFill/>
+          <a:ln/>
+        </p:spPr>
+        <p:txBody>
+          <a:bodyPr wrap="square" lIns="0" tIns="0" rIns="0" bIns="0" rtlCol="0" anchor="ctr"/>
           <a:lstStyle/>
           <a:p>
             <a:pPr algn="l" indent="0" marL="0">
@@ -3298,7 +3298,7 @@
         </p:nvSpPr>
         <p:spPr>
           <a:xfrm>
-            <a:off x="6534150" y="3038475"/>
+            <a:off x="6534150" y="3286125"/>
             <a:ext cx="66675" cy="66675"/>
           </a:xfrm>
           <a:prstGeom prst="roundRect">
@@ -3325,17 +3325,17 @@
         </p:nvSpPr>
         <p:spPr>
           <a:xfrm>
-            <a:off x="6724650" y="2952750"/>
-            <a:ext cx="4857750" cy="342900"/>
-          </a:xfrm>
-          <a:prstGeom prst="rect">
-            <a:avLst/>
-          </a:prstGeom>
-          <a:noFill/>
-          <a:ln/>
-        </p:spPr>
-        <p:txBody>
-          <a:bodyPr wrap="square" lIns="0" tIns="0" rIns="0" bIns="0" rtlCol="0" anchor="t"/>
+            <a:off x="6724650" y="3114675"/>
+            <a:ext cx="4857750" cy="419100"/>
+          </a:xfrm>
+          <a:prstGeom prst="rect">
+            <a:avLst/>
+          </a:prstGeom>
+          <a:noFill/>
+          <a:ln/>
+        </p:spPr>
+        <p:txBody>
+          <a:bodyPr wrap="square" lIns="0" tIns="0" rIns="0" bIns="0" rtlCol="0" anchor="ctr"/>
           <a:lstStyle/>
           <a:p>
             <a:pPr algn="l" indent="0" marL="0">
@@ -3364,7 +3364,7 @@
         </p:nvSpPr>
         <p:spPr>
           <a:xfrm>
-            <a:off x="6534150" y="3571875"/>
+            <a:off x="6534150" y="3743325"/>
             <a:ext cx="66675" cy="66675"/>
           </a:xfrm>
           <a:prstGeom prst="roundRect">
@@ -3391,17 +3391,17 @@
         </p:nvSpPr>
         <p:spPr>
           <a:xfrm>
-            <a:off x="6724650" y="3486150"/>
-            <a:ext cx="4857750" cy="342900"/>
-          </a:xfrm>
-          <a:prstGeom prst="rect">
-            <a:avLst/>
-          </a:prstGeom>
-          <a:noFill/>
-          <a:ln/>
-        </p:spPr>
-        <p:txBody>
-          <a:bodyPr wrap="square" lIns="0" tIns="0" rIns="0" bIns="0" rtlCol="0" anchor="t"/>
+            <a:off x="6724650" y="3571875"/>
+            <a:ext cx="4857750" cy="419100"/>
+          </a:xfrm>
+          <a:prstGeom prst="rect">
+            <a:avLst/>
+          </a:prstGeom>
+          <a:noFill/>
+          <a:ln/>
+        </p:spPr>
+        <p:txBody>
+          <a:bodyPr wrap="square" lIns="0" tIns="0" rIns="0" bIns="0" rtlCol="0" anchor="ctr"/>
           <a:lstStyle/>
           <a:p>
             <a:pPr algn="l" indent="0" marL="0">
@@ -3493,7 +3493,7 @@
         <p:spPr>
           <a:xfrm>
             <a:off x="400050" y="247650"/>
-            <a:ext cx="10839450" cy="381000"/>
+            <a:ext cx="10839450" cy="428625"/>
           </a:xfrm>
           <a:prstGeom prst="rect">
             <a:avLst/>
@@ -3509,7 +3509,7 @@
               <a:buNone/>
             </a:pPr>
             <a:r>
-              <a:rPr lang="en-US" sz="3000" b="1" dirty="0">
+              <a:rPr lang="en-US" sz="3200" b="1" dirty="0">
                 <a:solidFill>
                   <a:srgbClr val="EAEAEA"/>
                 </a:solidFill>
@@ -3519,7 +3519,7 @@
               </a:rPr>
               <a:t>Clearance already destroys more margin than promo</a:t>
             </a:r>
-            <a:endParaRPr lang="en-US" sz="3000" dirty="0"/>
+            <a:endParaRPr lang="en-US" sz="3200" dirty="0"/>
           </a:p>
         </p:txBody>
       </p:sp>
@@ -3609,12 +3609,12 @@
         </p:nvSpPr>
         <p:spPr>
           <a:xfrm>
-            <a:off x="400050" y="781050"/>
-            <a:ext cx="7058025" cy="5543550"/>
+            <a:off x="400050" y="904875"/>
+            <a:ext cx="7058025" cy="5419725"/>
           </a:xfrm>
           <a:prstGeom prst="roundRect">
             <a:avLst>
-              <a:gd name="adj" fmla="val 1649"/>
+              <a:gd name="adj" fmla="val 1687"/>
             </a:avLst>
           </a:prstGeom>
           <a:solidFill>
@@ -3644,7 +3644,7 @@
         </p:blipFill>
         <p:spPr>
           <a:xfrm>
-            <a:off x="552450" y="2019300"/>
+            <a:off x="552450" y="2085975"/>
             <a:ext cx="6753225" cy="3067050"/>
           </a:xfrm>
           <a:prstGeom prst="rect">
@@ -3660,7 +3660,7 @@
         </p:nvSpPr>
         <p:spPr>
           <a:xfrm>
-            <a:off x="7743825" y="781050"/>
+            <a:off x="7743825" y="904875"/>
             <a:ext cx="4048125" cy="171450"/>
           </a:xfrm>
           <a:prstGeom prst="rect">
@@ -3699,7 +3699,7 @@
         </p:nvSpPr>
         <p:spPr>
           <a:xfrm>
-            <a:off x="7743825" y="1209675"/>
+            <a:off x="7743825" y="1419225"/>
             <a:ext cx="66675" cy="66675"/>
           </a:xfrm>
           <a:prstGeom prst="roundRect">
@@ -3726,17 +3726,17 @@
         </p:nvSpPr>
         <p:spPr>
           <a:xfrm>
-            <a:off x="7934325" y="1123950"/>
-            <a:ext cx="3857625" cy="342900"/>
-          </a:xfrm>
-          <a:prstGeom prst="rect">
-            <a:avLst/>
-          </a:prstGeom>
-          <a:noFill/>
-          <a:ln/>
-        </p:spPr>
-        <p:txBody>
-          <a:bodyPr wrap="square" lIns="0" tIns="0" rIns="0" bIns="0" rtlCol="0" anchor="t"/>
+            <a:off x="7934325" y="1247775"/>
+            <a:ext cx="3857625" cy="419100"/>
+          </a:xfrm>
+          <a:prstGeom prst="rect">
+            <a:avLst/>
+          </a:prstGeom>
+          <a:noFill/>
+          <a:ln/>
+        </p:spPr>
+        <p:txBody>
+          <a:bodyPr wrap="square" lIns="0" tIns="0" rIns="0" bIns="0" rtlCol="0" anchor="ctr"/>
           <a:lstStyle/>
           <a:p>
             <a:pPr algn="l" indent="0" marL="0">
@@ -3765,7 +3765,7 @@
         </p:nvSpPr>
         <p:spPr>
           <a:xfrm>
-            <a:off x="7743825" y="1743075"/>
+            <a:off x="7743825" y="1876425"/>
             <a:ext cx="66675" cy="66675"/>
           </a:xfrm>
           <a:prstGeom prst="roundRect">
@@ -3792,17 +3792,17 @@
         </p:nvSpPr>
         <p:spPr>
           <a:xfrm>
-            <a:off x="7934325" y="1657350"/>
-            <a:ext cx="3857625" cy="342900"/>
-          </a:xfrm>
-          <a:prstGeom prst="rect">
-            <a:avLst/>
-          </a:prstGeom>
-          <a:noFill/>
-          <a:ln/>
-        </p:spPr>
-        <p:txBody>
-          <a:bodyPr wrap="square" lIns="0" tIns="0" rIns="0" bIns="0" rtlCol="0" anchor="t"/>
+            <a:off x="7934325" y="1704975"/>
+            <a:ext cx="3857625" cy="419100"/>
+          </a:xfrm>
+          <a:prstGeom prst="rect">
+            <a:avLst/>
+          </a:prstGeom>
+          <a:noFill/>
+          <a:ln/>
+        </p:spPr>
+        <p:txBody>
+          <a:bodyPr wrap="square" lIns="0" tIns="0" rIns="0" bIns="0" rtlCol="0" anchor="ctr"/>
           <a:lstStyle/>
           <a:p>
             <a:pPr algn="l" indent="0" marL="0">
@@ -3831,7 +3831,7 @@
         </p:nvSpPr>
         <p:spPr>
           <a:xfrm>
-            <a:off x="7743825" y="2276475"/>
+            <a:off x="7743825" y="2333625"/>
             <a:ext cx="66675" cy="66675"/>
           </a:xfrm>
           <a:prstGeom prst="roundRect">
@@ -3858,17 +3858,17 @@
         </p:nvSpPr>
         <p:spPr>
           <a:xfrm>
-            <a:off x="7934325" y="2190750"/>
-            <a:ext cx="3857625" cy="342900"/>
-          </a:xfrm>
-          <a:prstGeom prst="rect">
-            <a:avLst/>
-          </a:prstGeom>
-          <a:noFill/>
-          <a:ln/>
-        </p:spPr>
-        <p:txBody>
-          <a:bodyPr wrap="square" lIns="0" tIns="0" rIns="0" bIns="0" rtlCol="0" anchor="t"/>
+            <a:off x="7934325" y="2162175"/>
+            <a:ext cx="3857625" cy="419100"/>
+          </a:xfrm>
+          <a:prstGeom prst="rect">
+            <a:avLst/>
+          </a:prstGeom>
+          <a:noFill/>
+          <a:ln/>
+        </p:spPr>
+        <p:txBody>
+          <a:bodyPr wrap="square" lIns="0" tIns="0" rIns="0" bIns="0" rtlCol="0" anchor="ctr"/>
           <a:lstStyle/>
           <a:p>
             <a:pPr algn="l" indent="0" marL="0">
@@ -3960,7 +3960,7 @@
         <p:spPr>
           <a:xfrm>
             <a:off x="400050" y="247650"/>
-            <a:ext cx="10839450" cy="381000"/>
+            <a:ext cx="10839450" cy="428625"/>
           </a:xfrm>
           <a:prstGeom prst="rect">
             <a:avLst/>
@@ -3976,7 +3976,7 @@
               <a:buNone/>
             </a:pPr>
             <a:r>
-              <a:rPr lang="en-US" sz="3000" b="1" dirty="0">
+              <a:rPr lang="en-US" sz="3200" b="1" dirty="0">
                 <a:solidFill>
                   <a:srgbClr val="EAEAEA"/>
                 </a:solidFill>
@@ -3986,7 +3986,7 @@
               </a:rPr>
               <a:t>Full-price mix is eroding</a:t>
             </a:r>
-            <a:endParaRPr lang="en-US" sz="3000" dirty="0"/>
+            <a:endParaRPr lang="en-US" sz="3200" dirty="0"/>
           </a:p>
         </p:txBody>
       </p:sp>
@@ -4229,7 +4229,7 @@
         <p:spPr>
           <a:xfrm>
             <a:off x="400050" y="247650"/>
-            <a:ext cx="10839450" cy="381000"/>
+            <a:ext cx="10839450" cy="428625"/>
           </a:xfrm>
           <a:prstGeom prst="rect">
             <a:avLst/>
@@ -4245,7 +4245,7 @@
               <a:buNone/>
             </a:pPr>
             <a:r>
-              <a:rPr lang="en-US" sz="3000" b="1" dirty="0">
+              <a:rPr lang="en-US" sz="3200" b="1" dirty="0">
                 <a:solidFill>
                   <a:srgbClr val="EAEAEA"/>
                 </a:solidFill>
@@ -4255,7 +4255,7 @@
               </a:rPr>
               <a:t>Where to act — and what it buys</a:t>
             </a:r>
-            <a:endParaRPr lang="en-US" sz="3000" dirty="0"/>
+            <a:endParaRPr lang="en-US" sz="3200" dirty="0"/>
           </a:p>
         </p:txBody>
       </p:sp>
@@ -4345,8 +4345,8 @@
         </p:nvSpPr>
         <p:spPr>
           <a:xfrm>
-            <a:off x="400050" y="819150"/>
-            <a:ext cx="5619750" cy="171450"/>
+            <a:off x="400050" y="962025"/>
+            <a:ext cx="6410325" cy="171450"/>
           </a:xfrm>
           <a:prstGeom prst="rect">
             <a:avLst/>
@@ -4384,12 +4384,12 @@
         </p:nvSpPr>
         <p:spPr>
           <a:xfrm>
-            <a:off x="1543050" y="1143000"/>
-            <a:ext cx="2047875" cy="2266950"/>
+            <a:off x="1085850" y="1266825"/>
+            <a:ext cx="2757488" cy="2290763"/>
           </a:xfrm>
           <a:prstGeom prst="roundRect">
             <a:avLst>
-              <a:gd name="adj" fmla="val 4465"/>
+              <a:gd name="adj" fmla="val 3992"/>
             </a:avLst>
           </a:prstGeom>
           <a:solidFill>
@@ -4411,12 +4411,12 @@
         </p:nvSpPr>
         <p:spPr>
           <a:xfrm>
-            <a:off x="3686175" y="1143000"/>
-            <a:ext cx="2047875" cy="2266950"/>
+            <a:off x="3938588" y="1266825"/>
+            <a:ext cx="2757488" cy="2290763"/>
           </a:xfrm>
           <a:prstGeom prst="roundRect">
             <a:avLst>
-              <a:gd name="adj" fmla="val 4465"/>
+              <a:gd name="adj" fmla="val 3992"/>
             </a:avLst>
           </a:prstGeom>
           <a:solidFill>
@@ -4438,12 +4438,12 @@
         </p:nvSpPr>
         <p:spPr>
           <a:xfrm>
-            <a:off x="1543050" y="3505200"/>
-            <a:ext cx="2047875" cy="2266950"/>
+            <a:off x="1085850" y="3652838"/>
+            <a:ext cx="2757488" cy="2290763"/>
           </a:xfrm>
           <a:prstGeom prst="roundRect">
             <a:avLst>
-              <a:gd name="adj" fmla="val 4465"/>
+              <a:gd name="adj" fmla="val 3992"/>
             </a:avLst>
           </a:prstGeom>
           <a:solidFill>
@@ -4465,12 +4465,12 @@
         </p:nvSpPr>
         <p:spPr>
           <a:xfrm>
-            <a:off x="3686175" y="3505200"/>
-            <a:ext cx="2047875" cy="2266950"/>
+            <a:off x="3938588" y="3652838"/>
+            <a:ext cx="2757488" cy="2290763"/>
           </a:xfrm>
           <a:prstGeom prst="roundRect">
             <a:avLst>
-              <a:gd name="adj" fmla="val 4465"/>
+              <a:gd name="adj" fmla="val 3992"/>
             </a:avLst>
           </a:prstGeom>
           <a:solidFill>
@@ -4492,8 +4492,8 @@
         </p:nvSpPr>
         <p:spPr>
           <a:xfrm>
-            <a:off x="400050" y="1143000"/>
-            <a:ext cx="1047750" cy="266700"/>
+            <a:off x="400050" y="1266825"/>
+            <a:ext cx="628650" cy="266700"/>
           </a:xfrm>
           <a:prstGeom prst="rect">
             <a:avLst/>
@@ -4531,8 +4531,8 @@
         </p:nvSpPr>
         <p:spPr>
           <a:xfrm>
-            <a:off x="1543050" y="5924550"/>
-            <a:ext cx="4191000" cy="266700"/>
+            <a:off x="1085850" y="6000750"/>
+            <a:ext cx="5610225" cy="228600"/>
           </a:xfrm>
           <a:prstGeom prst="rect">
             <a:avLst/>
@@ -4570,8 +4570,8 @@
         </p:nvSpPr>
         <p:spPr>
           <a:xfrm>
-            <a:off x="1695450" y="1276350"/>
-            <a:ext cx="1743075" cy="171450"/>
+            <a:off x="1238250" y="1400175"/>
+            <a:ext cx="2452688" cy="171450"/>
           </a:xfrm>
           <a:prstGeom prst="rect">
             <a:avLst/>
@@ -4609,8 +4609,8 @@
         </p:nvSpPr>
         <p:spPr>
           <a:xfrm>
-            <a:off x="3838575" y="1276350"/>
-            <a:ext cx="1743075" cy="171450"/>
+            <a:off x="4090987" y="1400175"/>
+            <a:ext cx="2452688" cy="171450"/>
           </a:xfrm>
           <a:prstGeom prst="rect">
             <a:avLst/>
@@ -4648,8 +4648,8 @@
         </p:nvSpPr>
         <p:spPr>
           <a:xfrm>
-            <a:off x="1695450" y="3638550"/>
-            <a:ext cx="1743075" cy="171450"/>
+            <a:off x="1238250" y="3786188"/>
+            <a:ext cx="2452688" cy="171450"/>
           </a:xfrm>
           <a:prstGeom prst="rect">
             <a:avLst/>
@@ -4687,8 +4687,8 @@
         </p:nvSpPr>
         <p:spPr>
           <a:xfrm>
-            <a:off x="3838575" y="3638550"/>
-            <a:ext cx="1743075" cy="171450"/>
+            <a:off x="4090987" y="3786188"/>
+            <a:ext cx="2452688" cy="171450"/>
           </a:xfrm>
           <a:prstGeom prst="rect">
             <a:avLst/>
@@ -4726,12 +4726,12 @@
         </p:nvSpPr>
         <p:spPr>
           <a:xfrm>
-            <a:off x="1695450" y="1562100"/>
-            <a:ext cx="1743075" cy="381000"/>
+            <a:off x="1200150" y="1685925"/>
+            <a:ext cx="2528888" cy="400050"/>
           </a:xfrm>
           <a:prstGeom prst="roundRect">
             <a:avLst>
-              <a:gd name="adj" fmla="val 24000"/>
+              <a:gd name="adj" fmla="val 22857"/>
             </a:avLst>
           </a:prstGeom>
           <a:solidFill>
@@ -4753,8 +4753,8 @@
         </p:nvSpPr>
         <p:spPr>
           <a:xfrm>
-            <a:off x="1809750" y="1562100"/>
-            <a:ext cx="1514475" cy="381000"/>
+            <a:off x="1295400" y="1685925"/>
+            <a:ext cx="2338388" cy="400050"/>
           </a:xfrm>
           <a:prstGeom prst="rect">
             <a:avLst/>
@@ -4770,7 +4770,7 @@
               <a:buNone/>
             </a:pPr>
             <a:r>
-              <a:rPr lang="en-US" sz="1600" b="1" dirty="0">
+              <a:rPr lang="en-US" sz="1500" b="1" dirty="0">
                 <a:solidFill>
                   <a:srgbClr val="EAEAEA"/>
                 </a:solidFill>
@@ -4780,7 +4780,7 @@
               </a:rPr>
               <a:t>Core basics</a:t>
             </a:r>
-            <a:endParaRPr lang="en-US" sz="1600" dirty="0"/>
+            <a:endParaRPr lang="en-US" sz="1500" dirty="0"/>
           </a:p>
         </p:txBody>
       </p:sp>
@@ -4792,12 +4792,12 @@
         </p:nvSpPr>
         <p:spPr>
           <a:xfrm>
-            <a:off x="3838575" y="1562100"/>
-            <a:ext cx="1743075" cy="381000"/>
+            <a:off x="4052888" y="1685925"/>
+            <a:ext cx="2528888" cy="400050"/>
           </a:xfrm>
           <a:prstGeom prst="roundRect">
             <a:avLst>
-              <a:gd name="adj" fmla="val 24000"/>
+              <a:gd name="adj" fmla="val 22857"/>
             </a:avLst>
           </a:prstGeom>
           <a:solidFill>
@@ -4819,8 +4819,8 @@
         </p:nvSpPr>
         <p:spPr>
           <a:xfrm>
-            <a:off x="3952875" y="1562100"/>
-            <a:ext cx="1514475" cy="381000"/>
+            <a:off x="4148137" y="1685925"/>
+            <a:ext cx="2338388" cy="400050"/>
           </a:xfrm>
           <a:prstGeom prst="rect">
             <a:avLst/>
@@ -4836,7 +4836,7 @@
               <a:buNone/>
             </a:pPr>
             <a:r>
-              <a:rPr lang="en-US" sz="1600" b="1" dirty="0">
+              <a:rPr lang="en-US" sz="1500" b="1" dirty="0">
                 <a:solidFill>
                   <a:srgbClr val="EAEAEA"/>
                 </a:solidFill>
@@ -4846,7 +4846,7 @@
               </a:rPr>
               <a:t>Seasonal fashion</a:t>
             </a:r>
-            <a:endParaRPr lang="en-US" sz="1600" dirty="0"/>
+            <a:endParaRPr lang="en-US" sz="1500" dirty="0"/>
           </a:p>
         </p:txBody>
       </p:sp>
@@ -4858,12 +4858,12 @@
         </p:nvSpPr>
         <p:spPr>
           <a:xfrm>
-            <a:off x="1695450" y="3924300"/>
-            <a:ext cx="1743075" cy="381000"/>
+            <a:off x="1200150" y="4071938"/>
+            <a:ext cx="2528888" cy="400050"/>
           </a:xfrm>
           <a:prstGeom prst="roundRect">
             <a:avLst>
-              <a:gd name="adj" fmla="val 24000"/>
+              <a:gd name="adj" fmla="val 22857"/>
             </a:avLst>
           </a:prstGeom>
           <a:solidFill>
@@ -4885,8 +4885,8 @@
         </p:nvSpPr>
         <p:spPr>
           <a:xfrm>
-            <a:off x="1809750" y="3924300"/>
-            <a:ext cx="1514475" cy="381000"/>
+            <a:off x="1295400" y="4071938"/>
+            <a:ext cx="2338388" cy="400050"/>
           </a:xfrm>
           <a:prstGeom prst="rect">
             <a:avLst/>
@@ -4902,7 +4902,7 @@
               <a:buNone/>
             </a:pPr>
             <a:r>
-              <a:rPr lang="en-US" sz="1600" b="1" dirty="0">
+              <a:rPr lang="en-US" sz="1500" b="1" dirty="0">
                 <a:solidFill>
                   <a:srgbClr val="EAEAEA"/>
                 </a:solidFill>
@@ -4912,7 +4912,7 @@
               </a:rPr>
               <a:t>Test capsules</a:t>
             </a:r>
-            <a:endParaRPr lang="en-US" sz="1600" dirty="0"/>
+            <a:endParaRPr lang="en-US" sz="1500" dirty="0"/>
           </a:p>
         </p:txBody>
       </p:sp>
@@ -4924,12 +4924,12 @@
         </p:nvSpPr>
         <p:spPr>
           <a:xfrm>
-            <a:off x="3838575" y="3924300"/>
-            <a:ext cx="1743075" cy="381000"/>
+            <a:off x="4052888" y="4071938"/>
+            <a:ext cx="2528888" cy="400050"/>
           </a:xfrm>
           <a:prstGeom prst="roundRect">
             <a:avLst>
-              <a:gd name="adj" fmla="val 24000"/>
+              <a:gd name="adj" fmla="val 22857"/>
             </a:avLst>
           </a:prstGeom>
           <a:solidFill>
@@ -4951,8 +4951,8 @@
         </p:nvSpPr>
         <p:spPr>
           <a:xfrm>
-            <a:off x="3952875" y="3924300"/>
-            <a:ext cx="1514475" cy="381000"/>
+            <a:off x="4148137" y="4071938"/>
+            <a:ext cx="2338388" cy="400050"/>
           </a:xfrm>
           <a:prstGeom prst="rect">
             <a:avLst/>
@@ -4968,7 +4968,7 @@
               <a:buNone/>
             </a:pPr>
             <a:r>
-              <a:rPr lang="en-US" sz="1600" b="1" dirty="0">
+              <a:rPr lang="en-US" sz="1500" b="1" dirty="0">
                 <a:solidFill>
                   <a:srgbClr val="EAEAEA"/>
                 </a:solidFill>
@@ -4978,7 +4978,7 @@
               </a:rPr>
               <a:t>Aged novelty</a:t>
             </a:r>
-            <a:endParaRPr lang="en-US" sz="1600" dirty="0"/>
+            <a:endParaRPr lang="en-US" sz="1500" dirty="0"/>
           </a:p>
         </p:txBody>
       </p:sp>
@@ -4990,8 +4990,8 @@
         </p:nvSpPr>
         <p:spPr>
           <a:xfrm>
-            <a:off x="6172200" y="819150"/>
-            <a:ext cx="5619750" cy="171450"/>
+            <a:off x="7038975" y="962025"/>
+            <a:ext cx="4752975" cy="171450"/>
           </a:xfrm>
           <a:prstGeom prst="rect">
             <a:avLst/>
@@ -5029,12 +5029,12 @@
         </p:nvSpPr>
         <p:spPr>
           <a:xfrm>
-            <a:off x="6172200" y="2247900"/>
-            <a:ext cx="1714500" cy="2857500"/>
+            <a:off x="7038975" y="1228725"/>
+            <a:ext cx="4752975" cy="1333500"/>
           </a:xfrm>
           <a:prstGeom prst="roundRect">
             <a:avLst>
-              <a:gd name="adj" fmla="val 5333"/>
+              <a:gd name="adj" fmla="val 6857"/>
             </a:avLst>
           </a:prstGeom>
           <a:solidFill>
@@ -5056,8 +5056,8 @@
         </p:nvSpPr>
         <p:spPr>
           <a:xfrm>
-            <a:off x="6172200" y="2247900"/>
-            <a:ext cx="1714500" cy="76200"/>
+            <a:off x="7038975" y="1228725"/>
+            <a:ext cx="4752975" cy="76200"/>
           </a:xfrm>
           <a:prstGeom prst="rect">
             <a:avLst/>
@@ -5081,8 +5081,8 @@
         </p:nvSpPr>
         <p:spPr>
           <a:xfrm>
-            <a:off x="6362700" y="2495550"/>
-            <a:ext cx="1333500" cy="171450"/>
+            <a:off x="7191375" y="1419225"/>
+            <a:ext cx="4448175" cy="171450"/>
           </a:xfrm>
           <a:prstGeom prst="rect">
             <a:avLst/>
@@ -5120,24 +5120,24 @@
         </p:nvSpPr>
         <p:spPr>
           <a:xfrm>
-            <a:off x="6362700" y="2895600"/>
-            <a:ext cx="1333500" cy="1524000"/>
-          </a:xfrm>
-          <a:prstGeom prst="rect">
-            <a:avLst/>
-          </a:prstGeom>
-          <a:noFill/>
-          <a:ln/>
-        </p:spPr>
-        <p:txBody>
-          <a:bodyPr wrap="none" lIns="0" tIns="0" rIns="0" bIns="0" rtlCol="0" anchor="ctr"/>
-          <a:lstStyle/>
-          <a:p>
-            <a:pPr algn="l" indent="0" marL="0">
-              <a:buNone/>
-            </a:pPr>
-            <a:r>
-              <a:rPr lang="en-US" sz="3000" b="1" dirty="0">
+            <a:off x="7191375" y="1704975"/>
+            <a:ext cx="4448175" cy="381000"/>
+          </a:xfrm>
+          <a:prstGeom prst="rect">
+            <a:avLst/>
+          </a:prstGeom>
+          <a:noFill/>
+          <a:ln/>
+        </p:spPr>
+        <p:txBody>
+          <a:bodyPr wrap="square" lIns="0" tIns="0" rIns="0" bIns="0" rtlCol="0" anchor="ctr"/>
+          <a:lstStyle/>
+          <a:p>
+            <a:pPr algn="l" indent="0" marL="0">
+              <a:buNone/>
+            </a:pPr>
+            <a:r>
+              <a:rPr lang="en-US" sz="2500" b="1" dirty="0">
                 <a:solidFill>
                   <a:srgbClr val="4E79A7"/>
                 </a:solidFill>
@@ -5145,9 +5145,9 @@
                 <a:ea typeface="Helvetica Neue" pitchFamily="34" charset="-122"/>
                 <a:cs typeface="Helvetica Neue" pitchFamily="34" charset="-120"/>
               </a:rPr>
-              <a:t>+$18–28M</a:t>
-            </a:r>
-            <a:endParaRPr lang="en-US" sz="3000" dirty="0"/>
+              <a:t>+$23M</a:t>
+            </a:r>
+            <a:endParaRPr lang="en-US" sz="2500" dirty="0"/>
           </a:p>
         </p:txBody>
       </p:sp>
@@ -5159,8 +5159,8 @@
         </p:nvSpPr>
         <p:spPr>
           <a:xfrm>
-            <a:off x="6362700" y="4552950"/>
-            <a:ext cx="1333500" cy="381000"/>
+            <a:off x="7191375" y="2143125"/>
+            <a:ext cx="4448175" cy="304800"/>
           </a:xfrm>
           <a:prstGeom prst="rect">
             <a:avLst/>
@@ -5176,7 +5176,7 @@
               <a:buNone/>
             </a:pPr>
             <a:r>
-              <a:rPr lang="en-US" sz="1300" dirty="0">
+              <a:rPr lang="en-US" sz="1200" dirty="0">
                 <a:solidFill>
                   <a:srgbClr val="6C6C8A"/>
                 </a:solidFill>
@@ -5184,9 +5184,9 @@
                 <a:ea typeface="Helvetica Neue" pitchFamily="34" charset="-122"/>
                 <a:cs typeface="Helvetica Neue" pitchFamily="34" charset="-120"/>
               </a:rPr>
-              <a:t>Gross profit</a:t>
-            </a:r>
-            <a:endParaRPr lang="en-US" sz="1300" dirty="0"/>
+              <a:t>Mid-case GP uplift</a:t>
+            </a:r>
+            <a:endParaRPr lang="en-US" sz="1200" dirty="0"/>
           </a:p>
         </p:txBody>
       </p:sp>
@@ -5198,12 +5198,12 @@
         </p:nvSpPr>
         <p:spPr>
           <a:xfrm>
-            <a:off x="8115300" y="2247900"/>
-            <a:ext cx="1714500" cy="2857500"/>
+            <a:off x="7038975" y="2676525"/>
+            <a:ext cx="4752975" cy="1333500"/>
           </a:xfrm>
           <a:prstGeom prst="roundRect">
             <a:avLst>
-              <a:gd name="adj" fmla="val 5333"/>
+              <a:gd name="adj" fmla="val 6857"/>
             </a:avLst>
           </a:prstGeom>
           <a:solidFill>
@@ -5225,8 +5225,8 @@
         </p:nvSpPr>
         <p:spPr>
           <a:xfrm>
-            <a:off x="8115300" y="2247900"/>
-            <a:ext cx="1714500" cy="76200"/>
+            <a:off x="7038975" y="2676525"/>
+            <a:ext cx="4752975" cy="76200"/>
           </a:xfrm>
           <a:prstGeom prst="rect">
             <a:avLst/>
@@ -5250,8 +5250,8 @@
         </p:nvSpPr>
         <p:spPr>
           <a:xfrm>
-            <a:off x="8305800" y="2495550"/>
-            <a:ext cx="1333500" cy="171450"/>
+            <a:off x="7191375" y="2867025"/>
+            <a:ext cx="4448175" cy="171450"/>
           </a:xfrm>
           <a:prstGeom prst="rect">
             <a:avLst/>
@@ -5289,24 +5289,24 @@
         </p:nvSpPr>
         <p:spPr>
           <a:xfrm>
-            <a:off x="8305800" y="2895600"/>
-            <a:ext cx="1333500" cy="1524000"/>
-          </a:xfrm>
-          <a:prstGeom prst="rect">
-            <a:avLst/>
-          </a:prstGeom>
-          <a:noFill/>
-          <a:ln/>
-        </p:spPr>
-        <p:txBody>
-          <a:bodyPr wrap="none" lIns="0" tIns="0" rIns="0" bIns="0" rtlCol="0" anchor="ctr"/>
-          <a:lstStyle/>
-          <a:p>
-            <a:pPr algn="l" indent="0" marL="0">
-              <a:buNone/>
-            </a:pPr>
-            <a:r>
-              <a:rPr lang="en-US" sz="3000" b="1" dirty="0">
+            <a:off x="7191375" y="3152775"/>
+            <a:ext cx="4448175" cy="381000"/>
+          </a:xfrm>
+          <a:prstGeom prst="rect">
+            <a:avLst/>
+          </a:prstGeom>
+          <a:noFill/>
+          <a:ln/>
+        </p:spPr>
+        <p:txBody>
+          <a:bodyPr wrap="square" lIns="0" tIns="0" rIns="0" bIns="0" rtlCol="0" anchor="ctr"/>
+          <a:lstStyle/>
+          <a:p>
+            <a:pPr algn="l" indent="0" marL="0">
+              <a:buNone/>
+            </a:pPr>
+            <a:r>
+              <a:rPr lang="en-US" sz="2500" b="1" dirty="0">
                 <a:solidFill>
                   <a:srgbClr val="F28E2B"/>
                 </a:solidFill>
@@ -5314,9 +5314,9 @@
                 <a:ea typeface="Helvetica Neue" pitchFamily="34" charset="-122"/>
                 <a:cs typeface="Helvetica Neue" pitchFamily="34" charset="-120"/>
               </a:rPr>
-              <a:t>+4–6 pts</a:t>
-            </a:r>
-            <a:endParaRPr lang="en-US" sz="3000" dirty="0"/>
+              <a:t>+5 pts</a:t>
+            </a:r>
+            <a:endParaRPr lang="en-US" sz="2500" dirty="0"/>
           </a:p>
         </p:txBody>
       </p:sp>
@@ -5328,8 +5328,8 @@
         </p:nvSpPr>
         <p:spPr>
           <a:xfrm>
-            <a:off x="8305800" y="4552950"/>
-            <a:ext cx="1333500" cy="381000"/>
+            <a:off x="7191375" y="3590925"/>
+            <a:ext cx="4448175" cy="304800"/>
           </a:xfrm>
           <a:prstGeom prst="rect">
             <a:avLst/>
@@ -5345,7 +5345,7 @@
               <a:buNone/>
             </a:pPr>
             <a:r>
-              <a:rPr lang="en-US" sz="1300" dirty="0">
+              <a:rPr lang="en-US" sz="1200" dirty="0">
                 <a:solidFill>
                   <a:srgbClr val="6C6C8A"/>
                 </a:solidFill>
@@ -5355,7 +5355,7 @@
               </a:rPr>
               <a:t>Within 12 months</a:t>
             </a:r>
-            <a:endParaRPr lang="en-US" sz="1300" dirty="0"/>
+            <a:endParaRPr lang="en-US" sz="1200" dirty="0"/>
           </a:p>
         </p:txBody>
       </p:sp>
@@ -5367,12 +5367,12 @@
         </p:nvSpPr>
         <p:spPr>
           <a:xfrm>
-            <a:off x="10058400" y="2247900"/>
-            <a:ext cx="1714500" cy="2857500"/>
+            <a:off x="7038975" y="4124325"/>
+            <a:ext cx="4752975" cy="1333500"/>
           </a:xfrm>
           <a:prstGeom prst="roundRect">
             <a:avLst>
-              <a:gd name="adj" fmla="val 5333"/>
+              <a:gd name="adj" fmla="val 6857"/>
             </a:avLst>
           </a:prstGeom>
           <a:solidFill>
@@ -5394,8 +5394,8 @@
         </p:nvSpPr>
         <p:spPr>
           <a:xfrm>
-            <a:off x="10058400" y="2247900"/>
-            <a:ext cx="1714500" cy="76200"/>
+            <a:off x="7038975" y="4124325"/>
+            <a:ext cx="4752975" cy="76200"/>
           </a:xfrm>
           <a:prstGeom prst="rect">
             <a:avLst/>
@@ -5419,8 +5419,8 @@
         </p:nvSpPr>
         <p:spPr>
           <a:xfrm>
-            <a:off x="10248900" y="2495550"/>
-            <a:ext cx="1333500" cy="171450"/>
+            <a:off x="7191375" y="4314825"/>
+            <a:ext cx="4448175" cy="171450"/>
           </a:xfrm>
           <a:prstGeom prst="rect">
             <a:avLst/>
@@ -5458,24 +5458,24 @@
         </p:nvSpPr>
         <p:spPr>
           <a:xfrm>
-            <a:off x="10248900" y="2895600"/>
-            <a:ext cx="1333500" cy="1524000"/>
-          </a:xfrm>
-          <a:prstGeom prst="rect">
-            <a:avLst/>
-          </a:prstGeom>
-          <a:noFill/>
-          <a:ln/>
-        </p:spPr>
-        <p:txBody>
-          <a:bodyPr wrap="none" lIns="0" tIns="0" rIns="0" bIns="0" rtlCol="0" anchor="ctr"/>
-          <a:lstStyle/>
-          <a:p>
-            <a:pPr algn="l" indent="0" marL="0">
-              <a:buNone/>
-            </a:pPr>
-            <a:r>
-              <a:rPr lang="en-US" sz="3400" b="1" dirty="0">
+            <a:off x="7191375" y="4600575"/>
+            <a:ext cx="4448175" cy="381000"/>
+          </a:xfrm>
+          <a:prstGeom prst="rect">
+            <a:avLst/>
+          </a:prstGeom>
+          <a:noFill/>
+          <a:ln/>
+        </p:spPr>
+        <p:txBody>
+          <a:bodyPr wrap="square" lIns="0" tIns="0" rIns="0" bIns="0" rtlCol="0" anchor="ctr"/>
+          <a:lstStyle/>
+          <a:p>
+            <a:pPr algn="l" indent="0" marL="0">
+              <a:buNone/>
+            </a:pPr>
+            <a:r>
+              <a:rPr lang="en-US" sz="2500" b="1" dirty="0">
                 <a:solidFill>
                   <a:srgbClr val="E15759"/>
                 </a:solidFill>
@@ -5483,9 +5483,9 @@
                 <a:ea typeface="Helvetica Neue" pitchFamily="34" charset="-122"/>
                 <a:cs typeface="Helvetica Neue" pitchFamily="34" charset="-120"/>
               </a:rPr>
-              <a:t>−15–25%</a:t>
-            </a:r>
-            <a:endParaRPr lang="en-US" sz="3400" dirty="0"/>
+              <a:t>−20%</a:t>
+            </a:r>
+            <a:endParaRPr lang="en-US" sz="2500" dirty="0"/>
           </a:p>
         </p:txBody>
       </p:sp>
@@ -5497,8 +5497,8 @@
         </p:nvSpPr>
         <p:spPr>
           <a:xfrm>
-            <a:off x="10248900" y="4552950"/>
-            <a:ext cx="1333500" cy="381000"/>
+            <a:off x="7191375" y="5038725"/>
+            <a:ext cx="4448175" cy="304800"/>
           </a:xfrm>
           <a:prstGeom prst="rect">
             <a:avLst/>
@@ -5514,7 +5514,7 @@
               <a:buNone/>
             </a:pPr>
             <a:r>
-              <a:rPr lang="en-US" sz="1300" dirty="0">
+              <a:rPr lang="en-US" sz="1200" dirty="0">
                 <a:solidFill>
                   <a:srgbClr val="6C6C8A"/>
                 </a:solidFill>
@@ -5524,7 +5524,7 @@
               </a:rPr>
               <a:t>Weeks of supply</a:t>
             </a:r>
-            <a:endParaRPr lang="en-US" sz="1300" dirty="0"/>
+            <a:endParaRPr lang="en-US" sz="1200" dirty="0"/>
           </a:p>
         </p:txBody>
       </p:sp>
@@ -5599,7 +5599,7 @@
         <p:spPr>
           <a:xfrm>
             <a:off x="400050" y="247650"/>
-            <a:ext cx="10839450" cy="381000"/>
+            <a:ext cx="10839450" cy="428625"/>
           </a:xfrm>
           <a:prstGeom prst="rect">
             <a:avLst/>
@@ -5615,7 +5615,7 @@
               <a:buNone/>
             </a:pPr>
             <a:r>
-              <a:rPr lang="en-US" sz="3000" b="1" dirty="0">
+              <a:rPr lang="en-US" sz="3200" b="1" dirty="0">
                 <a:solidFill>
                   <a:srgbClr val="EAEAEA"/>
                 </a:solidFill>
@@ -5625,7 +5625,7 @@
               </a:rPr>
               <a:t>Sequence the capability—not a one-off promo calendar</a:t>
             </a:r>
-            <a:endParaRPr lang="en-US" sz="3000" dirty="0"/>
+            <a:endParaRPr lang="en-US" sz="3200" dirty="0"/>
           </a:p>
         </p:txBody>
       </p:sp>
@@ -5715,8 +5715,8 @@
         </p:nvSpPr>
         <p:spPr>
           <a:xfrm>
-            <a:off x="400050" y="781050"/>
-            <a:ext cx="3667125" cy="5086350"/>
+            <a:off x="400050" y="904875"/>
+            <a:ext cx="3667125" cy="4962525"/>
           </a:xfrm>
           <a:prstGeom prst="roundRect">
             <a:avLst>
@@ -5742,8 +5742,8 @@
         </p:nvSpPr>
         <p:spPr>
           <a:xfrm>
-            <a:off x="400050" y="781050"/>
-            <a:ext cx="57150" cy="5086350"/>
+            <a:off x="400050" y="904875"/>
+            <a:ext cx="57150" cy="4962525"/>
           </a:xfrm>
           <a:prstGeom prst="rect">
             <a:avLst/>
@@ -5767,7 +5767,7 @@
         </p:nvSpPr>
         <p:spPr>
           <a:xfrm>
-            <a:off x="571500" y="952500"/>
+            <a:off x="571500" y="1076325"/>
             <a:ext cx="3324225" cy="171450"/>
           </a:xfrm>
           <a:prstGeom prst="rect">
@@ -5806,7 +5806,7 @@
         </p:nvSpPr>
         <p:spPr>
           <a:xfrm>
-            <a:off x="571500" y="1200150"/>
+            <a:off x="571500" y="1323975"/>
             <a:ext cx="3324225" cy="381000"/>
           </a:xfrm>
           <a:prstGeom prst="rect">
@@ -5845,7 +5845,7 @@
         </p:nvSpPr>
         <p:spPr>
           <a:xfrm>
-            <a:off x="571500" y="1619250"/>
+            <a:off x="571500" y="1743075"/>
             <a:ext cx="3324225" cy="457200"/>
           </a:xfrm>
           <a:prstGeom prst="rect">
@@ -5884,7 +5884,7 @@
         </p:nvSpPr>
         <p:spPr>
           <a:xfrm>
-            <a:off x="571500" y="2200275"/>
+            <a:off x="571500" y="2371725"/>
             <a:ext cx="66675" cy="66675"/>
           </a:xfrm>
           <a:prstGeom prst="roundRect">
@@ -5911,7 +5911,7 @@
         </p:nvSpPr>
         <p:spPr>
           <a:xfrm>
-            <a:off x="762000" y="2114550"/>
+            <a:off x="762000" y="2238375"/>
             <a:ext cx="3133725" cy="342900"/>
           </a:xfrm>
           <a:prstGeom prst="rect">
@@ -5921,7 +5921,7 @@
           <a:ln/>
         </p:spPr>
         <p:txBody>
-          <a:bodyPr wrap="square" lIns="0" tIns="0" rIns="0" bIns="0" rtlCol="0" anchor="t"/>
+          <a:bodyPr wrap="square" lIns="0" tIns="0" rIns="0" bIns="0" rtlCol="0" anchor="ctr"/>
           <a:lstStyle/>
           <a:p>
             <a:pPr algn="l" indent="0" marL="0">
@@ -5950,7 +5950,7 @@
         </p:nvSpPr>
         <p:spPr>
           <a:xfrm>
-            <a:off x="571500" y="2428875"/>
+            <a:off x="571500" y="2600325"/>
             <a:ext cx="66675" cy="66675"/>
           </a:xfrm>
           <a:prstGeom prst="roundRect">
@@ -5977,7 +5977,7 @@
         </p:nvSpPr>
         <p:spPr>
           <a:xfrm>
-            <a:off x="762000" y="2343150"/>
+            <a:off x="762000" y="2466975"/>
             <a:ext cx="3133725" cy="342900"/>
           </a:xfrm>
           <a:prstGeom prst="rect">
@@ -5987,7 +5987,7 @@
           <a:ln/>
         </p:spPr>
         <p:txBody>
-          <a:bodyPr wrap="square" lIns="0" tIns="0" rIns="0" bIns="0" rtlCol="0" anchor="t"/>
+          <a:bodyPr wrap="square" lIns="0" tIns="0" rIns="0" bIns="0" rtlCol="0" anchor="ctr"/>
           <a:lstStyle/>
           <a:p>
             <a:pPr algn="l" indent="0" marL="0">
@@ -6016,7 +6016,7 @@
         </p:nvSpPr>
         <p:spPr>
           <a:xfrm>
-            <a:off x="571500" y="2657475"/>
+            <a:off x="571500" y="2828925"/>
             <a:ext cx="66675" cy="66675"/>
           </a:xfrm>
           <a:prstGeom prst="roundRect">
@@ -6043,7 +6043,7 @@
         </p:nvSpPr>
         <p:spPr>
           <a:xfrm>
-            <a:off x="762000" y="2571750"/>
+            <a:off x="762000" y="2695575"/>
             <a:ext cx="3133725" cy="342900"/>
           </a:xfrm>
           <a:prstGeom prst="rect">
@@ -6053,7 +6053,7 @@
           <a:ln/>
         </p:spPr>
         <p:txBody>
-          <a:bodyPr wrap="square" lIns="0" tIns="0" rIns="0" bIns="0" rtlCol="0" anchor="t"/>
+          <a:bodyPr wrap="square" lIns="0" tIns="0" rIns="0" bIns="0" rtlCol="0" anchor="ctr"/>
           <a:lstStyle/>
           <a:p>
             <a:pPr algn="l" indent="0" marL="0">
@@ -6082,8 +6082,8 @@
         </p:nvSpPr>
         <p:spPr>
           <a:xfrm>
-            <a:off x="4257675" y="781050"/>
-            <a:ext cx="3667125" cy="5086350"/>
+            <a:off x="4257675" y="904875"/>
+            <a:ext cx="3667125" cy="4962525"/>
           </a:xfrm>
           <a:prstGeom prst="roundRect">
             <a:avLst>
@@ -6109,8 +6109,8 @@
         </p:nvSpPr>
         <p:spPr>
           <a:xfrm>
-            <a:off x="4257675" y="781050"/>
-            <a:ext cx="57150" cy="5086350"/>
+            <a:off x="4257675" y="904875"/>
+            <a:ext cx="57150" cy="4962525"/>
           </a:xfrm>
           <a:prstGeom prst="rect">
             <a:avLst/>
@@ -6134,7 +6134,7 @@
         </p:nvSpPr>
         <p:spPr>
           <a:xfrm>
-            <a:off x="4429125" y="952500"/>
+            <a:off x="4429125" y="1076325"/>
             <a:ext cx="3324225" cy="171450"/>
           </a:xfrm>
           <a:prstGeom prst="rect">
@@ -6173,7 +6173,7 @@
         </p:nvSpPr>
         <p:spPr>
           <a:xfrm>
-            <a:off x="4429125" y="1200150"/>
+            <a:off x="4429125" y="1323975"/>
             <a:ext cx="3324225" cy="381000"/>
           </a:xfrm>
           <a:prstGeom prst="rect">
@@ -6212,7 +6212,7 @@
         </p:nvSpPr>
         <p:spPr>
           <a:xfrm>
-            <a:off x="4429125" y="1619250"/>
+            <a:off x="4429125" y="1743075"/>
             <a:ext cx="3324225" cy="457200"/>
           </a:xfrm>
           <a:prstGeom prst="rect">
@@ -6251,7 +6251,7 @@
         </p:nvSpPr>
         <p:spPr>
           <a:xfrm>
-            <a:off x="4429125" y="2200275"/>
+            <a:off x="4429125" y="2371725"/>
             <a:ext cx="66675" cy="66675"/>
           </a:xfrm>
           <a:prstGeom prst="roundRect">
@@ -6278,7 +6278,7 @@
         </p:nvSpPr>
         <p:spPr>
           <a:xfrm>
-            <a:off x="4619625" y="2114550"/>
+            <a:off x="4619625" y="2238375"/>
             <a:ext cx="3133725" cy="342900"/>
           </a:xfrm>
           <a:prstGeom prst="rect">
@@ -6288,7 +6288,7 @@
           <a:ln/>
         </p:spPr>
         <p:txBody>
-          <a:bodyPr wrap="square" lIns="0" tIns="0" rIns="0" bIns="0" rtlCol="0" anchor="t"/>
+          <a:bodyPr wrap="square" lIns="0" tIns="0" rIns="0" bIns="0" rtlCol="0" anchor="ctr"/>
           <a:lstStyle/>
           <a:p>
             <a:pPr algn="l" indent="0" marL="0">
@@ -6317,7 +6317,7 @@
         </p:nvSpPr>
         <p:spPr>
           <a:xfrm>
-            <a:off x="4429125" y="2428875"/>
+            <a:off x="4429125" y="2600325"/>
             <a:ext cx="66675" cy="66675"/>
           </a:xfrm>
           <a:prstGeom prst="roundRect">
@@ -6344,7 +6344,7 @@
         </p:nvSpPr>
         <p:spPr>
           <a:xfrm>
-            <a:off x="4619625" y="2343150"/>
+            <a:off x="4619625" y="2466975"/>
             <a:ext cx="3133725" cy="342900"/>
           </a:xfrm>
           <a:prstGeom prst="rect">
@@ -6354,7 +6354,7 @@
           <a:ln/>
         </p:spPr>
         <p:txBody>
-          <a:bodyPr wrap="square" lIns="0" tIns="0" rIns="0" bIns="0" rtlCol="0" anchor="t"/>
+          <a:bodyPr wrap="square" lIns="0" tIns="0" rIns="0" bIns="0" rtlCol="0" anchor="ctr"/>
           <a:lstStyle/>
           <a:p>
             <a:pPr algn="l" indent="0" marL="0">
@@ -6383,7 +6383,7 @@
         </p:nvSpPr>
         <p:spPr>
           <a:xfrm>
-            <a:off x="4429125" y="2657475"/>
+            <a:off x="4429125" y="2828925"/>
             <a:ext cx="66675" cy="66675"/>
           </a:xfrm>
           <a:prstGeom prst="roundRect">
@@ -6410,7 +6410,7 @@
         </p:nvSpPr>
         <p:spPr>
           <a:xfrm>
-            <a:off x="4619625" y="2571750"/>
+            <a:off x="4619625" y="2695575"/>
             <a:ext cx="3133725" cy="342900"/>
           </a:xfrm>
           <a:prstGeom prst="rect">
@@ -6420,7 +6420,7 @@
           <a:ln/>
         </p:spPr>
         <p:txBody>
-          <a:bodyPr wrap="square" lIns="0" tIns="0" rIns="0" bIns="0" rtlCol="0" anchor="t"/>
+          <a:bodyPr wrap="square" lIns="0" tIns="0" rIns="0" bIns="0" rtlCol="0" anchor="ctr"/>
           <a:lstStyle/>
           <a:p>
             <a:pPr algn="l" indent="0" marL="0">
@@ -6449,8 +6449,8 @@
         </p:nvSpPr>
         <p:spPr>
           <a:xfrm>
-            <a:off x="8115300" y="781050"/>
-            <a:ext cx="3667125" cy="5086350"/>
+            <a:off x="8115300" y="904875"/>
+            <a:ext cx="3667125" cy="4962525"/>
           </a:xfrm>
           <a:prstGeom prst="roundRect">
             <a:avLst>
@@ -6476,8 +6476,8 @@
         </p:nvSpPr>
         <p:spPr>
           <a:xfrm>
-            <a:off x="8115300" y="781050"/>
-            <a:ext cx="57150" cy="5086350"/>
+            <a:off x="8115300" y="904875"/>
+            <a:ext cx="57150" cy="4962525"/>
           </a:xfrm>
           <a:prstGeom prst="rect">
             <a:avLst/>
@@ -6501,7 +6501,7 @@
         </p:nvSpPr>
         <p:spPr>
           <a:xfrm>
-            <a:off x="8286750" y="952500"/>
+            <a:off x="8286750" y="1076325"/>
             <a:ext cx="3324225" cy="171450"/>
           </a:xfrm>
           <a:prstGeom prst="rect">
@@ -6540,7 +6540,7 @@
         </p:nvSpPr>
         <p:spPr>
           <a:xfrm>
-            <a:off x="8286750" y="1200150"/>
+            <a:off x="8286750" y="1323975"/>
             <a:ext cx="3324225" cy="381000"/>
           </a:xfrm>
           <a:prstGeom prst="rect">
@@ -6579,7 +6579,7 @@
         </p:nvSpPr>
         <p:spPr>
           <a:xfrm>
-            <a:off x="8286750" y="1619250"/>
+            <a:off x="8286750" y="1743075"/>
             <a:ext cx="3324225" cy="457200"/>
           </a:xfrm>
           <a:prstGeom prst="rect">
@@ -6618,7 +6618,7 @@
         </p:nvSpPr>
         <p:spPr>
           <a:xfrm>
-            <a:off x="8286750" y="2200275"/>
+            <a:off x="8286750" y="2371725"/>
             <a:ext cx="66675" cy="66675"/>
           </a:xfrm>
           <a:prstGeom prst="roundRect">
@@ -6645,7 +6645,7 @@
         </p:nvSpPr>
         <p:spPr>
           <a:xfrm>
-            <a:off x="8477250" y="2114550"/>
+            <a:off x="8477250" y="2238375"/>
             <a:ext cx="3133725" cy="342900"/>
           </a:xfrm>
           <a:prstGeom prst="rect">
@@ -6655,7 +6655,7 @@
           <a:ln/>
         </p:spPr>
         <p:txBody>
-          <a:bodyPr wrap="square" lIns="0" tIns="0" rIns="0" bIns="0" rtlCol="0" anchor="t"/>
+          <a:bodyPr wrap="square" lIns="0" tIns="0" rIns="0" bIns="0" rtlCol="0" anchor="ctr"/>
           <a:lstStyle/>
           <a:p>
             <a:pPr algn="l" indent="0" marL="0">
@@ -6684,7 +6684,7 @@
         </p:nvSpPr>
         <p:spPr>
           <a:xfrm>
-            <a:off x="8286750" y="2428875"/>
+            <a:off x="8286750" y="2600325"/>
             <a:ext cx="66675" cy="66675"/>
           </a:xfrm>
           <a:prstGeom prst="roundRect">
@@ -6711,7 +6711,7 @@
         </p:nvSpPr>
         <p:spPr>
           <a:xfrm>
-            <a:off x="8477250" y="2343150"/>
+            <a:off x="8477250" y="2466975"/>
             <a:ext cx="3133725" cy="342900"/>
           </a:xfrm>
           <a:prstGeom prst="rect">
@@ -6721,7 +6721,7 @@
           <a:ln/>
         </p:spPr>
         <p:txBody>
-          <a:bodyPr wrap="square" lIns="0" tIns="0" rIns="0" bIns="0" rtlCol="0" anchor="t"/>
+          <a:bodyPr wrap="square" lIns="0" tIns="0" rIns="0" bIns="0" rtlCol="0" anchor="ctr"/>
           <a:lstStyle/>
           <a:p>
             <a:pPr algn="l" indent="0" marL="0">
@@ -6750,7 +6750,7 @@
         </p:nvSpPr>
         <p:spPr>
           <a:xfrm>
-            <a:off x="8286750" y="2657475"/>
+            <a:off x="8286750" y="2828925"/>
             <a:ext cx="66675" cy="66675"/>
           </a:xfrm>
           <a:prstGeom prst="roundRect">
@@ -6777,7 +6777,7 @@
         </p:nvSpPr>
         <p:spPr>
           <a:xfrm>
-            <a:off x="8477250" y="2571750"/>
+            <a:off x="8477250" y="2695575"/>
             <a:ext cx="3133725" cy="342900"/>
           </a:xfrm>
           <a:prstGeom prst="rect">
@@ -6787,7 +6787,7 @@
           <a:ln/>
         </p:spPr>
         <p:txBody>
-          <a:bodyPr wrap="square" lIns="0" tIns="0" rIns="0" bIns="0" rtlCol="0" anchor="t"/>
+          <a:bodyPr wrap="square" lIns="0" tIns="0" rIns="0" bIns="0" rtlCol="0" anchor="ctr"/>
           <a:lstStyle/>
           <a:p>
             <a:pPr algn="l" indent="0" marL="0">
@@ -6918,7 +6918,7 @@
         <p:spPr>
           <a:xfrm>
             <a:off x="400050" y="247650"/>
-            <a:ext cx="10839450" cy="381000"/>
+            <a:ext cx="10839450" cy="428625"/>
           </a:xfrm>
           <a:prstGeom prst="rect">
             <a:avLst/>
@@ -6934,7 +6934,7 @@
               <a:buNone/>
             </a:pPr>
             <a:r>
-              <a:rPr lang="en-US" sz="3000" b="1" dirty="0">
+              <a:rPr lang="en-US" sz="3200" b="1" dirty="0">
                 <a:solidFill>
                   <a:srgbClr val="EAEAEA"/>
                 </a:solidFill>
@@ -6944,7 +6944,7 @@
               </a:rPr>
               <a:t>90-day pilot squad</a:t>
             </a:r>
-            <a:endParaRPr lang="en-US" sz="3000" dirty="0"/>
+            <a:endParaRPr lang="en-US" sz="3200" dirty="0"/>
           </a:p>
         </p:txBody>
       </p:sp>
@@ -6956,8 +6956,8 @@
         </p:nvSpPr>
         <p:spPr>
           <a:xfrm>
-            <a:off x="400050" y="800100"/>
-            <a:ext cx="10648950" cy="266700"/>
+            <a:off x="400050" y="942975"/>
+            <a:ext cx="10648950" cy="285750"/>
           </a:xfrm>
           <a:prstGeom prst="rect">
             <a:avLst/>
@@ -7073,7 +7073,7 @@
         </p:nvSpPr>
         <p:spPr>
           <a:xfrm>
-            <a:off x="1905000" y="1219200"/>
+            <a:off x="1905000" y="1457325"/>
             <a:ext cx="3168650" cy="171450"/>
           </a:xfrm>
           <a:prstGeom prst="rect">
@@ -7112,7 +7112,7 @@
         </p:nvSpPr>
         <p:spPr>
           <a:xfrm>
-            <a:off x="5226050" y="1219200"/>
+            <a:off x="5226050" y="1457325"/>
             <a:ext cx="3168650" cy="171450"/>
           </a:xfrm>
           <a:prstGeom prst="rect">
@@ -7151,7 +7151,7 @@
         </p:nvSpPr>
         <p:spPr>
           <a:xfrm>
-            <a:off x="8547100" y="1219200"/>
+            <a:off x="8547100" y="1457325"/>
             <a:ext cx="3168650" cy="171450"/>
           </a:xfrm>
           <a:prstGeom prst="rect">
@@ -7190,8 +7190,8 @@
         </p:nvSpPr>
         <p:spPr>
           <a:xfrm>
-            <a:off x="400050" y="1562100"/>
-            <a:ext cx="1257300" cy="876300"/>
+            <a:off x="400050" y="1800225"/>
+            <a:ext cx="1257300" cy="828675"/>
           </a:xfrm>
           <a:prstGeom prst="rect">
             <a:avLst/>
@@ -7229,8 +7229,8 @@
         </p:nvSpPr>
         <p:spPr>
           <a:xfrm>
-            <a:off x="1828800" y="1562100"/>
-            <a:ext cx="9963150" cy="876300"/>
+            <a:off x="1828800" y="1800225"/>
+            <a:ext cx="9963150" cy="828675"/>
           </a:xfrm>
           <a:prstGeom prst="rect">
             <a:avLst/>
@@ -7254,8 +7254,8 @@
         </p:nvSpPr>
         <p:spPr>
           <a:xfrm>
-            <a:off x="400050" y="2514600"/>
-            <a:ext cx="1257300" cy="876300"/>
+            <a:off x="400050" y="2705100"/>
+            <a:ext cx="1257300" cy="828675"/>
           </a:xfrm>
           <a:prstGeom prst="rect">
             <a:avLst/>
@@ -7293,8 +7293,8 @@
         </p:nvSpPr>
         <p:spPr>
           <a:xfrm>
-            <a:off x="1828800" y="2514600"/>
-            <a:ext cx="9963150" cy="876300"/>
+            <a:off x="1828800" y="2705100"/>
+            <a:ext cx="9963150" cy="828675"/>
           </a:xfrm>
           <a:prstGeom prst="rect">
             <a:avLst/>
@@ -7318,8 +7318,8 @@
         </p:nvSpPr>
         <p:spPr>
           <a:xfrm>
-            <a:off x="400050" y="3467100"/>
-            <a:ext cx="1257300" cy="876300"/>
+            <a:off x="400050" y="3609975"/>
+            <a:ext cx="1257300" cy="828675"/>
           </a:xfrm>
           <a:prstGeom prst="rect">
             <a:avLst/>
@@ -7357,8 +7357,8 @@
         </p:nvSpPr>
         <p:spPr>
           <a:xfrm>
-            <a:off x="1828800" y="3467100"/>
-            <a:ext cx="9963150" cy="876300"/>
+            <a:off x="1828800" y="3609975"/>
+            <a:ext cx="9963150" cy="828675"/>
           </a:xfrm>
           <a:prstGeom prst="rect">
             <a:avLst/>
@@ -7382,8 +7382,8 @@
         </p:nvSpPr>
         <p:spPr>
           <a:xfrm>
-            <a:off x="400050" y="4419600"/>
-            <a:ext cx="1257300" cy="876300"/>
+            <a:off x="400050" y="4514850"/>
+            <a:ext cx="1257300" cy="828675"/>
           </a:xfrm>
           <a:prstGeom prst="rect">
             <a:avLst/>
@@ -7421,8 +7421,8 @@
         </p:nvSpPr>
         <p:spPr>
           <a:xfrm>
-            <a:off x="1828800" y="4419600"/>
-            <a:ext cx="9963150" cy="876300"/>
+            <a:off x="1828800" y="4514850"/>
+            <a:ext cx="9963150" cy="828675"/>
           </a:xfrm>
           <a:prstGeom prst="rect">
             <a:avLst/>
@@ -7446,8 +7446,8 @@
         </p:nvSpPr>
         <p:spPr>
           <a:xfrm>
-            <a:off x="400050" y="5372100"/>
-            <a:ext cx="1257300" cy="876300"/>
+            <a:off x="400050" y="5419725"/>
+            <a:ext cx="1257300" cy="828675"/>
           </a:xfrm>
           <a:prstGeom prst="rect">
             <a:avLst/>
@@ -7485,8 +7485,8 @@
         </p:nvSpPr>
         <p:spPr>
           <a:xfrm>
-            <a:off x="1828800" y="5372100"/>
-            <a:ext cx="9963150" cy="876300"/>
+            <a:off x="1828800" y="5419725"/>
+            <a:ext cx="9963150" cy="828675"/>
           </a:xfrm>
           <a:prstGeom prst="rect">
             <a:avLst/>
@@ -7510,7 +7510,7 @@
         </p:nvSpPr>
         <p:spPr>
           <a:xfrm>
-            <a:off x="1924050" y="1809750"/>
+            <a:off x="1924050" y="2024062"/>
             <a:ext cx="3130550" cy="381000"/>
           </a:xfrm>
           <a:prstGeom prst="roundRect">
@@ -7537,7 +7537,7 @@
         </p:nvSpPr>
         <p:spPr>
           <a:xfrm>
-            <a:off x="2000250" y="1809750"/>
+            <a:off x="2000250" y="2024062"/>
             <a:ext cx="2978150" cy="381000"/>
           </a:xfrm>
           <a:prstGeom prst="rect">
@@ -7576,7 +7576,7 @@
         </p:nvSpPr>
         <p:spPr>
           <a:xfrm>
-            <a:off x="1924050" y="2762250"/>
+            <a:off x="1924050" y="2928938"/>
             <a:ext cx="3130550" cy="381000"/>
           </a:xfrm>
           <a:prstGeom prst="roundRect">
@@ -7603,7 +7603,7 @@
         </p:nvSpPr>
         <p:spPr>
           <a:xfrm>
-            <a:off x="2000250" y="2762250"/>
+            <a:off x="2000250" y="2928938"/>
             <a:ext cx="2978150" cy="381000"/>
           </a:xfrm>
           <a:prstGeom prst="rect">
@@ -7642,7 +7642,7 @@
         </p:nvSpPr>
         <p:spPr>
           <a:xfrm>
-            <a:off x="5245100" y="3714750"/>
+            <a:off x="5245100" y="3833812"/>
             <a:ext cx="3130550" cy="381000"/>
           </a:xfrm>
           <a:prstGeom prst="roundRect">
@@ -7669,7 +7669,7 @@
         </p:nvSpPr>
         <p:spPr>
           <a:xfrm>
-            <a:off x="5321300" y="3714750"/>
+            <a:off x="5321300" y="3833812"/>
             <a:ext cx="2978150" cy="381000"/>
           </a:xfrm>
           <a:prstGeom prst="rect">
@@ -7708,7 +7708,7 @@
         </p:nvSpPr>
         <p:spPr>
           <a:xfrm>
-            <a:off x="5245100" y="4667250"/>
+            <a:off x="5245100" y="4738688"/>
             <a:ext cx="3130550" cy="381000"/>
           </a:xfrm>
           <a:prstGeom prst="roundRect">
@@ -7735,7 +7735,7 @@
         </p:nvSpPr>
         <p:spPr>
           <a:xfrm>
-            <a:off x="5321300" y="4667250"/>
+            <a:off x="5321300" y="4738688"/>
             <a:ext cx="2978150" cy="381000"/>
           </a:xfrm>
           <a:prstGeom prst="rect">
@@ -7774,7 +7774,7 @@
         </p:nvSpPr>
         <p:spPr>
           <a:xfrm>
-            <a:off x="8566150" y="5619750"/>
+            <a:off x="8566150" y="5643563"/>
             <a:ext cx="3130550" cy="381000"/>
           </a:xfrm>
           <a:prstGeom prst="roundRect">
@@ -7801,7 +7801,7 @@
         </p:nvSpPr>
         <p:spPr>
           <a:xfrm>
-            <a:off x="8642350" y="5619750"/>
+            <a:off x="8642350" y="5643563"/>
             <a:ext cx="2978150" cy="381000"/>
           </a:xfrm>
           <a:prstGeom prst="rect">
@@ -7941,8 +7941,8 @@
         </p:nvSpPr>
         <p:spPr>
           <a:xfrm>
-            <a:off x="400050" y="1238250"/>
-            <a:ext cx="9525000" cy="1333500"/>
+            <a:off x="400050" y="1143000"/>
+            <a:ext cx="9525000" cy="1371600"/>
           </a:xfrm>
           <a:prstGeom prst="rect">
             <a:avLst/>
@@ -8003,8 +8003,8 @@
         </p:nvSpPr>
         <p:spPr>
           <a:xfrm>
-            <a:off x="400050" y="2952750"/>
-            <a:ext cx="8572500" cy="571500"/>
+            <a:off x="400050" y="2781300"/>
+            <a:ext cx="8572500" cy="342900"/>
           </a:xfrm>
           <a:prstGeom prst="rect">
             <a:avLst/>
@@ -8094,7 +8094,7 @@
         </p:nvSpPr>
         <p:spPr>
           <a:xfrm>
-            <a:off x="571500" y="4152900"/>
+            <a:off x="571500" y="4114800"/>
             <a:ext cx="3105150" cy="171450"/>
           </a:xfrm>
           <a:prstGeom prst="rect">
@@ -8133,8 +8133,8 @@
         </p:nvSpPr>
         <p:spPr>
           <a:xfrm>
-            <a:off x="571500" y="4419600"/>
-            <a:ext cx="3105150" cy="571500"/>
+            <a:off x="571500" y="4362450"/>
+            <a:ext cx="3105150" cy="666750"/>
           </a:xfrm>
           <a:prstGeom prst="rect">
             <a:avLst/>
@@ -8224,7 +8224,7 @@
         </p:nvSpPr>
         <p:spPr>
           <a:xfrm>
-            <a:off x="4343400" y="4152900"/>
+            <a:off x="4343400" y="4114800"/>
             <a:ext cx="3105150" cy="171450"/>
           </a:xfrm>
           <a:prstGeom prst="rect">
@@ -8263,8 +8263,8 @@
         </p:nvSpPr>
         <p:spPr>
           <a:xfrm>
-            <a:off x="4343400" y="4419600"/>
-            <a:ext cx="3105150" cy="571500"/>
+            <a:off x="4343400" y="4362450"/>
+            <a:ext cx="3105150" cy="666750"/>
           </a:xfrm>
           <a:prstGeom prst="rect">
             <a:avLst/>
@@ -8354,7 +8354,7 @@
         </p:nvSpPr>
         <p:spPr>
           <a:xfrm>
-            <a:off x="8115300" y="4152900"/>
+            <a:off x="8115300" y="4114800"/>
             <a:ext cx="3105150" cy="171450"/>
           </a:xfrm>
           <a:prstGeom prst="rect">
@@ -8393,8 +8393,8 @@
         </p:nvSpPr>
         <p:spPr>
           <a:xfrm>
-            <a:off x="8115300" y="4419600"/>
-            <a:ext cx="3105150" cy="571500"/>
+            <a:off x="8115300" y="4362450"/>
+            <a:ext cx="3105150" cy="666750"/>
           </a:xfrm>
           <a:prstGeom prst="rect">
             <a:avLst/>

--- a/examples/apparel-markdown.pptx
+++ b/examples/apparel-markdown.pptx
@@ -1726,7 +1726,7 @@
         </p:nvSpPr>
         <p:spPr>
           <a:xfrm>
-            <a:off x="400050" y="2038350"/>
+            <a:off x="400050" y="2114550"/>
             <a:ext cx="6858000" cy="457200"/>
           </a:xfrm>
           <a:prstGeom prst="rect">
@@ -1765,7 +1765,7 @@
         </p:nvSpPr>
         <p:spPr>
           <a:xfrm>
-            <a:off x="400050" y="2686050"/>
+            <a:off x="400050" y="2914650"/>
             <a:ext cx="1238250" cy="285750"/>
           </a:xfrm>
           <a:prstGeom prst="roundRect">
@@ -1792,7 +1792,7 @@
         </p:nvSpPr>
         <p:spPr>
           <a:xfrm>
-            <a:off x="476250" y="2743200"/>
+            <a:off x="476250" y="2971800"/>
             <a:ext cx="1085850" cy="171450"/>
           </a:xfrm>
           <a:prstGeom prst="rect">
@@ -1831,7 +1831,7 @@
         </p:nvSpPr>
         <p:spPr>
           <a:xfrm>
-            <a:off x="400050" y="3105150"/>
+            <a:off x="400050" y="3333750"/>
             <a:ext cx="6667500" cy="342900"/>
           </a:xfrm>
           <a:prstGeom prst="rect">
@@ -2774,12 +2774,12 @@
         </p:nvSpPr>
         <p:spPr>
           <a:xfrm>
-            <a:off x="400050" y="1457325"/>
-            <a:ext cx="5695950" cy="4867275"/>
+            <a:off x="400050" y="1419225"/>
+            <a:ext cx="5695950" cy="4905375"/>
           </a:xfrm>
           <a:prstGeom prst="roundRect">
             <a:avLst>
-              <a:gd name="adj" fmla="val 1879"/>
+              <a:gd name="adj" fmla="val 1864"/>
             </a:avLst>
           </a:prstGeom>
           <a:solidFill>
@@ -2801,7 +2801,7 @@
         </p:nvSpPr>
         <p:spPr>
           <a:xfrm>
-            <a:off x="400050" y="1457325"/>
+            <a:off x="400050" y="1419225"/>
             <a:ext cx="5695950" cy="76200"/>
           </a:xfrm>
           <a:prstGeom prst="rect">
@@ -2826,7 +2826,7 @@
         </p:nvSpPr>
         <p:spPr>
           <a:xfrm>
-            <a:off x="609600" y="1685925"/>
+            <a:off x="609600" y="1647825"/>
             <a:ext cx="5276850" cy="171450"/>
           </a:xfrm>
           <a:prstGeom prst="rect">
@@ -2865,7 +2865,7 @@
         </p:nvSpPr>
         <p:spPr>
           <a:xfrm>
-            <a:off x="609600" y="1981200"/>
+            <a:off x="609600" y="1943100"/>
             <a:ext cx="5276850" cy="476250"/>
           </a:xfrm>
           <a:prstGeom prst="rect">
@@ -2904,7 +2904,7 @@
         </p:nvSpPr>
         <p:spPr>
           <a:xfrm>
-            <a:off x="609600" y="2828925"/>
+            <a:off x="609600" y="2790825"/>
             <a:ext cx="66675" cy="66675"/>
           </a:xfrm>
           <a:prstGeom prst="roundRect">
@@ -2931,7 +2931,7 @@
         </p:nvSpPr>
         <p:spPr>
           <a:xfrm>
-            <a:off x="800100" y="2657475"/>
+            <a:off x="800100" y="2619375"/>
             <a:ext cx="5086350" cy="419100"/>
           </a:xfrm>
           <a:prstGeom prst="rect">
@@ -2970,7 +2970,7 @@
         </p:nvSpPr>
         <p:spPr>
           <a:xfrm>
-            <a:off x="609600" y="3286125"/>
+            <a:off x="609600" y="3248025"/>
             <a:ext cx="66675" cy="66675"/>
           </a:xfrm>
           <a:prstGeom prst="roundRect">
@@ -2997,7 +2997,7 @@
         </p:nvSpPr>
         <p:spPr>
           <a:xfrm>
-            <a:off x="800100" y="3114675"/>
+            <a:off x="800100" y="3076575"/>
             <a:ext cx="5086350" cy="419100"/>
           </a:xfrm>
           <a:prstGeom prst="rect">
@@ -3036,7 +3036,7 @@
         </p:nvSpPr>
         <p:spPr>
           <a:xfrm>
-            <a:off x="609600" y="3743325"/>
+            <a:off x="609600" y="3705225"/>
             <a:ext cx="66675" cy="66675"/>
           </a:xfrm>
           <a:prstGeom prst="roundRect">
@@ -3063,7 +3063,7 @@
         </p:nvSpPr>
         <p:spPr>
           <a:xfrm>
-            <a:off x="800100" y="3571875"/>
+            <a:off x="800100" y="3533775"/>
             <a:ext cx="5086350" cy="419100"/>
           </a:xfrm>
           <a:prstGeom prst="rect">
@@ -3102,12 +3102,12 @@
         </p:nvSpPr>
         <p:spPr>
           <a:xfrm>
-            <a:off x="6324600" y="1457325"/>
-            <a:ext cx="5467350" cy="4867275"/>
+            <a:off x="6324600" y="1419225"/>
+            <a:ext cx="5467350" cy="4905375"/>
           </a:xfrm>
           <a:prstGeom prst="roundRect">
             <a:avLst>
-              <a:gd name="adj" fmla="val 1879"/>
+              <a:gd name="adj" fmla="val 1864"/>
             </a:avLst>
           </a:prstGeom>
           <a:solidFill>
@@ -3129,7 +3129,7 @@
         </p:nvSpPr>
         <p:spPr>
           <a:xfrm>
-            <a:off x="6324600" y="1457325"/>
+            <a:off x="6324600" y="1419225"/>
             <a:ext cx="5467350" cy="76200"/>
           </a:xfrm>
           <a:prstGeom prst="rect">
@@ -3154,7 +3154,7 @@
         </p:nvSpPr>
         <p:spPr>
           <a:xfrm>
-            <a:off x="6534150" y="1685925"/>
+            <a:off x="6534150" y="1647825"/>
             <a:ext cx="5048250" cy="171450"/>
           </a:xfrm>
           <a:prstGeom prst="rect">
@@ -3193,7 +3193,7 @@
         </p:nvSpPr>
         <p:spPr>
           <a:xfrm>
-            <a:off x="6534150" y="1981200"/>
+            <a:off x="6534150" y="1943100"/>
             <a:ext cx="5048250" cy="476250"/>
           </a:xfrm>
           <a:prstGeom prst="rect">
@@ -3232,7 +3232,7 @@
         </p:nvSpPr>
         <p:spPr>
           <a:xfrm>
-            <a:off x="6534150" y="2828925"/>
+            <a:off x="6534150" y="2790825"/>
             <a:ext cx="66675" cy="66675"/>
           </a:xfrm>
           <a:prstGeom prst="roundRect">
@@ -3259,7 +3259,7 @@
         </p:nvSpPr>
         <p:spPr>
           <a:xfrm>
-            <a:off x="6724650" y="2657475"/>
+            <a:off x="6724650" y="2619375"/>
             <a:ext cx="4857750" cy="419100"/>
           </a:xfrm>
           <a:prstGeom prst="rect">
@@ -3298,7 +3298,7 @@
         </p:nvSpPr>
         <p:spPr>
           <a:xfrm>
-            <a:off x="6534150" y="3286125"/>
+            <a:off x="6534150" y="3248025"/>
             <a:ext cx="66675" cy="66675"/>
           </a:xfrm>
           <a:prstGeom prst="roundRect">
@@ -3325,7 +3325,7 @@
         </p:nvSpPr>
         <p:spPr>
           <a:xfrm>
-            <a:off x="6724650" y="3114675"/>
+            <a:off x="6724650" y="3076575"/>
             <a:ext cx="4857750" cy="419100"/>
           </a:xfrm>
           <a:prstGeom prst="rect">
@@ -3364,7 +3364,7 @@
         </p:nvSpPr>
         <p:spPr>
           <a:xfrm>
-            <a:off x="6534150" y="3743325"/>
+            <a:off x="6534150" y="3705225"/>
             <a:ext cx="66675" cy="66675"/>
           </a:xfrm>
           <a:prstGeom prst="roundRect">
@@ -3391,7 +3391,7 @@
         </p:nvSpPr>
         <p:spPr>
           <a:xfrm>
-            <a:off x="6724650" y="3571875"/>
+            <a:off x="6724650" y="3533775"/>
             <a:ext cx="4857750" cy="419100"/>
           </a:xfrm>
           <a:prstGeom prst="rect">
@@ -3609,12 +3609,12 @@
         </p:nvSpPr>
         <p:spPr>
           <a:xfrm>
-            <a:off x="400050" y="904875"/>
-            <a:ext cx="7058025" cy="5419725"/>
+            <a:off x="400050" y="866775"/>
+            <a:ext cx="7058025" cy="5457825"/>
           </a:xfrm>
           <a:prstGeom prst="roundRect">
             <a:avLst>
-              <a:gd name="adj" fmla="val 1687"/>
+              <a:gd name="adj" fmla="val 1675"/>
             </a:avLst>
           </a:prstGeom>
           <a:solidFill>
@@ -3644,7 +3644,7 @@
         </p:blipFill>
         <p:spPr>
           <a:xfrm>
-            <a:off x="552450" y="2085975"/>
+            <a:off x="552450" y="2066925"/>
             <a:ext cx="6753225" cy="3067050"/>
           </a:xfrm>
           <a:prstGeom prst="rect">
@@ -3660,7 +3660,7 @@
         </p:nvSpPr>
         <p:spPr>
           <a:xfrm>
-            <a:off x="7743825" y="904875"/>
+            <a:off x="7743825" y="866775"/>
             <a:ext cx="4048125" cy="171450"/>
           </a:xfrm>
           <a:prstGeom prst="rect">
@@ -3699,7 +3699,7 @@
         </p:nvSpPr>
         <p:spPr>
           <a:xfrm>
-            <a:off x="7743825" y="1419225"/>
+            <a:off x="7743825" y="1381125"/>
             <a:ext cx="66675" cy="66675"/>
           </a:xfrm>
           <a:prstGeom prst="roundRect">
@@ -3726,7 +3726,7 @@
         </p:nvSpPr>
         <p:spPr>
           <a:xfrm>
-            <a:off x="7934325" y="1247775"/>
+            <a:off x="7934325" y="1209675"/>
             <a:ext cx="3857625" cy="419100"/>
           </a:xfrm>
           <a:prstGeom prst="rect">
@@ -3765,7 +3765,7 @@
         </p:nvSpPr>
         <p:spPr>
           <a:xfrm>
-            <a:off x="7743825" y="1876425"/>
+            <a:off x="7743825" y="1838325"/>
             <a:ext cx="66675" cy="66675"/>
           </a:xfrm>
           <a:prstGeom prst="roundRect">
@@ -3792,7 +3792,7 @@
         </p:nvSpPr>
         <p:spPr>
           <a:xfrm>
-            <a:off x="7934325" y="1704975"/>
+            <a:off x="7934325" y="1666875"/>
             <a:ext cx="3857625" cy="419100"/>
           </a:xfrm>
           <a:prstGeom prst="rect">
@@ -3831,7 +3831,7 @@
         </p:nvSpPr>
         <p:spPr>
           <a:xfrm>
-            <a:off x="7743825" y="2333625"/>
+            <a:off x="7743825" y="2295525"/>
             <a:ext cx="66675" cy="66675"/>
           </a:xfrm>
           <a:prstGeom prst="roundRect">
@@ -3858,7 +3858,7 @@
         </p:nvSpPr>
         <p:spPr>
           <a:xfrm>
-            <a:off x="7934325" y="2162175"/>
+            <a:off x="7934325" y="2124075"/>
             <a:ext cx="3857625" cy="419100"/>
           </a:xfrm>
           <a:prstGeom prst="rect">
@@ -4345,7 +4345,7 @@
         </p:nvSpPr>
         <p:spPr>
           <a:xfrm>
-            <a:off x="400050" y="962025"/>
+            <a:off x="400050" y="981075"/>
             <a:ext cx="6410325" cy="171450"/>
           </a:xfrm>
           <a:prstGeom prst="rect">
@@ -4384,12 +4384,12 @@
         </p:nvSpPr>
         <p:spPr>
           <a:xfrm>
-            <a:off x="1085850" y="1266825"/>
-            <a:ext cx="2757488" cy="2290763"/>
+            <a:off x="1085850" y="1285875"/>
+            <a:ext cx="2757488" cy="2281238"/>
           </a:xfrm>
           <a:prstGeom prst="roundRect">
             <a:avLst>
-              <a:gd name="adj" fmla="val 3992"/>
+              <a:gd name="adj" fmla="val 4008"/>
             </a:avLst>
           </a:prstGeom>
           <a:solidFill>
@@ -4411,12 +4411,12 @@
         </p:nvSpPr>
         <p:spPr>
           <a:xfrm>
-            <a:off x="3938588" y="1266825"/>
-            <a:ext cx="2757488" cy="2290763"/>
+            <a:off x="3938588" y="1285875"/>
+            <a:ext cx="2757488" cy="2281238"/>
           </a:xfrm>
           <a:prstGeom prst="roundRect">
             <a:avLst>
-              <a:gd name="adj" fmla="val 3992"/>
+              <a:gd name="adj" fmla="val 4008"/>
             </a:avLst>
           </a:prstGeom>
           <a:solidFill>
@@ -4438,12 +4438,12 @@
         </p:nvSpPr>
         <p:spPr>
           <a:xfrm>
-            <a:off x="1085850" y="3652838"/>
-            <a:ext cx="2757488" cy="2290763"/>
+            <a:off x="1085850" y="3662362"/>
+            <a:ext cx="2757488" cy="2281238"/>
           </a:xfrm>
           <a:prstGeom prst="roundRect">
             <a:avLst>
-              <a:gd name="adj" fmla="val 3992"/>
+              <a:gd name="adj" fmla="val 4008"/>
             </a:avLst>
           </a:prstGeom>
           <a:solidFill>
@@ -4465,12 +4465,12 @@
         </p:nvSpPr>
         <p:spPr>
           <a:xfrm>
-            <a:off x="3938588" y="3652838"/>
-            <a:ext cx="2757488" cy="2290763"/>
+            <a:off x="3938588" y="3662362"/>
+            <a:ext cx="2757488" cy="2281238"/>
           </a:xfrm>
           <a:prstGeom prst="roundRect">
             <a:avLst>
-              <a:gd name="adj" fmla="val 3992"/>
+              <a:gd name="adj" fmla="val 4008"/>
             </a:avLst>
           </a:prstGeom>
           <a:solidFill>
@@ -4492,7 +4492,7 @@
         </p:nvSpPr>
         <p:spPr>
           <a:xfrm>
-            <a:off x="400050" y="1266825"/>
+            <a:off x="400050" y="1285875"/>
             <a:ext cx="628650" cy="266700"/>
           </a:xfrm>
           <a:prstGeom prst="rect">
@@ -4570,7 +4570,7 @@
         </p:nvSpPr>
         <p:spPr>
           <a:xfrm>
-            <a:off x="1238250" y="1400175"/>
+            <a:off x="1238250" y="1419225"/>
             <a:ext cx="2452688" cy="171450"/>
           </a:xfrm>
           <a:prstGeom prst="rect">
@@ -4609,7 +4609,7 @@
         </p:nvSpPr>
         <p:spPr>
           <a:xfrm>
-            <a:off x="4090987" y="1400175"/>
+            <a:off x="4090987" y="1419225"/>
             <a:ext cx="2452688" cy="171450"/>
           </a:xfrm>
           <a:prstGeom prst="rect">
@@ -4648,7 +4648,7 @@
         </p:nvSpPr>
         <p:spPr>
           <a:xfrm>
-            <a:off x="1238250" y="3786188"/>
+            <a:off x="1238250" y="3795713"/>
             <a:ext cx="2452688" cy="171450"/>
           </a:xfrm>
           <a:prstGeom prst="rect">
@@ -4687,7 +4687,7 @@
         </p:nvSpPr>
         <p:spPr>
           <a:xfrm>
-            <a:off x="4090987" y="3786188"/>
+            <a:off x="4090987" y="3795713"/>
             <a:ext cx="2452688" cy="171450"/>
           </a:xfrm>
           <a:prstGeom prst="rect">
@@ -4726,7 +4726,7 @@
         </p:nvSpPr>
         <p:spPr>
           <a:xfrm>
-            <a:off x="1200150" y="1685925"/>
+            <a:off x="1200150" y="1704975"/>
             <a:ext cx="2528888" cy="400050"/>
           </a:xfrm>
           <a:prstGeom prst="roundRect">
@@ -4753,7 +4753,7 @@
         </p:nvSpPr>
         <p:spPr>
           <a:xfrm>
-            <a:off x="1295400" y="1685925"/>
+            <a:off x="1295400" y="1704975"/>
             <a:ext cx="2338388" cy="400050"/>
           </a:xfrm>
           <a:prstGeom prst="rect">
@@ -4792,7 +4792,7 @@
         </p:nvSpPr>
         <p:spPr>
           <a:xfrm>
-            <a:off x="4052888" y="1685925"/>
+            <a:off x="4052888" y="1704975"/>
             <a:ext cx="2528888" cy="400050"/>
           </a:xfrm>
           <a:prstGeom prst="roundRect">
@@ -4819,7 +4819,7 @@
         </p:nvSpPr>
         <p:spPr>
           <a:xfrm>
-            <a:off x="4148137" y="1685925"/>
+            <a:off x="4148137" y="1704975"/>
             <a:ext cx="2338388" cy="400050"/>
           </a:xfrm>
           <a:prstGeom prst="rect">
@@ -4858,7 +4858,7 @@
         </p:nvSpPr>
         <p:spPr>
           <a:xfrm>
-            <a:off x="1200150" y="4071938"/>
+            <a:off x="1200150" y="4081463"/>
             <a:ext cx="2528888" cy="400050"/>
           </a:xfrm>
           <a:prstGeom prst="roundRect">
@@ -4885,7 +4885,7 @@
         </p:nvSpPr>
         <p:spPr>
           <a:xfrm>
-            <a:off x="1295400" y="4071938"/>
+            <a:off x="1295400" y="4081463"/>
             <a:ext cx="2338388" cy="400050"/>
           </a:xfrm>
           <a:prstGeom prst="rect">
@@ -4924,7 +4924,7 @@
         </p:nvSpPr>
         <p:spPr>
           <a:xfrm>
-            <a:off x="4052888" y="4071938"/>
+            <a:off x="4052888" y="4081463"/>
             <a:ext cx="2528888" cy="400050"/>
           </a:xfrm>
           <a:prstGeom prst="roundRect">
@@ -4951,7 +4951,7 @@
         </p:nvSpPr>
         <p:spPr>
           <a:xfrm>
-            <a:off x="4148137" y="4071938"/>
+            <a:off x="4148137" y="4081463"/>
             <a:ext cx="2338388" cy="400050"/>
           </a:xfrm>
           <a:prstGeom prst="rect">
@@ -4990,7 +4990,7 @@
         </p:nvSpPr>
         <p:spPr>
           <a:xfrm>
-            <a:off x="7038975" y="962025"/>
+            <a:off x="7038975" y="981075"/>
             <a:ext cx="4752975" cy="171450"/>
           </a:xfrm>
           <a:prstGeom prst="rect">
@@ -5029,7 +5029,7 @@
         </p:nvSpPr>
         <p:spPr>
           <a:xfrm>
-            <a:off x="7038975" y="1228725"/>
+            <a:off x="7038975" y="1247775"/>
             <a:ext cx="4752975" cy="1333500"/>
           </a:xfrm>
           <a:prstGeom prst="roundRect">
@@ -5056,7 +5056,7 @@
         </p:nvSpPr>
         <p:spPr>
           <a:xfrm>
-            <a:off x="7038975" y="1228725"/>
+            <a:off x="7038975" y="1247775"/>
             <a:ext cx="4752975" cy="76200"/>
           </a:xfrm>
           <a:prstGeom prst="rect">
@@ -5081,7 +5081,7 @@
         </p:nvSpPr>
         <p:spPr>
           <a:xfrm>
-            <a:off x="7191375" y="1419225"/>
+            <a:off x="7191375" y="1438275"/>
             <a:ext cx="4448175" cy="171450"/>
           </a:xfrm>
           <a:prstGeom prst="rect">
@@ -5120,7 +5120,7 @@
         </p:nvSpPr>
         <p:spPr>
           <a:xfrm>
-            <a:off x="7191375" y="1704975"/>
+            <a:off x="7191375" y="1724025"/>
             <a:ext cx="4448175" cy="381000"/>
           </a:xfrm>
           <a:prstGeom prst="rect">
@@ -5159,7 +5159,7 @@
         </p:nvSpPr>
         <p:spPr>
           <a:xfrm>
-            <a:off x="7191375" y="2143125"/>
+            <a:off x="7191375" y="2162175"/>
             <a:ext cx="4448175" cy="304800"/>
           </a:xfrm>
           <a:prstGeom prst="rect">
@@ -5198,7 +5198,7 @@
         </p:nvSpPr>
         <p:spPr>
           <a:xfrm>
-            <a:off x="7038975" y="2676525"/>
+            <a:off x="7038975" y="2695575"/>
             <a:ext cx="4752975" cy="1333500"/>
           </a:xfrm>
           <a:prstGeom prst="roundRect">
@@ -5225,7 +5225,7 @@
         </p:nvSpPr>
         <p:spPr>
           <a:xfrm>
-            <a:off x="7038975" y="2676525"/>
+            <a:off x="7038975" y="2695575"/>
             <a:ext cx="4752975" cy="76200"/>
           </a:xfrm>
           <a:prstGeom prst="rect">
@@ -5250,7 +5250,7 @@
         </p:nvSpPr>
         <p:spPr>
           <a:xfrm>
-            <a:off x="7191375" y="2867025"/>
+            <a:off x="7191375" y="2886075"/>
             <a:ext cx="4448175" cy="171450"/>
           </a:xfrm>
           <a:prstGeom prst="rect">
@@ -5289,7 +5289,7 @@
         </p:nvSpPr>
         <p:spPr>
           <a:xfrm>
-            <a:off x="7191375" y="3152775"/>
+            <a:off x="7191375" y="3171825"/>
             <a:ext cx="4448175" cy="381000"/>
           </a:xfrm>
           <a:prstGeom prst="rect">
@@ -5328,7 +5328,7 @@
         </p:nvSpPr>
         <p:spPr>
           <a:xfrm>
-            <a:off x="7191375" y="3590925"/>
+            <a:off x="7191375" y="3609975"/>
             <a:ext cx="4448175" cy="304800"/>
           </a:xfrm>
           <a:prstGeom prst="rect">
@@ -5367,7 +5367,7 @@
         </p:nvSpPr>
         <p:spPr>
           <a:xfrm>
-            <a:off x="7038975" y="4124325"/>
+            <a:off x="7038975" y="4143375"/>
             <a:ext cx="4752975" cy="1333500"/>
           </a:xfrm>
           <a:prstGeom prst="roundRect">
@@ -5394,7 +5394,7 @@
         </p:nvSpPr>
         <p:spPr>
           <a:xfrm>
-            <a:off x="7038975" y="4124325"/>
+            <a:off x="7038975" y="4143375"/>
             <a:ext cx="4752975" cy="76200"/>
           </a:xfrm>
           <a:prstGeom prst="rect">
@@ -5419,7 +5419,7 @@
         </p:nvSpPr>
         <p:spPr>
           <a:xfrm>
-            <a:off x="7191375" y="4314825"/>
+            <a:off x="7191375" y="4333875"/>
             <a:ext cx="4448175" cy="171450"/>
           </a:xfrm>
           <a:prstGeom prst="rect">
@@ -5458,7 +5458,7 @@
         </p:nvSpPr>
         <p:spPr>
           <a:xfrm>
-            <a:off x="7191375" y="4600575"/>
+            <a:off x="7191375" y="4619625"/>
             <a:ext cx="4448175" cy="381000"/>
           </a:xfrm>
           <a:prstGeom prst="rect">
@@ -5497,7 +5497,7 @@
         </p:nvSpPr>
         <p:spPr>
           <a:xfrm>
-            <a:off x="7191375" y="5038725"/>
+            <a:off x="7191375" y="5057775"/>
             <a:ext cx="4448175" cy="304800"/>
           </a:xfrm>
           <a:prstGeom prst="rect">
@@ -5715,8 +5715,8 @@
         </p:nvSpPr>
         <p:spPr>
           <a:xfrm>
-            <a:off x="400050" y="904875"/>
-            <a:ext cx="3667125" cy="4962525"/>
+            <a:off x="400050" y="866775"/>
+            <a:ext cx="3667125" cy="5000625"/>
           </a:xfrm>
           <a:prstGeom prst="roundRect">
             <a:avLst>
@@ -5742,8 +5742,8 @@
         </p:nvSpPr>
         <p:spPr>
           <a:xfrm>
-            <a:off x="400050" y="904875"/>
-            <a:ext cx="57150" cy="4962525"/>
+            <a:off x="400050" y="866775"/>
+            <a:ext cx="57150" cy="5000625"/>
           </a:xfrm>
           <a:prstGeom prst="rect">
             <a:avLst/>
@@ -5767,7 +5767,7 @@
         </p:nvSpPr>
         <p:spPr>
           <a:xfrm>
-            <a:off x="571500" y="1076325"/>
+            <a:off x="571500" y="1038225"/>
             <a:ext cx="3324225" cy="171450"/>
           </a:xfrm>
           <a:prstGeom prst="rect">
@@ -5806,7 +5806,7 @@
         </p:nvSpPr>
         <p:spPr>
           <a:xfrm>
-            <a:off x="571500" y="1323975"/>
+            <a:off x="571500" y="1285875"/>
             <a:ext cx="3324225" cy="381000"/>
           </a:xfrm>
           <a:prstGeom prst="rect">
@@ -5845,7 +5845,7 @@
         </p:nvSpPr>
         <p:spPr>
           <a:xfrm>
-            <a:off x="571500" y="1743075"/>
+            <a:off x="571500" y="1704975"/>
             <a:ext cx="3324225" cy="457200"/>
           </a:xfrm>
           <a:prstGeom prst="rect">
@@ -5884,7 +5884,7 @@
         </p:nvSpPr>
         <p:spPr>
           <a:xfrm>
-            <a:off x="571500" y="2371725"/>
+            <a:off x="571500" y="2333625"/>
             <a:ext cx="66675" cy="66675"/>
           </a:xfrm>
           <a:prstGeom prst="roundRect">
@@ -5911,7 +5911,7 @@
         </p:nvSpPr>
         <p:spPr>
           <a:xfrm>
-            <a:off x="762000" y="2238375"/>
+            <a:off x="762000" y="2200275"/>
             <a:ext cx="3133725" cy="342900"/>
           </a:xfrm>
           <a:prstGeom prst="rect">
@@ -5950,7 +5950,7 @@
         </p:nvSpPr>
         <p:spPr>
           <a:xfrm>
-            <a:off x="571500" y="2600325"/>
+            <a:off x="571500" y="2562225"/>
             <a:ext cx="66675" cy="66675"/>
           </a:xfrm>
           <a:prstGeom prst="roundRect">
@@ -5977,7 +5977,7 @@
         </p:nvSpPr>
         <p:spPr>
           <a:xfrm>
-            <a:off x="762000" y="2466975"/>
+            <a:off x="762000" y="2428875"/>
             <a:ext cx="3133725" cy="342900"/>
           </a:xfrm>
           <a:prstGeom prst="rect">
@@ -6016,7 +6016,7 @@
         </p:nvSpPr>
         <p:spPr>
           <a:xfrm>
-            <a:off x="571500" y="2828925"/>
+            <a:off x="571500" y="2790825"/>
             <a:ext cx="66675" cy="66675"/>
           </a:xfrm>
           <a:prstGeom prst="roundRect">
@@ -6043,7 +6043,7 @@
         </p:nvSpPr>
         <p:spPr>
           <a:xfrm>
-            <a:off x="762000" y="2695575"/>
+            <a:off x="762000" y="2657475"/>
             <a:ext cx="3133725" cy="342900"/>
           </a:xfrm>
           <a:prstGeom prst="rect">
@@ -6082,8 +6082,8 @@
         </p:nvSpPr>
         <p:spPr>
           <a:xfrm>
-            <a:off x="4257675" y="904875"/>
-            <a:ext cx="3667125" cy="4962525"/>
+            <a:off x="4257675" y="866775"/>
+            <a:ext cx="3667125" cy="5000625"/>
           </a:xfrm>
           <a:prstGeom prst="roundRect">
             <a:avLst>
@@ -6109,8 +6109,8 @@
         </p:nvSpPr>
         <p:spPr>
           <a:xfrm>
-            <a:off x="4257675" y="904875"/>
-            <a:ext cx="57150" cy="4962525"/>
+            <a:off x="4257675" y="866775"/>
+            <a:ext cx="57150" cy="5000625"/>
           </a:xfrm>
           <a:prstGeom prst="rect">
             <a:avLst/>
@@ -6134,7 +6134,7 @@
         </p:nvSpPr>
         <p:spPr>
           <a:xfrm>
-            <a:off x="4429125" y="1076325"/>
+            <a:off x="4429125" y="1038225"/>
             <a:ext cx="3324225" cy="171450"/>
           </a:xfrm>
           <a:prstGeom prst="rect">
@@ -6173,7 +6173,7 @@
         </p:nvSpPr>
         <p:spPr>
           <a:xfrm>
-            <a:off x="4429125" y="1323975"/>
+            <a:off x="4429125" y="1285875"/>
             <a:ext cx="3324225" cy="381000"/>
           </a:xfrm>
           <a:prstGeom prst="rect">
@@ -6212,7 +6212,7 @@
         </p:nvSpPr>
         <p:spPr>
           <a:xfrm>
-            <a:off x="4429125" y="1743075"/>
+            <a:off x="4429125" y="1704975"/>
             <a:ext cx="3324225" cy="457200"/>
           </a:xfrm>
           <a:prstGeom prst="rect">
@@ -6251,7 +6251,7 @@
         </p:nvSpPr>
         <p:spPr>
           <a:xfrm>
-            <a:off x="4429125" y="2371725"/>
+            <a:off x="4429125" y="2333625"/>
             <a:ext cx="66675" cy="66675"/>
           </a:xfrm>
           <a:prstGeom prst="roundRect">
@@ -6278,7 +6278,7 @@
         </p:nvSpPr>
         <p:spPr>
           <a:xfrm>
-            <a:off x="4619625" y="2238375"/>
+            <a:off x="4619625" y="2200275"/>
             <a:ext cx="3133725" cy="342900"/>
           </a:xfrm>
           <a:prstGeom prst="rect">
@@ -6317,7 +6317,7 @@
         </p:nvSpPr>
         <p:spPr>
           <a:xfrm>
-            <a:off x="4429125" y="2600325"/>
+            <a:off x="4429125" y="2562225"/>
             <a:ext cx="66675" cy="66675"/>
           </a:xfrm>
           <a:prstGeom prst="roundRect">
@@ -6344,7 +6344,7 @@
         </p:nvSpPr>
         <p:spPr>
           <a:xfrm>
-            <a:off x="4619625" y="2466975"/>
+            <a:off x="4619625" y="2428875"/>
             <a:ext cx="3133725" cy="342900"/>
           </a:xfrm>
           <a:prstGeom prst="rect">
@@ -6383,7 +6383,7 @@
         </p:nvSpPr>
         <p:spPr>
           <a:xfrm>
-            <a:off x="4429125" y="2828925"/>
+            <a:off x="4429125" y="2790825"/>
             <a:ext cx="66675" cy="66675"/>
           </a:xfrm>
           <a:prstGeom prst="roundRect">
@@ -6410,7 +6410,7 @@
         </p:nvSpPr>
         <p:spPr>
           <a:xfrm>
-            <a:off x="4619625" y="2695575"/>
+            <a:off x="4619625" y="2657475"/>
             <a:ext cx="3133725" cy="342900"/>
           </a:xfrm>
           <a:prstGeom prst="rect">
@@ -6449,8 +6449,8 @@
         </p:nvSpPr>
         <p:spPr>
           <a:xfrm>
-            <a:off x="8115300" y="904875"/>
-            <a:ext cx="3667125" cy="4962525"/>
+            <a:off x="8115300" y="866775"/>
+            <a:ext cx="3667125" cy="5000625"/>
           </a:xfrm>
           <a:prstGeom prst="roundRect">
             <a:avLst>
@@ -6476,8 +6476,8 @@
         </p:nvSpPr>
         <p:spPr>
           <a:xfrm>
-            <a:off x="8115300" y="904875"/>
-            <a:ext cx="57150" cy="4962525"/>
+            <a:off x="8115300" y="866775"/>
+            <a:ext cx="57150" cy="5000625"/>
           </a:xfrm>
           <a:prstGeom prst="rect">
             <a:avLst/>
@@ -6501,7 +6501,7 @@
         </p:nvSpPr>
         <p:spPr>
           <a:xfrm>
-            <a:off x="8286750" y="1076325"/>
+            <a:off x="8286750" y="1038225"/>
             <a:ext cx="3324225" cy="171450"/>
           </a:xfrm>
           <a:prstGeom prst="rect">
@@ -6540,7 +6540,7 @@
         </p:nvSpPr>
         <p:spPr>
           <a:xfrm>
-            <a:off x="8286750" y="1323975"/>
+            <a:off x="8286750" y="1285875"/>
             <a:ext cx="3324225" cy="381000"/>
           </a:xfrm>
           <a:prstGeom prst="rect">
@@ -6579,7 +6579,7 @@
         </p:nvSpPr>
         <p:spPr>
           <a:xfrm>
-            <a:off x="8286750" y="1743075"/>
+            <a:off x="8286750" y="1704975"/>
             <a:ext cx="3324225" cy="457200"/>
           </a:xfrm>
           <a:prstGeom prst="rect">
@@ -6618,7 +6618,7 @@
         </p:nvSpPr>
         <p:spPr>
           <a:xfrm>
-            <a:off x="8286750" y="2371725"/>
+            <a:off x="8286750" y="2333625"/>
             <a:ext cx="66675" cy="66675"/>
           </a:xfrm>
           <a:prstGeom prst="roundRect">
@@ -6645,7 +6645,7 @@
         </p:nvSpPr>
         <p:spPr>
           <a:xfrm>
-            <a:off x="8477250" y="2238375"/>
+            <a:off x="8477250" y="2200275"/>
             <a:ext cx="3133725" cy="342900"/>
           </a:xfrm>
           <a:prstGeom prst="rect">
@@ -6684,7 +6684,7 @@
         </p:nvSpPr>
         <p:spPr>
           <a:xfrm>
-            <a:off x="8286750" y="2600325"/>
+            <a:off x="8286750" y="2562225"/>
             <a:ext cx="66675" cy="66675"/>
           </a:xfrm>
           <a:prstGeom prst="roundRect">
@@ -6711,7 +6711,7 @@
         </p:nvSpPr>
         <p:spPr>
           <a:xfrm>
-            <a:off x="8477250" y="2466975"/>
+            <a:off x="8477250" y="2428875"/>
             <a:ext cx="3133725" cy="342900"/>
           </a:xfrm>
           <a:prstGeom prst="rect">
@@ -6750,7 +6750,7 @@
         </p:nvSpPr>
         <p:spPr>
           <a:xfrm>
-            <a:off x="8286750" y="2828925"/>
+            <a:off x="8286750" y="2790825"/>
             <a:ext cx="66675" cy="66675"/>
           </a:xfrm>
           <a:prstGeom prst="roundRect">
@@ -6777,7 +6777,7 @@
         </p:nvSpPr>
         <p:spPr>
           <a:xfrm>
-            <a:off x="8477250" y="2695575"/>
+            <a:off x="8477250" y="2657475"/>
             <a:ext cx="3133725" cy="342900"/>
           </a:xfrm>
           <a:prstGeom prst="rect">
@@ -7073,7 +7073,7 @@
         </p:nvSpPr>
         <p:spPr>
           <a:xfrm>
-            <a:off x="1905000" y="1457325"/>
+            <a:off x="1905000" y="1419225"/>
             <a:ext cx="3168650" cy="171450"/>
           </a:xfrm>
           <a:prstGeom prst="rect">
@@ -7112,7 +7112,7 @@
         </p:nvSpPr>
         <p:spPr>
           <a:xfrm>
-            <a:off x="5226050" y="1457325"/>
+            <a:off x="5226050" y="1419225"/>
             <a:ext cx="3168650" cy="171450"/>
           </a:xfrm>
           <a:prstGeom prst="rect">
@@ -7151,7 +7151,7 @@
         </p:nvSpPr>
         <p:spPr>
           <a:xfrm>
-            <a:off x="8547100" y="1457325"/>
+            <a:off x="8547100" y="1419225"/>
             <a:ext cx="3168650" cy="171450"/>
           </a:xfrm>
           <a:prstGeom prst="rect">
@@ -7190,8 +7190,8 @@
         </p:nvSpPr>
         <p:spPr>
           <a:xfrm>
-            <a:off x="400050" y="1800225"/>
-            <a:ext cx="1257300" cy="828675"/>
+            <a:off x="400050" y="1762125"/>
+            <a:ext cx="1257300" cy="836295"/>
           </a:xfrm>
           <a:prstGeom prst="rect">
             <a:avLst/>
@@ -7229,8 +7229,8 @@
         </p:nvSpPr>
         <p:spPr>
           <a:xfrm>
-            <a:off x="1828800" y="1800225"/>
-            <a:ext cx="9963150" cy="828675"/>
+            <a:off x="1828800" y="1762125"/>
+            <a:ext cx="9963150" cy="836295"/>
           </a:xfrm>
           <a:prstGeom prst="rect">
             <a:avLst/>
@@ -7254,8 +7254,8 @@
         </p:nvSpPr>
         <p:spPr>
           <a:xfrm>
-            <a:off x="400050" y="2705100"/>
-            <a:ext cx="1257300" cy="828675"/>
+            <a:off x="400050" y="2674620"/>
+            <a:ext cx="1257300" cy="836295"/>
           </a:xfrm>
           <a:prstGeom prst="rect">
             <a:avLst/>
@@ -7293,8 +7293,8 @@
         </p:nvSpPr>
         <p:spPr>
           <a:xfrm>
-            <a:off x="1828800" y="2705100"/>
-            <a:ext cx="9963150" cy="828675"/>
+            <a:off x="1828800" y="2674620"/>
+            <a:ext cx="9963150" cy="836295"/>
           </a:xfrm>
           <a:prstGeom prst="rect">
             <a:avLst/>
@@ -7318,8 +7318,8 @@
         </p:nvSpPr>
         <p:spPr>
           <a:xfrm>
-            <a:off x="400050" y="3609975"/>
-            <a:ext cx="1257300" cy="828675"/>
+            <a:off x="400050" y="3587115"/>
+            <a:ext cx="1257300" cy="836295"/>
           </a:xfrm>
           <a:prstGeom prst="rect">
             <a:avLst/>
@@ -7357,8 +7357,8 @@
         </p:nvSpPr>
         <p:spPr>
           <a:xfrm>
-            <a:off x="1828800" y="3609975"/>
-            <a:ext cx="9963150" cy="828675"/>
+            <a:off x="1828800" y="3587115"/>
+            <a:ext cx="9963150" cy="836295"/>
           </a:xfrm>
           <a:prstGeom prst="rect">
             <a:avLst/>
@@ -7382,8 +7382,8 @@
         </p:nvSpPr>
         <p:spPr>
           <a:xfrm>
-            <a:off x="400050" y="4514850"/>
-            <a:ext cx="1257300" cy="828675"/>
+            <a:off x="400050" y="4499610"/>
+            <a:ext cx="1257300" cy="836295"/>
           </a:xfrm>
           <a:prstGeom prst="rect">
             <a:avLst/>
@@ -7421,8 +7421,8 @@
         </p:nvSpPr>
         <p:spPr>
           <a:xfrm>
-            <a:off x="1828800" y="4514850"/>
-            <a:ext cx="9963150" cy="828675"/>
+            <a:off x="1828800" y="4499610"/>
+            <a:ext cx="9963150" cy="836295"/>
           </a:xfrm>
           <a:prstGeom prst="rect">
             <a:avLst/>
@@ -7446,8 +7446,8 @@
         </p:nvSpPr>
         <p:spPr>
           <a:xfrm>
-            <a:off x="400050" y="5419725"/>
-            <a:ext cx="1257300" cy="828675"/>
+            <a:off x="400050" y="5412105"/>
+            <a:ext cx="1257300" cy="836295"/>
           </a:xfrm>
           <a:prstGeom prst="rect">
             <a:avLst/>
@@ -7485,8 +7485,8 @@
         </p:nvSpPr>
         <p:spPr>
           <a:xfrm>
-            <a:off x="1828800" y="5419725"/>
-            <a:ext cx="9963150" cy="828675"/>
+            <a:off x="1828800" y="5412105"/>
+            <a:ext cx="9963150" cy="836295"/>
           </a:xfrm>
           <a:prstGeom prst="rect">
             <a:avLst/>
@@ -7510,7 +7510,7 @@
         </p:nvSpPr>
         <p:spPr>
           <a:xfrm>
-            <a:off x="1924050" y="2024062"/>
+            <a:off x="1924050" y="1989773"/>
             <a:ext cx="3130550" cy="381000"/>
           </a:xfrm>
           <a:prstGeom prst="roundRect">
@@ -7537,7 +7537,7 @@
         </p:nvSpPr>
         <p:spPr>
           <a:xfrm>
-            <a:off x="2000250" y="2024062"/>
+            <a:off x="2000250" y="1989773"/>
             <a:ext cx="2978150" cy="381000"/>
           </a:xfrm>
           <a:prstGeom prst="rect">
@@ -7576,7 +7576,7 @@
         </p:nvSpPr>
         <p:spPr>
           <a:xfrm>
-            <a:off x="1924050" y="2928938"/>
+            <a:off x="1924050" y="2902268"/>
             <a:ext cx="3130550" cy="381000"/>
           </a:xfrm>
           <a:prstGeom prst="roundRect">
@@ -7603,7 +7603,7 @@
         </p:nvSpPr>
         <p:spPr>
           <a:xfrm>
-            <a:off x="2000250" y="2928938"/>
+            <a:off x="2000250" y="2902268"/>
             <a:ext cx="2978150" cy="381000"/>
           </a:xfrm>
           <a:prstGeom prst="rect">
@@ -7642,7 +7642,7 @@
         </p:nvSpPr>
         <p:spPr>
           <a:xfrm>
-            <a:off x="5245100" y="3833812"/>
+            <a:off x="5245100" y="3814763"/>
             <a:ext cx="3130550" cy="381000"/>
           </a:xfrm>
           <a:prstGeom prst="roundRect">
@@ -7669,7 +7669,7 @@
         </p:nvSpPr>
         <p:spPr>
           <a:xfrm>
-            <a:off x="5321300" y="3833812"/>
+            <a:off x="5321300" y="3814763"/>
             <a:ext cx="2978150" cy="381000"/>
           </a:xfrm>
           <a:prstGeom prst="rect">
@@ -7708,7 +7708,7 @@
         </p:nvSpPr>
         <p:spPr>
           <a:xfrm>
-            <a:off x="5245100" y="4738688"/>
+            <a:off x="5245100" y="4727257"/>
             <a:ext cx="3130550" cy="381000"/>
           </a:xfrm>
           <a:prstGeom prst="roundRect">
@@ -7735,7 +7735,7 @@
         </p:nvSpPr>
         <p:spPr>
           <a:xfrm>
-            <a:off x="5321300" y="4738688"/>
+            <a:off x="5321300" y="4727257"/>
             <a:ext cx="2978150" cy="381000"/>
           </a:xfrm>
           <a:prstGeom prst="rect">
@@ -7774,7 +7774,7 @@
         </p:nvSpPr>
         <p:spPr>
           <a:xfrm>
-            <a:off x="8566150" y="5643563"/>
+            <a:off x="8566150" y="5639753"/>
             <a:ext cx="3130550" cy="381000"/>
           </a:xfrm>
           <a:prstGeom prst="roundRect">
@@ -7801,7 +7801,7 @@
         </p:nvSpPr>
         <p:spPr>
           <a:xfrm>
-            <a:off x="8642350" y="5643563"/>
+            <a:off x="8642350" y="5639753"/>
             <a:ext cx="2978150" cy="381000"/>
           </a:xfrm>
           <a:prstGeom prst="rect">
